--- a/Bidaw_seminar.pptx
+++ b/Bidaw_seminar.pptx
@@ -3294,7 +3294,7 @@
               </a:spcAft>
             </a:pPr>
             <a:r>
-              <a:rPr sz="1400" b="0" i="0">
+              <a:rPr sz="1300" b="0" i="0">
                 <a:solidFill>
                   <a:srgbClr val="222222"/>
                 </a:solidFill>
@@ -3311,7 +3311,7 @@
               </a:spcAft>
             </a:pPr>
             <a:r>
-              <a:rPr sz="1400" b="0" i="0">
+              <a:rPr sz="1300" b="0" i="0">
                 <a:solidFill>
                   <a:srgbClr val="222222"/>
                 </a:solidFill>
@@ -3599,7 +3599,7 @@
               </a:spcAft>
             </a:pPr>
             <a:r>
-              <a:rPr sz="1400" b="1" i="0">
+              <a:rPr sz="1300" b="1" i="0">
                 <a:solidFill>
                   <a:srgbClr val="1F2937"/>
                 </a:solidFill>
@@ -3643,7 +3643,7 @@
               </a:spcAft>
             </a:pPr>
             <a:r>
-              <a:rPr sz="1400" b="1" i="0">
+              <a:rPr sz="1300" b="1" i="0">
                 <a:solidFill>
                   <a:srgbClr val="1F2937"/>
                 </a:solidFill>
@@ -3778,7 +3778,7 @@
                 <a:latin typeface="Calibri"/>
                 <a:ea typeface="맑은 고딕"/>
               </a:rPr>
-              <a:t>→ 사용자가 다음 질문을 “생각하는 시간” 동안 </a:t>
+              <a:t>→ 사용자가 답을 읽는 사이 </a:t>
             </a:r>
             <a:r>
               <a:rPr sz="1200" b="0" i="1">
@@ -3788,7 +3788,7 @@
                 <a:latin typeface="Calibri"/>
                 <a:ea typeface="맑은 고딕"/>
               </a:rPr>
-              <a:t>다른 사용자 요청이 끼어들기 때문</a:t>
+              <a:t>다른 user KV 가 끼어들기 때문</a:t>
             </a:r>
           </a:p>
         </p:txBody>
@@ -4191,7 +4191,7 @@
               </a:spcAft>
             </a:pPr>
             <a:r>
-              <a:rPr sz="1400" b="1" i="0">
+              <a:rPr sz="1300" b="1" i="0">
                 <a:solidFill>
                   <a:srgbClr val="444444"/>
                 </a:solidFill>
@@ -4201,7 +4201,7 @@
               <a:t>▸ </a:t>
             </a:r>
             <a:r>
-              <a:rPr sz="1400" b="0" i="0">
+              <a:rPr sz="1300" b="0" i="0">
                 <a:solidFill>
                   <a:srgbClr val="222222"/>
                 </a:solidFill>
@@ -4211,7 +4211,7 @@
               <a:t>두 layer 의 </a:t>
             </a:r>
             <a:r>
-              <a:rPr sz="1400" b="1" i="0">
+              <a:rPr sz="1300" b="1" i="0">
                 <a:solidFill>
                   <a:srgbClr val="222222"/>
                 </a:solidFill>
@@ -4228,7 +4228,7 @@
               </a:spcAft>
             </a:pPr>
             <a:r>
-              <a:rPr sz="1400" b="1" i="0">
+              <a:rPr sz="1300" b="1" i="0">
                 <a:solidFill>
                   <a:srgbClr val="444444"/>
                 </a:solidFill>
@@ -4238,7 +4238,7 @@
               <a:t>▸ </a:t>
             </a:r>
             <a:r>
-              <a:rPr sz="1400" b="0" i="0">
+              <a:rPr sz="1300" b="0" i="0">
                 <a:solidFill>
                   <a:srgbClr val="222222"/>
                 </a:solidFill>
@@ -4248,7 +4248,7 @@
               <a:t>요청별 </a:t>
             </a:r>
             <a:r>
-              <a:rPr sz="1400" b="1" i="0">
+              <a:rPr sz="1300" b="1" i="0">
                 <a:solidFill>
                   <a:srgbClr val="222222"/>
                 </a:solidFill>
@@ -4265,7 +4265,7 @@
               </a:spcAft>
             </a:pPr>
             <a:r>
-              <a:rPr sz="1400" b="1" i="0">
+              <a:rPr sz="1300" b="1" i="0">
                 <a:solidFill>
                   <a:srgbClr val="444444"/>
                 </a:solidFill>
@@ -4275,7 +4275,7 @@
               <a:t>▸ </a:t>
             </a:r>
             <a:r>
-              <a:rPr sz="1400" b="0" i="0">
+              <a:rPr sz="1300" b="0" i="0">
                 <a:solidFill>
                   <a:srgbClr val="222222"/>
                 </a:solidFill>
@@ -4285,7 +4285,7 @@
               <a:t>심지어 </a:t>
             </a:r>
             <a:r>
-              <a:rPr sz="1400" b="1" i="0">
+              <a:rPr sz="1300" b="1" i="0">
                 <a:solidFill>
                   <a:srgbClr val="222222"/>
                 </a:solidFill>
@@ -4319,24 +4319,24 @@
               </a:spcAft>
             </a:pPr>
             <a:r>
-              <a:rPr sz="1400" b="0" i="0">
+              <a:rPr sz="1300" b="0" i="0">
                 <a:solidFill>
                   <a:srgbClr val="222222"/>
                 </a:solidFill>
                 <a:latin typeface="Calibri"/>
                 <a:ea typeface="맑은 고딕"/>
               </a:rPr>
-              <a:t>한 요청의 큰 KV가 도착할 때, </a:t>
-            </a:r>
-            <a:r>
-              <a:rPr sz="1400" b="1" i="0">
+              <a:t>큰 KV 한 개가 </a:t>
+            </a:r>
+            <a:r>
+              <a:rPr sz="1300" b="1" i="0">
                 <a:solidFill>
                   <a:srgbClr val="444444"/>
                 </a:solidFill>
                 <a:latin typeface="Calibri"/>
                 <a:ea typeface="맑은 고딕"/>
               </a:rPr>
-              <a:t>뒤따르는 작은 KV 요청까지 모두 GPU idle 상태로 만든다</a:t>
+              <a:t>뒤따르는 작은 KV 까지 GPU idle 로 만든다</a:t>
             </a:r>
           </a:p>
         </p:txBody>
@@ -4657,7 +4657,7 @@
               </a:spcAft>
             </a:pPr>
             <a:r>
-              <a:rPr sz="1400" b="0" i="0">
+              <a:rPr sz="1300" b="0" i="0">
                 <a:solidFill>
                   <a:srgbClr val="222222"/>
                 </a:solidFill>
@@ -4674,7 +4674,7 @@
               </a:spcAft>
             </a:pPr>
             <a:r>
-              <a:rPr sz="1400" b="0" i="0">
+              <a:rPr sz="1300" b="0" i="0">
                 <a:solidFill>
                   <a:srgbClr val="222222"/>
                 </a:solidFill>
@@ -4691,7 +4691,7 @@
               </a:spcAft>
             </a:pPr>
             <a:r>
-              <a:rPr sz="1400" b="0" i="1">
+              <a:rPr sz="1300" b="0" i="1">
                 <a:solidFill>
                   <a:srgbClr val="444444"/>
                 </a:solidFill>
@@ -4794,7 +4794,7 @@
               </a:spcAft>
             </a:pPr>
             <a:r>
-              <a:rPr sz="1400" b="0" i="0">
+              <a:rPr sz="1300" b="0" i="0">
                 <a:solidFill>
                   <a:srgbClr val="222222"/>
                 </a:solidFill>
@@ -4811,7 +4811,7 @@
               </a:spcAft>
             </a:pPr>
             <a:r>
-              <a:rPr sz="1400" b="0" i="0">
+              <a:rPr sz="1300" b="0" i="0">
                 <a:solidFill>
                   <a:srgbClr val="222222"/>
                 </a:solidFill>
@@ -4828,7 +4828,7 @@
               </a:spcAft>
             </a:pPr>
             <a:r>
-              <a:rPr sz="1400" b="0" i="1">
+              <a:rPr sz="1300" b="0" i="1">
                 <a:solidFill>
                   <a:srgbClr val="444444"/>
                 </a:solidFill>
@@ -5279,7 +5279,7 @@
               </a:spcAft>
             </a:pPr>
             <a:r>
-              <a:rPr sz="1400" b="0" i="0">
+              <a:rPr sz="1300" b="0" i="0">
                 <a:solidFill>
                   <a:srgbClr val="222222"/>
                 </a:solidFill>
@@ -5289,7 +5289,7 @@
               <a:t>이전 라운드의 </a:t>
             </a:r>
             <a:r>
-              <a:rPr sz="1400" b="1" i="0">
+              <a:rPr sz="1300" b="1" i="0">
                 <a:solidFill>
                   <a:srgbClr val="444444"/>
                 </a:solidFill>
@@ -5299,14 +5299,14 @@
               <a:t>model answer 길이</a:t>
             </a:r>
             <a:r>
-              <a:rPr sz="1400" b="0" i="0">
+              <a:rPr sz="1300" b="0" i="0">
                 <a:solidFill>
                   <a:srgbClr val="222222"/>
                 </a:solidFill>
                 <a:latin typeface="Calibri"/>
                 <a:ea typeface="맑은 고딕"/>
               </a:rPr>
-              <a:t>를 storage 측에 넘긴다</a:t>
+              <a:t>를 storage 에 넘긴다</a:t>
             </a:r>
           </a:p>
           <a:p>
@@ -5333,7 +5333,7 @@
                 <a:latin typeface="Calibri"/>
                 <a:ea typeface="맑은 고딕"/>
               </a:rPr>
-              <a:t>이 길이는 사용자의 다음 질문이 도착할 시점을 예측하는 신호</a:t>
+              <a:t>이 길이가 다음 질문 도착 시점의 예측 신호</a:t>
             </a:r>
           </a:p>
           <a:p>
@@ -5360,7 +5360,7 @@
                 <a:latin typeface="Calibri"/>
                 <a:ea typeface="맑은 고딕"/>
               </a:rPr>
-              <a:t>Storage는 이 신호로 next-access의 weighted reuse distance를 추정</a:t>
+              <a:t>Storage 는 신호로 next-access reuse distance 추정</a:t>
             </a:r>
           </a:p>
           <a:p>
@@ -5387,7 +5387,7 @@
                 <a:latin typeface="Calibri"/>
                 <a:ea typeface="맑은 고딕"/>
               </a:rPr>
-              <a:t>추정 결과로 hit potential이 가장 낮은 KV를 evict</a:t>
+              <a:t>hit potential 최저 KV 를 evict</a:t>
             </a:r>
           </a:p>
         </p:txBody>
@@ -5483,34 +5483,34 @@
               </a:spcAft>
             </a:pPr>
             <a:r>
-              <a:rPr sz="1400" b="0" i="0">
+              <a:rPr sz="1300" b="0" i="0">
                 <a:solidFill>
                   <a:srgbClr val="222222"/>
                 </a:solidFill>
                 <a:latin typeface="Calibri"/>
                 <a:ea typeface="맑은 고딕"/>
               </a:rPr>
-              <a:t>각 요청 KV의 </a:t>
-            </a:r>
-            <a:r>
-              <a:rPr sz="1400" b="1" i="0">
+              <a:t>각 요청 KV 의 </a:t>
+            </a:r>
+            <a:r>
+              <a:rPr sz="1300" b="1" i="0">
                 <a:solidFill>
                   <a:srgbClr val="444444"/>
                 </a:solidFill>
                 <a:latin typeface="Calibri"/>
                 <a:ea typeface="맑은 고딕"/>
               </a:rPr>
-              <a:t>위치(layer)와 크기</a:t>
-            </a:r>
-            <a:r>
-              <a:rPr sz="1400" b="0" i="0">
+              <a:t>위치 (layer) 와 크기</a:t>
+            </a:r>
+            <a:r>
+              <a:rPr sz="1300" b="0" i="0">
                 <a:solidFill>
                   <a:srgbClr val="222222"/>
                 </a:solidFill>
                 <a:latin typeface="Calibri"/>
                 <a:ea typeface="맑은 고딕"/>
               </a:rPr>
-              <a:t>를 compute 측에 넘긴다</a:t>
+              <a:t>를 compute 에 넘긴다</a:t>
             </a:r>
           </a:p>
           <a:p>
@@ -5537,7 +5537,7 @@
                 <a:latin typeface="Calibri"/>
                 <a:ea typeface="맑은 고딕"/>
               </a:rPr>
-              <a:t>Compute는 KV가 어디에 있고 얼마나 큰지를 알고 dispatch</a:t>
+              <a:t>Compute 는 KV 위치/크기 알고 dispatch</a:t>
             </a:r>
           </a:p>
           <a:p>
@@ -5564,7 +5564,7 @@
                 <a:latin typeface="Calibri"/>
                 <a:ea typeface="맑은 고딕"/>
               </a:rPr>
-              <a:t>두 개 큐(ready / preparing)로 I/O 길이를 결정성과 분리</a:t>
+              <a:t>ready / preparing 두 큐로 I/O 길이를 분리</a:t>
             </a:r>
           </a:p>
           <a:p>
@@ -5591,7 +5591,7 @@
                 <a:latin typeface="Calibri"/>
                 <a:ea typeface="맑은 고딕"/>
               </a:rPr>
-              <a:t>GPU idle 시간을 제거하고 큐잉 지연을 줄임</a:t>
+              <a:t>GPU idle 제거 + 큐잉 지연 감소</a:t>
             </a:r>
           </a:p>
         </p:txBody>
@@ -6991,7 +6991,7 @@
               </a:spcAft>
             </a:pPr>
             <a:r>
-              <a:rPr sz="1400" b="1" i="0">
+              <a:rPr sz="1300" b="1" i="0">
                 <a:solidFill>
                   <a:srgbClr val="1F2937"/>
                 </a:solidFill>
@@ -7533,7 +7533,7 @@
               </a:spcAft>
             </a:pPr>
             <a:r>
-              <a:rPr sz="1400" b="1" i="0">
+              <a:rPr sz="1300" b="1" i="0">
                 <a:solidFill>
                   <a:srgbClr val="222222"/>
                 </a:solidFill>
@@ -7567,7 +7567,7 @@
               </a:spcAft>
             </a:pPr>
             <a:r>
-              <a:rPr sz="1400" b="1" i="0">
+              <a:rPr sz="1300" b="1" i="0">
                 <a:solidFill>
                   <a:srgbClr val="222222"/>
                 </a:solidFill>
@@ -7758,7 +7758,7 @@
                 <a:latin typeface="Calibri"/>
                 <a:ea typeface="맑은 고딕"/>
               </a:rPr>
-              <a:t>작은 KV 요청을 먼저 </a:t>
+              <a:t>작은 KV 먼저 </a:t>
             </a:r>
             <a:r>
               <a:rPr sz="1300" b="1" i="0">
@@ -7768,7 +7768,7 @@
                 <a:latin typeface="Calibri"/>
                 <a:ea typeface="맑은 고딕"/>
               </a:rPr>
-              <a:t>→ ready queue로 빨리 promote</a:t>
+              <a:t>→ ready queue 로 빨리 promote</a:t>
             </a:r>
           </a:p>
           <a:p>
@@ -7795,7 +7795,7 @@
                 <a:latin typeface="Calibri"/>
                 <a:ea typeface="맑은 고딕"/>
               </a:rPr>
-              <a:t>그러나 waiting time이 증가하면 </a:t>
+              <a:t>waiting↑ 시 </a:t>
             </a:r>
             <a:r>
               <a:rPr sz="1300" b="1" i="0">
@@ -7805,7 +7805,7 @@
                 <a:latin typeface="Calibri"/>
                 <a:ea typeface="맑은 고딕"/>
               </a:rPr>
-              <a:t>큰 KV도 결국 promote (기아 방지)</a:t>
+              <a:t>큰 KV 도 promote (기아 방지)</a:t>
             </a:r>
           </a:p>
           <a:p>
@@ -7832,7 +7832,7 @@
                 <a:latin typeface="Calibri"/>
                 <a:ea typeface="맑은 고딕"/>
               </a:rPr>
-              <a:t>classical HRRN을 </a:t>
+              <a:t>classical HRRN 의 </a:t>
             </a:r>
             <a:r>
               <a:rPr sz="1300" b="1" i="0">
@@ -7842,7 +7842,7 @@
                 <a:latin typeface="Calibri"/>
                 <a:ea typeface="맑은 고딕"/>
               </a:rPr>
-              <a:t>I/O 시간 ≈ KV size 가정으로 변형</a:t>
+              <a:t>I/O time ≈ KV size 변형</a:t>
             </a:r>
           </a:p>
         </p:txBody>
@@ -8164,7 +8164,7 @@
               </a:spcAft>
             </a:pPr>
             <a:r>
-              <a:rPr sz="1400" b="1" i="0">
+              <a:rPr sz="1300" b="1" i="0">
                 <a:solidFill>
                   <a:srgbClr val="1F2937"/>
                 </a:solidFill>
@@ -8215,7 +8215,7 @@
               </a:spcAft>
             </a:pPr>
             <a:r>
-              <a:rPr sz="1400" b="1" i="0">
+              <a:rPr sz="1300" b="1" i="0">
                 <a:solidFill>
                   <a:srgbClr val="1F2937"/>
                 </a:solidFill>
@@ -8588,7 +8588,7 @@
               </a:spcAft>
             </a:pPr>
             <a:r>
-              <a:rPr sz="1400" b="1" i="0">
+              <a:rPr sz="1300" b="1" i="0">
                 <a:solidFill>
                   <a:srgbClr val="1F2937"/>
                 </a:solidFill>
@@ -9933,7 +9933,7 @@
               </a:spcAft>
             </a:pPr>
             <a:r>
-              <a:rPr sz="1400" b="1" i="0">
+              <a:rPr sz="1300" b="1" i="0">
                 <a:solidFill>
                   <a:srgbClr val="222222"/>
                 </a:solidFill>
@@ -9967,7 +9967,7 @@
               </a:spcAft>
             </a:pPr>
             <a:r>
-              <a:rPr sz="1400" b="1" i="0">
+              <a:rPr sz="1300" b="1" i="0">
                 <a:solidFill>
                   <a:srgbClr val="444444"/>
                 </a:solidFill>
@@ -10001,7 +10001,7 @@
               </a:spcAft>
             </a:pPr>
             <a:r>
-              <a:rPr sz="1400" b="1" i="0">
+              <a:rPr sz="1300" b="1" i="0">
                 <a:solidFill>
                   <a:srgbClr val="222222"/>
                 </a:solidFill>
@@ -10104,7 +10104,7 @@
               </a:spcAft>
             </a:pPr>
             <a:r>
-              <a:rPr sz="1400" b="0" i="0">
+              <a:rPr sz="1300" b="0" i="0">
                 <a:solidFill>
                   <a:srgbClr val="222222"/>
                 </a:solidFill>
@@ -10115,7 +10115,7 @@
 </a:t>
             </a:r>
             <a:r>
-              <a:rPr sz="1400" b="0" i="0">
+              <a:rPr sz="1300" b="0" i="0">
                 <a:solidFill>
                   <a:srgbClr val="222222"/>
                 </a:solidFill>
@@ -10125,7 +10125,7 @@
               <a:t>Optimal과의 격차를 좁히려면 </a:t>
             </a:r>
             <a:r>
-              <a:rPr sz="1400" b="1" i="0">
+              <a:rPr sz="1300" b="1" i="0">
                 <a:solidFill>
                   <a:srgbClr val="444444"/>
                 </a:solidFill>
@@ -10135,7 +10135,7 @@
               <a:t>구간별 hit 확률을 모델링</a:t>
             </a:r>
             <a:r>
-              <a:rPr sz="1400" b="0" i="0">
+              <a:rPr sz="1300" b="0" i="0">
                 <a:solidFill>
                   <a:srgbClr val="222222"/>
                 </a:solidFill>
@@ -10440,7 +10440,7 @@
               </a:spcAft>
             </a:pPr>
             <a:r>
-              <a:rPr sz="1400" b="0" i="0">
+              <a:rPr sz="1300" b="0" i="0">
                 <a:solidFill>
                   <a:srgbClr val="222222"/>
                 </a:solidFill>
@@ -10520,7 +10520,7 @@
               </a:spcAft>
             </a:pPr>
             <a:r>
-              <a:rPr sz="1400" b="0" i="0">
+              <a:rPr sz="1300" b="0" i="0">
                 <a:solidFill>
                   <a:srgbClr val="222222"/>
                 </a:solidFill>
@@ -10600,7 +10600,7 @@
               </a:spcAft>
             </a:pPr>
             <a:r>
-              <a:rPr sz="1400" b="0" i="0">
+              <a:rPr sz="1300" b="0" i="0">
                 <a:solidFill>
                   <a:srgbClr val="222222"/>
                 </a:solidFill>
@@ -10680,7 +10680,7 @@
               </a:spcAft>
             </a:pPr>
             <a:r>
-              <a:rPr sz="1400" b="0" i="0">
+              <a:rPr sz="1300" b="0" i="0">
                 <a:solidFill>
                   <a:srgbClr val="222222"/>
                 </a:solidFill>
@@ -10760,7 +10760,7 @@
               </a:spcAft>
             </a:pPr>
             <a:r>
-              <a:rPr sz="1400" b="0" i="0">
+              <a:rPr sz="1300" b="0" i="0">
                 <a:solidFill>
                   <a:srgbClr val="222222"/>
                 </a:solidFill>
@@ -11138,7 +11138,7 @@
               <a:t>▸  </a:t>
             </a:r>
             <a:r>
-              <a:rPr sz="1400" b="1" i="0">
+              <a:rPr sz="1300" b="1" i="0">
                 <a:solidFill>
                   <a:srgbClr val="1F2937"/>
                 </a:solidFill>
@@ -11148,7 +11148,7 @@
               <a:t>prob_small</a:t>
             </a:r>
             <a:r>
-              <a:rPr sz="1400" b="0" i="0">
+              <a:rPr sz="1300" b="0" i="0">
                 <a:solidFill>
                   <a:srgbClr val="222222"/>
                 </a:solidFill>
@@ -11208,7 +11208,7 @@
               <a:t>▸  </a:t>
             </a:r>
             <a:r>
-              <a:rPr sz="1400" b="1" i="0">
+              <a:rPr sz="1300" b="1" i="0">
                 <a:solidFill>
                   <a:srgbClr val="1F2937"/>
                 </a:solidFill>
@@ -11218,7 +11218,7 @@
               <a:t>prob_promising(i)</a:t>
             </a:r>
             <a:r>
-              <a:rPr sz="1400" b="0" i="0">
+              <a:rPr sz="1300" b="0" i="0">
                 <a:solidFill>
                   <a:srgbClr val="222222"/>
                 </a:solidFill>
@@ -11278,7 +11278,7 @@
               <a:t>▸  </a:t>
             </a:r>
             <a:r>
-              <a:rPr sz="1400" b="1" i="0">
+              <a:rPr sz="1300" b="1" i="0">
                 <a:solidFill>
                   <a:srgbClr val="1F2937"/>
                 </a:solidFill>
@@ -11288,7 +11288,7 @@
               <a:t>hit_promising(i)</a:t>
             </a:r>
             <a:r>
-              <a:rPr sz="1400" b="0" i="0">
+              <a:rPr sz="1300" b="0" i="0">
                 <a:solidFill>
                   <a:srgbClr val="222222"/>
                 </a:solidFill>
@@ -11348,7 +11348,7 @@
               <a:t>▸  </a:t>
             </a:r>
             <a:r>
-              <a:rPr sz="1400" b="1" i="0">
+              <a:rPr sz="1300" b="1" i="0">
                 <a:solidFill>
                   <a:srgbClr val="1F2937"/>
                 </a:solidFill>
@@ -11358,7 +11358,7 @@
               <a:t>prob_extreme</a:t>
             </a:r>
             <a:r>
-              <a:rPr sz="1400" b="0" i="0">
+              <a:rPr sz="1300" b="0" i="0">
                 <a:solidFill>
                   <a:srgbClr val="222222"/>
                 </a:solidFill>
@@ -11803,7 +11803,7 @@
               </a:spcAft>
             </a:pPr>
             <a:r>
-              <a:rPr sz="1400" b="1" i="0">
+              <a:rPr sz="1300" b="1" i="0">
                 <a:solidFill>
                   <a:srgbClr val="1F2937"/>
                 </a:solidFill>
@@ -11827,7 +11827,7 @@
                 <a:latin typeface="Calibri"/>
                 <a:ea typeface="맑은 고딕"/>
               </a:rPr>
-              <a:t>▸ KV tensor는 attention 입력으로 직접 필요하지만 </a:t>
+              <a:t>▸ KV tensor 는 attention 입력으로 </a:t>
             </a:r>
             <a:r>
               <a:rPr sz="1300" b="1" i="0">
@@ -11837,7 +11837,7 @@
                 <a:latin typeface="Calibri"/>
                 <a:ea typeface="맑은 고딕"/>
               </a:rPr>
-              <a:t>size가 큼</a:t>
+              <a:t>필요하지만 size 가 큼</a:t>
             </a:r>
           </a:p>
           <a:p>
@@ -11847,7 +11847,7 @@
               </a:spcAft>
             </a:pPr>
             <a:r>
-              <a:rPr sz="1400" b="1" i="0">
+              <a:rPr sz="1300" b="1" i="0">
                 <a:solidFill>
                   <a:srgbClr val="1F2937"/>
                 </a:solidFill>
@@ -11881,7 +11881,7 @@
               </a:spcAft>
             </a:pPr>
             <a:r>
-              <a:rPr sz="1400" b="1" i="0">
+              <a:rPr sz="1300" b="1" i="0">
                 <a:solidFill>
                   <a:srgbClr val="444444"/>
                 </a:solidFill>
@@ -14223,7 +14223,7 @@
               </a:spcAft>
             </a:pPr>
             <a:r>
-              <a:rPr sz="1400" b="1" i="0">
+              <a:rPr sz="1300" b="1" i="0">
                 <a:solidFill>
                   <a:srgbClr val="444444"/>
                 </a:solidFill>
@@ -14233,7 +14233,7 @@
               <a:t>▸ </a:t>
             </a:r>
             <a:r>
-              <a:rPr sz="1400" b="1" i="0">
+              <a:rPr sz="1300" b="1" i="0">
                 <a:solidFill>
                   <a:srgbClr val="222222"/>
                 </a:solidFill>
@@ -14243,7 +14243,7 @@
               <a:t>Bidaw — 응답 latency </a:t>
             </a:r>
             <a:r>
-              <a:rPr sz="1400" b="0" i="0">
+              <a:rPr sz="1300" b="0" i="0">
                 <a:solidFill>
                   <a:srgbClr val="222222"/>
                 </a:solidFill>
@@ -14260,7 +14260,7 @@
               </a:spcAft>
             </a:pPr>
             <a:r>
-              <a:rPr sz="1400" b="1" i="0">
+              <a:rPr sz="1300" b="1" i="0">
                 <a:solidFill>
                   <a:srgbClr val="444444"/>
                 </a:solidFill>
@@ -14270,7 +14270,7 @@
               <a:t>▸ </a:t>
             </a:r>
             <a:r>
-              <a:rPr sz="1400" b="1" i="0">
+              <a:rPr sz="1300" b="1" i="0">
                 <a:solidFill>
                   <a:srgbClr val="222222"/>
                 </a:solidFill>
@@ -14280,7 +14280,7 @@
               <a:t>Bidaw — throughput </a:t>
             </a:r>
             <a:r>
-              <a:rPr sz="1400" b="0" i="0">
+              <a:rPr sz="1300" b="0" i="0">
                 <a:solidFill>
                   <a:srgbClr val="222222"/>
                 </a:solidFill>
@@ -14297,7 +14297,7 @@
               </a:spcAft>
             </a:pPr>
             <a:r>
-              <a:rPr sz="1400" b="1" i="0">
+              <a:rPr sz="1300" b="1" i="0">
                 <a:solidFill>
                   <a:srgbClr val="444444"/>
                 </a:solidFill>
@@ -14307,7 +14307,7 @@
               <a:t>▸ </a:t>
             </a:r>
             <a:r>
-              <a:rPr sz="1400" b="1" i="0">
+              <a:rPr sz="1300" b="1" i="0">
                 <a:solidFill>
                   <a:srgbClr val="222222"/>
                 </a:solidFill>
@@ -14317,7 +14317,7 @@
               <a:t>Optimal과의 gap </a:t>
             </a:r>
             <a:r>
-              <a:rPr sz="1400" b="0" i="0">
+              <a:rPr sz="1300" b="0" i="0">
                 <a:solidFill>
                   <a:srgbClr val="222222"/>
                 </a:solidFill>
@@ -14334,7 +14334,7 @@
               </a:spcAft>
             </a:pPr>
             <a:r>
-              <a:rPr sz="1400" b="1" i="0">
+              <a:rPr sz="1300" b="1" i="0">
                 <a:solidFill>
                   <a:srgbClr val="444444"/>
                 </a:solidFill>
@@ -14344,7 +14344,7 @@
               <a:t>▸ </a:t>
             </a:r>
             <a:r>
-              <a:rPr sz="1400" b="1" i="0">
+              <a:rPr sz="1300" b="1" i="0">
                 <a:solidFill>
                   <a:srgbClr val="222222"/>
                 </a:solidFill>
@@ -14354,7 +14354,7 @@
               <a:t>Note </a:t>
             </a:r>
             <a:r>
-              <a:rPr sz="1400" b="0" i="0">
+              <a:rPr sz="1300" b="0" i="0">
                 <a:solidFill>
                   <a:srgbClr val="222222"/>
                 </a:solidFill>
@@ -14747,7 +14747,7 @@
               </a:spcAft>
             </a:pPr>
             <a:r>
-              <a:rPr sz="1400" b="1" i="0">
+              <a:rPr sz="1300" b="1" i="0">
                 <a:solidFill>
                   <a:srgbClr val="1F2937"/>
                 </a:solidFill>
@@ -14818,7 +14818,7 @@
               </a:spcAft>
             </a:pPr>
             <a:r>
-              <a:rPr sz="1400" b="1" i="0">
+              <a:rPr sz="1300" b="1" i="0">
                 <a:solidFill>
                   <a:srgbClr val="1F2937"/>
                 </a:solidFill>
@@ -15349,7 +15349,7 @@
               </a:spcAft>
             </a:pPr>
             <a:r>
-              <a:rPr sz="1400" b="1" i="0">
+              <a:rPr sz="1300" b="1" i="0">
                 <a:solidFill>
                   <a:srgbClr val="444444"/>
                 </a:solidFill>
@@ -15359,7 +15359,7 @@
               <a:t>▸ </a:t>
             </a:r>
             <a:r>
-              <a:rPr sz="1400" b="1" i="0">
+              <a:rPr sz="1300" b="1" i="0">
                 <a:solidFill>
                   <a:srgbClr val="1F2937"/>
                 </a:solidFill>
@@ -15369,7 +15369,7 @@
               <a:t>Tail latency</a:t>
             </a:r>
             <a:r>
-              <a:rPr sz="1400" b="0" i="0">
+              <a:rPr sz="1300" b="0" i="0">
                 <a:solidFill>
                   <a:srgbClr val="222222"/>
                 </a:solidFill>
@@ -15386,7 +15386,7 @@
               </a:spcAft>
             </a:pPr>
             <a:r>
-              <a:rPr sz="1400" b="1" i="0">
+              <a:rPr sz="1300" b="1" i="0">
                 <a:solidFill>
                   <a:srgbClr val="444444"/>
                 </a:solidFill>
@@ -15396,7 +15396,7 @@
               <a:t>▸ </a:t>
             </a:r>
             <a:r>
-              <a:rPr sz="1400" b="1" i="0">
+              <a:rPr sz="1300" b="1" i="0">
                 <a:solidFill>
                   <a:srgbClr val="1F2937"/>
                 </a:solidFill>
@@ -15406,7 +15406,7 @@
               <a:t>Ablation</a:t>
             </a:r>
             <a:r>
-              <a:rPr sz="1400" b="0" i="0">
+              <a:rPr sz="1300" b="0" i="0">
                 <a:solidFill>
                   <a:srgbClr val="222222"/>
                 </a:solidFill>
@@ -15423,7 +15423,7 @@
               </a:spcAft>
             </a:pPr>
             <a:r>
-              <a:rPr sz="1400" b="1" i="0">
+              <a:rPr sz="1300" b="1" i="0">
                 <a:solidFill>
                   <a:srgbClr val="444444"/>
                 </a:solidFill>
@@ -15433,7 +15433,7 @@
               <a:t>▸ </a:t>
             </a:r>
             <a:r>
-              <a:rPr sz="1400" b="1" i="0">
+              <a:rPr sz="1300" b="1" i="0">
                 <a:solidFill>
                   <a:srgbClr val="1F2937"/>
                 </a:solidFill>
@@ -15443,7 +15443,7 @@
               <a:t>Overhead</a:t>
             </a:r>
             <a:r>
-              <a:rPr sz="1400" b="0" i="0">
+              <a:rPr sz="1300" b="0" i="0">
                 <a:solidFill>
                   <a:srgbClr val="222222"/>
                 </a:solidFill>
@@ -15789,7 +15789,7 @@
               </a:spcAft>
             </a:pPr>
             <a:r>
-              <a:rPr sz="1400" b="1" i="0">
+              <a:rPr sz="1300" b="1" i="0">
                 <a:solidFill>
                   <a:srgbClr val="444444"/>
                 </a:solidFill>
@@ -15799,7 +15799,7 @@
               <a:t>•  </a:t>
             </a:r>
             <a:r>
-              <a:rPr sz="1400" b="0" i="0">
+              <a:rPr sz="1300" b="0" i="0">
                 <a:solidFill>
                   <a:srgbClr val="222222"/>
                 </a:solidFill>
@@ -15816,7 +15816,7 @@
               </a:spcAft>
             </a:pPr>
             <a:r>
-              <a:rPr sz="1400" b="1" i="0">
+              <a:rPr sz="1300" b="1" i="0">
                 <a:solidFill>
                   <a:srgbClr val="444444"/>
                 </a:solidFill>
@@ -15826,7 +15826,7 @@
               <a:t>•  </a:t>
             </a:r>
             <a:r>
-              <a:rPr sz="1400" b="0" i="0">
+              <a:rPr sz="1300" b="0" i="0">
                 <a:solidFill>
                   <a:srgbClr val="222222"/>
                 </a:solidFill>
@@ -15843,7 +15843,7 @@
               </a:spcAft>
             </a:pPr>
             <a:r>
-              <a:rPr sz="1400" b="1" i="0">
+              <a:rPr sz="1300" b="1" i="0">
                 <a:solidFill>
                   <a:srgbClr val="444444"/>
                 </a:solidFill>
@@ -15853,7 +15853,7 @@
               <a:t>•  </a:t>
             </a:r>
             <a:r>
-              <a:rPr sz="1400" b="0" i="0">
+              <a:rPr sz="1300" b="0" i="0">
                 <a:solidFill>
                   <a:srgbClr val="222222"/>
                 </a:solidFill>
@@ -15887,7 +15887,7 @@
               </a:spcAft>
             </a:pPr>
             <a:r>
-              <a:rPr sz="1400" b="1" i="0">
+              <a:rPr sz="1300" b="1" i="0">
                 <a:solidFill>
                   <a:srgbClr val="444444"/>
                 </a:solidFill>
@@ -15897,24 +15897,24 @@
               <a:t>•  </a:t>
             </a:r>
             <a:r>
-              <a:rPr sz="1400" b="0" i="0">
+              <a:rPr sz="1300" b="0" i="0">
                 <a:solidFill>
                   <a:srgbClr val="222222"/>
                 </a:solidFill>
                 <a:latin typeface="Calibri"/>
                 <a:ea typeface="맑은 고딕"/>
               </a:rPr>
-              <a:t>라운드 N의 응답은 라운드 0..N-1의 모든 KV tensor를 다시 attention 입력으로 사용</a:t>
-            </a:r>
-          </a:p>
-          <a:p>
-            <a:pPr algn="l">
-              <a:spcAft>
-                <a:spcPts val="400"/>
-              </a:spcAft>
-            </a:pPr>
-            <a:r>
-              <a:rPr sz="1400" b="1" i="0">
+              <a:t>라운드 N 응답은 0..N-1 라운드 KV 를 attention 입력으로 재사용</a:t>
+            </a:r>
+          </a:p>
+          <a:p>
+            <a:pPr algn="l">
+              <a:spcAft>
+                <a:spcPts val="400"/>
+              </a:spcAft>
+            </a:pPr>
+            <a:r>
+              <a:rPr sz="1300" b="1" i="0">
                 <a:solidFill>
                   <a:srgbClr val="444444"/>
                 </a:solidFill>
@@ -15924,14 +15924,14 @@
               <a:t>•  </a:t>
             </a:r>
             <a:r>
-              <a:rPr sz="1400" b="0" i="0">
+              <a:rPr sz="1300" b="0" i="0">
                 <a:solidFill>
                   <a:srgbClr val="222222"/>
                 </a:solidFill>
                 <a:latin typeface="Calibri"/>
                 <a:ea typeface="맑은 고딕"/>
               </a:rPr>
-              <a:t>이 KV를 재계산하면 GPU FLOPs를 매번 다시 태움 → caching이 필수</a:t>
+              <a:t>재계산은 GPU FLOPs를 매번 태움 → KV caching이 필수</a:t>
             </a:r>
           </a:p>
         </p:txBody>
@@ -16949,8 +16949,8 @@
         </p:nvSpPr>
         <p:spPr>
           <a:xfrm>
-            <a:off x="6400800" y="1280160"/>
-            <a:ext cx="5303520" cy="4389120"/>
+            <a:off x="6126480" y="1280160"/>
+            <a:ext cx="5577840" cy="4389120"/>
           </a:xfrm>
           <a:prstGeom prst="rect">
             <a:avLst/>
@@ -16995,8 +16995,8 @@
         </p:nvSpPr>
         <p:spPr>
           <a:xfrm>
-            <a:off x="6583680" y="1463040"/>
-            <a:ext cx="4937760" cy="4023360"/>
+            <a:off x="6309360" y="1463040"/>
+            <a:ext cx="5212080" cy="4023360"/>
           </a:xfrm>
           <a:prstGeom prst="rect">
             <a:avLst/>
@@ -17015,7 +17015,7 @@
               </a:spcAft>
             </a:pPr>
             <a:r>
-              <a:rPr sz="1400" b="1" i="0">
+              <a:rPr sz="1300" b="1" i="0">
                 <a:solidFill>
                   <a:srgbClr val="1F2937"/>
                 </a:solidFill>
@@ -17032,14 +17032,14 @@
               </a:spcAft>
             </a:pPr>
             <a:r>
-              <a:rPr sz="1600" b="0" i="0">
+              <a:rPr sz="1300" b="0" i="0">
                 <a:solidFill>
                   <a:srgbClr val="222222"/>
                 </a:solidFill>
                 <a:latin typeface="Consolas"/>
                 <a:ea typeface="맑은 고딕"/>
               </a:rPr>
-              <a:t>Attention(Q, K, V) = softmax(Q · Kᵀ / √d) · V</a:t>
+              <a:t>Attention(Q,K,V) = softmax(Q·K^T / sqrt(d))·V</a:t>
             </a:r>
           </a:p>
           <a:p>
@@ -17049,7 +17049,7 @@
               </a:spcAft>
             </a:pPr>
             <a:r>
-              <a:rPr sz="1400" b="0" i="0">
+              <a:rPr sz="1300" b="0" i="0">
                 <a:solidFill>
                   <a:srgbClr val="222222"/>
                 </a:solidFill>
@@ -17066,7 +17066,7 @@
               </a:spcAft>
             </a:pPr>
             <a:r>
-              <a:rPr sz="1400" b="0" i="0">
+              <a:rPr sz="1300" b="0" i="0">
                 <a:solidFill>
                   <a:srgbClr val="222222"/>
                 </a:solidFill>
@@ -17076,7 +17076,7 @@
               <a:t>▸ 과거 토큰의 K, V는 변하지 않음 → </a:t>
             </a:r>
             <a:r>
-              <a:rPr sz="1400" b="1" i="0">
+              <a:rPr sz="1300" b="1" i="0">
                 <a:solidFill>
                   <a:srgbClr val="444444"/>
                 </a:solidFill>
@@ -17093,7 +17093,7 @@
               </a:spcAft>
             </a:pPr>
             <a:r>
-              <a:rPr sz="1400" b="0" i="0">
+              <a:rPr sz="1300" b="0" i="0">
                 <a:solidFill>
                   <a:srgbClr val="707680"/>
                 </a:solidFill>
@@ -17110,7 +17110,7 @@
               </a:spcAft>
             </a:pPr>
             <a:r>
-              <a:rPr sz="1400" b="0" i="0">
+              <a:rPr sz="1300" b="0" i="0">
                 <a:solidFill>
                   <a:srgbClr val="222222"/>
                 </a:solidFill>
@@ -17184,7 +17184,7 @@
               </a:spcAft>
             </a:pPr>
             <a:r>
-              <a:rPr sz="1400" b="1" i="0">
+              <a:rPr sz="1300" b="1" i="0">
                 <a:solidFill>
                   <a:srgbClr val="444444"/>
                 </a:solidFill>
@@ -17194,7 +17194,7 @@
               <a:t>•  </a:t>
             </a:r>
             <a:r>
-              <a:rPr sz="1400" b="0" i="0">
+              <a:rPr sz="1300" b="0" i="0">
                 <a:solidFill>
                   <a:srgbClr val="222222"/>
                 </a:solidFill>
@@ -17204,7 +17204,7 @@
               <a:t>재계산을 안 하면 </a:t>
             </a:r>
             <a:r>
-              <a:rPr sz="1400" b="1" i="0">
+              <a:rPr sz="1300" b="1" i="0">
                 <a:solidFill>
                   <a:srgbClr val="222222"/>
                 </a:solidFill>
@@ -17221,7 +17221,7 @@
               </a:spcAft>
             </a:pPr>
             <a:r>
-              <a:rPr sz="1400" b="1" i="0">
+              <a:rPr sz="1300" b="1" i="0">
                 <a:solidFill>
                   <a:srgbClr val="444444"/>
                 </a:solidFill>
@@ -17231,7 +17231,7 @@
               <a:t>•  </a:t>
             </a:r>
             <a:r>
-              <a:rPr sz="1400" b="0" i="0">
+              <a:rPr sz="1300" b="0" i="0">
                 <a:solidFill>
                   <a:srgbClr val="222222"/>
                 </a:solidFill>
@@ -17241,7 +17241,7 @@
               <a:t>저장 비용이 매우 큼 </a:t>
             </a:r>
             <a:r>
-              <a:rPr sz="1400" b="1" i="0">
+              <a:rPr sz="1300" b="1" i="0">
                 <a:solidFill>
                   <a:srgbClr val="222222"/>
                 </a:solidFill>
@@ -17258,7 +17258,7 @@
               </a:spcAft>
             </a:pPr>
             <a:r>
-              <a:rPr sz="1400" b="1" i="0">
+              <a:rPr sz="1300" b="1" i="0">
                 <a:solidFill>
                   <a:srgbClr val="444444"/>
                 </a:solidFill>
@@ -17268,7 +17268,7 @@
               <a:t>•  </a:t>
             </a:r>
             <a:r>
-              <a:rPr sz="1400" b="0" i="0">
+              <a:rPr sz="1300" b="0" i="0">
                 <a:solidFill>
                   <a:srgbClr val="222222"/>
                 </a:solidFill>
@@ -17278,7 +17278,7 @@
               <a:t>vLLM, PagedAttention 류 가속 시스템도 </a:t>
             </a:r>
             <a:r>
-              <a:rPr sz="1400" b="1" i="0">
+              <a:rPr sz="1300" b="1" i="0">
                 <a:solidFill>
                   <a:srgbClr val="222222"/>
                 </a:solidFill>
@@ -17312,7 +17312,7 @@
               </a:spcAft>
             </a:pPr>
             <a:r>
-              <a:rPr sz="1400" b="0" i="0">
+              <a:rPr sz="1300" b="0" i="0">
                 <a:solidFill>
                   <a:srgbClr val="222222"/>
                 </a:solidFill>
@@ -17322,7 +17322,7 @@
               <a:t>▸ 한 사용자의 </a:t>
             </a:r>
             <a:r>
-              <a:rPr sz="1400" b="1" i="0">
+              <a:rPr sz="1300" b="1" i="0">
                 <a:solidFill>
                   <a:srgbClr val="444444"/>
                 </a:solidFill>
@@ -17332,7 +17332,7 @@
               <a:t>여러 라운드 대화 KV</a:t>
             </a:r>
             <a:r>
-              <a:rPr sz="1400" b="0" i="0">
+              <a:rPr sz="1300" b="0" i="0">
                 <a:solidFill>
                   <a:srgbClr val="222222"/>
                 </a:solidFill>
@@ -17661,7 +17661,7 @@
               </a:spcAft>
             </a:pPr>
             <a:r>
-              <a:rPr sz="1400" b="1" i="0">
+              <a:rPr sz="1300" b="1" i="0">
                 <a:solidFill>
                   <a:srgbClr val="444444"/>
                 </a:solidFill>
@@ -17671,24 +17671,24 @@
               <a:t>•  </a:t>
             </a:r>
             <a:r>
-              <a:rPr sz="1400" b="1" i="0">
+              <a:rPr sz="1300" b="1" i="0">
                 <a:solidFill>
                   <a:srgbClr val="222222"/>
                 </a:solidFill>
                 <a:latin typeface="Calibri"/>
                 <a:ea typeface="맑은 고딕"/>
               </a:rPr>
-              <a:t>80GB A800 GPU 1장</a:t>
-            </a:r>
-            <a:r>
-              <a:rPr sz="1400" b="0" i="0">
+              <a:t>80GB A800 GPU 1장 </a:t>
+            </a:r>
+            <a:r>
+              <a:rPr sz="1300" b="0" i="0">
                 <a:solidFill>
                   <a:srgbClr val="222222"/>
                 </a:solidFill>
                 <a:latin typeface="Calibri"/>
                 <a:ea typeface="맑은 고딕"/>
               </a:rPr>
-              <a:t> → Attention KV가 곧바로 GPU 메모리를 잡아먹음</a:t>
+              <a:t>→ KV가 곧바로 GPU 메모리를 점유</a:t>
             </a:r>
           </a:p>
           <a:p>
@@ -17698,7 +17698,7 @@
               </a:spcAft>
             </a:pPr>
             <a:r>
-              <a:rPr sz="1400" b="1" i="0">
+              <a:rPr sz="1300" b="1" i="0">
                 <a:solidFill>
                   <a:srgbClr val="444444"/>
                 </a:solidFill>
@@ -17708,24 +17708,24 @@
               <a:t>•  </a:t>
             </a:r>
             <a:r>
-              <a:rPr sz="1400" b="1" i="0">
+              <a:rPr sz="1300" b="1" i="0">
                 <a:solidFill>
                   <a:srgbClr val="222222"/>
                 </a:solidFill>
                 <a:latin typeface="Calibri"/>
                 <a:ea typeface="맑은 고딕"/>
               </a:rPr>
-              <a:t>사용자 30명/분 도착 시 </a:t>
-            </a:r>
-            <a:r>
-              <a:rPr sz="1400" b="0" i="0">
+              <a:t>30 users/min 도착 시 </a:t>
+            </a:r>
+            <a:r>
+              <a:rPr sz="1300" b="0" i="0">
                 <a:solidFill>
                   <a:srgbClr val="222222"/>
                 </a:solidFill>
                 <a:latin typeface="Calibri"/>
                 <a:ea typeface="맑은 고딕"/>
               </a:rPr>
-              <a:t>OPT-13B에서 동시 캐시 KV가 480GB까지 증가</a:t>
+              <a:t>OPT-13B 동시 캐시 KV ≈ 480 GB</a:t>
             </a:r>
           </a:p>
           <a:p>
@@ -17735,7 +17735,7 @@
               </a:spcAft>
             </a:pPr>
             <a:r>
-              <a:rPr sz="1400" b="1" i="0">
+              <a:rPr sz="1300" b="1" i="0">
                 <a:solidFill>
                   <a:srgbClr val="444444"/>
                 </a:solidFill>
@@ -17745,24 +17745,24 @@
               <a:t>•  </a:t>
             </a:r>
             <a:r>
-              <a:rPr sz="1400" b="1" i="0">
+              <a:rPr sz="1300" b="1" i="0">
                 <a:solidFill>
                   <a:srgbClr val="222222"/>
                 </a:solidFill>
                 <a:latin typeface="Calibri"/>
                 <a:ea typeface="맑은 고딕"/>
               </a:rPr>
-              <a:t>일반적인 LLM 서버의 </a:t>
-            </a:r>
-            <a:r>
-              <a:rPr sz="1400" b="0" i="0">
+              <a:t>LLM 서버 host memory </a:t>
+            </a:r>
+            <a:r>
+              <a:rPr sz="1300" b="0" i="0">
                 <a:solidFill>
                   <a:srgbClr val="222222"/>
                 </a:solidFill>
                 <a:latin typeface="Calibri"/>
                 <a:ea typeface="맑은 고딕"/>
               </a:rPr>
-              <a:t>host memory(perf layer)는 약 1.6×–3.2× of GPU memory</a:t>
+              <a:t>≈ GPU mem 의 1.6–3.2×</a:t>
             </a:r>
           </a:p>
           <a:p>
@@ -17772,7 +17772,7 @@
               </a:spcAft>
             </a:pPr>
             <a:r>
-              <a:rPr sz="1400" b="1" i="0">
+              <a:rPr sz="1300" b="1" i="0">
                 <a:solidFill>
                   <a:srgbClr val="444444"/>
                 </a:solidFill>
@@ -17782,24 +17782,24 @@
               <a:t>•  </a:t>
             </a:r>
             <a:r>
-              <a:rPr sz="1400" b="1" i="0">
+              <a:rPr sz="1300" b="1" i="0">
                 <a:solidFill>
                   <a:srgbClr val="222222"/>
                 </a:solidFill>
                 <a:latin typeface="Calibri"/>
                 <a:ea typeface="맑은 고딕"/>
               </a:rPr>
-              <a:t>따라서 </a:t>
-            </a:r>
-            <a:r>
-              <a:rPr sz="1400" b="0" i="0">
+              <a:t>→ host memory </a:t>
+            </a:r>
+            <a:r>
+              <a:rPr sz="1300" b="0" i="0">
                 <a:solidFill>
                   <a:srgbClr val="222222"/>
                 </a:solidFill>
                 <a:latin typeface="Calibri"/>
                 <a:ea typeface="맑은 고딕"/>
               </a:rPr>
-              <a:t>host memory도 부족 → SSD(capacity layer)까지 사용해야 함</a:t>
+              <a:t>도 부족, capacity SSD 도 사용해야 함</a:t>
             </a:r>
           </a:p>
         </p:txBody>
@@ -17915,7 +17915,7 @@
               </a:spcAft>
             </a:pPr>
             <a:r>
-              <a:rPr sz="1400" b="0" i="1">
+              <a:rPr sz="1300" b="0" i="1">
                 <a:solidFill>
                   <a:srgbClr val="707680"/>
                 </a:solidFill>
@@ -18509,7 +18509,7 @@
               </a:spcAft>
             </a:pPr>
             <a:r>
-              <a:rPr sz="1400" b="0" i="0">
+              <a:rPr sz="1300" b="0" i="0">
                 <a:solidFill>
                   <a:srgbClr val="222222"/>
                 </a:solidFill>
@@ -18519,7 +18519,7 @@
               <a:t>쓰기는 백그라운드, 그러나 읽기(load)는 </a:t>
             </a:r>
             <a:r>
-              <a:rPr sz="1400" b="1" i="0">
+              <a:rPr sz="1300" b="1" i="0">
                 <a:solidFill>
                   <a:srgbClr val="444444"/>
                 </a:solidFill>
@@ -18848,7 +18848,7 @@
               </a:spcAft>
             </a:pPr>
             <a:r>
-              <a:rPr sz="1400" b="1" i="0">
+              <a:rPr sz="1300" b="1" i="0">
                 <a:solidFill>
                   <a:srgbClr val="1F2937"/>
                 </a:solidFill>
@@ -18882,7 +18882,7 @@
               </a:spcAft>
             </a:pPr>
             <a:r>
-              <a:rPr sz="1400" b="1" i="0">
+              <a:rPr sz="1300" b="1" i="0">
                 <a:solidFill>
                   <a:srgbClr val="1F2937"/>
                 </a:solidFill>
@@ -18899,7 +18899,7 @@
               </a:spcAft>
             </a:pPr>
             <a:r>
-              <a:rPr sz="1400" b="0" i="0">
+              <a:rPr sz="1300" b="0" i="0">
                 <a:solidFill>
                   <a:srgbClr val="222222"/>
                 </a:solidFill>
@@ -18909,7 +18909,7 @@
               <a:t>▸ 응답 latency가 </a:t>
             </a:r>
             <a:r>
-              <a:rPr sz="1400" b="1" i="0">
+              <a:rPr sz="1300" b="1" i="0">
                 <a:solidFill>
                   <a:srgbClr val="444444"/>
                 </a:solidFill>
@@ -18926,7 +18926,7 @@
               </a:spcAft>
             </a:pPr>
             <a:r>
-              <a:rPr sz="1400" b="0" i="0">
+              <a:rPr sz="1300" b="0" i="0">
                 <a:solidFill>
                   <a:srgbClr val="222222"/>
                 </a:solidFill>
@@ -18936,7 +18936,7 @@
               <a:t>▸ throughput은 </a:t>
             </a:r>
             <a:r>
-              <a:rPr sz="1400" b="1" i="0">
+              <a:rPr sz="1300" b="1" i="0">
                 <a:solidFill>
                   <a:srgbClr val="444444"/>
                 </a:solidFill>
@@ -18953,7 +18953,7 @@
               </a:spcAft>
             </a:pPr>
             <a:r>
-              <a:rPr sz="1400" b="1" i="0">
+              <a:rPr sz="1300" b="1" i="0">
                 <a:solidFill>
                   <a:srgbClr val="1F2937"/>
                 </a:solidFill>
@@ -19316,7 +19316,7 @@
               </a:spcAft>
             </a:pPr>
             <a:r>
-              <a:rPr sz="1400" b="1" i="0">
+              <a:rPr sz="1300" b="1" i="0">
                 <a:solidFill>
                   <a:srgbClr val="1F2937"/>
                 </a:solidFill>
@@ -19340,17 +19340,17 @@
                 <a:latin typeface="Calibri"/>
                 <a:ea typeface="맑은 고딕"/>
               </a:rPr>
-              <a:t>China Telecom omni-channel — 1M+ 라운드, 사용자 단위 timestamp 보존</a:t>
-            </a:r>
-          </a:p>
-          <a:p>
-            <a:pPr algn="l">
-              <a:spcAft>
-                <a:spcPts val="400"/>
-              </a:spcAft>
-            </a:pPr>
-            <a:r>
-              <a:rPr sz="1400" b="1" i="0">
+              <a:t>China Telecom · 1M+ 라운드 · user timestamp 보존</a:t>
+            </a:r>
+          </a:p>
+          <a:p>
+            <a:pPr algn="l">
+              <a:spcAft>
+                <a:spcPts val="400"/>
+              </a:spcAft>
+            </a:pPr>
+            <a:r>
+              <a:rPr sz="1300" b="1" i="0">
                 <a:solidFill>
                   <a:srgbClr val="1F2937"/>
                 </a:solidFill>
@@ -19384,7 +19384,7 @@
                 <a:latin typeface="Calibri"/>
                 <a:ea typeface="맑은 고딕"/>
               </a:rPr>
-              <a:t>ShareGPT: 평균 5.7 라운드 — 인터랙티브 대화 분석에 부족</a:t>
+              <a:t>ShareGPT: 5.7 라운드 — interactive 분석엔 짧음</a:t>
             </a:r>
           </a:p>
           <a:p>
@@ -19411,7 +19411,7 @@
                 <a:latin typeface="Calibri"/>
                 <a:ea typeface="맑은 고딕"/>
               </a:rPr>
-              <a:t>Mooncake: query 12k+ 토큰 — 길지만 대화 패턴은 부재</a:t>
+              <a:t>Mooncake: 12k+ 토큰 — 길지만 대화 패턴 부재</a:t>
             </a:r>
           </a:p>
           <a:p>
@@ -19438,7 +19438,7 @@
                 <a:latin typeface="Calibri"/>
                 <a:ea typeface="맑은 고딕"/>
               </a:rPr>
-              <a:t>본 trace: 라운드 수 22.4 / 토큰 길이 36 — “interactive” 정의에 부합</a:t>
+              <a:t>본 trace: 22.4 라운드 / 36 토큰 — interactive 부합</a:t>
             </a:r>
           </a:p>
         </p:txBody>
@@ -19517,7 +19517,7 @@
               </a:spcAft>
             </a:pPr>
             <a:r>
-              <a:rPr sz="1400" b="0" i="0">
+              <a:rPr sz="1300" b="0" i="0">
                 <a:solidFill>
                   <a:srgbClr val="222222"/>
                 </a:solidFill>
@@ -19527,7 +19527,7 @@
               <a:t>이어지는 세 슬라이드에서 </a:t>
             </a:r>
             <a:r>
-              <a:rPr sz="1400" b="1" i="0">
+              <a:rPr sz="1300" b="1" i="0">
                 <a:solidFill>
                   <a:srgbClr val="444444"/>
                 </a:solidFill>
@@ -19537,7 +19537,7 @@
               <a:t>Observation 1 / 2 / 3</a:t>
             </a:r>
             <a:r>
-              <a:rPr sz="1400" b="0" i="0">
+              <a:rPr sz="1300" b="0" i="0">
                 <a:solidFill>
                   <a:srgbClr val="222222"/>
                 </a:solidFill>
@@ -19866,7 +19866,7 @@
               </a:spcAft>
             </a:pPr>
             <a:r>
-              <a:rPr sz="1400" b="1" i="0">
+              <a:rPr sz="1300" b="1" i="0">
                 <a:solidFill>
                   <a:srgbClr val="1F2937"/>
                 </a:solidFill>
@@ -19900,7 +19900,7 @@
                 <a:latin typeface="Calibri"/>
                 <a:ea typeface="맑은 고딕"/>
               </a:rPr>
-              <a:t>사용자는 평균 22.4 라운드 동안 KV가 살아있어야 함</a:t>
+              <a:t>사용자 평균 22.4 라운드 동안 KV 가 생존</a:t>
             </a:r>
           </a:p>
           <a:p>
@@ -19927,7 +19927,7 @@
                 <a:latin typeface="Calibri"/>
                 <a:ea typeface="맑은 고딕"/>
               </a:rPr>
-              <a:t>도착률이 늘면 동시 사용자 수가 선형 증가</a:t>
+              <a:t>도착률↑ → 동시 사용자 수 선형 증가</a:t>
             </a:r>
           </a:p>
           <a:p>
@@ -19954,17 +19954,17 @@
                 <a:latin typeface="Calibri"/>
                 <a:ea typeface="맑은 고딕"/>
               </a:rPr>
-              <a:t>OPT-13B에서 30 users/min일 때 480 GB &gt; 200 GB perf layer</a:t>
-            </a:r>
-          </a:p>
-          <a:p>
-            <a:pPr algn="l">
-              <a:spcAft>
-                <a:spcPts val="400"/>
-              </a:spcAft>
-            </a:pPr>
-            <a:r>
-              <a:rPr sz="1400" b="1" i="0">
+              <a:t>OPT-13B · 30 users/min ≈ 480 GB (perf 200 GB)</a:t>
+            </a:r>
+          </a:p>
+          <a:p>
+            <a:pPr algn="l">
+              <a:spcAft>
+                <a:spcPts val="400"/>
+              </a:spcAft>
+            </a:pPr>
+            <a:r>
+              <a:rPr sz="1300" b="1" i="0">
                 <a:solidFill>
                   <a:srgbClr val="1F2937"/>
                 </a:solidFill>
@@ -19998,7 +19998,7 @@
                 <a:latin typeface="Calibri"/>
                 <a:ea typeface="맑은 고딕"/>
               </a:rPr>
-              <a:t>perf layer가 아무리 크더라도 곧 한계</a:t>
+              <a:t>perf layer 가 커도 결국 한계</a:t>
             </a:r>
           </a:p>
           <a:p>
@@ -20025,7 +20025,7 @@
                 <a:latin typeface="Calibri"/>
                 <a:ea typeface="맑은 고딕"/>
               </a:rPr>
-              <a:t>eviction을 잘 하지 못하면 capacity layer로 자주 fallback</a:t>
+              <a:t>eviction 부실 → capacity layer 로 빈번히 fallback</a:t>
             </a:r>
           </a:p>
         </p:txBody>

--- a/Bidaw_seminar.pptx
+++ b/Bidaw_seminar.pptx
@@ -3641,24 +3641,24 @@
               <a:t>▸ </a:t>
             </a:r>
             <a:r>
-              <a:rPr sz="1400" b="0" i="0">
-                <a:solidFill>
-                  <a:srgbClr val="1F2937"/>
-                </a:solidFill>
-                <a:latin typeface="Calibri"/>
-                <a:ea typeface="맑은 고딕"/>
-              </a:rPr>
-              <a:t>80%의 KV access 가 </a:t>
-            </a:r>
-            <a:r>
-              <a:rPr sz="1400" b="1" i="0">
-                <a:solidFill>
-                  <a:srgbClr val="1F2937"/>
-                </a:solidFill>
-                <a:latin typeface="Calibri"/>
-                <a:ea typeface="맑은 고딕"/>
-              </a:rPr>
-              <a:t>perf layer (200GB)를 초과</a:t>
+              <a:rPr sz="1700" b="0" i="0">
+                <a:solidFill>
+                  <a:srgbClr val="1F2937"/>
+                </a:solidFill>
+                <a:latin typeface="Calibri"/>
+                <a:ea typeface="맑은 고딕"/>
+              </a:rPr>
+              <a:t>80% access </a:t>
+            </a:r>
+            <a:r>
+              <a:rPr sz="1700" b="1" i="0">
+                <a:solidFill>
+                  <a:srgbClr val="1F2937"/>
+                </a:solidFill>
+                <a:latin typeface="Calibri"/>
+                <a:ea typeface="맑은 고딕"/>
+              </a:rPr>
+              <a:t>&gt;  perf 200 GB</a:t>
             </a:r>
           </a:p>
           <a:p>
@@ -3678,24 +3678,24 @@
               <a:t>▸ </a:t>
             </a:r>
             <a:r>
-              <a:rPr sz="1400" b="0" i="0">
-                <a:solidFill>
-                  <a:srgbClr val="1F2937"/>
-                </a:solidFill>
-                <a:latin typeface="Calibri"/>
-                <a:ea typeface="맑은 고딕"/>
-              </a:rPr>
-              <a:t>FIFO/LRU/queue-enhanced 모두 </a:t>
-            </a:r>
-            <a:r>
-              <a:rPr sz="1400" b="1" i="0">
-                <a:solidFill>
-                  <a:srgbClr val="1F2937"/>
-                </a:solidFill>
-                <a:latin typeface="Calibri"/>
-                <a:ea typeface="맑은 고딕"/>
-              </a:rPr>
-              <a:t>hit rate ≈ 20% 수준</a:t>
+              <a:rPr sz="1700" b="0" i="0">
+                <a:solidFill>
+                  <a:srgbClr val="1F2937"/>
+                </a:solidFill>
+                <a:latin typeface="Calibri"/>
+                <a:ea typeface="맑은 고딕"/>
+              </a:rPr>
+              <a:t>정책 무관 </a:t>
+            </a:r>
+            <a:r>
+              <a:rPr sz="1700" b="1" i="0">
+                <a:solidFill>
+                  <a:srgbClr val="1F2937"/>
+                </a:solidFill>
+                <a:latin typeface="Calibri"/>
+                <a:ea typeface="맑은 고딕"/>
+              </a:rPr>
+              <a:t>hit ≈ 20 %</a:t>
             </a:r>
           </a:p>
           <a:p>
@@ -3715,51 +3715,51 @@
               <a:t>▸ </a:t>
             </a:r>
             <a:r>
-              <a:rPr sz="1400" b="0" i="0">
-                <a:solidFill>
-                  <a:srgbClr val="1F2937"/>
-                </a:solidFill>
-                <a:latin typeface="Calibri"/>
-                <a:ea typeface="맑은 고딕"/>
-              </a:rPr>
-              <a:t>perf layer가 </a:t>
-            </a:r>
-            <a:r>
-              <a:rPr sz="1400" b="1" i="0">
-                <a:solidFill>
-                  <a:srgbClr val="1F2937"/>
-                </a:solidFill>
-                <a:latin typeface="Calibri"/>
-                <a:ea typeface="맑은 고딕"/>
-              </a:rPr>
-              <a:t>전체 KV의 40.1%를 담을 수 있음에도 hit는 절반 수준</a:t>
-            </a:r>
-          </a:p>
-          <a:p>
-            <a:pPr algn="l">
-              <a:spcAft>
-                <a:spcPts val="400"/>
-              </a:spcAft>
-            </a:pPr>
-            <a:r>
-              <a:rPr sz="1400" b="0" i="0">
-                <a:solidFill>
-                  <a:srgbClr val="1F2937"/>
-                </a:solidFill>
-                <a:latin typeface="Calibri"/>
-                <a:ea typeface="맑은 고딕"/>
-              </a:rPr>
-              <a:t>→ 사용자가 답을 읽는 사이 </a:t>
-            </a:r>
-            <a:r>
-              <a:rPr sz="1400" b="0" i="1">
+              <a:rPr sz="1700" b="0" i="0">
+                <a:solidFill>
+                  <a:srgbClr val="1F2937"/>
+                </a:solidFill>
+                <a:latin typeface="Calibri"/>
+                <a:ea typeface="맑은 고딕"/>
+              </a:rPr>
+              <a:t>perf 가 40 % 담아도 </a:t>
+            </a:r>
+            <a:r>
+              <a:rPr sz="1700" b="1" i="0">
+                <a:solidFill>
+                  <a:srgbClr val="1F2937"/>
+                </a:solidFill>
+                <a:latin typeface="Calibri"/>
+                <a:ea typeface="맑은 고딕"/>
+              </a:rPr>
+              <a:t>hit 절반 수준</a:t>
+            </a:r>
+          </a:p>
+          <a:p>
+            <a:pPr algn="l">
+              <a:spcAft>
+                <a:spcPts val="400"/>
+              </a:spcAft>
+            </a:pPr>
+            <a:r>
+              <a:rPr sz="1600" b="0" i="0">
+                <a:solidFill>
+                  <a:srgbClr val="1F2937"/>
+                </a:solidFill>
+                <a:latin typeface="Calibri"/>
+                <a:ea typeface="맑은 고딕"/>
+              </a:rPr>
+              <a:t>→ user 가 답 읽는 사이 </a:t>
+            </a:r>
+            <a:r>
+              <a:rPr sz="1600" b="0" i="1">
                 <a:solidFill>
                   <a:srgbClr val="6B7280"/>
                 </a:solidFill>
                 <a:latin typeface="Calibri"/>
                 <a:ea typeface="맑은 고딕"/>
               </a:rPr>
-              <a:t>다른 user KV 가 끼어들기 때문</a:t>
+              <a:t>다른 KV 끼어듦</a:t>
             </a:r>
           </a:p>
         </p:txBody>
@@ -3895,8 +3895,8 @@
         </p:blipFill>
         <p:spPr>
           <a:xfrm>
-            <a:off x="507102" y="1280160"/>
-            <a:ext cx="5660916" cy="2377440"/>
+            <a:off x="457200" y="1280160"/>
+            <a:ext cx="5669280" cy="2380952"/>
           </a:xfrm>
           <a:prstGeom prst="rect">
             <a:avLst/>
@@ -3911,8 +3911,8 @@
         </p:nvSpPr>
         <p:spPr>
           <a:xfrm>
-            <a:off x="457200" y="3703320"/>
-            <a:ext cx="5760720" cy="320040"/>
+            <a:off x="457200" y="3706832"/>
+            <a:ext cx="5669280" cy="320040"/>
           </a:xfrm>
           <a:prstGeom prst="rect">
             <a:avLst/>
@@ -3938,7 +3938,7 @@
                 <a:latin typeface="Calibri"/>
                 <a:ea typeface="맑은 고딕"/>
               </a:rPr>
-              <a:t>Figure 7. 시간 구간별 KV loading time의 변동계수 CV</a:t>
+              <a:t>Figure 7. 시간 구간별 KV loading time 의 변동계수 CV</a:t>
             </a:r>
           </a:p>
         </p:txBody>
@@ -3959,8 +3959,8 @@
         </p:blipFill>
         <p:spPr>
           <a:xfrm>
-            <a:off x="603837" y="3931920"/>
-            <a:ext cx="5467446" cy="2377440"/>
+            <a:off x="6309360" y="1280160"/>
+            <a:ext cx="5486400" cy="2385681"/>
           </a:xfrm>
           <a:prstGeom prst="rect">
             <a:avLst/>
@@ -3975,8 +3975,8 @@
         </p:nvSpPr>
         <p:spPr>
           <a:xfrm>
-            <a:off x="457200" y="6355080"/>
-            <a:ext cx="5760720" cy="320040"/>
+            <a:off x="6309360" y="3711561"/>
+            <a:ext cx="5486400" cy="320040"/>
           </a:xfrm>
           <a:prstGeom prst="rect">
             <a:avLst/>
@@ -4015,8 +4015,8 @@
         </p:nvSpPr>
         <p:spPr>
           <a:xfrm>
-            <a:off x="6492240" y="1280160"/>
-            <a:ext cx="5486400" cy="5120640"/>
+            <a:off x="457200" y="4297680"/>
+            <a:ext cx="11247120" cy="2194560"/>
           </a:xfrm>
           <a:prstGeom prst="rect">
             <a:avLst/>
@@ -4048,7 +4048,7 @@
           <a:p>
             <a:pPr algn="l">
               <a:spcAft>
-                <a:spcPts val="400"/>
+                <a:spcPts val="1000"/>
               </a:spcAft>
             </a:pPr>
             <a:r>
@@ -4069,7 +4069,7 @@
                 <a:latin typeface="Calibri"/>
                 <a:ea typeface="맑은 고딕"/>
               </a:rPr>
-              <a:t>두 layer 의 </a:t>
+              <a:t>host DRAM ↔ SSD </a:t>
             </a:r>
             <a:r>
               <a:rPr sz="1800" b="1" i="0">
@@ -4079,81 +4079,47 @@
                 <a:latin typeface="Calibri"/>
                 <a:ea typeface="맑은 고딕"/>
               </a:rPr>
-              <a:t>bandwidth 격차 (host DRAM ↔ SSD)</a:t>
-            </a:r>
-          </a:p>
-          <a:p>
-            <a:pPr algn="l">
-              <a:spcAft>
-                <a:spcPts val="400"/>
-              </a:spcAft>
-            </a:pPr>
+              <a:t>bandwidth 격차</a:t>
+            </a:r>
+            <a:r>
+              <a:rPr sz="1800" b="0" i="0">
+                <a:solidFill>
+                  <a:srgbClr val="1F2937"/>
+                </a:solidFill>
+                <a:latin typeface="Calibri"/>
+                <a:ea typeface="맑은 고딕"/>
+              </a:rPr>
+              <a:t>  ·  요청별 </a:t>
+            </a:r>
             <a:r>
               <a:rPr sz="1800" b="1" i="0">
                 <a:solidFill>
+                  <a:srgbClr val="1F2937"/>
+                </a:solidFill>
+                <a:latin typeface="Calibri"/>
+                <a:ea typeface="맑은 고딕"/>
+              </a:rPr>
+              <a:t>KV size 가 수십 MB ~ 수백 MB</a:t>
+            </a:r>
+            <a:r>
+              <a:rPr sz="1800" b="0" i="0">
+                <a:solidFill>
+                  <a:srgbClr val="1F2937"/>
+                </a:solidFill>
+                <a:latin typeface="Calibri"/>
+                <a:ea typeface="맑은 고딕"/>
+              </a:rPr>
+              <a:t>  ·  </a:t>
+            </a:r>
+            <a:r>
+              <a:rPr sz="1800" b="1" i="0">
+                <a:solidFill>
                   <a:srgbClr val="D9352A"/>
                 </a:solidFill>
                 <a:latin typeface="Calibri"/>
                 <a:ea typeface="맑은 고딕"/>
               </a:rPr>
-              <a:t>▸ </a:t>
-            </a:r>
-            <a:r>
-              <a:rPr sz="1800" b="0" i="0">
-                <a:solidFill>
-                  <a:srgbClr val="1F2937"/>
-                </a:solidFill>
-                <a:latin typeface="Calibri"/>
-                <a:ea typeface="맑은 고딕"/>
-              </a:rPr>
-              <a:t>요청별 </a:t>
-            </a:r>
-            <a:r>
-              <a:rPr sz="1800" b="1" i="0">
-                <a:solidFill>
-                  <a:srgbClr val="1F2937"/>
-                </a:solidFill>
-                <a:latin typeface="Calibri"/>
-                <a:ea typeface="맑은 고딕"/>
-              </a:rPr>
-              <a:t>KV size 자체가 매우 다름 (수십 MB ~ 수백 MB)</a:t>
-            </a:r>
-          </a:p>
-          <a:p>
-            <a:pPr algn="l">
-              <a:spcAft>
-                <a:spcPts val="400"/>
-              </a:spcAft>
-            </a:pPr>
-            <a:r>
-              <a:rPr sz="1800" b="1" i="0">
-                <a:solidFill>
-                  <a:srgbClr val="D9352A"/>
-                </a:solidFill>
-                <a:latin typeface="Calibri"/>
-                <a:ea typeface="맑은 고딕"/>
-              </a:rPr>
-              <a:t>▸ </a:t>
-            </a:r>
-            <a:r>
-              <a:rPr sz="1800" b="0" i="0">
-                <a:solidFill>
-                  <a:srgbClr val="1F2937"/>
-                </a:solidFill>
-                <a:latin typeface="Calibri"/>
-                <a:ea typeface="맑은 고딕"/>
-              </a:rPr>
-              <a:t>심지어 </a:t>
-            </a:r>
-            <a:r>
-              <a:rPr sz="1800" b="1" i="0">
-                <a:solidFill>
-                  <a:srgbClr val="1F2937"/>
-                </a:solidFill>
-                <a:latin typeface="Calibri"/>
-                <a:ea typeface="맑은 고딕"/>
-              </a:rPr>
-              <a:t>5초 윈도우 내에서도 CV &gt; 90% — globally 균일화되지 않음</a:t>
+              <a:t>5초 윈도우에서도 CV &gt; 90 %</a:t>
             </a:r>
           </a:p>
           <a:p>
@@ -4170,17 +4136,10 @@
                 <a:latin typeface="Calibri"/>
                 <a:ea typeface="맑은 고딕"/>
               </a:rPr>
-              <a:t>함의</a:t>
-            </a:r>
-          </a:p>
-          <a:p>
-            <a:pPr algn="l">
-              <a:spcAft>
-                <a:spcPts val="400"/>
-              </a:spcAft>
-            </a:pPr>
-            <a:r>
-              <a:rPr sz="1800" b="0" i="0">
+              <a:t>함의 — </a:t>
+            </a:r>
+            <a:r>
+              <a:rPr sz="2000" b="0" i="0">
                 <a:solidFill>
                   <a:srgbClr val="1F2937"/>
                 </a:solidFill>
@@ -4190,7 +4149,7 @@
               <a:t>큰 KV 한 개가 </a:t>
             </a:r>
             <a:r>
-              <a:rPr sz="1800" b="1" i="0">
+              <a:rPr sz="2000" b="1" i="0">
                 <a:solidFill>
                   <a:srgbClr val="D9352A"/>
                 </a:solidFill>
@@ -4837,8 +4796,8 @@
         </p:nvSpPr>
         <p:spPr>
           <a:xfrm>
-            <a:off x="457200" y="1280160"/>
-            <a:ext cx="5486400" cy="4937760"/>
+            <a:off x="457200" y="1417320"/>
+            <a:ext cx="5486400" cy="3474720"/>
           </a:xfrm>
           <a:prstGeom prst="rect">
             <a:avLst/>
@@ -4883,8 +4842,8 @@
         </p:nvSpPr>
         <p:spPr>
           <a:xfrm>
-            <a:off x="640080" y="1371600"/>
-            <a:ext cx="5120640" cy="4754880"/>
+            <a:off x="640080" y="1554480"/>
+            <a:ext cx="5120640" cy="3200400"/>
           </a:xfrm>
           <a:prstGeom prst="rect">
             <a:avLst/>
@@ -5041,8 +5000,8 @@
         </p:nvSpPr>
         <p:spPr>
           <a:xfrm>
-            <a:off x="6217920" y="1280160"/>
-            <a:ext cx="5486400" cy="4937760"/>
+            <a:off x="6217920" y="1417320"/>
+            <a:ext cx="5486400" cy="3474720"/>
           </a:xfrm>
           <a:prstGeom prst="rect">
             <a:avLst/>
@@ -5087,8 +5046,8 @@
         </p:nvSpPr>
         <p:spPr>
           <a:xfrm>
-            <a:off x="6400800" y="1371600"/>
-            <a:ext cx="5120640" cy="4754880"/>
+            <a:off x="6400800" y="1554480"/>
+            <a:ext cx="5120640" cy="3200400"/>
           </a:xfrm>
           <a:prstGeom prst="rect">
             <a:avLst/>
@@ -6651,8 +6610,8 @@
         </p:nvSpPr>
         <p:spPr>
           <a:xfrm>
-            <a:off x="457200" y="1188720"/>
-            <a:ext cx="5669280" cy="5120640"/>
+            <a:off x="457200" y="1280160"/>
+            <a:ext cx="5669280" cy="3657600"/>
           </a:xfrm>
           <a:prstGeom prst="rect">
             <a:avLst/>
@@ -6697,8 +6656,8 @@
         </p:nvSpPr>
         <p:spPr>
           <a:xfrm>
-            <a:off x="640080" y="1280160"/>
-            <a:ext cx="5303520" cy="4937760"/>
+            <a:off x="640080" y="1417320"/>
+            <a:ext cx="5303520" cy="3383280"/>
           </a:xfrm>
           <a:prstGeom prst="rect">
             <a:avLst/>
@@ -6842,8 +6801,8 @@
         </p:nvSpPr>
         <p:spPr>
           <a:xfrm>
-            <a:off x="6309360" y="1188720"/>
-            <a:ext cx="5394960" cy="5120640"/>
+            <a:off x="6309360" y="1280160"/>
+            <a:ext cx="5394960" cy="3657600"/>
           </a:xfrm>
           <a:prstGeom prst="rect">
             <a:avLst/>
@@ -6888,8 +6847,8 @@
         </p:nvSpPr>
         <p:spPr>
           <a:xfrm>
-            <a:off x="6492240" y="1280160"/>
-            <a:ext cx="5029200" cy="4937760"/>
+            <a:off x="6492240" y="1417320"/>
+            <a:ext cx="5029200" cy="3383280"/>
           </a:xfrm>
           <a:prstGeom prst="rect">
             <a:avLst/>
@@ -9031,8 +8990,8 @@
         </p:nvSpPr>
         <p:spPr>
           <a:xfrm>
-            <a:off x="457200" y="1280160"/>
-            <a:ext cx="640080" cy="731520"/>
+            <a:off x="457200" y="1463040"/>
+            <a:ext cx="822960" cy="822960"/>
           </a:xfrm>
           <a:prstGeom prst="rect">
             <a:avLst/>
@@ -9051,7 +9010,7 @@
               </a:spcAft>
             </a:pPr>
             <a:r>
-              <a:rPr sz="2000" b="1" i="0">
+              <a:rPr sz="2800" b="1" i="0">
                 <a:solidFill>
                   <a:srgbClr val="6B7280"/>
                 </a:solidFill>
@@ -9071,8 +9030,8 @@
         </p:nvSpPr>
         <p:spPr>
           <a:xfrm>
-            <a:off x="1188720" y="1325880"/>
-            <a:ext cx="10515600" cy="731520"/>
+            <a:off x="1371600" y="1508760"/>
+            <a:ext cx="10424160" cy="822960"/>
           </a:xfrm>
           <a:prstGeom prst="rect">
             <a:avLst/>
@@ -9091,7 +9050,7 @@
               </a:spcAft>
             </a:pPr>
             <a:r>
-              <a:rPr sz="1800" b="0" i="0">
+              <a:rPr sz="1900" b="0" i="0">
                 <a:solidFill>
                   <a:srgbClr val="1F2937"/>
                 </a:solidFill>
@@ -9111,8 +9070,8 @@
         </p:nvSpPr>
         <p:spPr>
           <a:xfrm>
-            <a:off x="457200" y="2057400"/>
-            <a:ext cx="640080" cy="731520"/>
+            <a:off x="457200" y="2423160"/>
+            <a:ext cx="822960" cy="822960"/>
           </a:xfrm>
           <a:prstGeom prst="rect">
             <a:avLst/>
@@ -9131,7 +9090,7 @@
               </a:spcAft>
             </a:pPr>
             <a:r>
-              <a:rPr sz="2000" b="1" i="0">
+              <a:rPr sz="2800" b="1" i="0">
                 <a:solidFill>
                   <a:srgbClr val="6B7280"/>
                 </a:solidFill>
@@ -9151,8 +9110,8 @@
         </p:nvSpPr>
         <p:spPr>
           <a:xfrm>
-            <a:off x="1188720" y="2103120"/>
-            <a:ext cx="10515600" cy="731520"/>
+            <a:off x="1371600" y="2468880"/>
+            <a:ext cx="10424160" cy="822960"/>
           </a:xfrm>
           <a:prstGeom prst="rect">
             <a:avLst/>
@@ -9171,7 +9130,7 @@
               </a:spcAft>
             </a:pPr>
             <a:r>
-              <a:rPr sz="1800" b="0" i="0">
+              <a:rPr sz="1900" b="0" i="0">
                 <a:solidFill>
                   <a:srgbClr val="1F2937"/>
                 </a:solidFill>
@@ -9191,8 +9150,8 @@
         </p:nvSpPr>
         <p:spPr>
           <a:xfrm>
-            <a:off x="457200" y="2834640"/>
-            <a:ext cx="640080" cy="731520"/>
+            <a:off x="457200" y="3383280"/>
+            <a:ext cx="822960" cy="822960"/>
           </a:xfrm>
           <a:prstGeom prst="rect">
             <a:avLst/>
@@ -9211,7 +9170,7 @@
               </a:spcAft>
             </a:pPr>
             <a:r>
-              <a:rPr sz="2000" b="1" i="0">
+              <a:rPr sz="2800" b="1" i="0">
                 <a:solidFill>
                   <a:srgbClr val="6B7280"/>
                 </a:solidFill>
@@ -9231,8 +9190,8 @@
         </p:nvSpPr>
         <p:spPr>
           <a:xfrm>
-            <a:off x="1188720" y="2880360"/>
-            <a:ext cx="10515600" cy="731520"/>
+            <a:off x="1371600" y="3429000"/>
+            <a:ext cx="10424160" cy="822960"/>
           </a:xfrm>
           <a:prstGeom prst="rect">
             <a:avLst/>
@@ -9251,7 +9210,7 @@
               </a:spcAft>
             </a:pPr>
             <a:r>
-              <a:rPr sz="1800" b="0" i="0">
+              <a:rPr sz="1900" b="0" i="0">
                 <a:solidFill>
                   <a:srgbClr val="1F2937"/>
                 </a:solidFill>
@@ -9271,8 +9230,8 @@
         </p:nvSpPr>
         <p:spPr>
           <a:xfrm>
-            <a:off x="457200" y="3611880"/>
-            <a:ext cx="640080" cy="731520"/>
+            <a:off x="457200" y="4343400"/>
+            <a:ext cx="822960" cy="822960"/>
           </a:xfrm>
           <a:prstGeom prst="rect">
             <a:avLst/>
@@ -9291,7 +9250,7 @@
               </a:spcAft>
             </a:pPr>
             <a:r>
-              <a:rPr sz="2000" b="1" i="0">
+              <a:rPr sz="2800" b="1" i="0">
                 <a:solidFill>
                   <a:srgbClr val="6B7280"/>
                 </a:solidFill>
@@ -9311,8 +9270,8 @@
         </p:nvSpPr>
         <p:spPr>
           <a:xfrm>
-            <a:off x="1188720" y="3657600"/>
-            <a:ext cx="10515600" cy="731520"/>
+            <a:off x="1371600" y="4389120"/>
+            <a:ext cx="10424160" cy="822960"/>
           </a:xfrm>
           <a:prstGeom prst="rect">
             <a:avLst/>
@@ -9331,7 +9290,7 @@
               </a:spcAft>
             </a:pPr>
             <a:r>
-              <a:rPr sz="1800" b="0" i="0">
+              <a:rPr sz="1900" b="0" i="0">
                 <a:solidFill>
                   <a:srgbClr val="1F2937"/>
                 </a:solidFill>
@@ -9351,8 +9310,8 @@
         </p:nvSpPr>
         <p:spPr>
           <a:xfrm>
-            <a:off x="457200" y="4389120"/>
-            <a:ext cx="640080" cy="731520"/>
+            <a:off x="457200" y="5303520"/>
+            <a:ext cx="822960" cy="822960"/>
           </a:xfrm>
           <a:prstGeom prst="rect">
             <a:avLst/>
@@ -9371,7 +9330,7 @@
               </a:spcAft>
             </a:pPr>
             <a:r>
-              <a:rPr sz="2000" b="1" i="0">
+              <a:rPr sz="2800" b="1" i="0">
                 <a:solidFill>
                   <a:srgbClr val="6B7280"/>
                 </a:solidFill>
@@ -9391,8 +9350,8 @@
         </p:nvSpPr>
         <p:spPr>
           <a:xfrm>
-            <a:off x="1188720" y="4434840"/>
-            <a:ext cx="10515600" cy="731520"/>
+            <a:off x="1371600" y="5349240"/>
+            <a:ext cx="10424160" cy="822960"/>
           </a:xfrm>
           <a:prstGeom prst="rect">
             <a:avLst/>
@@ -9411,7 +9370,7 @@
               </a:spcAft>
             </a:pPr>
             <a:r>
-              <a:rPr sz="1800" b="0" i="0">
+              <a:rPr sz="1900" b="0" i="0">
                 <a:solidFill>
                   <a:srgbClr val="1F2937"/>
                 </a:solidFill>
@@ -10258,7 +10217,7 @@
                 <a:latin typeface="Calibri"/>
                 <a:ea typeface="맑은 고딕"/>
               </a:rPr>
-              <a:t>▸ KV tensor 는 attention 입력으로 </a:t>
+              <a:t>▸ KV tensor 직접 필요 — </a:t>
             </a:r>
             <a:r>
               <a:rPr sz="1800" b="1" i="0">
@@ -10268,7 +10227,7 @@
                 <a:latin typeface="Calibri"/>
                 <a:ea typeface="맑은 고딕"/>
               </a:rPr>
-              <a:t>필요하지만 size 가 큼</a:t>
+              <a:t>그러나 size 가 큼</a:t>
             </a:r>
           </a:p>
           <a:p>
@@ -10501,8 +10460,8 @@
         </p:nvSpPr>
         <p:spPr>
           <a:xfrm>
-            <a:off x="457200" y="1188720"/>
-            <a:ext cx="5669280" cy="5120640"/>
+            <a:off x="457200" y="1280160"/>
+            <a:ext cx="5669280" cy="3108960"/>
           </a:xfrm>
           <a:prstGeom prst="rect">
             <a:avLst/>
@@ -10547,8 +10506,8 @@
         </p:nvSpPr>
         <p:spPr>
           <a:xfrm>
-            <a:off x="640080" y="1280160"/>
-            <a:ext cx="5303520" cy="4937760"/>
+            <a:off x="640080" y="1417320"/>
+            <a:ext cx="5303520" cy="2834640"/>
           </a:xfrm>
           <a:prstGeom prst="rect">
             <a:avLst/>
@@ -10601,7 +10560,7 @@
                 <a:latin typeface="Calibri"/>
                 <a:ea typeface="맑은 고딕"/>
               </a:rPr>
-              <a:t>Llama, Qwen, Bloom, OPT, Baichuan 등</a:t>
+              <a:t>Llama · Qwen · Bloom · OPT · Baichuan</a:t>
             </a:r>
           </a:p>
           <a:p>
@@ -10628,7 +10587,7 @@
                 <a:latin typeface="Calibri"/>
                 <a:ea typeface="맑은 고딕"/>
               </a:rPr>
-              <a:t>head 별 K, V 가 별도 → KV tensor가 큼</a:t>
+              <a:t>head 별 K, V 분리 → KV 가 큼</a:t>
             </a:r>
           </a:p>
           <a:p>
@@ -10655,7 +10614,7 @@
                 <a:latin typeface="Calibri"/>
                 <a:ea typeface="맑은 고딕"/>
               </a:rPr>
-              <a:t>Tensor 6 캐싱이 더 적은 공간으로 더 많은 compute를 절약</a:t>
+              <a:t>Tensor 6 캐싱 = 적은 공간 / 많은 compute 절약</a:t>
             </a:r>
           </a:p>
           <a:p>
@@ -10695,8 +10654,8 @@
         </p:nvSpPr>
         <p:spPr>
           <a:xfrm>
-            <a:off x="6309360" y="1188720"/>
-            <a:ext cx="5394960" cy="5120640"/>
+            <a:off x="6309360" y="1280160"/>
+            <a:ext cx="5394960" cy="3108960"/>
           </a:xfrm>
           <a:prstGeom prst="rect">
             <a:avLst/>
@@ -10741,8 +10700,8 @@
         </p:nvSpPr>
         <p:spPr>
           <a:xfrm>
-            <a:off x="6492240" y="1280160"/>
-            <a:ext cx="5029200" cy="4937760"/>
+            <a:off x="6492240" y="1417320"/>
+            <a:ext cx="5029200" cy="2834640"/>
           </a:xfrm>
           <a:prstGeom prst="rect">
             <a:avLst/>
@@ -14589,7 +14548,7 @@
         <p:spPr>
           <a:xfrm>
             <a:off x="457200" y="1188720"/>
-            <a:ext cx="5852160" cy="5120640"/>
+            <a:ext cx="5486400" cy="5120640"/>
           </a:xfrm>
           <a:prstGeom prst="rect">
             <a:avLst/>
@@ -16446,60 +16405,14 @@
       </p:sp>
       <p:sp>
         <p:nvSpPr>
-          <p:cNvPr id="6" name="Rectangle 5"/>
-          <p:cNvSpPr/>
-          <p:nvPr/>
-        </p:nvSpPr>
-        <p:spPr>
-          <a:xfrm>
-            <a:off x="457200" y="4937760"/>
-            <a:ext cx="11247120" cy="1463040"/>
-          </a:xfrm>
-          <a:prstGeom prst="rect">
-            <a:avLst/>
-          </a:prstGeom>
-          <a:solidFill>
-            <a:srgbClr val="FFFFFF"/>
-          </a:solidFill>
-          <a:ln w="6350">
-            <a:solidFill>
-              <a:srgbClr val="E5E7EB"/>
-            </a:solidFill>
-          </a:ln>
-          <a:effectLst/>
-        </p:spPr>
-        <p:style>
-          <a:lnRef idx="1">
-            <a:schemeClr val="accent1"/>
-          </a:lnRef>
-          <a:fillRef idx="3">
-            <a:schemeClr val="accent1"/>
-          </a:fillRef>
-          <a:effectRef idx="2">
-            <a:schemeClr val="accent1"/>
-          </a:effectRef>
-          <a:fontRef idx="minor">
-            <a:schemeClr val="lt1"/>
-          </a:fontRef>
-        </p:style>
-        <p:txBody>
-          <a:bodyPr rtlCol="0" anchor="ctr"/>
-          <a:lstStyle/>
-          <a:p>
-            <a:pPr algn="ctr"/>
-          </a:p>
-        </p:txBody>
-      </p:sp>
-      <p:sp>
-        <p:nvSpPr>
-          <p:cNvPr id="7" name="TextBox 6"/>
+          <p:cNvPr id="6" name="TextBox 5"/>
           <p:cNvSpPr txBox="1"/>
           <p:nvPr/>
         </p:nvSpPr>
         <p:spPr>
           <a:xfrm>
-            <a:off x="640080" y="5029200"/>
-            <a:ext cx="10972800" cy="1280160"/>
+            <a:off x="457200" y="5669280"/>
+            <a:ext cx="11247120" cy="640080"/>
           </a:xfrm>
           <a:prstGeom prst="rect">
             <a:avLst/>
@@ -16520,39 +16433,29 @@
             <a:r>
               <a:rPr sz="1800" b="0" i="0">
                 <a:solidFill>
-                  <a:srgbClr val="1F2937"/>
-                </a:solidFill>
-                <a:latin typeface="Calibri"/>
-                <a:ea typeface="맑은 고딕"/>
-              </a:rPr>
-              <a:t>이어지는 세 슬라이드에서 </a:t>
-            </a:r>
-            <a:r>
-              <a:rPr sz="1800" b="1" i="0">
+                  <a:srgbClr val="6B7280"/>
+                </a:solidFill>
+                <a:latin typeface="Calibri"/>
+                <a:ea typeface="맑은 고딕"/>
+              </a:rPr>
+              <a:t>이어지는 세 슬라이드 →  </a:t>
+            </a:r>
+            <a:r>
+              <a:rPr sz="2200" b="1" i="0">
                 <a:solidFill>
                   <a:srgbClr val="D9352A"/>
                 </a:solidFill>
                 <a:latin typeface="Calibri"/>
                 <a:ea typeface="맑은 고딕"/>
               </a:rPr>
-              <a:t>Observation 1 / 2 / 3</a:t>
-            </a:r>
-            <a:r>
-              <a:rPr sz="1800" b="0" i="0">
-                <a:solidFill>
-                  <a:srgbClr val="1F2937"/>
-                </a:solidFill>
-                <a:latin typeface="Calibri"/>
-                <a:ea typeface="맑은 고딕"/>
-              </a:rPr>
-              <a:t>을 차례로 살펴본다.</a:t>
-            </a:r>
-          </a:p>
-        </p:txBody>
-      </p:sp>
-      <p:sp>
-        <p:nvSpPr>
-          <p:cNvPr id="8" name="TextBox 7"/>
+              <a:t>Observation 1 · 2 · 3</a:t>
+            </a:r>
+          </a:p>
+        </p:txBody>
+      </p:sp>
+      <p:sp>
+        <p:nvSpPr>
+          <p:cNvPr id="7" name="TextBox 6"/>
           <p:cNvSpPr txBox="1"/>
           <p:nvPr/>
         </p:nvSpPr>
@@ -16791,7 +16694,7 @@
                 <a:latin typeface="Calibri"/>
                 <a:ea typeface="맑은 고딕"/>
               </a:rPr>
-              <a:t>사용자 평균 22.4 라운드 동안 KV 가 생존</a:t>
+              <a:t>22.4 라운드 동안 KV 생존</a:t>
             </a:r>
           </a:p>
           <a:p>
@@ -16845,7 +16748,7 @@
                 <a:latin typeface="Calibri"/>
                 <a:ea typeface="맑은 고딕"/>
               </a:rPr>
-              <a:t>OPT-13B · 30 users/min ≈ 480 GB (perf 200 GB)</a:t>
+              <a:t>30 users/min ≈ 480 GB &gt; perf 200 GB</a:t>
             </a:r>
           </a:p>
           <a:p>

--- a/Bidaw_seminar.pptx
+++ b/Bidaw_seminar.pptx
@@ -3604,7 +3604,7 @@
                 <a:latin typeface="Calibri"/>
                 <a:ea typeface="맑은 고딕"/>
               </a:rPr>
-              <a:t>다른 KV의 총 크기 합</a:t>
+              <a:t>다른 KV들의 크기 합</a:t>
             </a:r>
           </a:p>
           <a:p>
@@ -3621,7 +3621,7 @@
                 <a:latin typeface="Calibri"/>
                 <a:ea typeface="맑은 고딕"/>
               </a:rPr>
-              <a:t>수치</a:t>
+              <a:t>측정치</a:t>
             </a:r>
           </a:p>
           <a:p>
@@ -3648,7 +3648,7 @@
                 <a:latin typeface="Calibri"/>
                 <a:ea typeface="맑은 고딕"/>
               </a:rPr>
-              <a:t>80% access </a:t>
+              <a:t>access의 80%가 </a:t>
             </a:r>
             <a:r>
               <a:rPr sz="1700" b="1" i="0">
@@ -3658,7 +3658,7 @@
                 <a:latin typeface="Calibri"/>
                 <a:ea typeface="맑은 고딕"/>
               </a:rPr>
-              <a:t>&gt;  perf 200 GB</a:t>
+              <a:t>perf 200 GB를 초과</a:t>
             </a:r>
           </a:p>
           <a:p>
@@ -3685,7 +3685,7 @@
                 <a:latin typeface="Calibri"/>
                 <a:ea typeface="맑은 고딕"/>
               </a:rPr>
-              <a:t>정책 무관 </a:t>
+              <a:t>정책에 상관없이 </a:t>
             </a:r>
             <a:r>
               <a:rPr sz="1700" b="1" i="0">
@@ -3695,7 +3695,7 @@
                 <a:latin typeface="Calibri"/>
                 <a:ea typeface="맑은 고딕"/>
               </a:rPr>
-              <a:t>hit ≈ 20 %</a:t>
+              <a:t>hit ≈ 20%</a:t>
             </a:r>
           </a:p>
           <a:p>
@@ -3722,7 +3722,7 @@
                 <a:latin typeface="Calibri"/>
                 <a:ea typeface="맑은 고딕"/>
               </a:rPr>
-              <a:t>perf 가 40 % 담아도 </a:t>
+              <a:t>perf가 40%를 담아도 </a:t>
             </a:r>
             <a:r>
               <a:rPr sz="1700" b="1" i="0">
@@ -3732,7 +3732,7 @@
                 <a:latin typeface="Calibri"/>
                 <a:ea typeface="맑은 고딕"/>
               </a:rPr>
-              <a:t>hit 절반 수준</a:t>
+              <a:t>hit은 절반 수준</a:t>
             </a:r>
           </a:p>
           <a:p>
@@ -3749,7 +3749,7 @@
                 <a:latin typeface="Calibri"/>
                 <a:ea typeface="맑은 고딕"/>
               </a:rPr>
-              <a:t>→ user 가 답 읽는 사이 </a:t>
+              <a:t>→ 사용자가 답을 읽는 사이 </a:t>
             </a:r>
             <a:r>
               <a:rPr sz="1600" b="0" i="1">
@@ -3759,7 +3759,7 @@
                 <a:latin typeface="Calibri"/>
                 <a:ea typeface="맑은 고딕"/>
               </a:rPr>
-              <a:t>다른 KV 끼어듦</a:t>
+              <a:t>다른 KV가 끼어든다</a:t>
             </a:r>
           </a:p>
         </p:txBody>
@@ -3938,7 +3938,7 @@
                 <a:latin typeface="Calibri"/>
                 <a:ea typeface="맑은 고딕"/>
               </a:rPr>
-              <a:t>Figure 7. 시간 구간별 KV loading time 의 변동계수 CV</a:t>
+              <a:t>Figure 7. 시간 구간별 KV loading time의 변동계수 CV</a:t>
             </a:r>
           </a:p>
         </p:txBody>
@@ -4002,7 +4002,7 @@
                 <a:latin typeface="Calibri"/>
                 <a:ea typeface="맑은 고딕"/>
               </a:rPr>
-              <a:t>Figure 8. Loaded KV 크기 분포 (히스토그램)</a:t>
+              <a:t>Figure 8. 로드된 KV 크기 분포 (히스토그램)</a:t>
             </a:r>
           </a:p>
         </p:txBody>
@@ -4069,7 +4069,7 @@
                 <a:latin typeface="Calibri"/>
                 <a:ea typeface="맑은 고딕"/>
               </a:rPr>
-              <a:t>host DRAM ↔ SSD </a:t>
+              <a:t>host DRAM과 SSD의 </a:t>
             </a:r>
             <a:r>
               <a:rPr sz="1800" b="1" i="0">
@@ -4089,7 +4089,7 @@
                 <a:latin typeface="Calibri"/>
                 <a:ea typeface="맑은 고딕"/>
               </a:rPr>
-              <a:t>  ·  요청별 </a:t>
+              <a:t>  ·  요청마다 </a:t>
             </a:r>
             <a:r>
               <a:rPr sz="1800" b="1" i="0">
@@ -4099,7 +4099,7 @@
                 <a:latin typeface="Calibri"/>
                 <a:ea typeface="맑은 고딕"/>
               </a:rPr>
-              <a:t>KV size 가 수십 MB ~ 수백 MB</a:t>
+              <a:t>KV size가 수십 MB ~ 수백 MB로 다양</a:t>
             </a:r>
             <a:r>
               <a:rPr sz="1800" b="0" i="0">
@@ -4119,7 +4119,7 @@
                 <a:latin typeface="Calibri"/>
                 <a:ea typeface="맑은 고딕"/>
               </a:rPr>
-              <a:t>5초 윈도우에서도 CV &gt; 90 %</a:t>
+              <a:t>5초 윈도우에서도 CV &gt; 90%</a:t>
             </a:r>
           </a:p>
           <a:p>
@@ -4156,7 +4156,7 @@
                 <a:latin typeface="Calibri"/>
                 <a:ea typeface="맑은 고딕"/>
               </a:rPr>
-              <a:t>뒤따르는 작은 KV 까지 GPU idle 로 만든다</a:t>
+              <a:t>뒤따르는 작은 KV들까지 막아 GPU를 놀게 만든다</a:t>
             </a:r>
           </a:p>
         </p:txBody>
@@ -4271,7 +4271,7 @@
                 <a:latin typeface="Calibri"/>
                 <a:ea typeface="맑은 고딕"/>
               </a:rPr>
-              <a:t>Root cause — compute engine과 storage가 서로 unaware</a:t>
+              <a:t>Root cause — compute engine과 storage가 서로를 모름</a:t>
             </a:r>
           </a:p>
         </p:txBody>
@@ -4357,7 +4357,7 @@
                 <a:latin typeface="Calibri"/>
                 <a:ea typeface="맑은 고딕"/>
               </a:rPr>
-              <a:t>문제 1. Compute engine은 storage I/O latency를 모른다</a:t>
+              <a:t>문제 1. Compute engine이 storage I/O latency를 모른다</a:t>
             </a:r>
           </a:p>
           <a:p>
@@ -4374,7 +4374,7 @@
                 <a:latin typeface="Calibri"/>
                 <a:ea typeface="맑은 고딕"/>
               </a:rPr>
-              <a:t>▸ 어떤 요청의 KV가 perf layer에 있는지, capacity layer에 있는지</a:t>
+              <a:t>▸ 어느 요청의 KV가 perf layer에 있고, 어느 것이 capacity layer에 있는지</a:t>
             </a:r>
           </a:p>
           <a:p>
@@ -4391,7 +4391,7 @@
                 <a:latin typeface="Calibri"/>
                 <a:ea typeface="맑은 고딕"/>
               </a:rPr>
-              <a:t>▸ 어떤 요청의 KV size가 큰지 vs 작은지</a:t>
+              <a:t>▸ 어느 요청의 KV size가 크고 어느 것이 작은지</a:t>
             </a:r>
           </a:p>
           <a:p>
@@ -4408,7 +4408,7 @@
                 <a:latin typeface="Calibri"/>
                 <a:ea typeface="맑은 고딕"/>
               </a:rPr>
-              <a:t>→ 그냥 FCFS로 dispatch → 큰 I/O가 큐 머리에 박히면 GPU idle</a:t>
+              <a:t>→ FCFS로 보내면 큰 I/O 하나가 큐 앞을 막아 GPU가 논다</a:t>
             </a:r>
           </a:p>
         </p:txBody>
@@ -4494,7 +4494,7 @@
                 <a:latin typeface="Calibri"/>
                 <a:ea typeface="맑은 고딕"/>
               </a:rPr>
-              <a:t>문제 2. Storage는 사용자 대화 패턴을 모른다</a:t>
+              <a:t>문제 2. Storage가 사용자 대화 패턴을 모른다</a:t>
             </a:r>
           </a:p>
           <a:p>
@@ -4511,7 +4511,7 @@
                 <a:latin typeface="Calibri"/>
                 <a:ea typeface="맑은 고딕"/>
               </a:rPr>
-              <a:t>▸ Eviction은 자기 측의 KV access history만 사용</a:t>
+              <a:t>▸ eviction이 storage 쪽 KV access history만 사용</a:t>
             </a:r>
           </a:p>
           <a:p>
@@ -4528,7 +4528,7 @@
                 <a:latin typeface="Calibri"/>
                 <a:ea typeface="맑은 고딕"/>
               </a:rPr>
-              <a:t>▸ 사용자의 다음 질문 timing은 compute가 만든 답변 길이에 좌우</a:t>
+              <a:t>▸ 사용자의 다음 질문 시점은 compute가 만든 답변 길이가 결정</a:t>
             </a:r>
           </a:p>
           <a:p>
@@ -4545,7 +4545,7 @@
                 <a:latin typeface="Calibri"/>
                 <a:ea typeface="맑은 고딕"/>
               </a:rPr>
-              <a:t>→ 정보 부재로 인해 hit rate ≈ 20% 수준</a:t>
+              <a:t>→ 정보 부족으로 hit rate가 20% 수준에 머무름</a:t>
             </a:r>
           </a:p>
         </p:txBody>
@@ -4631,7 +4631,7 @@
                 <a:latin typeface="Calibri"/>
                 <a:ea typeface="맑은 고딕"/>
               </a:rPr>
-              <a:t>문제는 둘 다 </a:t>
+              <a:t>두 문제 모두 </a:t>
             </a:r>
             <a:r>
               <a:rPr sz="1800" b="1" i="0">
@@ -4641,7 +4641,7 @@
                 <a:latin typeface="Calibri"/>
                 <a:ea typeface="맑은 고딕"/>
               </a:rPr>
-              <a:t>정보가 한쪽 방향으로만 흐르거나, 아예 흐르지 않는다는 것</a:t>
+              <a:t>정보 교환이 한 방향에 그치거나 아예 끊겨 있다는 점에서 같다</a:t>
             </a:r>
           </a:p>
           <a:p>
@@ -4668,7 +4668,7 @@
                 <a:latin typeface="Calibri"/>
                 <a:ea typeface="맑은 고딕"/>
               </a:rPr>
-              <a:t>두 방향 모두 정보를 흐르게 하면 두 문제 모두 해결된다</a:t>
+              <a:t>양방향 정보 교환을 열어주면 두 문제가 함께 풀린다</a:t>
             </a:r>
           </a:p>
         </p:txBody>
@@ -4896,7 +4896,7 @@
                 <a:latin typeface="Calibri"/>
                 <a:ea typeface="맑은 고딕"/>
               </a:rPr>
-              <a:t>model answer 길이</a:t>
+              <a:t>답변 길이</a:t>
             </a:r>
             <a:r>
               <a:rPr sz="1800" b="0" i="0">
@@ -4906,7 +4906,7 @@
                 <a:latin typeface="Calibri"/>
                 <a:ea typeface="맑은 고딕"/>
               </a:rPr>
-              <a:t>를 storage 에 넘긴다</a:t>
+              <a:t>를 storage에 전달</a:t>
             </a:r>
           </a:p>
           <a:p>
@@ -4933,7 +4933,7 @@
                 <a:latin typeface="Calibri"/>
                 <a:ea typeface="맑은 고딕"/>
               </a:rPr>
-              <a:t>이 길이가 다음 질문 도착 시점의 예측 신호</a:t>
+              <a:t>이 길이가 다음 질문 도착 시점을 가늠하는 신호</a:t>
             </a:r>
           </a:p>
           <a:p>
@@ -4960,7 +4960,7 @@
                 <a:latin typeface="Calibri"/>
                 <a:ea typeface="맑은 고딕"/>
               </a:rPr>
-              <a:t>Storage 는 신호로 next-access reuse distance 추정</a:t>
+              <a:t>storage는 이 신호로 다음 access의 reuse distance를 추정</a:t>
             </a:r>
           </a:p>
           <a:p>
@@ -4987,7 +4987,7 @@
                 <a:latin typeface="Calibri"/>
                 <a:ea typeface="맑은 고딕"/>
               </a:rPr>
-              <a:t>hit potential 최저 KV 를 evict</a:t>
+              <a:t>hit potential이 가장 낮은 KV를 evict</a:t>
             </a:r>
           </a:p>
         </p:txBody>
@@ -5090,7 +5090,7 @@
                 <a:latin typeface="Calibri"/>
                 <a:ea typeface="맑은 고딕"/>
               </a:rPr>
-              <a:t>각 요청 KV 의 </a:t>
+              <a:t>각 요청 KV의 </a:t>
             </a:r>
             <a:r>
               <a:rPr sz="1800" b="1" i="0">
@@ -5100,7 +5100,7 @@
                 <a:latin typeface="Calibri"/>
                 <a:ea typeface="맑은 고딕"/>
               </a:rPr>
-              <a:t>위치 (layer) 와 크기</a:t>
+              <a:t>위치(layer)와 크기</a:t>
             </a:r>
             <a:r>
               <a:rPr sz="1800" b="0" i="0">
@@ -5110,7 +5110,7 @@
                 <a:latin typeface="Calibri"/>
                 <a:ea typeface="맑은 고딕"/>
               </a:rPr>
-              <a:t>를 compute 에 넘긴다</a:t>
+              <a:t>를 compute에 전달</a:t>
             </a:r>
           </a:p>
           <a:p>
@@ -5137,7 +5137,7 @@
                 <a:latin typeface="Calibri"/>
                 <a:ea typeface="맑은 고딕"/>
               </a:rPr>
-              <a:t>Compute 는 KV 위치/크기 알고 dispatch</a:t>
+              <a:t>compute가 KV의 위치와 크기를 알고 dispatch</a:t>
             </a:r>
           </a:p>
           <a:p>
@@ -5191,7 +5191,7 @@
                 <a:latin typeface="Calibri"/>
                 <a:ea typeface="맑은 고딕"/>
               </a:rPr>
-              <a:t>GPU idle 제거 + 큐잉 지연 감소</a:t>
+              <a:t>GPU 유휴 시간 제거 + 큐잉 지연 감소</a:t>
             </a:r>
           </a:p>
         </p:txBody>
@@ -5306,7 +5306,7 @@
                 <a:latin typeface="Calibri"/>
                 <a:ea typeface="맑은 고딕"/>
               </a:rPr>
-              <a:t>시스템 개관 — 3개 컴포넌트 + 양방향 신호</a:t>
+              <a:t>시스템 구성 — 3개 컴포넌트와 양방향 신호</a:t>
             </a:r>
           </a:p>
         </p:txBody>
@@ -5427,7 +5427,7 @@
                 <a:latin typeface="Calibri"/>
                 <a:ea typeface="맑은 고딕"/>
               </a:rPr>
-              <a:t>Storage로부터 KV 위치와 크기를 받아 ready/preparing 큐로 분리</a:t>
+              <a:t>storage에서 KV 위치와 크기를 받아 ready/preparing 큐로 분리</a:t>
             </a:r>
           </a:p>
           <a:p>
@@ -5461,7 +5461,7 @@
                 <a:latin typeface="Calibri"/>
                 <a:ea typeface="맑은 고딕"/>
               </a:rPr>
-              <a:t>GPU에서 생성된 history tensor 중 storage-efficient tensor만 캐시</a:t>
+              <a:t>GPU에서 만들어진 history tensor 중 storage-efficient tensor만 캐싱</a:t>
             </a:r>
           </a:p>
           <a:p>
@@ -5495,7 +5495,7 @@
                 <a:latin typeface="Calibri"/>
                 <a:ea typeface="맑은 고딕"/>
               </a:rPr>
-              <a:t>Compute가 넘긴 답변 길이로 reuse distance 추정 → hit potential 최저 KV 축출</a:t>
+              <a:t>compute가 보낸 답변 길이로 reuse distance를 추정하고 hit potential이 가장 낮은 KV를 evict</a:t>
             </a:r>
           </a:p>
           <a:p>
@@ -5529,7 +5529,7 @@
                 <a:latin typeface="Calibri"/>
                 <a:ea typeface="맑은 고딕"/>
               </a:rPr>
-              <a:t>▸ Storage → Compute: KV location &amp; size</a:t>
+              <a:t>▸ Storage → Compute: KV의 위치와 크기</a:t>
             </a:r>
           </a:p>
           <a:p>
@@ -5546,7 +5546,7 @@
                 <a:latin typeface="Calibri"/>
                 <a:ea typeface="맑은 고딕"/>
               </a:rPr>
-              <a:t>▸ Compute → Storage: future access timing (=answer length)</a:t>
+              <a:t>▸ Compute → Storage: 다음 access 시점(= 답변 길이)</a:t>
             </a:r>
           </a:p>
         </p:txBody>
@@ -5741,7 +5741,7 @@
                 <a:latin typeface="Calibri"/>
                 <a:ea typeface="맑은 고딕"/>
               </a:rPr>
-              <a:t>사용자 요청 도착 → Scheduler가 KV의 location/size를 storage에서 조회</a:t>
+              <a:t>사용자 요청이 도착하면 Scheduler가 KV의 위치와 크기를 storage에서 조회</a:t>
             </a:r>
           </a:p>
           <a:p>
@@ -5758,7 +5758,7 @@
                 <a:latin typeface="Calibri"/>
                 <a:ea typeface="맑은 고딕"/>
               </a:rPr>
-              <a:t>→ Ready queue 또는 Preparing queue 로 dispatch</a:t>
+              <a:t>→ Ready queue 또는 Preparing queue로 보냄</a:t>
             </a:r>
           </a:p>
         </p:txBody>
@@ -5838,7 +5838,7 @@
                 <a:latin typeface="Calibri"/>
                 <a:ea typeface="맑은 고딕"/>
               </a:rPr>
-              <a:t>GPU가 inference 진행 중 생성한 storage-efficient tensor를 History Cacher가 캐싱</a:t>
+              <a:t>GPU가 inference 중에 만든 storage-efficient tensor를 History Cacher가 보관</a:t>
             </a:r>
           </a:p>
           <a:p>
@@ -5855,7 +5855,7 @@
                 <a:latin typeface="Calibri"/>
                 <a:ea typeface="맑은 고딕"/>
               </a:rPr>
-              <a:t>→ KV tensor 대신 더 작은 intermediate tensor를 저장 (MHA-only)</a:t>
+              <a:t>→ KV tensor 대신 더 작은 intermediate tensor를 저장 (MHA에 한함)</a:t>
             </a:r>
           </a:p>
         </p:txBody>
@@ -5935,7 +5935,7 @@
                 <a:latin typeface="Calibri"/>
                 <a:ea typeface="맑은 고딕"/>
               </a:rPr>
-              <a:t>GPU 응답 완료 → 답변 토큰 길이를 Eviction Manager에게 전달</a:t>
+              <a:t>GPU 응답이 끝나면 답변 토큰 길이를 Eviction Manager에 전달</a:t>
             </a:r>
           </a:p>
           <a:p>
@@ -5952,7 +5952,7 @@
                 <a:latin typeface="Calibri"/>
                 <a:ea typeface="맑은 고딕"/>
               </a:rPr>
-              <a:t>→ 다음 KV access의 reuse distance 분포 추정</a:t>
+              <a:t>→ 다음 KV access의 reuse distance 분포를 추정</a:t>
             </a:r>
           </a:p>
         </p:txBody>
@@ -6032,7 +6032,7 @@
                 <a:latin typeface="Calibri"/>
                 <a:ea typeface="맑은 고딕"/>
               </a:rPr>
-              <a:t>Free perf-layer 공간이 임계 미만이 되면 eviction 트리거</a:t>
+              <a:t>perf layer 여유 공간이 임계치 아래로 떨어지면 eviction 트리거</a:t>
             </a:r>
           </a:p>
           <a:p>
@@ -6049,7 +6049,7 @@
                 <a:latin typeface="Calibri"/>
                 <a:ea typeface="맑은 고딕"/>
               </a:rPr>
-              <a:t>→ Hit potential 최저 KV를 capacity layer로 이동 (inclusive caching)</a:t>
+              <a:t>→ hit potential이 가장 낮은 KV를 capacity layer로 이동 (inclusive caching)</a:t>
             </a:r>
           </a:p>
         </p:txBody>
@@ -6164,7 +6164,7 @@
                 <a:latin typeface="Calibri"/>
                 <a:ea typeface="맑은 고딕"/>
               </a:rPr>
-              <a:t>Mechanism 1 동기 — I/O blocking과 overlap의 한계</a:t>
+              <a:t>Mechanism 1의 동기 — I/O blocking과 overlap의 한계</a:t>
             </a:r>
           </a:p>
         </p:txBody>
@@ -6228,7 +6228,7 @@
                 <a:latin typeface="Calibri"/>
                 <a:ea typeface="맑은 고딕"/>
               </a:rPr>
-              <a:t>Figure 10. I/O-aware request scheduling 전략 개관</a:t>
+              <a:t>Figure 10. I/O-aware request scheduling 전략 개요</a:t>
             </a:r>
           </a:p>
         </p:txBody>
@@ -6268,7 +6268,7 @@
                 <a:latin typeface="Calibri"/>
                 <a:ea typeface="맑은 고딕"/>
               </a:rPr>
-              <a:t>왜 단순 overlap이 안 되는가</a:t>
+              <a:t>왜 단순한 overlap으로는 부족한가</a:t>
             </a:r>
           </a:p>
           <a:p>
@@ -6295,7 +6295,7 @@
                 <a:latin typeface="Calibri"/>
                 <a:ea typeface="맑은 고딕"/>
               </a:rPr>
-              <a:t>한 iteration의 GPU compute = 수십 ms</a:t>
+              <a:t>GPU compute 한 iteration = 수십 ms</a:t>
             </a:r>
           </a:p>
           <a:p>
@@ -6322,7 +6322,7 @@
                 <a:latin typeface="Calibri"/>
                 <a:ea typeface="맑은 고딕"/>
               </a:rPr>
-              <a:t>Capacity layer I/O = 수백 ms</a:t>
+              <a:t>capacity layer I/O = 수백 ms</a:t>
             </a:r>
           </a:p>
           <a:p>
@@ -6349,7 +6349,7 @@
                 <a:latin typeface="Calibri"/>
                 <a:ea typeface="맑은 고딕"/>
               </a:rPr>
-              <a:t>다음 layer의 KV load와 overlap 해도 시간 차가 너무 큼</a:t>
+              <a:t>다음 layer KV load와 겹쳐도 시간 차가 너무 큼</a:t>
             </a:r>
           </a:p>
           <a:p>
@@ -6376,7 +6376,7 @@
                 <a:latin typeface="Calibri"/>
                 <a:ea typeface="맑은 고딕"/>
               </a:rPr>
-              <a:t>naive overlap은 “다음 토큰 1개를 기다리며 GPU가 또 idle”</a:t>
+              <a:t>naive overlap만으로는 GPU가 다음 토큰을 기다리며 다시 논다</a:t>
             </a:r>
           </a:p>
         </p:txBody>
@@ -6472,7 +6472,7 @@
                 <a:latin typeface="Calibri"/>
                 <a:ea typeface="맑은 고딕"/>
               </a:rPr>
-              <a:t>느린 I/O 요청이 빠른 I/O 요청을 막지 않게 하면서, </a:t>
+              <a:t>느린 I/O가 빠른 I/O를 막지 않으면서, </a:t>
             </a:r>
             <a:r>
               <a:rPr sz="2000" b="1" i="0">
@@ -6482,7 +6482,7 @@
                 <a:latin typeface="Calibri"/>
                 <a:ea typeface="맑은 고딕"/>
               </a:rPr>
-              <a:t>큰 KV 요청도 starvation 없이 진행시킨다</a:t>
+              <a:t>큰 KV 요청도 starvation 없이 처리한다</a:t>
             </a:r>
           </a:p>
         </p:txBody>
@@ -6717,7 +6717,7 @@
                 <a:latin typeface="Calibri"/>
                 <a:ea typeface="맑은 고딕"/>
               </a:rPr>
-              <a:t>KV가 perf layer에 있는 요청 — FCFS, GPU에 즉시 dispatch</a:t>
+              <a:t>KV가 perf layer에 있는 요청 — FCFS로 GPU에 바로 보냄</a:t>
             </a:r>
           </a:p>
           <a:p>
@@ -6751,7 +6751,7 @@
                 <a:latin typeface="Calibri"/>
                 <a:ea typeface="맑은 고딕"/>
               </a:rPr>
-              <a:t>KV가 capacity layer에 있는 요청 — 백그라운드로 perf layer로 끌어올림</a:t>
+              <a:t>KV가 capacity layer에 있는 요청 — 백그라운드로 perf layer에 올림</a:t>
             </a:r>
           </a:p>
           <a:p>
@@ -6768,7 +6768,7 @@
                 <a:latin typeface="Calibri"/>
                 <a:ea typeface="맑은 고딕"/>
               </a:rPr>
-              <a:t>promotion 시 </a:t>
+              <a:t>promotion 후에도 </a:t>
             </a:r>
             <a:r>
               <a:rPr sz="1800" b="1" i="0">
@@ -6788,7 +6788,7 @@
                 <a:latin typeface="Calibri"/>
                 <a:ea typeface="맑은 고딕"/>
               </a:rPr>
-              <a:t>해 tail latency 폭주를 방지</a:t>
+              <a:t>해 tail latency 급증을 막음</a:t>
             </a:r>
           </a:p>
         </p:txBody>
@@ -6874,7 +6874,7 @@
                 <a:latin typeface="Calibri"/>
                 <a:ea typeface="맑은 고딕"/>
               </a:rPr>
-              <a:t>disk-HRRN  (preparing queue 정렬)</a:t>
+              <a:t>disk-HRRN (preparing queue 정렬)</a:t>
             </a:r>
           </a:p>
           <a:p>
@@ -6928,7 +6928,7 @@
                 <a:latin typeface="Calibri"/>
                 <a:ea typeface="맑은 고딕"/>
               </a:rPr>
-              <a:t>→ ready queue 로 빨리 promote</a:t>
+              <a:t>→ ready queue로 빠르게 promote</a:t>
             </a:r>
           </a:p>
           <a:p>
@@ -6955,7 +6955,7 @@
                 <a:latin typeface="Calibri"/>
                 <a:ea typeface="맑은 고딕"/>
               </a:rPr>
-              <a:t>waiting↑ 시 </a:t>
+              <a:t>대기 시간이 길어지면 </a:t>
             </a:r>
             <a:r>
               <a:rPr sz="1800" b="1" i="0">
@@ -6965,7 +6965,7 @@
                 <a:latin typeface="Calibri"/>
                 <a:ea typeface="맑은 고딕"/>
               </a:rPr>
-              <a:t>큰 KV 도 promote (기아 방지)</a:t>
+              <a:t>큰 KV도 promote (starvation 방지)</a:t>
             </a:r>
           </a:p>
           <a:p>
@@ -6992,7 +6992,7 @@
                 <a:latin typeface="Calibri"/>
                 <a:ea typeface="맑은 고딕"/>
               </a:rPr>
-              <a:t>classical HRRN 의 </a:t>
+              <a:t>classical HRRN을 </a:t>
             </a:r>
             <a:r>
               <a:rPr sz="1800" b="1" i="0">
@@ -7002,7 +7002,7 @@
                 <a:latin typeface="Calibri"/>
                 <a:ea typeface="맑은 고딕"/>
               </a:rPr>
-              <a:t>I/O time ≈ KV size 변형</a:t>
+              <a:t>I/O time ≈ KV size에 맞춰 변형</a:t>
             </a:r>
           </a:p>
         </p:txBody>
@@ -7117,7 +7117,7 @@
                 <a:latin typeface="Calibri"/>
                 <a:ea typeface="맑은 고딕"/>
               </a:rPr>
-              <a:t>동작 예시 — GPU idle을 어떻게 없애는가</a:t>
+              <a:t>동작 예 — GPU 유휴 시간을 어떻게 없애는가</a:t>
             </a:r>
           </a:p>
         </p:txBody>
@@ -7181,7 +7181,7 @@
                 <a:latin typeface="Calibri"/>
                 <a:ea typeface="맑은 고딕"/>
               </a:rPr>
-              <a:t>Figure 11. (a) FCFS vs (b) I/O-aware scheduling 의 timeline 비교</a:t>
+              <a:t>Figure 11. (a) FCFS vs (b) I/O-aware scheduling의 timeline 비교</a:t>
             </a:r>
           </a:p>
         </p:txBody>
@@ -7238,7 +7238,7 @@
                 <a:latin typeface="Calibri"/>
                 <a:ea typeface="맑은 고딕"/>
               </a:rPr>
-              <a:t>req 1, 2 (큰 capacity-layer KV)가 머리에서 대기 →</a:t>
+              <a:t>큐 앞쪽의 req 1, 2(큰 capacity-layer KV)가 막아서</a:t>
             </a:r>
           </a:p>
           <a:p>
@@ -7255,7 +7255,7 @@
                 <a:latin typeface="Calibri"/>
                 <a:ea typeface="맑은 고딕"/>
               </a:rPr>
-              <a:t>GPU와 perf-layer I/O 가 모두 idle</a:t>
+              <a:t>GPU와 perf-layer I/O가 모두 논다</a:t>
             </a:r>
           </a:p>
           <a:p>
@@ -7289,7 +7289,7 @@
                 <a:latin typeface="Calibri"/>
                 <a:ea typeface="맑은 고딕"/>
               </a:rPr>
-              <a:t>req 3, 4, 5 (perf-layer hit) 먼저 GPU로 → 그 사이 req 2 가 promote</a:t>
+              <a:t>req 3, 4, 5(perf-layer hit)가 먼저 GPU로 가고, 그 사이 req 2가 promote</a:t>
             </a:r>
           </a:p>
           <a:p>
@@ -7306,7 +7306,7 @@
                 <a:latin typeface="Calibri"/>
                 <a:ea typeface="맑은 고딕"/>
               </a:rPr>
-              <a:t>큐잉 시간 평균 </a:t>
+              <a:t>평균 큐잉 시간 </a:t>
             </a:r>
             <a:r>
               <a:rPr sz="1800" b="1" i="0">
@@ -7431,7 +7431,7 @@
                 <a:latin typeface="Calibri"/>
                 <a:ea typeface="맑은 고딕"/>
               </a:rPr>
-              <a:t>Mechanism 2 핵심 관찰 — 답변 길이 ↔ 다음 reuse distance</a:t>
+              <a:t>Mechanism 2의 핵심 관찰 — 답변 길이와 다음 reuse distance</a:t>
             </a:r>
           </a:p>
         </p:txBody>
@@ -7495,7 +7495,7 @@
                 <a:latin typeface="Calibri"/>
                 <a:ea typeface="맑은 고딕"/>
               </a:rPr>
-              <a:t>Figure 12. Hour 별로 답변 길이(가로축) vs 다음 KV access의 reuse distance(세로축). 빨간 라인 = 하한</a:t>
+              <a:t>Figure 12. 시간대별 답변 길이(가로축) vs 다음 KV access의 reuse distance(세로축). 빨간 선 = 하한</a:t>
             </a:r>
           </a:p>
         </p:txBody>
@@ -7552,7 +7552,7 @@
                 <a:latin typeface="Calibri"/>
                 <a:ea typeface="맑은 고딕"/>
               </a:rPr>
-              <a:t>현재 access ↔ 다음 access 사이에 접근되는 다른 KV 의 </a:t>
+              <a:t>현재 access와 다음 access 사이에 접근되는 다른 KV의 </a:t>
             </a:r>
             <a:r>
               <a:rPr sz="1800" b="1" i="0">
@@ -7562,7 +7562,7 @@
                 <a:latin typeface="Calibri"/>
                 <a:ea typeface="맑은 고딕"/>
               </a:rPr>
-              <a:t>총 byte 합</a:t>
+              <a:t>byte 합</a:t>
             </a:r>
           </a:p>
           <a:p>
@@ -7579,7 +7579,7 @@
                 <a:latin typeface="Calibri"/>
                 <a:ea typeface="맑은 고딕"/>
               </a:rPr>
-              <a:t>관찰 — 답변이 길수록 사용자가 다음 질문을 늦게 보낸다 → 그 사이 다른 사용자 KV가 끼어들어 reuse distance 하한이 </a:t>
+              <a:t>관찰 — 답변이 길수록 사용자가 다음 질문을 늦게 보내고, 그 사이 다른 사용자의 KV가 끼어들면서 reuse distance 하한이 </a:t>
             </a:r>
             <a:r>
               <a:rPr sz="1800" b="1" i="0">
@@ -7589,7 +7589,7 @@
                 <a:latin typeface="Calibri"/>
                 <a:ea typeface="맑은 고딕"/>
               </a:rPr>
-              <a:t>단조 증가 (Spearman ρ = 0.94 ~ 0.98)</a:t>
+              <a:t>꾸준히 증가 (Spearman ρ = 0.94 ~ 0.98)</a:t>
             </a:r>
           </a:p>
         </p:txBody>
@@ -7794,7 +7794,7 @@
                 <a:latin typeface="Calibri"/>
                 <a:ea typeface="맑은 고딕"/>
               </a:rPr>
-              <a:t>    Interactive LLM serving과 KV cache의 역할</a:t>
+              <a:t>    Interactive LLM serving과 KV cache 역할</a:t>
             </a:r>
           </a:p>
         </p:txBody>
@@ -7884,7 +7884,7 @@
                 <a:latin typeface="Calibri"/>
                 <a:ea typeface="맑은 고딕"/>
               </a:rPr>
-              <a:t>    KV loading 병목, 그리고 세 가지 워크로드 관찰</a:t>
+              <a:t>    KV loading 병목과 워크로드 관찰 세 가지</a:t>
             </a:r>
           </a:p>
         </p:txBody>
@@ -8064,7 +8064,7 @@
                 <a:latin typeface="Calibri"/>
                 <a:ea typeface="맑은 고딕"/>
               </a:rPr>
-              <a:t>    I/O-aware request scheduling (compute side)</a:t>
+              <a:t>    I/O-aware request scheduling (compute 측)</a:t>
             </a:r>
           </a:p>
         </p:txBody>
@@ -8154,7 +8154,7 @@
                 <a:latin typeface="Calibri"/>
                 <a:ea typeface="맑은 고딕"/>
               </a:rPr>
-              <a:t>    Previous-answer-based eviction (storage side)</a:t>
+              <a:t>    Previous-answer-based eviction (storage 측)</a:t>
             </a:r>
           </a:p>
         </p:txBody>
@@ -8334,7 +8334,7 @@
                 <a:latin typeface="Calibri"/>
                 <a:ea typeface="맑은 고딕"/>
               </a:rPr>
-              <a:t>    5개 모델 · 50분간 토크의 핵심 plot 7개</a:t>
+              <a:t>    모델 5종에 걸친 핵심 plot 7개</a:t>
             </a:r>
           </a:p>
         </p:txBody>
@@ -8424,7 +8424,7 @@
                 <a:latin typeface="Calibri"/>
                 <a:ea typeface="맑은 고딕"/>
               </a:rPr>
-              <a:t>    한계, 일반화 가능성, takeaway</a:t>
+              <a:t>    한계와 일반화 가능성</a:t>
             </a:r>
           </a:p>
         </p:txBody>
@@ -8539,7 +8539,7 @@
                 <a:latin typeface="Calibri"/>
                 <a:ea typeface="맑은 고딕"/>
               </a:rPr>
-              <a:t>그러나 큰 reuse distance 라고 무조건 미스가 아니다</a:t>
+              <a:t>reuse distance가 크다고 곧 미스인 것은 아니다</a:t>
             </a:r>
           </a:p>
         </p:txBody>
@@ -8643,7 +8643,7 @@
                 <a:latin typeface="Calibri"/>
                 <a:ea typeface="맑은 고딕"/>
               </a:rPr>
-              <a:t>세 영역으로 분할</a:t>
+              <a:t>세 영역으로 나눔</a:t>
             </a:r>
           </a:p>
           <a:p>
@@ -8711,7 +8711,7 @@
                 <a:latin typeface="Calibri"/>
                 <a:ea typeface="맑은 고딕"/>
               </a:rPr>
-              <a:t>Optimal(Belady)은 100% 가까이 유지하지만 LRU는 0~40% 수준</a:t>
+              <a:t>Optimal(Belady)은 100%에 가깝지만 LRU는 0~40% 수준</a:t>
             </a:r>
           </a:p>
           <a:p>
@@ -8745,7 +8745,7 @@
                 <a:latin typeface="Calibri"/>
                 <a:ea typeface="맑은 고딕"/>
               </a:rPr>
-              <a:t>Optimal도 hit ≈ 0 — eviction 후보 1순위</a:t>
+              <a:t>Optimal도 hit ≈ 0 — eviction 1순위</a:t>
             </a:r>
           </a:p>
         </p:txBody>
@@ -8831,7 +8831,7 @@
                 <a:latin typeface="Calibri"/>
                 <a:ea typeface="맑은 고딕"/>
               </a:rPr>
-              <a:t>교훈 — distance만 보고 evict하면 promising 구간을 잃는다.
+              <a:t>교훈 — distance만 보고 evict하면 promising 구간을 놓친다.
 </a:t>
             </a:r>
             <a:r>
@@ -9057,7 +9057,7 @@
                 <a:latin typeface="Calibri"/>
                 <a:ea typeface="맑은 고딕"/>
               </a:rPr>
-              <a:t>Promising 영역을 m개 fine-grained bucket으로 분할</a:t>
+              <a:t>Promising 영역을 m개의 fine-grained bucket으로 나눔</a:t>
             </a:r>
           </a:p>
         </p:txBody>
@@ -9217,7 +9217,7 @@
                 <a:latin typeface="Calibri"/>
                 <a:ea typeface="맑은 고딕"/>
               </a:rPr>
-              <a:t>사용자별 과거 KV access 분포로 다음 access가 각 bucket에 떨어질 확률을 추정</a:t>
+              <a:t>사용자별 과거 KV access 분포로, 다음 access가 각 bucket에 떨어질 확률을 추정</a:t>
             </a:r>
           </a:p>
         </p:txBody>
@@ -9297,7 +9297,7 @@
                 <a:latin typeface="Calibri"/>
                 <a:ea typeface="맑은 고딕"/>
               </a:rPr>
-              <a:t>Compute가 넘긴 답변 길이로 reuse distance 하한을 결정 → 더 작은 bucket의 확률을 0으로 truncate</a:t>
+              <a:t>compute가 보낸 답변 길이로 reuse distance 하한을 정해 더 작은 bucket의 확률을 0으로 truncate</a:t>
             </a:r>
           </a:p>
         </p:txBody>
@@ -9377,7 +9377,7 @@
                 <a:latin typeface="Calibri"/>
                 <a:ea typeface="맑은 고딕"/>
               </a:rPr>
-              <a:t>Equation 2 로 overall hit potential 계산 → 가장 낮은 KV evict</a:t>
+              <a:t>Equation 2로 overall hit potential을 계산해 가장 낮은 KV를 evict</a:t>
             </a:r>
           </a:p>
         </p:txBody>
@@ -9595,7 +9595,7 @@
                 <a:latin typeface="Calibri"/>
                 <a:ea typeface="맑은 고딕"/>
               </a:rPr>
-              <a:t>Equation (2). 가장 낮은 hit potential을 가진 KV를 evict</a:t>
+              <a:t>Equation (2). hit potential이 가장 낮은 KV를 evict</a:t>
             </a:r>
           </a:p>
         </p:txBody>
@@ -9665,7 +9665,7 @@
                 <a:latin typeface="Calibri"/>
                 <a:ea typeface="맑은 고딕"/>
               </a:rPr>
-              <a:t>다음 access가 perf layer 안쪽으로 들어옴 — hit 확률 1.0</a:t>
+              <a:t>다음 access가 perf layer 안에 들어올 확률 — hit 확률 1.0</a:t>
             </a:r>
           </a:p>
         </p:txBody>
@@ -9735,7 +9735,7 @@
                 <a:latin typeface="Calibri"/>
                 <a:ea typeface="맑은 고딕"/>
               </a:rPr>
-              <a:t>promising bucket i 에 떨어질 확률 (m개)</a:t>
+              <a:t>promising bucket i에 떨어질 확률 (총 m개 bucket)</a:t>
             </a:r>
           </a:p>
         </p:txBody>
@@ -9805,7 +9805,7 @@
                 <a:latin typeface="Calibri"/>
                 <a:ea typeface="맑은 고딕"/>
               </a:rPr>
-              <a:t>ghost cache의 Belady 시뮬레이션이 알려주는 i bucket의 hit rate</a:t>
+              <a:t>ghost cache의 Belady 시뮬레이션이 알려주는 bucket i의 hit rate</a:t>
             </a:r>
           </a:p>
         </p:txBody>
@@ -9875,7 +9875,7 @@
                 <a:latin typeface="Calibri"/>
                 <a:ea typeface="맑은 고딕"/>
               </a:rPr>
-              <a:t>perf layer로 영원히 안 돌아옴 — hit 확률 0</a:t>
+              <a:t>perf layer로 다시 돌아오지 않음 — hit 확률 0</a:t>
             </a:r>
           </a:p>
         </p:txBody>
@@ -9961,7 +9961,7 @@
                 <a:latin typeface="Calibri"/>
                 <a:ea typeface="맑은 고딕"/>
               </a:rPr>
-              <a:t>Note. Ghost cache는 백그라운드에서 Belady 시뮬레이션을 수행 — eviction 결정 단계에는 </a:t>
+              <a:t>Note. Ghost cache는 백그라운드에서 Belady 시뮬레이션을 수행 — eviction 결정 단계의 추가 비용은 </a:t>
             </a:r>
             <a:r>
               <a:rPr sz="1400" b="1" i="0">
@@ -9981,7 +9981,7 @@
                 <a:latin typeface="Calibri"/>
                 <a:ea typeface="맑은 고딕"/>
               </a:rPr>
-              <a:t>만 추가 (자세한 비교는 평가 슬라이드에서)</a:t>
+              <a:t>에 그침 (자세한 비교는 평가 슬라이드에서)</a:t>
             </a:r>
           </a:p>
         </p:txBody>
@@ -10096,7 +10096,7 @@
                 <a:latin typeface="Calibri"/>
                 <a:ea typeface="맑은 고딕"/>
               </a:rPr>
-              <a:t>Mechanism 3 — 어떤 tensor를 캐시할 것인가</a:t>
+              <a:t>Mechanism 3 — 어떤 tensor를 캐싱할 것인가</a:t>
             </a:r>
           </a:p>
         </p:txBody>
@@ -10160,7 +10160,7 @@
                 <a:latin typeface="Calibri"/>
                 <a:ea typeface="맑은 고딕"/>
               </a:rPr>
-              <a:t>Figure 14. (a) Tensor 별 size &amp; 절약 가능한 GFLOPs, (b) cost efficiency</a:t>
+              <a:t>Figure 14. (a) tensor별 size와 절약 가능한 GFLOPs, (b) cost efficiency</a:t>
             </a:r>
           </a:p>
         </p:txBody>
@@ -10200,7 +10200,7 @@
                 <a:latin typeface="Calibri"/>
                 <a:ea typeface="맑은 고딕"/>
               </a:rPr>
-              <a:t>왜 KV tensor가 최적이 아닌가</a:t>
+              <a:t>왜 KV tensor가 최선이 아닌가</a:t>
             </a:r>
           </a:p>
           <a:p>
@@ -10217,7 +10217,7 @@
                 <a:latin typeface="Calibri"/>
                 <a:ea typeface="맑은 고딕"/>
               </a:rPr>
-              <a:t>▸ KV tensor 직접 필요 — </a:t>
+              <a:t>▸ KV tensor가 직접 필요하지만 </a:t>
             </a:r>
             <a:r>
               <a:rPr sz="1800" b="1" i="0">
@@ -10227,7 +10227,7 @@
                 <a:latin typeface="Calibri"/>
                 <a:ea typeface="맑은 고딕"/>
               </a:rPr>
-              <a:t>그러나 size 가 큼</a:t>
+              <a:t>size가 크다</a:t>
             </a:r>
           </a:p>
           <a:p>
@@ -10295,7 +10295,7 @@
                 <a:latin typeface="Calibri"/>
                 <a:ea typeface="맑은 고딕"/>
               </a:rPr>
-              <a:t>▸ 51 GFLOPs/MB — KV tensor(30.5)의 1.67×</a:t>
+              <a:t>▸ 51 GFLOPs/MB — KV tensor(30.5)의 1.67배</a:t>
             </a:r>
           </a:p>
           <a:p>
@@ -10312,7 +10312,7 @@
                 <a:latin typeface="Calibri"/>
                 <a:ea typeface="맑은 고딕"/>
               </a:rPr>
-              <a:t>▸ KV tensor로 변환은 </a:t>
+              <a:t>▸ KV tensor로 변환하는 데 </a:t>
             </a:r>
             <a:r>
               <a:rPr sz="1800" b="1" i="0">
@@ -10533,7 +10533,7 @@
                 <a:latin typeface="Calibri"/>
                 <a:ea typeface="맑은 고딕"/>
               </a:rPr>
-              <a:t>MHA-based 모델</a:t>
+              <a:t>MHA 기반 모델</a:t>
             </a:r>
           </a:p>
           <a:p>
@@ -10587,7 +10587,7 @@
                 <a:latin typeface="Calibri"/>
                 <a:ea typeface="맑은 고딕"/>
               </a:rPr>
-              <a:t>head 별 K, V 분리 → KV 가 큼</a:t>
+              <a:t>head마다 K, V가 분리 → KV가 큼</a:t>
             </a:r>
           </a:p>
           <a:p>
@@ -10614,7 +10614,7 @@
                 <a:latin typeface="Calibri"/>
                 <a:ea typeface="맑은 고딕"/>
               </a:rPr>
-              <a:t>Tensor 6 캐싱 = 적은 공간 / 많은 compute 절약</a:t>
+              <a:t>tensor 6 캐싱이 적은 공간으로 많은 compute를 절약</a:t>
             </a:r>
           </a:p>
           <a:p>
@@ -10631,7 +10631,7 @@
                 <a:latin typeface="Calibri"/>
                 <a:ea typeface="맑은 고딕"/>
               </a:rPr>
-              <a:t>→ Bidaw에서는 </a:t>
+              <a:t>→ Bidaw는 </a:t>
             </a:r>
             <a:r>
               <a:rPr sz="1800" b="1" i="0">
@@ -10641,7 +10641,7 @@
                 <a:latin typeface="Calibri"/>
                 <a:ea typeface="맑은 고딕"/>
               </a:rPr>
-              <a:t>tensor 6 를 캐시</a:t>
+              <a:t>tensor 6를 캐싱</a:t>
             </a:r>
           </a:p>
         </p:txBody>
@@ -10727,7 +10727,7 @@
                 <a:latin typeface="Calibri"/>
                 <a:ea typeface="맑은 고딕"/>
               </a:rPr>
-              <a:t>GQA-based 모델</a:t>
+              <a:t>GQA 기반 모델</a:t>
             </a:r>
           </a:p>
           <a:p>
@@ -10781,7 +10781,7 @@
                 <a:latin typeface="Calibri"/>
                 <a:ea typeface="맑은 고딕"/>
               </a:rPr>
-              <a:t>tensor 6의 cost-efficiency 우위가 사라짐</a:t>
+              <a:t>tensor 6의 cost-efficiency 이점이 사라짐</a:t>
             </a:r>
           </a:p>
           <a:p>
@@ -10798,7 +10798,7 @@
                 <a:latin typeface="Calibri"/>
                 <a:ea typeface="맑은 고딕"/>
               </a:rPr>
-              <a:t>→ GQA에서는 그냥 </a:t>
+              <a:t>→ GQA에서는 </a:t>
             </a:r>
             <a:r>
               <a:rPr sz="1800" b="1" i="0">
@@ -10808,7 +10808,7 @@
                 <a:latin typeface="Calibri"/>
                 <a:ea typeface="맑은 고딕"/>
               </a:rPr>
-              <a:t>KV tensor를 캐시</a:t>
+              <a:t>KV tensor를 그대로 캐싱</a:t>
             </a:r>
           </a:p>
         </p:txBody>
@@ -10923,7 +10923,7 @@
                 <a:latin typeface="Calibri"/>
                 <a:ea typeface="맑은 고딕"/>
               </a:rPr>
-              <a:t>구현 노트 — vLLM 위에 얹는 세 가지 트릭</a:t>
+              <a:t>구현 노트 — vLLM 위에 얹는 네 가지 기법</a:t>
             </a:r>
           </a:p>
         </p:txBody>
@@ -11024,7 +11024,7 @@
                 <a:latin typeface="Calibri"/>
                 <a:ea typeface="맑은 고딕"/>
               </a:rPr>
-              <a:t>조기 종료된 요청을 배치 안에서 즉시 release → 새 요청을 빠르게 admit (ORCA 류와 호환)</a:t>
+              <a:t>일찍 끝난 요청을 배치에서 바로 빼고 새 요청을 곧장 받아들임 (ORCA 계열과 호환)</a:t>
             </a:r>
           </a:p>
         </p:txBody>
@@ -11125,7 +11125,7 @@
                 <a:latin typeface="Calibri"/>
                 <a:ea typeface="맑은 고딕"/>
               </a:rPr>
-              <a:t>history/query 토큰은 256-token 큰 블록, response 토큰은 16-token 작은 블록 → CPU↔GPU 대역폭 활용 + 단편화 감소</a:t>
+              <a:t>history/query 토큰은 256토큰의 큰 블록, response 토큰은 16토큰의 작은 블록으로 관리 → CPU-GPU 대역폭 활용도 향상, 단편화 감소</a:t>
             </a:r>
           </a:p>
         </p:txBody>
@@ -11226,7 +11226,7 @@
                 <a:latin typeface="Calibri"/>
                 <a:ea typeface="맑은 고딕"/>
               </a:rPr>
-              <a:t>Storage-efficient tensor → KV tensor 변환을 별도 스트림에서 수행 → idle SM 활용, 본 추론 latency에 영향 없음</a:t>
+              <a:t>storage-efficient tensor를 KV tensor로 바꾸는 작업을 별도 스트림에서 실행 → 유휴 SM을 활용하고 실제 추론 latency에 영향 없음</a:t>
             </a:r>
           </a:p>
         </p:txBody>
@@ -11327,7 +11327,7 @@
                 <a:latin typeface="Calibri"/>
                 <a:ea typeface="맑은 고딕"/>
               </a:rPr>
-              <a:t>Eviction 시 capacity layer에 이미 사본이 있어 큰 write 트래픽이 발생하지 않음 (FlashGen 류와 동일)</a:t>
+              <a:t>eviction 시점에 capacity layer에 이미 사본이 있어 추가 write 트래픽이 거의 없음 (FlashGen 계열과 동일)</a:t>
             </a:r>
           </a:p>
         </p:txBody>
@@ -11609,7 +11609,7 @@
                 <a:latin typeface="Calibri"/>
                 <a:ea typeface="맑은 고딕"/>
               </a:rPr>
-              <a:t>RAID-5 over 4× SATA SSD, 1.5 GB/s</a:t>
+              <a:t>SATA SSD 4장 RAID-5, 1.5 GB/s</a:t>
             </a:r>
           </a:p>
           <a:p>
@@ -11690,7 +11690,7 @@
                 <a:latin typeface="Calibri"/>
                 <a:ea typeface="맑은 고딕"/>
               </a:rPr>
-              <a:t>자체 1M-round trace, ShareGPT (Poisson 시뮬)</a:t>
+              <a:t>자체 100만 라운드 trace, ShareGPT (Poisson 시뮬)</a:t>
             </a:r>
           </a:p>
         </p:txBody>
@@ -11813,7 +11813,7 @@
                 <a:latin typeface="Calibri"/>
                 <a:ea typeface="맑은 고딕"/>
               </a:rPr>
-              <a:t>  Recompute (no KV caching)</a:t>
+              <a:t>  Recompute (KV caching 없음)</a:t>
             </a:r>
           </a:p>
           <a:p>
@@ -11924,7 +11924,7 @@
                 <a:latin typeface="Calibri"/>
                 <a:ea typeface="맑은 고딕"/>
               </a:rPr>
-              <a:t>  All KVs in perf layer (upper bound)</a:t>
+              <a:t>  모든 KV가 perf layer에 있는 상한선</a:t>
             </a:r>
           </a:p>
           <a:p>
@@ -11961,7 +11961,7 @@
                 <a:latin typeface="Calibri"/>
                 <a:ea typeface="맑은 고딕"/>
               </a:rPr>
-              <a:t>  본 논문</a:t>
+              <a:t>  이 논문</a:t>
             </a:r>
           </a:p>
         </p:txBody>
@@ -12076,7 +12076,7 @@
                 <a:latin typeface="Calibri"/>
                 <a:ea typeface="맑은 고딕"/>
               </a:rPr>
-              <a:t>Overall performance — 5개 모델 동시 평가</a:t>
+              <a:t>Overall performance — 모델 5종 동시 평가</a:t>
             </a:r>
           </a:p>
         </p:txBody>
@@ -12140,7 +12140,7 @@
                 <a:latin typeface="Calibri"/>
                 <a:ea typeface="맑은 고딕"/>
               </a:rPr>
-              <a:t>Figure 15. 사용자 도착률 vs 평균 응답 latency, 5개 모델</a:t>
+              <a:t>Figure 15. 사용자 도착률 vs 평균 응답 latency, 모델 5종</a:t>
             </a:r>
           </a:p>
         </p:txBody>
@@ -12200,7 +12200,7 @@
                 <a:latin typeface="Calibri"/>
                 <a:ea typeface="맑은 고딕"/>
               </a:rPr>
-              <a:t>최대 3.58× 감소 (vs CachedAttention/FlashGen)</a:t>
+              <a:t>최대 3.58배 감소 (vs CachedAttention/FlashGen)</a:t>
             </a:r>
           </a:p>
           <a:p>
@@ -12237,7 +12237,7 @@
                 <a:latin typeface="Calibri"/>
                 <a:ea typeface="맑은 고딕"/>
               </a:rPr>
-              <a:t>1.43–1.83× 향상 (동일 latency 기준)</a:t>
+              <a:t>1.43~1.83배 향상 (동일 latency 기준)</a:t>
             </a:r>
           </a:p>
           <a:p>
@@ -12264,7 +12264,7 @@
                 <a:latin typeface="Calibri"/>
                 <a:ea typeface="맑은 고딕"/>
               </a:rPr>
-              <a:t>Optimal과의 gap </a:t>
+              <a:t>Optimal과의 격차 </a:t>
             </a:r>
             <a:r>
               <a:rPr sz="1800" b="0" i="0">
@@ -12311,7 +12311,7 @@
                 <a:latin typeface="Calibri"/>
                 <a:ea typeface="맑은 고딕"/>
               </a:rPr>
-              <a:t>Bidaw는 lossless — 답변 정확도는 FlashGen 등과 동일</a:t>
+              <a:t>Bidaw는 lossless — 답변 정확도는 FlashGen 등과 같음</a:t>
             </a:r>
           </a:p>
         </p:txBody>
@@ -12490,7 +12490,7 @@
                 <a:latin typeface="Calibri"/>
                 <a:ea typeface="맑은 고딕"/>
               </a:rPr>
-              <a:t>Figure 16. host memory 120–200GB 범위에서의 latency</a:t>
+              <a:t>Figure 16. host memory 120~200GB 범위에서의 latency</a:t>
             </a:r>
           </a:p>
         </p:txBody>
@@ -12621,7 +12621,7 @@
                 <a:latin typeface="Calibri"/>
                 <a:ea typeface="맑은 고딕"/>
               </a:rPr>
-              <a:t>host memory 120GB까지 줄여도 Bidaw는 baseline 200GB 수준의 latency</a:t>
+              <a:t>host memory를 120GB까지 줄여도 Bidaw는 baseline 200GB 수준의 latency</a:t>
             </a:r>
           </a:p>
           <a:p>
@@ -12648,7 +12648,7 @@
                 <a:latin typeface="Calibri"/>
                 <a:ea typeface="맑은 고딕"/>
               </a:rPr>
-              <a:t>1.75–2.19× 더 많은 사용자/분 지원 — 작은 메모리에서 격차가 더 벌어짐</a:t>
+              <a:t>동일 메모리에서 1.75~2.19배 더 많은 사용자/분 처리 — 메모리가 작을수록 격차가 더 벌어짐</a:t>
             </a:r>
           </a:p>
           <a:p>
@@ -12702,7 +12702,7 @@
                 <a:latin typeface="Calibri"/>
                 <a:ea typeface="맑은 고딕"/>
               </a:rPr>
-              <a:t>  대비 -57.6% miss rate</a:t>
+              <a:t>  보다 miss rate -57.6%</a:t>
             </a:r>
           </a:p>
           <a:p>
@@ -12729,7 +12729,7 @@
                 <a:latin typeface="Calibri"/>
                 <a:ea typeface="맑은 고딕"/>
               </a:rPr>
-              <a:t>LFU/LRU/FIFO 일반 정책</a:t>
+              <a:t>LFU/LRU/FIFO 같은 일반 정책</a:t>
             </a:r>
             <a:r>
               <a:rPr sz="1800" b="1" i="0">
@@ -12739,7 +12739,7 @@
                 <a:latin typeface="Calibri"/>
                 <a:ea typeface="맑은 고딕"/>
               </a:rPr>
-              <a:t>  대비 -69.9% miss rate</a:t>
+              <a:t>  보다 miss rate -69.9%</a:t>
             </a:r>
           </a:p>
         </p:txBody>
@@ -13106,7 +13106,7 @@
                 <a:latin typeface="Calibri"/>
                 <a:ea typeface="맑은 고딕"/>
               </a:rPr>
-              <a:t>    P90 −52.96% / P95 −49.30% / P99 −47.03% (vs CachedAttention)</a:t>
+              <a:t>    CachedAttention 대비 P90 −52.96% / P95 −49.30% / P99 −47.03%</a:t>
             </a:r>
           </a:p>
           <a:p>
@@ -13143,7 +13143,7 @@
                 <a:latin typeface="Calibri"/>
                 <a:ea typeface="맑은 고딕"/>
               </a:rPr>
-              <a:t>    Scheduling +1.58×, Eviction +1.25×, Tensor caching +1.10×</a:t>
+              <a:t>    Scheduling +1.58배, Eviction +1.25배, Tensor caching +1.10배</a:t>
             </a:r>
           </a:p>
           <a:p>
@@ -13359,7 +13359,7 @@
                 <a:latin typeface="Calibri"/>
                 <a:ea typeface="맑은 고딕"/>
               </a:rPr>
-              <a:t>Figure 1. 각 라운드의 답변은 이전 라운드들의 KV tensor에 의존</a:t>
+              <a:t>Figure 1. 각 라운드의 답변은 이전 라운드의 KV tensor를 참조한다</a:t>
             </a:r>
           </a:p>
         </p:txBody>
@@ -13426,7 +13426,7 @@
                 <a:latin typeface="Calibri"/>
                 <a:ea typeface="맑은 고딕"/>
               </a:rPr>
-              <a:t>Replika · Duolingo · 챗봇 — 사용자가 LLM과 번갈아 대화</a:t>
+              <a:t>Replika · Duolingo · 챗봇 — 사용자와 LLM이 번갈아 주고받는 대화</a:t>
             </a:r>
           </a:p>
           <a:p>
@@ -13453,7 +13453,7 @@
                 <a:latin typeface="Calibri"/>
                 <a:ea typeface="맑은 고딕"/>
               </a:rPr>
-              <a:t>사용자 평균 22.4 라운드 (P90 = 45 라운드)</a:t>
+              <a:t>사용자 한 명당 평균 22.4 라운드 (P90 = 45 라운드)</a:t>
             </a:r>
           </a:p>
           <a:p>
@@ -13480,7 +13480,7 @@
                 <a:latin typeface="Calibri"/>
                 <a:ea typeface="맑은 고딕"/>
               </a:rPr>
-              <a:t>대화 지속 시간 평균 분 단위, 길게는 60분 이상</a:t>
+              <a:t>한 대화 지속 시간 평균 수 분, 길면 60분 이상</a:t>
             </a:r>
           </a:p>
           <a:p>
@@ -13524,7 +13524,7 @@
                 <a:latin typeface="Calibri"/>
                 <a:ea typeface="맑은 고딕"/>
               </a:rPr>
-              <a:t>라운드 N 답변 = 0..N-1 라운드 KV 재사용</a:t>
+              <a:t>N번째 라운드 답변 = 0~N-1 라운드의 KV를 재사용</a:t>
             </a:r>
           </a:p>
           <a:p>
@@ -13551,7 +13551,7 @@
                 <a:latin typeface="Calibri"/>
                 <a:ea typeface="맑은 고딕"/>
               </a:rPr>
-              <a:t>재계산 = GPU FLOPs 낭비 → caching 필수</a:t>
+              <a:t>재계산은 GPU FLOPs 낭비 → caching이 필수</a:t>
             </a:r>
           </a:p>
         </p:txBody>
@@ -13779,7 +13779,7 @@
                 <a:latin typeface="Calibri"/>
                 <a:ea typeface="맑은 고딕"/>
               </a:rPr>
-              <a:t>compute ↔ storage 양방향 정보 공유라는 새로운 설계 원칙 제시</a:t>
+              <a:t>compute와 storage 사이 양방향 정보 공유라는 설계 원칙을 제시</a:t>
             </a:r>
           </a:p>
           <a:p>
@@ -13806,7 +13806,7 @@
                 <a:latin typeface="Calibri"/>
                 <a:ea typeface="맑은 고딕"/>
               </a:rPr>
-              <a:t>I/O-aware scheduling + previous-answer-based eviction의 두 메커니즘</a:t>
+              <a:t>I/O-aware scheduling과 previous-answer-based eviction 두 메커니즘</a:t>
             </a:r>
           </a:p>
           <a:p>
@@ -13833,7 +13833,7 @@
                 <a:latin typeface="Calibri"/>
                 <a:ea typeface="맑은 고딕"/>
               </a:rPr>
-              <a:t>MHA에서 storage-efficient tensor 캐싱으로 공간/연산 trade-off</a:t>
+              <a:t>MHA에서 storage-efficient tensor 캐싱으로 공간과 연산을 함께 절약</a:t>
             </a:r>
           </a:p>
           <a:p>
@@ -13860,7 +13860,7 @@
                 <a:latin typeface="Calibri"/>
                 <a:ea typeface="맑은 고딕"/>
               </a:rPr>
-              <a:t>5 모델 평균 3.58× latency / 1.83× throughput, optimal 근접</a:t>
+              <a:t>모델 5종 평균 latency 3.58배, throughput 1.83배 — Optimal에 근접</a:t>
             </a:r>
           </a:p>
         </p:txBody>
@@ -13973,7 +13973,7 @@
                 <a:latin typeface="Calibri"/>
                 <a:ea typeface="맑은 고딕"/>
               </a:rPr>
-              <a:t>단일 사용자 대화 안에서의 KV 재사용만 다룸 — cross-user 공유는 범위 밖</a:t>
+              <a:t>한 사용자 대화 내부의 KV 재사용만 다룸 — 사용자 간 공유는 범위 밖</a:t>
             </a:r>
           </a:p>
           <a:p>
@@ -14000,7 +14000,7 @@
                 <a:latin typeface="Calibri"/>
                 <a:ea typeface="맑은 고딕"/>
               </a:rPr>
-              <a:t>GQA에서는 storage-efficient tensor 효과가 사라짐</a:t>
+              <a:t>GQA에서는 storage-efficient tensor의 이점이 사라짐</a:t>
             </a:r>
           </a:p>
           <a:p>
@@ -14027,7 +14027,7 @@
                 <a:latin typeface="Calibri"/>
                 <a:ea typeface="맑은 고딕"/>
               </a:rPr>
-              <a:t>ShareGPT 류 timestamp 부재 trace에선 eviction 효과가 약화</a:t>
+              <a:t>ShareGPT처럼 timestamp가 없는 trace에서는 eviction 효과가 약해짐</a:t>
             </a:r>
           </a:p>
           <a:p>
@@ -14054,7 +14054,7 @@
                 <a:latin typeface="Calibri"/>
                 <a:ea typeface="맑은 고딕"/>
               </a:rPr>
-              <a:t>단일 GPU 노드 평가 — disaggregated/멀티노드는 future work</a:t>
+              <a:t>단일 GPU 노드 평가 — disaggregated · 멀티노드는 future work</a:t>
             </a:r>
           </a:p>
         </p:txBody>
@@ -14167,7 +14167,7 @@
                 <a:latin typeface="Calibri"/>
                 <a:ea typeface="맑은 고딕"/>
               </a:rPr>
-              <a:t>“대화 시스템”의 사람-속도가 storage 정책에 신호로 활용 가능하다</a:t>
+              <a:t>대화 시스템에서 사용자가 글을 읽는 속도가 storage 정책의 유용한 신호가 된다</a:t>
             </a:r>
           </a:p>
           <a:p>
@@ -14194,7 +14194,7 @@
                 <a:latin typeface="Calibri"/>
                 <a:ea typeface="맑은 고딕"/>
               </a:rPr>
-              <a:t>고전 storage 기법(HRRN, Belady ghost cache)이 LLM에서 다시 빛난다</a:t>
+              <a:t>HRRN, Belady ghost cache 같은 고전 기법이 LLM 워크로드에서 다시 유효함을 보임</a:t>
             </a:r>
           </a:p>
           <a:p>
@@ -14221,7 +14221,7 @@
                 <a:latin typeface="Calibri"/>
                 <a:ea typeface="맑은 고딕"/>
               </a:rPr>
-              <a:t>ML serving + storage co-design 의 좋은 사례 — 후속 연구가 활발할 영역</a:t>
+              <a:t>ML serving과 storage의 co-design 사례 — 후속 연구가 활발해질 분야</a:t>
             </a:r>
           </a:p>
         </p:txBody>
@@ -14336,7 +14336,7 @@
                 <a:latin typeface="Calibri"/>
                 <a:ea typeface="맑은 고딕"/>
               </a:rPr>
-              <a:t>KV cache의 역할 — attention 재계산을 막는 핵심 자료구조</a:t>
+              <a:t>KV cache 역할 — attention 재계산을 피하는 핵심 자료구조</a:t>
             </a:r>
           </a:p>
         </p:txBody>
@@ -14422,7 +14422,7 @@
                 <a:latin typeface="Calibri"/>
                 <a:ea typeface="맑은 고딕"/>
               </a:rPr>
-              <a:t>Self-attention(요점)</a:t>
+              <a:t>Self-attention 요점</a:t>
             </a:r>
           </a:p>
           <a:p>
@@ -14473,7 +14473,7 @@
                 <a:latin typeface="Calibri"/>
                 <a:ea typeface="맑은 고딕"/>
               </a:rPr>
-              <a:t>▸ 과거 토큰의 K, V는 변하지 않음 → </a:t>
+              <a:t>▸ 과거 토큰의 K, V는 그대로 → </a:t>
             </a:r>
             <a:r>
               <a:rPr sz="1800" b="1" i="0">
@@ -14500,7 +14500,7 @@
                 <a:latin typeface="Calibri"/>
                 <a:ea typeface="맑은 고딕"/>
               </a:rPr>
-              <a:t>토큰 t개 · 레이어 L · 헤드 h · head_dim d 일 때</a:t>
+              <a:t>토큰 t개 · layer L · head h · head_dim d 일 때</a:t>
             </a:r>
           </a:p>
           <a:p>
@@ -14534,7 +14534,7 @@
                 <a:latin typeface="Calibri"/>
                 <a:ea typeface="맑은 고딕"/>
               </a:rPr>
-              <a:t>예: OPT-13B, 2,048 토큰 → 약 0.78 GB / user</a:t>
+              <a:t>예: OPT-13B에서 2,048 토큰이면 약 0.78 GB / user</a:t>
             </a:r>
           </a:p>
         </p:txBody>
@@ -14574,7 +14574,7 @@
                 <a:latin typeface="Calibri"/>
                 <a:ea typeface="맑은 고딕"/>
               </a:rPr>
-              <a:t>왜 KV cache 인가</a:t>
+              <a:t>왜 KV cache가 필요한가</a:t>
             </a:r>
           </a:p>
           <a:p>
@@ -14601,7 +14601,7 @@
                 <a:latin typeface="Calibri"/>
                 <a:ea typeface="맑은 고딕"/>
               </a:rPr>
-              <a:t>재계산을 안 하면 </a:t>
+              <a:t>재계산을 피하면 </a:t>
             </a:r>
             <a:r>
               <a:rPr sz="1800" b="1" i="0">
@@ -14611,7 +14611,7 @@
                 <a:latin typeface="Calibri"/>
                 <a:ea typeface="맑은 고딕"/>
               </a:rPr>
-              <a:t>응답 latency가 곧바로 줄어든다</a:t>
+              <a:t>응답 latency가 그만큼 짧아진다</a:t>
             </a:r>
           </a:p>
           <a:p>
@@ -14638,7 +14638,7 @@
                 <a:latin typeface="Calibri"/>
                 <a:ea typeface="맑은 고딕"/>
               </a:rPr>
-              <a:t>저장 비용이 매우 큼 </a:t>
+              <a:t>저장 비용이 큼 </a:t>
             </a:r>
             <a:r>
               <a:rPr sz="1800" b="1" i="0">
@@ -14648,7 +14648,7 @@
                 <a:latin typeface="Calibri"/>
                 <a:ea typeface="맑은 고딕"/>
               </a:rPr>
-              <a:t>→ 효율적 관리가 시스템 설계의 1번 과제</a:t>
+              <a:t>→ 효율적 관리가 시스템 설계의 첫 과제</a:t>
             </a:r>
           </a:p>
           <a:p>
@@ -14675,7 +14675,7 @@
                 <a:latin typeface="Calibri"/>
                 <a:ea typeface="맑은 고딕"/>
               </a:rPr>
-              <a:t>vLLM, PagedAttention 류 가속 시스템도 </a:t>
+              <a:t>vLLM, PagedAttention 같은 가속 시스템도 </a:t>
             </a:r>
             <a:r>
               <a:rPr sz="1800" b="1" i="0">
@@ -14685,7 +14685,7 @@
                 <a:latin typeface="Calibri"/>
                 <a:ea typeface="맑은 고딕"/>
               </a:rPr>
-              <a:t>결국 KV cache 관리가 핵심</a:t>
+              <a:t>결국 KV cache 관리가 중심</a:t>
             </a:r>
           </a:p>
           <a:p>
@@ -14702,7 +14702,7 @@
                 <a:latin typeface="Calibri"/>
                 <a:ea typeface="맑은 고딕"/>
               </a:rPr>
-              <a:t>이번 논문의 KV는?</a:t>
+              <a:t>이 논문이 다루는 KV는?</a:t>
             </a:r>
           </a:p>
           <a:p>
@@ -14739,7 +14739,7 @@
                 <a:latin typeface="Calibri"/>
                 <a:ea typeface="맑은 고딕"/>
               </a:rPr>
-              <a:t>를 보존 — cross-user KV 공유는 범위 밖</a:t>
+              <a:t>를 보존 — 사용자 간 KV 공유는 범위 밖</a:t>
             </a:r>
           </a:p>
         </p:txBody>
@@ -14854,7 +14854,7 @@
                 <a:latin typeface="Calibri"/>
                 <a:ea typeface="맑은 고딕"/>
               </a:rPr>
-              <a:t>왜 GPU 메모리에 다 못 두는가</a:t>
+              <a:t>왜 GPU 메모리에 다 담을 수 없는가</a:t>
             </a:r>
           </a:p>
         </p:txBody>
@@ -14918,7 +14918,7 @@
                 <a:latin typeface="Calibri"/>
                 <a:ea typeface="맑은 고딕"/>
               </a:rPr>
-              <a:t>Figure 5. 사용자 도착률 vs 동시 캐시 KV 총량 (perf layer 200GB 기준)</a:t>
+              <a:t>Figure 5. 사용자 도착률 vs 동시 캐싱 KV 총량 (perf layer 200GB 기준)</a:t>
             </a:r>
           </a:p>
         </p:txBody>
@@ -14978,7 +14978,7 @@
                 <a:latin typeface="Calibri"/>
                 <a:ea typeface="맑은 고딕"/>
               </a:rPr>
-              <a:t>→ KV가 곧바로 GPU 메모리를 점유</a:t>
+              <a:t>→ KV가 GPU 메모리를 곧바로 채움</a:t>
             </a:r>
           </a:p>
           <a:p>
@@ -15005,7 +15005,7 @@
                 <a:latin typeface="Calibri"/>
                 <a:ea typeface="맑은 고딕"/>
               </a:rPr>
-              <a:t>30 users/min 도착 시 </a:t>
+              <a:t>도착률 30 users/min에서 </a:t>
             </a:r>
             <a:r>
               <a:rPr sz="1800" b="0" i="0">
@@ -15015,7 +15015,7 @@
                 <a:latin typeface="Calibri"/>
                 <a:ea typeface="맑은 고딕"/>
               </a:rPr>
-              <a:t>OPT-13B 동시 캐시 KV ≈ 480 GB</a:t>
+              <a:t>OPT-13B의 동시 캐싱 KV ≈ 480 GB</a:t>
             </a:r>
           </a:p>
           <a:p>
@@ -15042,7 +15042,7 @@
                 <a:latin typeface="Calibri"/>
                 <a:ea typeface="맑은 고딕"/>
               </a:rPr>
-              <a:t>LLM 서버 host memory </a:t>
+              <a:t>LLM 서버의 host memory </a:t>
             </a:r>
             <a:r>
               <a:rPr sz="1800" b="0" i="0">
@@ -15052,7 +15052,7 @@
                 <a:latin typeface="Calibri"/>
                 <a:ea typeface="맑은 고딕"/>
               </a:rPr>
-              <a:t>≈ GPU mem 의 1.6–3.2×</a:t>
+              <a:t>≈ GPU 메모리의 1.6–3.2배</a:t>
             </a:r>
           </a:p>
           <a:p>
@@ -15079,7 +15079,7 @@
                 <a:latin typeface="Calibri"/>
                 <a:ea typeface="맑은 고딕"/>
               </a:rPr>
-              <a:t>→ host memory </a:t>
+              <a:t>→ host memory도 부족 </a:t>
             </a:r>
             <a:r>
               <a:rPr sz="1800" b="0" i="0">
@@ -15089,7 +15089,7 @@
                 <a:latin typeface="Calibri"/>
                 <a:ea typeface="맑은 고딕"/>
               </a:rPr>
-              <a:t>도 부족, capacity SSD 도 사용해야 함</a:t>
+              <a:t>→ capacity SSD까지 같이 써야 함</a:t>
             </a:r>
           </a:p>
         </p:txBody>
@@ -15175,7 +15175,7 @@
                 <a:latin typeface="Calibri"/>
                 <a:ea typeface="맑은 고딕"/>
               </a:rPr>
-              <a:t>동시 캐시 KV는 perf layer를 </a:t>
+              <a:t>동시 캐싱 KV가 perf layer를 </a:t>
             </a:r>
             <a:r>
               <a:rPr sz="2000" b="1" i="0">
@@ -15185,7 +15185,7 @@
                 <a:latin typeface="Calibri"/>
                 <a:ea typeface="맑은 고딕"/>
               </a:rPr>
-              <a:t>최대 3.91×</a:t>
+              <a:t>최대 3.91배</a:t>
             </a:r>
             <a:r>
               <a:rPr sz="2000" b="0" i="0">
@@ -15212,7 +15212,7 @@
                 <a:latin typeface="Calibri"/>
                 <a:ea typeface="맑은 고딕"/>
               </a:rPr>
-              <a:t>→ 2-tier (host memory + SSD) 캐싱이 필연</a:t>
+              <a:t>→ 2-tier (host memory + SSD) 캐싱이 불가피</a:t>
             </a:r>
           </a:p>
         </p:txBody>
@@ -15391,7 +15391,7 @@
                 <a:latin typeface="Calibri"/>
                 <a:ea typeface="맑은 고딕"/>
               </a:rPr>
-              <a:t>Figure 2. Compute engine ↔ two-tier storage 구조</a:t>
+              <a:t>Figure 2. Compute engine과 two-tier storage의 구조</a:t>
             </a:r>
           </a:p>
         </p:txBody>
@@ -15448,7 +15448,7 @@
                 <a:latin typeface="Calibri"/>
                 <a:ea typeface="맑은 고딕"/>
               </a:rPr>
-              <a:t>Host DRAM, 빠르지만 용량 한정</a:t>
+              <a:t>Host DRAM — 빠르지만 용량이 작음</a:t>
             </a:r>
           </a:p>
           <a:p>
@@ -15482,7 +15482,7 @@
                 <a:latin typeface="Calibri"/>
                 <a:ea typeface="맑은 고딕"/>
               </a:rPr>
-              <a:t>SSD (RAID-5, 본 논문은 1.5 GB/s)</a:t>
+              <a:t>SSD (RAID-5, 이 논문은 1.5 GB/s)</a:t>
             </a:r>
           </a:p>
           <a:p>
@@ -15499,7 +15499,7 @@
                 <a:latin typeface="Calibri"/>
                 <a:ea typeface="맑은 고딕"/>
               </a:rPr>
-              <a:t>대표 선행 시스템</a:t>
+              <a:t>주요 선행 시스템</a:t>
             </a:r>
           </a:p>
           <a:p>
@@ -15696,7 +15696,7 @@
                 <a:latin typeface="Calibri"/>
                 <a:ea typeface="맑은 고딕"/>
               </a:rPr>
-              <a:t>쓰기는 백그라운드, 그러나 읽기(load)는 </a:t>
+              <a:t>쓰기는 백그라운드로 빠졌지만, 읽기(load)는 여전히 </a:t>
             </a:r>
             <a:r>
               <a:rPr sz="1800" b="1" i="0">
@@ -15706,7 +15706,7 @@
                 <a:latin typeface="Calibri"/>
                 <a:ea typeface="맑은 고딕"/>
               </a:rPr>
-              <a:t>critical path 위에 놓여 있다</a:t>
+              <a:t>critical path 위에 남아 있다</a:t>
             </a:r>
           </a:p>
         </p:txBody>
@@ -15821,7 +15821,7 @@
                 <a:latin typeface="Calibri"/>
                 <a:ea typeface="맑은 고딕"/>
               </a:rPr>
-              <a:t>그러나 KV loading 자체가 병목 — 이상치와의 큰 격차</a:t>
+              <a:t>KV loading 자체가 병목 — 이상치 대비 큰 격차</a:t>
             </a:r>
           </a:p>
         </p:txBody>
@@ -15885,7 +15885,7 @@
                 <a:latin typeface="Calibri"/>
                 <a:ea typeface="맑은 고딕"/>
               </a:rPr>
-              <a:t>Figure 3. KV recompute / 기존 cache / Ideal cache 의 latency 비교</a:t>
+              <a:t>Figure 3. KV 재계산 / 기존 cache / Ideal cache의 latency 비교</a:t>
             </a:r>
           </a:p>
         </p:txBody>
@@ -15976,7 +15976,7 @@
                 <a:latin typeface="Calibri"/>
                 <a:ea typeface="맑은 고딕"/>
               </a:rPr>
-              <a:t>▸ 응답 latency가 </a:t>
+              <a:t>▸ 응답 latency </a:t>
             </a:r>
             <a:r>
               <a:rPr sz="1800" b="1" i="0">
@@ -15986,7 +15986,7 @@
                 <a:latin typeface="Calibri"/>
                 <a:ea typeface="맑은 고딕"/>
               </a:rPr>
-              <a:t>최대 3.8× 증가</a:t>
+              <a:t>최대 3.8배 증가</a:t>
             </a:r>
           </a:p>
           <a:p>
@@ -16003,7 +16003,7 @@
                 <a:latin typeface="Calibri"/>
                 <a:ea typeface="맑은 고딕"/>
               </a:rPr>
-              <a:t>▸ throughput은 </a:t>
+              <a:t>▸ throughput </a:t>
             </a:r>
             <a:r>
               <a:rPr sz="1800" b="1" i="0">
@@ -16013,7 +16013,7 @@
                 <a:latin typeface="Calibri"/>
                 <a:ea typeface="맑은 고딕"/>
               </a:rPr>
-              <a:t>최대 2.0× 감소</a:t>
+              <a:t>최대 2.0배 감소</a:t>
             </a:r>
           </a:p>
           <a:p>
@@ -16030,7 +16030,7 @@
                 <a:latin typeface="Calibri"/>
                 <a:ea typeface="맑은 고딕"/>
               </a:rPr>
-              <a:t>Ideal vs reality?</a:t>
+              <a:t>Ideal vs 현실</a:t>
             </a:r>
           </a:p>
           <a:p>
@@ -16047,7 +16047,7 @@
                 <a:latin typeface="Calibri"/>
                 <a:ea typeface="맑은 고딕"/>
               </a:rPr>
-              <a:t>Ideal = 모든 KV가 perf layer에 있다고 가정한 동일 시스템.</a:t>
+              <a:t>Ideal = 모든 KV가 perf layer에 있다고 가정한 동일 시스템</a:t>
             </a:r>
           </a:p>
           <a:p>
@@ -16064,7 +16064,7 @@
                 <a:latin typeface="Calibri"/>
                 <a:ea typeface="맑은 고딕"/>
               </a:rPr>
-              <a:t>이 격차의 원인을 분석하는 것이 본 논문의 출발점이다.</a:t>
+              <a:t>이 격차의 원인을 풀어내는 것이 이 논문의 출발점이다.</a:t>
             </a:r>
           </a:p>
         </p:txBody>
@@ -16179,7 +16179,7 @@
                 <a:latin typeface="Calibri"/>
                 <a:ea typeface="맑은 고딕"/>
               </a:rPr>
-              <a:t>워크로드 — 백만 라운드 실서비스 인터랙티브 대화 trace</a:t>
+              <a:t>워크로드 — 100만 라운드 규모의 실서비스 대화 trace</a:t>
             </a:r>
           </a:p>
         </p:txBody>
@@ -16300,7 +16300,7 @@
                 <a:latin typeface="Calibri"/>
                 <a:ea typeface="맑은 고딕"/>
               </a:rPr>
-              <a:t>China Telecom · 1M+ 라운드 · user timestamp 보존</a:t>
+              <a:t>China Telecom · 100만+ 라운드 · 사용자 timestamp 포함</a:t>
             </a:r>
           </a:p>
           <a:p>
@@ -16317,7 +16317,7 @@
                 <a:latin typeface="Calibri"/>
                 <a:ea typeface="맑은 고딕"/>
               </a:rPr>
-              <a:t>ShareGPT vs Mooncake와의 차이</a:t>
+              <a:t>ShareGPT · Mooncake와의 차이</a:t>
             </a:r>
           </a:p>
           <a:p>
@@ -16344,7 +16344,7 @@
                 <a:latin typeface="Calibri"/>
                 <a:ea typeface="맑은 고딕"/>
               </a:rPr>
-              <a:t>ShareGPT: 5.7 라운드 — interactive 분석엔 짧음</a:t>
+              <a:t>ShareGPT: 5.7 라운드 — 인터랙티브 분석엔 짧음</a:t>
             </a:r>
           </a:p>
           <a:p>
@@ -16371,7 +16371,7 @@
                 <a:latin typeface="Calibri"/>
                 <a:ea typeface="맑은 고딕"/>
               </a:rPr>
-              <a:t>Mooncake: 12k+ 토큰 — 길지만 대화 패턴 부재</a:t>
+              <a:t>Mooncake: 12k+ 토큰 — 길지만 대화 패턴 없음</a:t>
             </a:r>
           </a:p>
           <a:p>
@@ -16398,7 +16398,7 @@
                 <a:latin typeface="Calibri"/>
                 <a:ea typeface="맑은 고딕"/>
               </a:rPr>
-              <a:t>본 trace: 22.4 라운드 / 36 토큰 — interactive 부합</a:t>
+              <a:t>이 trace: 22.4 라운드 / 36 토큰 — 인터랙티브 워크로드에 잘 맞음</a:t>
             </a:r>
           </a:p>
         </p:txBody>
@@ -16438,7 +16438,7 @@
                 <a:latin typeface="Calibri"/>
                 <a:ea typeface="맑은 고딕"/>
               </a:rPr>
-              <a:t>이어지는 세 슬라이드 →  </a:t>
+              <a:t>이어지는 세 슬라이드에서 다룰 내용  →  </a:t>
             </a:r>
             <a:r>
               <a:rPr sz="2200" b="1" i="0">
@@ -16563,7 +16563,7 @@
                 <a:latin typeface="Calibri"/>
                 <a:ea typeface="맑은 고딕"/>
               </a:rPr>
-              <a:t>Observation 1 — 동시 캐시 KV 양이 perf layer를 크게 초과</a:t>
+              <a:t>Observation 1 — 동시 캐싱 KV가 perf layer를 크게 초과</a:t>
             </a:r>
           </a:p>
         </p:txBody>
@@ -16627,7 +16627,7 @@
                 <a:latin typeface="Calibri"/>
                 <a:ea typeface="맑은 고딕"/>
               </a:rPr>
-              <a:t>Figure 5. 사용자 도착률 vs 동시 캐시 KV 총량 / 동시 사용자 수</a:t>
+              <a:t>Figure 5. 사용자 도착률 vs 동시 캐싱 KV 총량 / 동시 사용자 수</a:t>
             </a:r>
           </a:p>
         </p:txBody>
@@ -16694,7 +16694,7 @@
                 <a:latin typeface="Calibri"/>
                 <a:ea typeface="맑은 고딕"/>
               </a:rPr>
-              <a:t>22.4 라운드 동안 KV 생존</a:t>
+              <a:t>한 사용자의 KV가 22.4 라운드 동안 살아 있음</a:t>
             </a:r>
           </a:p>
           <a:p>
@@ -16748,7 +16748,7 @@
                 <a:latin typeface="Calibri"/>
                 <a:ea typeface="맑은 고딕"/>
               </a:rPr>
-              <a:t>30 users/min ≈ 480 GB &gt; perf 200 GB</a:t>
+              <a:t>30 users/min에서 480 GB &gt; perf 200 GB</a:t>
             </a:r>
           </a:p>
           <a:p>
@@ -16792,7 +16792,7 @@
                 <a:latin typeface="Calibri"/>
                 <a:ea typeface="맑은 고딕"/>
               </a:rPr>
-              <a:t>perf layer 가 커도 결국 한계</a:t>
+              <a:t>perf layer를 키워도 결국 한계가 있음</a:t>
             </a:r>
           </a:p>
           <a:p>
@@ -16819,7 +16819,7 @@
                 <a:latin typeface="Calibri"/>
                 <a:ea typeface="맑은 고딕"/>
               </a:rPr>
-              <a:t>eviction 부실 → capacity layer 로 빈번히 fallback</a:t>
+              <a:t>eviction이 비효율적이면 capacity layer로 자주 떨어짐</a:t>
             </a:r>
           </a:p>
         </p:txBody>

--- a/Bidaw_seminar.pptx
+++ b/Bidaw_seminar.pptx
@@ -3233,7 +3233,7 @@
               </a:spcAft>
             </a:pPr>
             <a:r>
-              <a:rPr sz="3800" b="1" i="0">
+              <a:rPr sz="3800" b="1" i="0" lang="ko-KR" altLang="en-US" kern="0">
                 <a:solidFill>
                   <a:srgbClr val="1F2937"/>
                 </a:solidFill>
@@ -3250,7 +3250,7 @@
               </a:spcAft>
             </a:pPr>
             <a:r>
-              <a:rPr sz="3800" b="1" i="0">
+              <a:rPr sz="3800" b="1" i="0" lang="ko-KR" altLang="en-US" kern="0">
                 <a:solidFill>
                   <a:srgbClr val="1F2937"/>
                 </a:solidFill>
@@ -3267,7 +3267,7 @@
               </a:spcAft>
             </a:pPr>
             <a:r>
-              <a:rPr sz="2000" b="0" i="0">
+              <a:rPr sz="2000" b="0" i="0" lang="ko-KR" altLang="en-US" kern="0">
                 <a:solidFill>
                   <a:srgbClr val="6B7280"/>
                 </a:solidFill>
@@ -3307,7 +3307,7 @@
               </a:spcAft>
             </a:pPr>
             <a:r>
-              <a:rPr sz="1800" b="1" i="0">
+              <a:rPr sz="1800" b="1" i="0" lang="ko-KR" altLang="en-US" kern="0">
                 <a:solidFill>
                   <a:srgbClr val="1F2937"/>
                 </a:solidFill>
@@ -3317,7 +3317,7 @@
               <a:t>Shipeng Hu</a:t>
             </a:r>
             <a:r>
-              <a:rPr sz="1800" b="0" i="0">
+              <a:rPr sz="1800" b="0" i="0" lang="ko-KR" altLang="en-US" kern="0">
                 <a:solidFill>
                   <a:srgbClr val="1F2937"/>
                 </a:solidFill>
@@ -3334,7 +3334,7 @@
               </a:spcAft>
             </a:pPr>
             <a:r>
-              <a:rPr sz="1400" b="0" i="0">
+              <a:rPr sz="1400" b="0" i="0" lang="ko-KR" altLang="en-US" kern="0">
                 <a:solidFill>
                   <a:srgbClr val="6B7280"/>
                 </a:solidFill>
@@ -3374,7 +3374,7 @@
               </a:spcAft>
             </a:pPr>
             <a:r>
-              <a:rPr sz="1800" b="1" i="0">
+              <a:rPr sz="1800" b="1" i="0" lang="ko-KR" altLang="en-US" kern="0">
                 <a:solidFill>
                   <a:srgbClr val="6B7280"/>
                 </a:solidFill>
@@ -3391,7 +3391,7 @@
               </a:spcAft>
             </a:pPr>
             <a:r>
-              <a:rPr sz="1400" b="0" i="0">
+              <a:rPr sz="1400" b="0" i="0" lang="ko-KR" altLang="en-US" kern="0">
                 <a:solidFill>
                   <a:srgbClr val="6B7280"/>
                 </a:solidFill>
@@ -3449,7 +3449,7 @@
               </a:spcAft>
             </a:pPr>
             <a:r>
-              <a:rPr sz="1200" b="1" i="0">
+              <a:rPr sz="1200" b="1" i="0" lang="ko-KR" altLang="en-US" kern="0">
                 <a:solidFill>
                   <a:srgbClr val="6B7280"/>
                 </a:solidFill>
@@ -3466,7 +3466,7 @@
               </a:spcAft>
             </a:pPr>
             <a:r>
-              <a:rPr sz="2800" b="1" i="0">
+              <a:rPr sz="2800" b="1" i="0" lang="ko-KR" altLang="en-US" kern="0">
                 <a:solidFill>
                   <a:srgbClr val="1F2937"/>
                 </a:solidFill>
@@ -3530,7 +3530,7 @@
               </a:spcAft>
             </a:pPr>
             <a:r>
-              <a:rPr sz="1000" b="0" i="1">
+              <a:rPr sz="1000" b="0" i="1" lang="ko-KR" altLang="en-US" kern="0">
                 <a:solidFill>
                   <a:srgbClr val="6B7280"/>
                 </a:solidFill>
@@ -3570,7 +3570,7 @@
               </a:spcAft>
             </a:pPr>
             <a:r>
-              <a:rPr sz="1800" b="1" i="0">
+              <a:rPr sz="1800" b="1" i="0" lang="ko-KR" altLang="en-US" kern="0">
                 <a:solidFill>
                   <a:srgbClr val="1F2937"/>
                 </a:solidFill>
@@ -3587,7 +3587,7 @@
               </a:spcAft>
             </a:pPr>
             <a:r>
-              <a:rPr sz="1400" b="0" i="0">
+              <a:rPr sz="1400" b="0" i="0" lang="ko-KR" altLang="en-US" kern="0">
                 <a:solidFill>
                   <a:srgbClr val="1F2937"/>
                 </a:solidFill>
@@ -3597,7 +3597,7 @@
               <a:t>두 access 사이에 접근된 </a:t>
             </a:r>
             <a:r>
-              <a:rPr sz="1400" b="1" i="0">
+              <a:rPr sz="1400" b="1" i="0" lang="ko-KR" altLang="en-US" kern="0">
                 <a:solidFill>
                   <a:srgbClr val="1F2937"/>
                 </a:solidFill>
@@ -3614,7 +3614,7 @@
               </a:spcAft>
             </a:pPr>
             <a:r>
-              <a:rPr sz="1800" b="1" i="0">
+              <a:rPr sz="1800" b="1" i="0" lang="ko-KR" altLang="en-US" kern="0">
                 <a:solidFill>
                   <a:srgbClr val="1F2937"/>
                 </a:solidFill>
@@ -3631,7 +3631,7 @@
               </a:spcAft>
             </a:pPr>
             <a:r>
-              <a:rPr sz="1800" b="1" i="0">
+              <a:rPr sz="1800" b="1" i="0" lang="ko-KR" altLang="en-US" kern="0">
                 <a:solidFill>
                   <a:srgbClr val="D9352A"/>
                 </a:solidFill>
@@ -3641,34 +3641,34 @@
               <a:t>▸ </a:t>
             </a:r>
             <a:r>
-              <a:rPr sz="1700" b="0" i="0">
-                <a:solidFill>
-                  <a:srgbClr val="1F2937"/>
-                </a:solidFill>
-                <a:latin typeface="Calibri"/>
-                <a:ea typeface="맑은 고딕"/>
-              </a:rPr>
-              <a:t>80% access </a:t>
-            </a:r>
-            <a:r>
-              <a:rPr sz="1700" b="1" i="0">
-                <a:solidFill>
-                  <a:srgbClr val="1F2937"/>
-                </a:solidFill>
-                <a:latin typeface="Calibri"/>
-                <a:ea typeface="맑은 고딕"/>
-              </a:rPr>
-              <a:t>&gt;  perf 200 GB</a:t>
-            </a:r>
-          </a:p>
-          <a:p>
-            <a:pPr algn="l">
-              <a:spcAft>
-                <a:spcPts val="400"/>
-              </a:spcAft>
-            </a:pPr>
-            <a:r>
-              <a:rPr sz="1800" b="1" i="0">
+              <a:rPr sz="1700" b="0" i="0" lang="ko-KR" altLang="en-US" kern="0">
+                <a:solidFill>
+                  <a:srgbClr val="1F2937"/>
+                </a:solidFill>
+                <a:latin typeface="Calibri"/>
+                <a:ea typeface="맑은 고딕"/>
+              </a:rPr>
+              <a:t>전체 KV access의 80%가 </a:t>
+            </a:r>
+            <a:r>
+              <a:rPr sz="1700" b="1" i="0" lang="ko-KR" altLang="en-US" kern="0">
+                <a:solidFill>
+                  <a:srgbClr val="1F2937"/>
+                </a:solidFill>
+                <a:latin typeface="Calibri"/>
+                <a:ea typeface="맑은 고딕"/>
+              </a:rPr>
+              <a:t>perf layer(200 GB)를 초과</a:t>
+            </a:r>
+          </a:p>
+          <a:p>
+            <a:pPr algn="l">
+              <a:spcAft>
+                <a:spcPts val="400"/>
+              </a:spcAft>
+            </a:pPr>
+            <a:r>
+              <a:rPr sz="1800" b="1" i="0" lang="ko-KR" altLang="en-US" kern="0">
                 <a:solidFill>
                   <a:srgbClr val="D9352A"/>
                 </a:solidFill>
@@ -3678,34 +3678,34 @@
               <a:t>▸ </a:t>
             </a:r>
             <a:r>
-              <a:rPr sz="1700" b="0" i="0">
-                <a:solidFill>
-                  <a:srgbClr val="1F2937"/>
-                </a:solidFill>
-                <a:latin typeface="Calibri"/>
-                <a:ea typeface="맑은 고딕"/>
-              </a:rPr>
-              <a:t>정책 무관 </a:t>
-            </a:r>
-            <a:r>
-              <a:rPr sz="1700" b="1" i="0">
-                <a:solidFill>
-                  <a:srgbClr val="1F2937"/>
-                </a:solidFill>
-                <a:latin typeface="Calibri"/>
-                <a:ea typeface="맑은 고딕"/>
-              </a:rPr>
-              <a:t>hit ≈ 20 %</a:t>
-            </a:r>
-          </a:p>
-          <a:p>
-            <a:pPr algn="l">
-              <a:spcAft>
-                <a:spcPts val="400"/>
-              </a:spcAft>
-            </a:pPr>
-            <a:r>
-              <a:rPr sz="1800" b="1" i="0">
+              <a:rPr sz="1700" b="0" i="0" lang="ko-KR" altLang="en-US" kern="0">
+                <a:solidFill>
+                  <a:srgbClr val="1F2937"/>
+                </a:solidFill>
+                <a:latin typeface="Calibri"/>
+                <a:ea typeface="맑은 고딕"/>
+              </a:rPr>
+              <a:t>어떤 정책이든 </a:t>
+            </a:r>
+            <a:r>
+              <a:rPr sz="1700" b="1" i="0" lang="ko-KR" altLang="en-US" kern="0">
+                <a:solidFill>
+                  <a:srgbClr val="1F2937"/>
+                </a:solidFill>
+                <a:latin typeface="Calibri"/>
+                <a:ea typeface="맑은 고딕"/>
+              </a:rPr>
+              <a:t>hit rate가 약 20% 수준</a:t>
+            </a:r>
+          </a:p>
+          <a:p>
+            <a:pPr algn="l">
+              <a:spcAft>
+                <a:spcPts val="400"/>
+              </a:spcAft>
+            </a:pPr>
+            <a:r>
+              <a:rPr sz="1800" b="1" i="0" lang="ko-KR" altLang="en-US" kern="0">
                 <a:solidFill>
                   <a:srgbClr val="D9352A"/>
                 </a:solidFill>
@@ -3715,51 +3715,51 @@
               <a:t>▸ </a:t>
             </a:r>
             <a:r>
-              <a:rPr sz="1700" b="0" i="0">
-                <a:solidFill>
-                  <a:srgbClr val="1F2937"/>
-                </a:solidFill>
-                <a:latin typeface="Calibri"/>
-                <a:ea typeface="맑은 고딕"/>
-              </a:rPr>
-              <a:t>perf 가 40 % 담아도 </a:t>
-            </a:r>
-            <a:r>
-              <a:rPr sz="1700" b="1" i="0">
-                <a:solidFill>
-                  <a:srgbClr val="1F2937"/>
-                </a:solidFill>
-                <a:latin typeface="Calibri"/>
-                <a:ea typeface="맑은 고딕"/>
-              </a:rPr>
-              <a:t>hit 절반 수준</a:t>
-            </a:r>
-          </a:p>
-          <a:p>
-            <a:pPr algn="l">
-              <a:spcAft>
-                <a:spcPts val="400"/>
-              </a:spcAft>
-            </a:pPr>
-            <a:r>
-              <a:rPr sz="1600" b="0" i="0">
-                <a:solidFill>
-                  <a:srgbClr val="1F2937"/>
-                </a:solidFill>
-                <a:latin typeface="Calibri"/>
-                <a:ea typeface="맑은 고딕"/>
-              </a:rPr>
-              <a:t>→ user 가 답 읽는 사이 </a:t>
-            </a:r>
-            <a:r>
-              <a:rPr sz="1600" b="0" i="1">
+              <a:rPr sz="1700" b="0" i="0" lang="ko-KR" altLang="en-US" kern="0">
+                <a:solidFill>
+                  <a:srgbClr val="1F2937"/>
+                </a:solidFill>
+                <a:latin typeface="Calibri"/>
+                <a:ea typeface="맑은 고딕"/>
+              </a:rPr>
+              <a:t>perf layer가 KV의 40%를 담아도 </a:t>
+            </a:r>
+            <a:r>
+              <a:rPr sz="1700" b="1" i="0" lang="ko-KR" altLang="en-US" kern="0">
+                <a:solidFill>
+                  <a:srgbClr val="1F2937"/>
+                </a:solidFill>
+                <a:latin typeface="Calibri"/>
+                <a:ea typeface="맑은 고딕"/>
+              </a:rPr>
+              <a:t>hit는 절반 수준</a:t>
+            </a:r>
+          </a:p>
+          <a:p>
+            <a:pPr algn="l">
+              <a:spcAft>
+                <a:spcPts val="400"/>
+              </a:spcAft>
+            </a:pPr>
+            <a:r>
+              <a:rPr sz="1600" b="0" i="0" lang="ko-KR" altLang="en-US" kern="0">
+                <a:solidFill>
+                  <a:srgbClr val="1F2937"/>
+                </a:solidFill>
+                <a:latin typeface="Calibri"/>
+                <a:ea typeface="맑은 고딕"/>
+              </a:rPr>
+              <a:t>→ 사용자가 답을 읽는 사이 </a:t>
+            </a:r>
+            <a:r>
+              <a:rPr sz="1600" b="0" i="1" lang="ko-KR" altLang="en-US" kern="0">
                 <a:solidFill>
                   <a:srgbClr val="6B7280"/>
                 </a:solidFill>
                 <a:latin typeface="Calibri"/>
                 <a:ea typeface="맑은 고딕"/>
               </a:rPr>
-              <a:t>다른 KV 끼어듦</a:t>
+              <a:t>다른 사용자의 KV가 끼어들기 때문</a:t>
             </a:r>
           </a:p>
         </p:txBody>
@@ -3792,7 +3792,7 @@
               </a:spcAft>
             </a:pPr>
             <a:r>
-              <a:rPr sz="1000" b="0" i="0">
+              <a:rPr sz="1000" b="0" i="0" lang="ko-KR" altLang="en-US" kern="0">
                 <a:solidFill>
                   <a:srgbClr val="6B7280"/>
                 </a:solidFill>
@@ -3850,7 +3850,7 @@
               </a:spcAft>
             </a:pPr>
             <a:r>
-              <a:rPr sz="1200" b="1" i="0">
+              <a:rPr sz="1200" b="1" i="0" lang="ko-KR" altLang="en-US" kern="0">
                 <a:solidFill>
                   <a:srgbClr val="6B7280"/>
                 </a:solidFill>
@@ -3867,7 +3867,7 @@
               </a:spcAft>
             </a:pPr>
             <a:r>
-              <a:rPr sz="2800" b="1" i="0">
+              <a:rPr sz="2800" b="1" i="0" lang="ko-KR" altLang="en-US" kern="0">
                 <a:solidFill>
                   <a:srgbClr val="1F2937"/>
                 </a:solidFill>
@@ -3931,14 +3931,14 @@
               </a:spcAft>
             </a:pPr>
             <a:r>
-              <a:rPr sz="1000" b="0" i="1">
+              <a:rPr sz="1000" b="0" i="1" lang="ko-KR" altLang="en-US" kern="0">
                 <a:solidFill>
                   <a:srgbClr val="6B7280"/>
                 </a:solidFill>
                 <a:latin typeface="Calibri"/>
                 <a:ea typeface="맑은 고딕"/>
               </a:rPr>
-              <a:t>Figure 7. 시간 구간별 KV loading time 의 변동계수 CV</a:t>
+              <a:t>Figure 7. 시간 구간별 KV loading time의 변동계수 CV</a:t>
             </a:r>
           </a:p>
         </p:txBody>
@@ -3995,7 +3995,7 @@
               </a:spcAft>
             </a:pPr>
             <a:r>
-              <a:rPr sz="1000" b="0" i="1">
+              <a:rPr sz="1000" b="0" i="1" lang="ko-KR" altLang="en-US" kern="0">
                 <a:solidFill>
                   <a:srgbClr val="6B7280"/>
                 </a:solidFill>
@@ -4035,7 +4035,7 @@
               </a:spcAft>
             </a:pPr>
             <a:r>
-              <a:rPr sz="2000" b="1" i="0">
+              <a:rPr sz="2000" b="1" i="0" lang="ko-KR" altLang="en-US" kern="0">
                 <a:solidFill>
                   <a:srgbClr val="1F2937"/>
                 </a:solidFill>
@@ -4052,7 +4052,7 @@
               </a:spcAft>
             </a:pPr>
             <a:r>
-              <a:rPr sz="1800" b="1" i="0">
+              <a:rPr sz="1800" b="1" i="0" lang="ko-KR" altLang="en-US" kern="0">
                 <a:solidFill>
                   <a:srgbClr val="D9352A"/>
                 </a:solidFill>
@@ -4062,74 +4062,74 @@
               <a:t>▸ </a:t>
             </a:r>
             <a:r>
-              <a:rPr sz="1800" b="0" i="0">
-                <a:solidFill>
-                  <a:srgbClr val="1F2937"/>
-                </a:solidFill>
-                <a:latin typeface="Calibri"/>
-                <a:ea typeface="맑은 고딕"/>
-              </a:rPr>
-              <a:t>host DRAM ↔ SSD </a:t>
-            </a:r>
-            <a:r>
-              <a:rPr sz="1800" b="1" i="0">
-                <a:solidFill>
-                  <a:srgbClr val="1F2937"/>
-                </a:solidFill>
-                <a:latin typeface="Calibri"/>
-                <a:ea typeface="맑은 고딕"/>
-              </a:rPr>
-              <a:t>bandwidth 격차</a:t>
-            </a:r>
-            <a:r>
-              <a:rPr sz="1800" b="0" i="0">
-                <a:solidFill>
-                  <a:srgbClr val="1F2937"/>
-                </a:solidFill>
-                <a:latin typeface="Calibri"/>
-                <a:ea typeface="맑은 고딕"/>
-              </a:rPr>
-              <a:t>  ·  요청별 </a:t>
-            </a:r>
-            <a:r>
-              <a:rPr sz="1800" b="1" i="0">
-                <a:solidFill>
-                  <a:srgbClr val="1F2937"/>
-                </a:solidFill>
-                <a:latin typeface="Calibri"/>
-                <a:ea typeface="맑은 고딕"/>
-              </a:rPr>
-              <a:t>KV size 가 수십 MB ~ 수백 MB</a:t>
-            </a:r>
-            <a:r>
-              <a:rPr sz="1800" b="0" i="0">
-                <a:solidFill>
-                  <a:srgbClr val="1F2937"/>
-                </a:solidFill>
-                <a:latin typeface="Calibri"/>
-                <a:ea typeface="맑은 고딕"/>
-              </a:rPr>
-              <a:t>  ·  </a:t>
-            </a:r>
-            <a:r>
-              <a:rPr sz="1800" b="1" i="0">
+              <a:rPr sz="1800" b="0" i="0" lang="ko-KR" altLang="en-US" kern="0">
+                <a:solidFill>
+                  <a:srgbClr val="1F2937"/>
+                </a:solidFill>
+                <a:latin typeface="Calibri"/>
+                <a:ea typeface="맑은 고딕"/>
+              </a:rPr>
+              <a:t>host DRAM과 SSD 사이의 </a:t>
+            </a:r>
+            <a:r>
+              <a:rPr sz="1800" b="1" i="0" lang="ko-KR" altLang="en-US" kern="0">
+                <a:solidFill>
+                  <a:srgbClr val="1F2937"/>
+                </a:solidFill>
+                <a:latin typeface="Calibri"/>
+                <a:ea typeface="맑은 고딕"/>
+              </a:rPr>
+              <a:t>bandwidth 차이</a:t>
+            </a:r>
+            <a:r>
+              <a:rPr sz="1800" b="0" i="0" lang="ko-KR" altLang="en-US" kern="0">
+                <a:solidFill>
+                  <a:srgbClr val="1F2937"/>
+                </a:solidFill>
+                <a:latin typeface="Calibri"/>
+                <a:ea typeface="맑은 고딕"/>
+              </a:rPr>
+              <a:t>   ·   요청마다 </a:t>
+            </a:r>
+            <a:r>
+              <a:rPr sz="1800" b="1" i="0" lang="ko-KR" altLang="en-US" kern="0">
+                <a:solidFill>
+                  <a:srgbClr val="1F2937"/>
+                </a:solidFill>
+                <a:latin typeface="Calibri"/>
+                <a:ea typeface="맑은 고딕"/>
+              </a:rPr>
+              <a:t>KV size가 수십 MB ~ 수백 MB</a:t>
+            </a:r>
+            <a:r>
+              <a:rPr sz="1800" b="0" i="0" lang="ko-KR" altLang="en-US" kern="0">
+                <a:solidFill>
+                  <a:srgbClr val="1F2937"/>
+                </a:solidFill>
+                <a:latin typeface="Calibri"/>
+                <a:ea typeface="맑은 고딕"/>
+              </a:rPr>
+              <a:t>   ·   </a:t>
+            </a:r>
+            <a:r>
+              <a:rPr sz="1800" b="1" i="0" lang="ko-KR" altLang="en-US" kern="0">
                 <a:solidFill>
                   <a:srgbClr val="D9352A"/>
                 </a:solidFill>
                 <a:latin typeface="Calibri"/>
                 <a:ea typeface="맑은 고딕"/>
               </a:rPr>
-              <a:t>5초 윈도우에서도 CV &gt; 90 %</a:t>
-            </a:r>
-          </a:p>
-          <a:p>
-            <a:pPr algn="l">
-              <a:spcAft>
-                <a:spcPts val="400"/>
-              </a:spcAft>
-            </a:pPr>
-            <a:r>
-              <a:rPr sz="2000" b="1" i="0">
+              <a:t>5초 윈도우 안에서도 CV &gt; 90%</a:t>
+            </a:r>
+          </a:p>
+          <a:p>
+            <a:pPr algn="l">
+              <a:spcAft>
+                <a:spcPts val="400"/>
+              </a:spcAft>
+            </a:pPr>
+            <a:r>
+              <a:rPr sz="2000" b="1" i="0" lang="ko-KR" altLang="en-US" kern="0">
                 <a:solidFill>
                   <a:srgbClr val="1F2937"/>
                 </a:solidFill>
@@ -4139,24 +4139,24 @@
               <a:t>함의 — </a:t>
             </a:r>
             <a:r>
-              <a:rPr sz="2000" b="0" i="0">
-                <a:solidFill>
-                  <a:srgbClr val="1F2937"/>
-                </a:solidFill>
-                <a:latin typeface="Calibri"/>
-                <a:ea typeface="맑은 고딕"/>
-              </a:rPr>
-              <a:t>큰 KV 한 개가 </a:t>
-            </a:r>
-            <a:r>
-              <a:rPr sz="2000" b="1" i="0">
+              <a:rPr sz="2000" b="0" i="0" lang="ko-KR" altLang="en-US" kern="0">
+                <a:solidFill>
+                  <a:srgbClr val="1F2937"/>
+                </a:solidFill>
+                <a:latin typeface="Calibri"/>
+                <a:ea typeface="맑은 고딕"/>
+              </a:rPr>
+              <a:t>큰 KV 하나가 </a:t>
+            </a:r>
+            <a:r>
+              <a:rPr sz="2000" b="1" i="0" lang="ko-KR" altLang="en-US" kern="0">
                 <a:solidFill>
                   <a:srgbClr val="D9352A"/>
                 </a:solidFill>
                 <a:latin typeface="Calibri"/>
                 <a:ea typeface="맑은 고딕"/>
               </a:rPr>
-              <a:t>뒤따르는 작은 KV 까지 GPU idle 로 만든다</a:t>
+              <a:t>뒤따르는 작은 KV들까지 GPU를 idle 상태로 만든다</a:t>
             </a:r>
           </a:p>
         </p:txBody>
@@ -4189,7 +4189,7 @@
               </a:spcAft>
             </a:pPr>
             <a:r>
-              <a:rPr sz="1000" b="0" i="0">
+              <a:rPr sz="1000" b="0" i="0" lang="ko-KR" altLang="en-US" kern="0">
                 <a:solidFill>
                   <a:srgbClr val="6B7280"/>
                 </a:solidFill>
@@ -4247,7 +4247,7 @@
               </a:spcAft>
             </a:pPr>
             <a:r>
-              <a:rPr sz="1200" b="1" i="0">
+              <a:rPr sz="1200" b="1" i="0" lang="ko-KR" altLang="en-US" kern="0">
                 <a:solidFill>
                   <a:srgbClr val="6B7280"/>
                 </a:solidFill>
@@ -4264,7 +4264,7 @@
               </a:spcAft>
             </a:pPr>
             <a:r>
-              <a:rPr sz="2800" b="1" i="0">
+              <a:rPr sz="2800" b="1" i="0" lang="ko-KR" altLang="en-US" kern="0">
                 <a:solidFill>
                   <a:srgbClr val="1F2937"/>
                 </a:solidFill>
@@ -4350,7 +4350,7 @@
               </a:spcAft>
             </a:pPr>
             <a:r>
-              <a:rPr sz="2000" b="1" i="0">
+              <a:rPr sz="2000" b="1" i="0" lang="ko-KR" altLang="en-US" kern="0">
                 <a:solidFill>
                   <a:srgbClr val="1F2937"/>
                 </a:solidFill>
@@ -4367,7 +4367,7 @@
               </a:spcAft>
             </a:pPr>
             <a:r>
-              <a:rPr sz="1800" b="0" i="0">
+              <a:rPr sz="1800" b="0" i="0" lang="ko-KR" altLang="en-US" kern="0">
                 <a:solidFill>
                   <a:srgbClr val="1F2937"/>
                 </a:solidFill>
@@ -4384,7 +4384,7 @@
               </a:spcAft>
             </a:pPr>
             <a:r>
-              <a:rPr sz="1800" b="0" i="0">
+              <a:rPr sz="1800" b="0" i="0" lang="ko-KR" altLang="en-US" kern="0">
                 <a:solidFill>
                   <a:srgbClr val="1F2937"/>
                 </a:solidFill>
@@ -4401,7 +4401,7 @@
               </a:spcAft>
             </a:pPr>
             <a:r>
-              <a:rPr sz="1800" b="0" i="1">
+              <a:rPr sz="1800" b="0" i="1" lang="ko-KR" altLang="en-US" kern="0">
                 <a:solidFill>
                   <a:srgbClr val="D9352A"/>
                 </a:solidFill>
@@ -4487,7 +4487,7 @@
               </a:spcAft>
             </a:pPr>
             <a:r>
-              <a:rPr sz="2000" b="1" i="0">
+              <a:rPr sz="2000" b="1" i="0" lang="ko-KR" altLang="en-US" kern="0">
                 <a:solidFill>
                   <a:srgbClr val="1F2937"/>
                 </a:solidFill>
@@ -4504,7 +4504,7 @@
               </a:spcAft>
             </a:pPr>
             <a:r>
-              <a:rPr sz="1800" b="0" i="0">
+              <a:rPr sz="1800" b="0" i="0" lang="ko-KR" altLang="en-US" kern="0">
                 <a:solidFill>
                   <a:srgbClr val="1F2937"/>
                 </a:solidFill>
@@ -4521,7 +4521,7 @@
               </a:spcAft>
             </a:pPr>
             <a:r>
-              <a:rPr sz="1800" b="0" i="0">
+              <a:rPr sz="1800" b="0" i="0" lang="ko-KR" altLang="en-US" kern="0">
                 <a:solidFill>
                   <a:srgbClr val="1F2937"/>
                 </a:solidFill>
@@ -4538,7 +4538,7 @@
               </a:spcAft>
             </a:pPr>
             <a:r>
-              <a:rPr sz="1800" b="0" i="1">
+              <a:rPr sz="1800" b="0" i="1" lang="ko-KR" altLang="en-US" kern="0">
                 <a:solidFill>
                   <a:srgbClr val="D9352A"/>
                 </a:solidFill>
@@ -4624,7 +4624,7 @@
               </a:spcAft>
             </a:pPr>
             <a:r>
-              <a:rPr sz="1800" b="0" i="0">
+              <a:rPr sz="1800" b="0" i="0" lang="ko-KR" altLang="en-US" kern="0">
                 <a:solidFill>
                   <a:srgbClr val="1F2937"/>
                 </a:solidFill>
@@ -4634,7 +4634,7 @@
               <a:t>문제는 둘 다 </a:t>
             </a:r>
             <a:r>
-              <a:rPr sz="1800" b="1" i="0">
+              <a:rPr sz="1800" b="1" i="0" lang="ko-KR" altLang="en-US" kern="0">
                 <a:solidFill>
                   <a:srgbClr val="1F2937"/>
                 </a:solidFill>
@@ -4651,7 +4651,7 @@
               </a:spcAft>
             </a:pPr>
             <a:r>
-              <a:rPr sz="1500" b="0" i="0">
+              <a:rPr sz="1500" b="0" i="0" lang="ko-KR" altLang="en-US" kern="0">
                 <a:solidFill>
                   <a:srgbClr val="6B7280"/>
                 </a:solidFill>
@@ -4661,7 +4661,7 @@
               <a:t>Bidaw의 가설: </a:t>
             </a:r>
             <a:r>
-              <a:rPr sz="1500" b="1" i="0">
+              <a:rPr sz="1500" b="1" i="0" lang="ko-KR" altLang="en-US" kern="0">
                 <a:solidFill>
                   <a:srgbClr val="1F2937"/>
                 </a:solidFill>
@@ -4701,7 +4701,7 @@
               </a:spcAft>
             </a:pPr>
             <a:r>
-              <a:rPr sz="1000" b="0" i="0">
+              <a:rPr sz="1000" b="0" i="0" lang="ko-KR" altLang="en-US" kern="0">
                 <a:solidFill>
                   <a:srgbClr val="6B7280"/>
                 </a:solidFill>
@@ -4759,7 +4759,7 @@
               </a:spcAft>
             </a:pPr>
             <a:r>
-              <a:rPr sz="1200" b="1" i="0">
+              <a:rPr sz="1200" b="1" i="0" lang="ko-KR" altLang="en-US" kern="0">
                 <a:solidFill>
                   <a:srgbClr val="6B7280"/>
                 </a:solidFill>
@@ -4776,7 +4776,7 @@
               </a:spcAft>
             </a:pPr>
             <a:r>
-              <a:rPr sz="2800" b="1" i="0">
+              <a:rPr sz="2800" b="1" i="0" lang="ko-KR" altLang="en-US" kern="0">
                 <a:solidFill>
                   <a:srgbClr val="1F2937"/>
                 </a:solidFill>
@@ -4862,7 +4862,7 @@
               </a:spcAft>
             </a:pPr>
             <a:r>
-              <a:rPr sz="2000" b="1" i="0">
+              <a:rPr sz="2000" b="1" i="0" lang="ko-KR" altLang="en-US" kern="0">
                 <a:solidFill>
                   <a:srgbClr val="1F2937"/>
                 </a:solidFill>
@@ -4879,7 +4879,7 @@
               </a:spcAft>
             </a:pPr>
             <a:r>
-              <a:rPr sz="1800" b="0" i="0">
+              <a:rPr sz="1800" b="0" i="0" lang="ko-KR" altLang="en-US" kern="0">
                 <a:solidFill>
                   <a:srgbClr val="1F2937"/>
                 </a:solidFill>
@@ -4889,7 +4889,7 @@
               <a:t>이전 라운드의 </a:t>
             </a:r>
             <a:r>
-              <a:rPr sz="1800" b="1" i="0">
+              <a:rPr sz="1800" b="1" i="0" lang="ko-KR" altLang="en-US" kern="0">
                 <a:solidFill>
                   <a:srgbClr val="D9352A"/>
                 </a:solidFill>
@@ -4899,24 +4899,24 @@
               <a:t>model answer 길이</a:t>
             </a:r>
             <a:r>
-              <a:rPr sz="1800" b="0" i="0">
-                <a:solidFill>
-                  <a:srgbClr val="1F2937"/>
-                </a:solidFill>
-                <a:latin typeface="Calibri"/>
-                <a:ea typeface="맑은 고딕"/>
-              </a:rPr>
-              <a:t>를 storage 에 넘긴다</a:t>
-            </a:r>
-          </a:p>
-          <a:p>
-            <a:pPr algn="l">
-              <a:spcAft>
-                <a:spcPts val="400"/>
-              </a:spcAft>
-            </a:pPr>
-            <a:r>
-              <a:rPr sz="1800" b="1" i="0">
+              <a:rPr sz="1800" b="0" i="0" lang="ko-KR" altLang="en-US" kern="0">
+                <a:solidFill>
+                  <a:srgbClr val="1F2937"/>
+                </a:solidFill>
+                <a:latin typeface="Calibri"/>
+                <a:ea typeface="맑은 고딕"/>
+              </a:rPr>
+              <a:t>를 storage에 넘긴다</a:t>
+            </a:r>
+          </a:p>
+          <a:p>
+            <a:pPr algn="l">
+              <a:spcAft>
+                <a:spcPts val="400"/>
+              </a:spcAft>
+            </a:pPr>
+            <a:r>
+              <a:rPr sz="1800" b="1" i="0" lang="ko-KR" altLang="en-US" kern="0">
                 <a:solidFill>
                   <a:srgbClr val="D9352A"/>
                 </a:solidFill>
@@ -4926,7 +4926,7 @@
               <a:t>▸ </a:t>
             </a:r>
             <a:r>
-              <a:rPr sz="1800" b="0" i="0">
+              <a:rPr sz="1800" b="0" i="0" lang="ko-KR" altLang="en-US" kern="0">
                 <a:solidFill>
                   <a:srgbClr val="1F2937"/>
                 </a:solidFill>
@@ -4943,7 +4943,7 @@
               </a:spcAft>
             </a:pPr>
             <a:r>
-              <a:rPr sz="1800" b="1" i="0">
+              <a:rPr sz="1800" b="1" i="0" lang="ko-KR" altLang="en-US" kern="0">
                 <a:solidFill>
                   <a:srgbClr val="D9352A"/>
                 </a:solidFill>
@@ -4953,24 +4953,24 @@
               <a:t>▸ </a:t>
             </a:r>
             <a:r>
-              <a:rPr sz="1800" b="0" i="0">
-                <a:solidFill>
-                  <a:srgbClr val="1F2937"/>
-                </a:solidFill>
-                <a:latin typeface="Calibri"/>
-                <a:ea typeface="맑은 고딕"/>
-              </a:rPr>
-              <a:t>Storage 는 신호로 next-access reuse distance 추정</a:t>
-            </a:r>
-          </a:p>
-          <a:p>
-            <a:pPr algn="l">
-              <a:spcAft>
-                <a:spcPts val="400"/>
-              </a:spcAft>
-            </a:pPr>
-            <a:r>
-              <a:rPr sz="1800" b="1" i="0">
+              <a:rPr sz="1800" b="0" i="0" lang="ko-KR" altLang="en-US" kern="0">
+                <a:solidFill>
+                  <a:srgbClr val="1F2937"/>
+                </a:solidFill>
+                <a:latin typeface="Calibri"/>
+                <a:ea typeface="맑은 고딕"/>
+              </a:rPr>
+              <a:t>Storage는 신호로 next-access reuse distance 추정</a:t>
+            </a:r>
+          </a:p>
+          <a:p>
+            <a:pPr algn="l">
+              <a:spcAft>
+                <a:spcPts val="400"/>
+              </a:spcAft>
+            </a:pPr>
+            <a:r>
+              <a:rPr sz="1800" b="1" i="0" lang="ko-KR" altLang="en-US" kern="0">
                 <a:solidFill>
                   <a:srgbClr val="D9352A"/>
                 </a:solidFill>
@@ -4980,14 +4980,14 @@
               <a:t>▸ </a:t>
             </a:r>
             <a:r>
-              <a:rPr sz="1800" b="0" i="0">
-                <a:solidFill>
-                  <a:srgbClr val="1F2937"/>
-                </a:solidFill>
-                <a:latin typeface="Calibri"/>
-                <a:ea typeface="맑은 고딕"/>
-              </a:rPr>
-              <a:t>hit potential 최저 KV 를 evict</a:t>
+              <a:rPr sz="1800" b="0" i="0" lang="ko-KR" altLang="en-US" kern="0">
+                <a:solidFill>
+                  <a:srgbClr val="1F2937"/>
+                </a:solidFill>
+                <a:latin typeface="Calibri"/>
+                <a:ea typeface="맑은 고딕"/>
+              </a:rPr>
+              <a:t>hit potential 최저 KV를 evict</a:t>
             </a:r>
           </a:p>
         </p:txBody>
@@ -5066,7 +5066,7 @@
               </a:spcAft>
             </a:pPr>
             <a:r>
-              <a:rPr sz="2000" b="1" i="0">
+              <a:rPr sz="2000" b="1" i="0" lang="ko-KR" altLang="en-US" kern="0">
                 <a:solidFill>
                   <a:srgbClr val="1F2937"/>
                 </a:solidFill>
@@ -5083,17 +5083,17 @@
               </a:spcAft>
             </a:pPr>
             <a:r>
-              <a:rPr sz="1800" b="0" i="0">
-                <a:solidFill>
-                  <a:srgbClr val="1F2937"/>
-                </a:solidFill>
-                <a:latin typeface="Calibri"/>
-                <a:ea typeface="맑은 고딕"/>
-              </a:rPr>
-              <a:t>각 요청 KV 의 </a:t>
-            </a:r>
-            <a:r>
-              <a:rPr sz="1800" b="1" i="0">
+              <a:rPr sz="1800" b="0" i="0" lang="ko-KR" altLang="en-US" kern="0">
+                <a:solidFill>
+                  <a:srgbClr val="1F2937"/>
+                </a:solidFill>
+                <a:latin typeface="Calibri"/>
+                <a:ea typeface="맑은 고딕"/>
+              </a:rPr>
+              <a:t>각 요청 KV의 </a:t>
+            </a:r>
+            <a:r>
+              <a:rPr sz="1800" b="1" i="0" lang="ko-KR" altLang="en-US" kern="0">
                 <a:solidFill>
                   <a:srgbClr val="D9352A"/>
                 </a:solidFill>
@@ -5103,24 +5103,24 @@
               <a:t>위치 (layer) 와 크기</a:t>
             </a:r>
             <a:r>
-              <a:rPr sz="1800" b="0" i="0">
-                <a:solidFill>
-                  <a:srgbClr val="1F2937"/>
-                </a:solidFill>
-                <a:latin typeface="Calibri"/>
-                <a:ea typeface="맑은 고딕"/>
-              </a:rPr>
-              <a:t>를 compute 에 넘긴다</a:t>
-            </a:r>
-          </a:p>
-          <a:p>
-            <a:pPr algn="l">
-              <a:spcAft>
-                <a:spcPts val="400"/>
-              </a:spcAft>
-            </a:pPr>
-            <a:r>
-              <a:rPr sz="1800" b="1" i="0">
+              <a:rPr sz="1800" b="0" i="0" lang="ko-KR" altLang="en-US" kern="0">
+                <a:solidFill>
+                  <a:srgbClr val="1F2937"/>
+                </a:solidFill>
+                <a:latin typeface="Calibri"/>
+                <a:ea typeface="맑은 고딕"/>
+              </a:rPr>
+              <a:t>를 compute에 넘긴다</a:t>
+            </a:r>
+          </a:p>
+          <a:p>
+            <a:pPr algn="l">
+              <a:spcAft>
+                <a:spcPts val="400"/>
+              </a:spcAft>
+            </a:pPr>
+            <a:r>
+              <a:rPr sz="1800" b="1" i="0" lang="ko-KR" altLang="en-US" kern="0">
                 <a:solidFill>
                   <a:srgbClr val="D9352A"/>
                 </a:solidFill>
@@ -5130,24 +5130,24 @@
               <a:t>▸ </a:t>
             </a:r>
             <a:r>
-              <a:rPr sz="1800" b="0" i="0">
-                <a:solidFill>
-                  <a:srgbClr val="1F2937"/>
-                </a:solidFill>
-                <a:latin typeface="Calibri"/>
-                <a:ea typeface="맑은 고딕"/>
-              </a:rPr>
-              <a:t>Compute 는 KV 위치/크기 알고 dispatch</a:t>
-            </a:r>
-          </a:p>
-          <a:p>
-            <a:pPr algn="l">
-              <a:spcAft>
-                <a:spcPts val="400"/>
-              </a:spcAft>
-            </a:pPr>
-            <a:r>
-              <a:rPr sz="1800" b="1" i="0">
+              <a:rPr sz="1800" b="0" i="0" lang="ko-KR" altLang="en-US" kern="0">
+                <a:solidFill>
+                  <a:srgbClr val="1F2937"/>
+                </a:solidFill>
+                <a:latin typeface="Calibri"/>
+                <a:ea typeface="맑은 고딕"/>
+              </a:rPr>
+              <a:t>Compute는 KV 위치/크기 알고 dispatch</a:t>
+            </a:r>
+          </a:p>
+          <a:p>
+            <a:pPr algn="l">
+              <a:spcAft>
+                <a:spcPts val="400"/>
+              </a:spcAft>
+            </a:pPr>
+            <a:r>
+              <a:rPr sz="1800" b="1" i="0" lang="ko-KR" altLang="en-US" kern="0">
                 <a:solidFill>
                   <a:srgbClr val="D9352A"/>
                 </a:solidFill>
@@ -5157,7 +5157,7 @@
               <a:t>▸ </a:t>
             </a:r>
             <a:r>
-              <a:rPr sz="1800" b="0" i="0">
+              <a:rPr sz="1800" b="0" i="0" lang="ko-KR" altLang="en-US" kern="0">
                 <a:solidFill>
                   <a:srgbClr val="1F2937"/>
                 </a:solidFill>
@@ -5174,7 +5174,7 @@
               </a:spcAft>
             </a:pPr>
             <a:r>
-              <a:rPr sz="1800" b="1" i="0">
+              <a:rPr sz="1800" b="1" i="0" lang="ko-KR" altLang="en-US" kern="0">
                 <a:solidFill>
                   <a:srgbClr val="D9352A"/>
                 </a:solidFill>
@@ -5184,7 +5184,7 @@
               <a:t>▸ </a:t>
             </a:r>
             <a:r>
-              <a:rPr sz="1800" b="0" i="0">
+              <a:rPr sz="1800" b="0" i="0" lang="ko-KR" altLang="en-US" kern="0">
                 <a:solidFill>
                   <a:srgbClr val="1F2937"/>
                 </a:solidFill>
@@ -5224,7 +5224,7 @@
               </a:spcAft>
             </a:pPr>
             <a:r>
-              <a:rPr sz="1000" b="0" i="0">
+              <a:rPr sz="1000" b="0" i="0" lang="ko-KR" altLang="en-US" kern="0">
                 <a:solidFill>
                   <a:srgbClr val="6B7280"/>
                 </a:solidFill>
@@ -5282,7 +5282,7 @@
               </a:spcAft>
             </a:pPr>
             <a:r>
-              <a:rPr sz="1200" b="1" i="0">
+              <a:rPr sz="1200" b="1" i="0" lang="ko-KR" altLang="en-US" kern="0">
                 <a:solidFill>
                   <a:srgbClr val="6B7280"/>
                 </a:solidFill>
@@ -5299,7 +5299,7 @@
               </a:spcAft>
             </a:pPr>
             <a:r>
-              <a:rPr sz="2800" b="1" i="0">
+              <a:rPr sz="2800" b="1" i="0" lang="ko-KR" altLang="en-US" kern="0">
                 <a:solidFill>
                   <a:srgbClr val="1F2937"/>
                 </a:solidFill>
@@ -5363,7 +5363,7 @@
               </a:spcAft>
             </a:pPr>
             <a:r>
-              <a:rPr sz="1000" b="0" i="1">
+              <a:rPr sz="1000" b="0" i="1" lang="ko-KR" altLang="en-US" kern="0">
                 <a:solidFill>
                   <a:srgbClr val="6B7280"/>
                 </a:solidFill>
@@ -5403,7 +5403,7 @@
               </a:spcAft>
             </a:pPr>
             <a:r>
-              <a:rPr sz="2000" b="1" i="0">
+              <a:rPr sz="2000" b="1" i="0" lang="ko-KR" altLang="en-US" kern="0">
                 <a:solidFill>
                   <a:srgbClr val="1F2937"/>
                 </a:solidFill>
@@ -5420,7 +5420,7 @@
               </a:spcAft>
             </a:pPr>
             <a:r>
-              <a:rPr sz="1800" b="0" i="0">
+              <a:rPr sz="1800" b="0" i="0" lang="ko-KR" altLang="en-US" kern="0">
                 <a:solidFill>
                   <a:srgbClr val="6B7280"/>
                 </a:solidFill>
@@ -5437,7 +5437,7 @@
               </a:spcAft>
             </a:pPr>
             <a:r>
-              <a:rPr sz="2000" b="1" i="0">
+              <a:rPr sz="2000" b="1" i="0" lang="ko-KR" altLang="en-US" kern="0">
                 <a:solidFill>
                   <a:srgbClr val="1F2937"/>
                 </a:solidFill>
@@ -5454,7 +5454,7 @@
               </a:spcAft>
             </a:pPr>
             <a:r>
-              <a:rPr sz="1800" b="0" i="0">
+              <a:rPr sz="1800" b="0" i="0" lang="ko-KR" altLang="en-US" kern="0">
                 <a:solidFill>
                   <a:srgbClr val="6B7280"/>
                 </a:solidFill>
@@ -5471,7 +5471,7 @@
               </a:spcAft>
             </a:pPr>
             <a:r>
-              <a:rPr sz="2000" b="1" i="0">
+              <a:rPr sz="2000" b="1" i="0" lang="ko-KR" altLang="en-US" kern="0">
                 <a:solidFill>
                   <a:srgbClr val="1F2937"/>
                 </a:solidFill>
@@ -5488,7 +5488,7 @@
               </a:spcAft>
             </a:pPr>
             <a:r>
-              <a:rPr sz="1800" b="0" i="0">
+              <a:rPr sz="1800" b="0" i="0" lang="ko-KR" altLang="en-US" kern="0">
                 <a:solidFill>
                   <a:srgbClr val="6B7280"/>
                 </a:solidFill>
@@ -5505,7 +5505,7 @@
               </a:spcAft>
             </a:pPr>
             <a:r>
-              <a:rPr sz="2000" b="1" i="0">
+              <a:rPr sz="2000" b="1" i="0" lang="ko-KR" altLang="en-US" kern="0">
                 <a:solidFill>
                   <a:srgbClr val="D9352A"/>
                 </a:solidFill>
@@ -5522,7 +5522,7 @@
               </a:spcAft>
             </a:pPr>
             <a:r>
-              <a:rPr sz="1800" b="0" i="0">
+              <a:rPr sz="1800" b="0" i="0" lang="ko-KR" altLang="en-US" kern="0">
                 <a:solidFill>
                   <a:srgbClr val="1F2937"/>
                 </a:solidFill>
@@ -5539,7 +5539,7 @@
               </a:spcAft>
             </a:pPr>
             <a:r>
-              <a:rPr sz="1800" b="0" i="0">
+              <a:rPr sz="1800" b="0" i="0" lang="ko-KR" altLang="en-US" kern="0">
                 <a:solidFill>
                   <a:srgbClr val="1F2937"/>
                 </a:solidFill>
@@ -5579,7 +5579,7 @@
               </a:spcAft>
             </a:pPr>
             <a:r>
-              <a:rPr sz="1000" b="0" i="0">
+              <a:rPr sz="1000" b="0" i="0" lang="ko-KR" altLang="en-US" kern="0">
                 <a:solidFill>
                   <a:srgbClr val="6B7280"/>
                 </a:solidFill>
@@ -5637,7 +5637,7 @@
               </a:spcAft>
             </a:pPr>
             <a:r>
-              <a:rPr sz="1200" b="1" i="0">
+              <a:rPr sz="1200" b="1" i="0" lang="ko-KR" altLang="en-US" kern="0">
                 <a:solidFill>
                   <a:srgbClr val="6B7280"/>
                 </a:solidFill>
@@ -5654,7 +5654,7 @@
               </a:spcAft>
             </a:pPr>
             <a:r>
-              <a:rPr sz="2800" b="1" i="0">
+              <a:rPr sz="2800" b="1" i="0" lang="ko-KR" altLang="en-US" kern="0">
                 <a:solidFill>
                   <a:srgbClr val="1F2937"/>
                 </a:solidFill>
@@ -5694,7 +5694,7 @@
               </a:spcAft>
             </a:pPr>
             <a:r>
-              <a:rPr sz="3200" b="1" i="0">
+              <a:rPr sz="3200" b="1" i="0" lang="ko-KR" altLang="en-US" kern="0">
                 <a:solidFill>
                   <a:srgbClr val="6B7280"/>
                 </a:solidFill>
@@ -5734,7 +5734,7 @@
               </a:spcAft>
             </a:pPr>
             <a:r>
-              <a:rPr sz="1500" b="1" i="0">
+              <a:rPr sz="1500" b="1" i="0" lang="ko-KR" altLang="en-US" kern="0">
                 <a:solidFill>
                   <a:srgbClr val="1F2937"/>
                 </a:solidFill>
@@ -5751,14 +5751,14 @@
               </a:spcAft>
             </a:pPr>
             <a:r>
-              <a:rPr sz="1800" b="0" i="0">
+              <a:rPr sz="1800" b="0" i="0" lang="ko-KR" altLang="en-US" kern="0">
                 <a:solidFill>
                   <a:srgbClr val="6B7280"/>
                 </a:solidFill>
                 <a:latin typeface="Calibri"/>
                 <a:ea typeface="맑은 고딕"/>
               </a:rPr>
-              <a:t>→ Ready queue 또는 Preparing queue 로 dispatch</a:t>
+              <a:t>→ Ready queue 또는 Preparing queue로 dispatch</a:t>
             </a:r>
           </a:p>
         </p:txBody>
@@ -5791,7 +5791,7 @@
               </a:spcAft>
             </a:pPr>
             <a:r>
-              <a:rPr sz="3200" b="1" i="0">
+              <a:rPr sz="3200" b="1" i="0" lang="ko-KR" altLang="en-US" kern="0">
                 <a:solidFill>
                   <a:srgbClr val="6B7280"/>
                 </a:solidFill>
@@ -5831,7 +5831,7 @@
               </a:spcAft>
             </a:pPr>
             <a:r>
-              <a:rPr sz="1500" b="1" i="0">
+              <a:rPr sz="1500" b="1" i="0" lang="ko-KR" altLang="en-US" kern="0">
                 <a:solidFill>
                   <a:srgbClr val="1F2937"/>
                 </a:solidFill>
@@ -5848,7 +5848,7 @@
               </a:spcAft>
             </a:pPr>
             <a:r>
-              <a:rPr sz="1800" b="0" i="0">
+              <a:rPr sz="1800" b="0" i="0" lang="ko-KR" altLang="en-US" kern="0">
                 <a:solidFill>
                   <a:srgbClr val="6B7280"/>
                 </a:solidFill>
@@ -5888,7 +5888,7 @@
               </a:spcAft>
             </a:pPr>
             <a:r>
-              <a:rPr sz="3200" b="1" i="0">
+              <a:rPr sz="3200" b="1" i="0" lang="ko-KR" altLang="en-US" kern="0">
                 <a:solidFill>
                   <a:srgbClr val="6B7280"/>
                 </a:solidFill>
@@ -5928,7 +5928,7 @@
               </a:spcAft>
             </a:pPr>
             <a:r>
-              <a:rPr sz="1500" b="1" i="0">
+              <a:rPr sz="1500" b="1" i="0" lang="ko-KR" altLang="en-US" kern="0">
                 <a:solidFill>
                   <a:srgbClr val="1F2937"/>
                 </a:solidFill>
@@ -5945,7 +5945,7 @@
               </a:spcAft>
             </a:pPr>
             <a:r>
-              <a:rPr sz="1800" b="0" i="0">
+              <a:rPr sz="1800" b="0" i="0" lang="ko-KR" altLang="en-US" kern="0">
                 <a:solidFill>
                   <a:srgbClr val="6B7280"/>
                 </a:solidFill>
@@ -5985,7 +5985,7 @@
               </a:spcAft>
             </a:pPr>
             <a:r>
-              <a:rPr sz="3200" b="1" i="0">
+              <a:rPr sz="3200" b="1" i="0" lang="ko-KR" altLang="en-US" kern="0">
                 <a:solidFill>
                   <a:srgbClr val="6B7280"/>
                 </a:solidFill>
@@ -6025,7 +6025,7 @@
               </a:spcAft>
             </a:pPr>
             <a:r>
-              <a:rPr sz="1500" b="1" i="0">
+              <a:rPr sz="1500" b="1" i="0" lang="ko-KR" altLang="en-US" kern="0">
                 <a:solidFill>
                   <a:srgbClr val="1F2937"/>
                 </a:solidFill>
@@ -6042,7 +6042,7 @@
               </a:spcAft>
             </a:pPr>
             <a:r>
-              <a:rPr sz="1800" b="0" i="0">
+              <a:rPr sz="1800" b="0" i="0" lang="ko-KR" altLang="en-US" kern="0">
                 <a:solidFill>
                   <a:srgbClr val="6B7280"/>
                 </a:solidFill>
@@ -6082,7 +6082,7 @@
               </a:spcAft>
             </a:pPr>
             <a:r>
-              <a:rPr sz="1000" b="0" i="0">
+              <a:rPr sz="1000" b="0" i="0" lang="ko-KR" altLang="en-US" kern="0">
                 <a:solidFill>
                   <a:srgbClr val="6B7280"/>
                 </a:solidFill>
@@ -6140,7 +6140,7 @@
               </a:spcAft>
             </a:pPr>
             <a:r>
-              <a:rPr sz="1200" b="1" i="0">
+              <a:rPr sz="1200" b="1" i="0" lang="ko-KR" altLang="en-US" kern="0">
                 <a:solidFill>
                   <a:srgbClr val="6B7280"/>
                 </a:solidFill>
@@ -6157,7 +6157,7 @@
               </a:spcAft>
             </a:pPr>
             <a:r>
-              <a:rPr sz="2800" b="1" i="0">
+              <a:rPr sz="2800" b="1" i="0" lang="ko-KR" altLang="en-US" kern="0">
                 <a:solidFill>
                   <a:srgbClr val="1F2937"/>
                 </a:solidFill>
@@ -6221,7 +6221,7 @@
               </a:spcAft>
             </a:pPr>
             <a:r>
-              <a:rPr sz="1000" b="0" i="1">
+              <a:rPr sz="1000" b="0" i="1" lang="ko-KR" altLang="en-US" kern="0">
                 <a:solidFill>
                   <a:srgbClr val="6B7280"/>
                 </a:solidFill>
@@ -6261,7 +6261,7 @@
               </a:spcAft>
             </a:pPr>
             <a:r>
-              <a:rPr sz="1800" b="1" i="0">
+              <a:rPr sz="1800" b="1" i="0" lang="ko-KR" altLang="en-US" kern="0">
                 <a:solidFill>
                   <a:srgbClr val="1F2937"/>
                 </a:solidFill>
@@ -6278,7 +6278,7 @@
               </a:spcAft>
             </a:pPr>
             <a:r>
-              <a:rPr sz="1800" b="1" i="0">
+              <a:rPr sz="1800" b="1" i="0" lang="ko-KR" altLang="en-US" kern="0">
                 <a:solidFill>
                   <a:srgbClr val="D9352A"/>
                 </a:solidFill>
@@ -6288,7 +6288,7 @@
               <a:t>▸ </a:t>
             </a:r>
             <a:r>
-              <a:rPr sz="1800" b="0" i="0">
+              <a:rPr sz="1800" b="0" i="0" lang="ko-KR" altLang="en-US" kern="0">
                 <a:solidFill>
                   <a:srgbClr val="1F2937"/>
                 </a:solidFill>
@@ -6305,7 +6305,7 @@
               </a:spcAft>
             </a:pPr>
             <a:r>
-              <a:rPr sz="1800" b="1" i="0">
+              <a:rPr sz="1800" b="1" i="0" lang="ko-KR" altLang="en-US" kern="0">
                 <a:solidFill>
                   <a:srgbClr val="D9352A"/>
                 </a:solidFill>
@@ -6315,7 +6315,7 @@
               <a:t>▸ </a:t>
             </a:r>
             <a:r>
-              <a:rPr sz="1800" b="0" i="0">
+              <a:rPr sz="1800" b="0" i="0" lang="ko-KR" altLang="en-US" kern="0">
                 <a:solidFill>
                   <a:srgbClr val="1F2937"/>
                 </a:solidFill>
@@ -6332,7 +6332,7 @@
               </a:spcAft>
             </a:pPr>
             <a:r>
-              <a:rPr sz="1800" b="1" i="0">
+              <a:rPr sz="1800" b="1" i="0" lang="ko-KR" altLang="en-US" kern="0">
                 <a:solidFill>
                   <a:srgbClr val="D9352A"/>
                 </a:solidFill>
@@ -6342,7 +6342,7 @@
               <a:t>▸ </a:t>
             </a:r>
             <a:r>
-              <a:rPr sz="1800" b="0" i="0">
+              <a:rPr sz="1800" b="0" i="0" lang="ko-KR" altLang="en-US" kern="0">
                 <a:solidFill>
                   <a:srgbClr val="1F2937"/>
                 </a:solidFill>
@@ -6359,7 +6359,7 @@
               </a:spcAft>
             </a:pPr>
             <a:r>
-              <a:rPr sz="1800" b="1" i="0">
+              <a:rPr sz="1800" b="1" i="0" lang="ko-KR" altLang="en-US" kern="0">
                 <a:solidFill>
                   <a:srgbClr val="D9352A"/>
                 </a:solidFill>
@@ -6369,7 +6369,7 @@
               <a:t>▸ </a:t>
             </a:r>
             <a:r>
-              <a:rPr sz="1800" b="0" i="0">
+              <a:rPr sz="1800" b="0" i="0" lang="ko-KR" altLang="en-US" kern="0">
                 <a:solidFill>
                   <a:srgbClr val="1F2937"/>
                 </a:solidFill>
@@ -6455,7 +6455,7 @@
               </a:spcAft>
             </a:pPr>
             <a:r>
-              <a:rPr sz="2000" b="1" i="0">
+              <a:rPr sz="2000" b="1" i="0" lang="ko-KR" altLang="en-US" kern="0">
                 <a:solidFill>
                   <a:srgbClr val="1F2937"/>
                 </a:solidFill>
@@ -6465,7 +6465,7 @@
               <a:t>설계 목표 — </a:t>
             </a:r>
             <a:r>
-              <a:rPr sz="2000" b="0" i="0">
+              <a:rPr sz="2000" b="0" i="0" lang="ko-KR" altLang="en-US" kern="0">
                 <a:solidFill>
                   <a:srgbClr val="1F2937"/>
                 </a:solidFill>
@@ -6475,7 +6475,7 @@
               <a:t>느린 I/O 요청이 빠른 I/O 요청을 막지 않게 하면서, </a:t>
             </a:r>
             <a:r>
-              <a:rPr sz="2000" b="1" i="0">
+              <a:rPr sz="2000" b="1" i="0" lang="ko-KR" altLang="en-US" kern="0">
                 <a:solidFill>
                   <a:srgbClr val="D9352A"/>
                 </a:solidFill>
@@ -6515,7 +6515,7 @@
               </a:spcAft>
             </a:pPr>
             <a:r>
-              <a:rPr sz="1000" b="0" i="0">
+              <a:rPr sz="1000" b="0" i="0" lang="ko-KR" altLang="en-US" kern="0">
                 <a:solidFill>
                   <a:srgbClr val="6B7280"/>
                 </a:solidFill>
@@ -6573,7 +6573,7 @@
               </a:spcAft>
             </a:pPr>
             <a:r>
-              <a:rPr sz="1200" b="1" i="0">
+              <a:rPr sz="1200" b="1" i="0" lang="ko-KR" altLang="en-US" kern="0">
                 <a:solidFill>
                   <a:srgbClr val="6B7280"/>
                 </a:solidFill>
@@ -6590,7 +6590,7 @@
               </a:spcAft>
             </a:pPr>
             <a:r>
-              <a:rPr sz="2800" b="1" i="0">
+              <a:rPr sz="2800" b="1" i="0" lang="ko-KR" altLang="en-US" kern="0">
                 <a:solidFill>
                   <a:srgbClr val="1F2937"/>
                 </a:solidFill>
@@ -6676,7 +6676,7 @@
               </a:spcAft>
             </a:pPr>
             <a:r>
-              <a:rPr sz="2000" b="1" i="0">
+              <a:rPr sz="2000" b="1" i="0" lang="ko-KR" altLang="en-US" kern="0">
                 <a:solidFill>
                   <a:srgbClr val="1F2937"/>
                 </a:solidFill>
@@ -6693,7 +6693,7 @@
               </a:spcAft>
             </a:pPr>
             <a:r>
-              <a:rPr sz="1800" b="1" i="0">
+              <a:rPr sz="1800" b="1" i="0" lang="ko-KR" altLang="en-US" kern="0">
                 <a:solidFill>
                   <a:srgbClr val="1F2937"/>
                 </a:solidFill>
@@ -6710,7 +6710,7 @@
               </a:spcAft>
             </a:pPr>
             <a:r>
-              <a:rPr sz="1800" b="0" i="0">
+              <a:rPr sz="1800" b="0" i="0" lang="ko-KR" altLang="en-US" kern="0">
                 <a:solidFill>
                   <a:srgbClr val="6B7280"/>
                 </a:solidFill>
@@ -6727,7 +6727,7 @@
               </a:spcAft>
             </a:pPr>
             <a:r>
-              <a:rPr sz="1800" b="1" i="0">
+              <a:rPr sz="1800" b="1" i="0" lang="ko-KR" altLang="en-US" kern="0">
                 <a:solidFill>
                   <a:srgbClr val="1F2937"/>
                 </a:solidFill>
@@ -6744,7 +6744,7 @@
               </a:spcAft>
             </a:pPr>
             <a:r>
-              <a:rPr sz="1800" b="0" i="0">
+              <a:rPr sz="1800" b="0" i="0" lang="ko-KR" altLang="en-US" kern="0">
                 <a:solidFill>
                   <a:srgbClr val="6B7280"/>
                 </a:solidFill>
@@ -6761,7 +6761,7 @@
               </a:spcAft>
             </a:pPr>
             <a:r>
-              <a:rPr sz="1800" b="0" i="0">
+              <a:rPr sz="1800" b="0" i="0" lang="ko-KR" altLang="en-US" kern="0">
                 <a:solidFill>
                   <a:srgbClr val="1F2937"/>
                 </a:solidFill>
@@ -6771,7 +6771,7 @@
               <a:t>promotion 시 </a:t>
             </a:r>
             <a:r>
-              <a:rPr sz="1800" b="1" i="0">
+              <a:rPr sz="1800" b="1" i="0" lang="ko-KR" altLang="en-US" kern="0">
                 <a:solidFill>
                   <a:srgbClr val="D9352A"/>
                 </a:solidFill>
@@ -6781,7 +6781,7 @@
               <a:t>원래 도착 시각을 유지</a:t>
             </a:r>
             <a:r>
-              <a:rPr sz="1800" b="0" i="0">
+              <a:rPr sz="1800" b="0" i="0" lang="ko-KR" altLang="en-US" kern="0">
                 <a:solidFill>
                   <a:srgbClr val="1F2937"/>
                 </a:solidFill>
@@ -6867,7 +6867,7 @@
               </a:spcAft>
             </a:pPr>
             <a:r>
-              <a:rPr sz="2000" b="1" i="0">
+              <a:rPr sz="2000" b="1" i="0" lang="ko-KR" altLang="en-US" kern="0">
                 <a:solidFill>
                   <a:srgbClr val="1F2937"/>
                 </a:solidFill>
@@ -6884,7 +6884,7 @@
               </a:spcAft>
             </a:pPr>
             <a:r>
-              <a:rPr sz="2000" b="0" i="0">
+              <a:rPr sz="2000" b="0" i="0" lang="ko-KR" altLang="en-US" kern="0">
                 <a:solidFill>
                   <a:srgbClr val="1F2937"/>
                 </a:solidFill>
@@ -6901,7 +6901,7 @@
               </a:spcAft>
             </a:pPr>
             <a:r>
-              <a:rPr sz="1800" b="1" i="0">
+              <a:rPr sz="1800" b="1" i="0" lang="ko-KR" altLang="en-US" kern="0">
                 <a:solidFill>
                   <a:srgbClr val="D9352A"/>
                 </a:solidFill>
@@ -6911,7 +6911,7 @@
               <a:t>▸ </a:t>
             </a:r>
             <a:r>
-              <a:rPr sz="1800" b="0" i="0">
+              <a:rPr sz="1800" b="0" i="0" lang="ko-KR" altLang="en-US" kern="0">
                 <a:solidFill>
                   <a:srgbClr val="1F2937"/>
                 </a:solidFill>
@@ -6921,24 +6921,24 @@
               <a:t>작은 KV 먼저 </a:t>
             </a:r>
             <a:r>
-              <a:rPr sz="1800" b="1" i="0">
-                <a:solidFill>
-                  <a:srgbClr val="1F2937"/>
-                </a:solidFill>
-                <a:latin typeface="Calibri"/>
-                <a:ea typeface="맑은 고딕"/>
-              </a:rPr>
-              <a:t>→ ready queue 로 빨리 promote</a:t>
-            </a:r>
-          </a:p>
-          <a:p>
-            <a:pPr algn="l">
-              <a:spcAft>
-                <a:spcPts val="400"/>
-              </a:spcAft>
-            </a:pPr>
-            <a:r>
-              <a:rPr sz="1800" b="1" i="0">
+              <a:rPr sz="1800" b="1" i="0" lang="ko-KR" altLang="en-US" kern="0">
+                <a:solidFill>
+                  <a:srgbClr val="1F2937"/>
+                </a:solidFill>
+                <a:latin typeface="Calibri"/>
+                <a:ea typeface="맑은 고딕"/>
+              </a:rPr>
+              <a:t>→ ready queue로 빨리 promote</a:t>
+            </a:r>
+          </a:p>
+          <a:p>
+            <a:pPr algn="l">
+              <a:spcAft>
+                <a:spcPts val="400"/>
+              </a:spcAft>
+            </a:pPr>
+            <a:r>
+              <a:rPr sz="1800" b="1" i="0" lang="ko-KR" altLang="en-US" kern="0">
                 <a:solidFill>
                   <a:srgbClr val="D9352A"/>
                 </a:solidFill>
@@ -6948,7 +6948,7 @@
               <a:t>▸ </a:t>
             </a:r>
             <a:r>
-              <a:rPr sz="1800" b="0" i="0">
+              <a:rPr sz="1800" b="0" i="0" lang="ko-KR" altLang="en-US" kern="0">
                 <a:solidFill>
                   <a:srgbClr val="1F2937"/>
                 </a:solidFill>
@@ -6958,24 +6958,24 @@
               <a:t>waiting↑ 시 </a:t>
             </a:r>
             <a:r>
-              <a:rPr sz="1800" b="1" i="0">
-                <a:solidFill>
-                  <a:srgbClr val="1F2937"/>
-                </a:solidFill>
-                <a:latin typeface="Calibri"/>
-                <a:ea typeface="맑은 고딕"/>
-              </a:rPr>
-              <a:t>큰 KV 도 promote (기아 방지)</a:t>
-            </a:r>
-          </a:p>
-          <a:p>
-            <a:pPr algn="l">
-              <a:spcAft>
-                <a:spcPts val="400"/>
-              </a:spcAft>
-            </a:pPr>
-            <a:r>
-              <a:rPr sz="1800" b="1" i="0">
+              <a:rPr sz="1800" b="1" i="0" lang="ko-KR" altLang="en-US" kern="0">
+                <a:solidFill>
+                  <a:srgbClr val="1F2937"/>
+                </a:solidFill>
+                <a:latin typeface="Calibri"/>
+                <a:ea typeface="맑은 고딕"/>
+              </a:rPr>
+              <a:t>큰 KV도 promote (기아 방지)</a:t>
+            </a:r>
+          </a:p>
+          <a:p>
+            <a:pPr algn="l">
+              <a:spcAft>
+                <a:spcPts val="400"/>
+              </a:spcAft>
+            </a:pPr>
+            <a:r>
+              <a:rPr sz="1800" b="1" i="0" lang="ko-KR" altLang="en-US" kern="0">
                 <a:solidFill>
                   <a:srgbClr val="D9352A"/>
                 </a:solidFill>
@@ -6985,17 +6985,17 @@
               <a:t>▸ </a:t>
             </a:r>
             <a:r>
-              <a:rPr sz="1800" b="0" i="0">
-                <a:solidFill>
-                  <a:srgbClr val="1F2937"/>
-                </a:solidFill>
-                <a:latin typeface="Calibri"/>
-                <a:ea typeface="맑은 고딕"/>
-              </a:rPr>
-              <a:t>classical HRRN 의 </a:t>
-            </a:r>
-            <a:r>
-              <a:rPr sz="1800" b="1" i="0">
+              <a:rPr sz="1800" b="0" i="0" lang="ko-KR" altLang="en-US" kern="0">
+                <a:solidFill>
+                  <a:srgbClr val="1F2937"/>
+                </a:solidFill>
+                <a:latin typeface="Calibri"/>
+                <a:ea typeface="맑은 고딕"/>
+              </a:rPr>
+              <a:t>classical HRRN의 </a:t>
+            </a:r>
+            <a:r>
+              <a:rPr sz="1800" b="1" i="0" lang="ko-KR" altLang="en-US" kern="0">
                 <a:solidFill>
                   <a:srgbClr val="1F2937"/>
                 </a:solidFill>
@@ -7035,7 +7035,7 @@
               </a:spcAft>
             </a:pPr>
             <a:r>
-              <a:rPr sz="1000" b="0" i="0">
+              <a:rPr sz="1000" b="0" i="0" lang="ko-KR" altLang="en-US" kern="0">
                 <a:solidFill>
                   <a:srgbClr val="6B7280"/>
                 </a:solidFill>
@@ -7093,7 +7093,7 @@
               </a:spcAft>
             </a:pPr>
             <a:r>
-              <a:rPr sz="1200" b="1" i="0">
+              <a:rPr sz="1200" b="1" i="0" lang="ko-KR" altLang="en-US" kern="0">
                 <a:solidFill>
                   <a:srgbClr val="6B7280"/>
                 </a:solidFill>
@@ -7110,7 +7110,7 @@
               </a:spcAft>
             </a:pPr>
             <a:r>
-              <a:rPr sz="2800" b="1" i="0">
+              <a:rPr sz="2800" b="1" i="0" lang="ko-KR" altLang="en-US" kern="0">
                 <a:solidFill>
                   <a:srgbClr val="1F2937"/>
                 </a:solidFill>
@@ -7174,14 +7174,14 @@
               </a:spcAft>
             </a:pPr>
             <a:r>
-              <a:rPr sz="1000" b="0" i="1">
+              <a:rPr sz="1000" b="0" i="1" lang="ko-KR" altLang="en-US" kern="0">
                 <a:solidFill>
                   <a:srgbClr val="6B7280"/>
                 </a:solidFill>
                 <a:latin typeface="Calibri"/>
                 <a:ea typeface="맑은 고딕"/>
               </a:rPr>
-              <a:t>Figure 11. (a) FCFS vs (b) I/O-aware scheduling 의 timeline 비교</a:t>
+              <a:t>Figure 11. (a) FCFS vs (b) I/O-aware scheduling의 timeline 비교</a:t>
             </a:r>
           </a:p>
         </p:txBody>
@@ -7214,7 +7214,7 @@
               </a:spcAft>
             </a:pPr>
             <a:r>
-              <a:rPr sz="1800" b="1" i="0">
+              <a:rPr sz="1800" b="1" i="0" lang="ko-KR" altLang="en-US" kern="0">
                 <a:solidFill>
                   <a:srgbClr val="1F2937"/>
                 </a:solidFill>
@@ -7231,7 +7231,7 @@
               </a:spcAft>
             </a:pPr>
             <a:r>
-              <a:rPr sz="1800" b="0" i="0">
+              <a:rPr sz="1800" b="0" i="0" lang="ko-KR" altLang="en-US" kern="0">
                 <a:solidFill>
                   <a:srgbClr val="1F2937"/>
                 </a:solidFill>
@@ -7248,14 +7248,14 @@
               </a:spcAft>
             </a:pPr>
             <a:r>
-              <a:rPr sz="1800" b="0" i="1">
+              <a:rPr sz="1800" b="0" i="1" lang="ko-KR" altLang="en-US" kern="0">
                 <a:solidFill>
                   <a:srgbClr val="D9352A"/>
                 </a:solidFill>
                 <a:latin typeface="Calibri"/>
                 <a:ea typeface="맑은 고딕"/>
               </a:rPr>
-              <a:t>GPU와 perf-layer I/O 가 모두 idle</a:t>
+              <a:t>GPU와 perf-layer I/O가 모두 idle</a:t>
             </a:r>
           </a:p>
           <a:p>
@@ -7265,7 +7265,7 @@
               </a:spcAft>
             </a:pPr>
             <a:r>
-              <a:rPr sz="1800" b="1" i="0">
+              <a:rPr sz="1800" b="1" i="0" lang="ko-KR" altLang="en-US" kern="0">
                 <a:solidFill>
                   <a:srgbClr val="1F2937"/>
                 </a:solidFill>
@@ -7282,7 +7282,7 @@
               </a:spcAft>
             </a:pPr>
             <a:r>
-              <a:rPr sz="1800" b="0" i="0">
+              <a:rPr sz="1800" b="0" i="0" lang="ko-KR" altLang="en-US" kern="0">
                 <a:solidFill>
                   <a:srgbClr val="1F2937"/>
                 </a:solidFill>
@@ -7299,7 +7299,7 @@
               </a:spcAft>
             </a:pPr>
             <a:r>
-              <a:rPr sz="1800" b="0" i="0">
+              <a:rPr sz="1800" b="0" i="0" lang="ko-KR" altLang="en-US" kern="0">
                 <a:solidFill>
                   <a:srgbClr val="1F2937"/>
                 </a:solidFill>
@@ -7309,7 +7309,7 @@
               <a:t>큐잉 시간 평균 </a:t>
             </a:r>
             <a:r>
-              <a:rPr sz="1800" b="1" i="0">
+              <a:rPr sz="1800" b="1" i="0" lang="ko-KR" altLang="en-US" kern="0">
                 <a:solidFill>
                   <a:srgbClr val="D9352A"/>
                 </a:solidFill>
@@ -7349,7 +7349,7 @@
               </a:spcAft>
             </a:pPr>
             <a:r>
-              <a:rPr sz="1000" b="0" i="0">
+              <a:rPr sz="1000" b="0" i="0" lang="ko-KR" altLang="en-US" kern="0">
                 <a:solidFill>
                   <a:srgbClr val="6B7280"/>
                 </a:solidFill>
@@ -7407,7 +7407,7 @@
               </a:spcAft>
             </a:pPr>
             <a:r>
-              <a:rPr sz="1200" b="1" i="0">
+              <a:rPr sz="1200" b="1" i="0" lang="ko-KR" altLang="en-US" kern="0">
                 <a:solidFill>
                   <a:srgbClr val="6B7280"/>
                 </a:solidFill>
@@ -7424,7 +7424,7 @@
               </a:spcAft>
             </a:pPr>
             <a:r>
-              <a:rPr sz="2800" b="1" i="0">
+              <a:rPr sz="2800" b="1" i="0" lang="ko-KR" altLang="en-US" kern="0">
                 <a:solidFill>
                   <a:srgbClr val="1F2937"/>
                 </a:solidFill>
@@ -7488,7 +7488,7 @@
               </a:spcAft>
             </a:pPr>
             <a:r>
-              <a:rPr sz="1000" b="0" i="1">
+              <a:rPr sz="1000" b="0" i="1" lang="ko-KR" altLang="en-US" kern="0">
                 <a:solidFill>
                   <a:srgbClr val="6B7280"/>
                 </a:solidFill>
@@ -7528,7 +7528,7 @@
               </a:spcAft>
             </a:pPr>
             <a:r>
-              <a:rPr sz="1800" b="1" i="0">
+              <a:rPr sz="1800" b="1" i="0" lang="ko-KR" altLang="en-US" kern="0">
                 <a:solidFill>
                   <a:srgbClr val="1F2937"/>
                 </a:solidFill>
@@ -7545,17 +7545,17 @@
               </a:spcAft>
             </a:pPr>
             <a:r>
-              <a:rPr sz="1800" b="0" i="0">
-                <a:solidFill>
-                  <a:srgbClr val="1F2937"/>
-                </a:solidFill>
-                <a:latin typeface="Calibri"/>
-                <a:ea typeface="맑은 고딕"/>
-              </a:rPr>
-              <a:t>현재 access ↔ 다음 access 사이에 접근되는 다른 KV 의 </a:t>
-            </a:r>
-            <a:r>
-              <a:rPr sz="1800" b="1" i="0">
+              <a:rPr sz="1800" b="0" i="0" lang="ko-KR" altLang="en-US" kern="0">
+                <a:solidFill>
+                  <a:srgbClr val="1F2937"/>
+                </a:solidFill>
+                <a:latin typeface="Calibri"/>
+                <a:ea typeface="맑은 고딕"/>
+              </a:rPr>
+              <a:t>현재 access ↔ 다음 access 사이에 접근되는 다른 KV의 </a:t>
+            </a:r>
+            <a:r>
+              <a:rPr sz="1800" b="1" i="0" lang="ko-KR" altLang="en-US" kern="0">
                 <a:solidFill>
                   <a:srgbClr val="1F2937"/>
                 </a:solidFill>
@@ -7572,7 +7572,7 @@
               </a:spcAft>
             </a:pPr>
             <a:r>
-              <a:rPr sz="1800" b="0" i="0">
+              <a:rPr sz="1800" b="0" i="0" lang="ko-KR" altLang="en-US" kern="0">
                 <a:solidFill>
                   <a:srgbClr val="1F2937"/>
                 </a:solidFill>
@@ -7582,7 +7582,7 @@
               <a:t>관찰 — 답변이 길수록 사용자가 다음 질문을 늦게 보낸다 → 그 사이 다른 사용자 KV가 끼어들어 reuse distance 하한이 </a:t>
             </a:r>
             <a:r>
-              <a:rPr sz="1800" b="1" i="0">
+              <a:rPr sz="1800" b="1" i="0" lang="ko-KR" altLang="en-US" kern="0">
                 <a:solidFill>
                   <a:srgbClr val="D9352A"/>
                 </a:solidFill>
@@ -7622,7 +7622,7 @@
               </a:spcAft>
             </a:pPr>
             <a:r>
-              <a:rPr sz="1000" b="0" i="0">
+              <a:rPr sz="1000" b="0" i="0" lang="ko-KR" altLang="en-US" kern="0">
                 <a:solidFill>
                   <a:srgbClr val="6B7280"/>
                 </a:solidFill>
@@ -7680,7 +7680,7 @@
               </a:spcAft>
             </a:pPr>
             <a:r>
-              <a:rPr sz="1200" b="1" i="0">
+              <a:rPr sz="1200" b="1" i="0" lang="ko-KR" altLang="en-US" kern="0">
                 <a:solidFill>
                   <a:srgbClr val="6B7280"/>
                 </a:solidFill>
@@ -7697,7 +7697,7 @@
               </a:spcAft>
             </a:pPr>
             <a:r>
-              <a:rPr sz="2800" b="1" i="0">
+              <a:rPr sz="2800" b="1" i="0" lang="ko-KR" altLang="en-US" kern="0">
                 <a:solidFill>
                   <a:srgbClr val="1F2937"/>
                 </a:solidFill>
@@ -7737,7 +7737,7 @@
               </a:spcAft>
             </a:pPr>
             <a:r>
-              <a:rPr sz="1800" b="1" i="0">
+              <a:rPr sz="1800" b="1" i="0" lang="ko-KR" altLang="en-US" kern="0">
                 <a:solidFill>
                   <a:srgbClr val="6B7280"/>
                 </a:solidFill>
@@ -7777,7 +7777,7 @@
               </a:spcAft>
             </a:pPr>
             <a:r>
-              <a:rPr sz="1700" b="1" i="0">
+              <a:rPr sz="1700" b="1" i="0" lang="ko-KR" altLang="en-US" kern="0">
                 <a:solidFill>
                   <a:srgbClr val="1F2937"/>
                 </a:solidFill>
@@ -7787,7 +7787,7 @@
               <a:t>Background</a:t>
             </a:r>
             <a:r>
-              <a:rPr sz="1800" b="0" i="0">
+              <a:rPr sz="1800" b="0" i="0" lang="ko-KR" altLang="en-US" kern="0">
                 <a:solidFill>
                   <a:srgbClr val="1F2937"/>
                 </a:solidFill>
@@ -7827,7 +7827,7 @@
               </a:spcAft>
             </a:pPr>
             <a:r>
-              <a:rPr sz="1800" b="1" i="0">
+              <a:rPr sz="1800" b="1" i="0" lang="ko-KR" altLang="en-US" kern="0">
                 <a:solidFill>
                   <a:srgbClr val="6B7280"/>
                 </a:solidFill>
@@ -7867,7 +7867,7 @@
               </a:spcAft>
             </a:pPr>
             <a:r>
-              <a:rPr sz="1700" b="1" i="0">
+              <a:rPr sz="1700" b="1" i="0" lang="ko-KR" altLang="en-US" kern="0">
                 <a:solidFill>
                   <a:srgbClr val="1F2937"/>
                 </a:solidFill>
@@ -7877,7 +7877,7 @@
               <a:t>Motivation</a:t>
             </a:r>
             <a:r>
-              <a:rPr sz="1800" b="0" i="0">
+              <a:rPr sz="1800" b="0" i="0" lang="ko-KR" altLang="en-US" kern="0">
                 <a:solidFill>
                   <a:srgbClr val="1F2937"/>
                 </a:solidFill>
@@ -7917,7 +7917,7 @@
               </a:spcAft>
             </a:pPr>
             <a:r>
-              <a:rPr sz="1800" b="1" i="0">
+              <a:rPr sz="1800" b="1" i="0" lang="ko-KR" altLang="en-US" kern="0">
                 <a:solidFill>
                   <a:srgbClr val="6B7280"/>
                 </a:solidFill>
@@ -7957,7 +7957,7 @@
               </a:spcAft>
             </a:pPr>
             <a:r>
-              <a:rPr sz="1700" b="1" i="0">
+              <a:rPr sz="1700" b="1" i="0" lang="ko-KR" altLang="en-US" kern="0">
                 <a:solidFill>
                   <a:srgbClr val="1F2937"/>
                 </a:solidFill>
@@ -7967,7 +7967,7 @@
               <a:t>Key Idea</a:t>
             </a:r>
             <a:r>
-              <a:rPr sz="1800" b="0" i="0">
+              <a:rPr sz="1800" b="0" i="0" lang="ko-KR" altLang="en-US" kern="0">
                 <a:solidFill>
                   <a:srgbClr val="1F2937"/>
                 </a:solidFill>
@@ -8007,7 +8007,7 @@
               </a:spcAft>
             </a:pPr>
             <a:r>
-              <a:rPr sz="1800" b="1" i="0">
+              <a:rPr sz="1800" b="1" i="0" lang="ko-KR" altLang="en-US" kern="0">
                 <a:solidFill>
                   <a:srgbClr val="6B7280"/>
                 </a:solidFill>
@@ -8047,7 +8047,7 @@
               </a:spcAft>
             </a:pPr>
             <a:r>
-              <a:rPr sz="1700" b="1" i="0">
+              <a:rPr sz="1700" b="1" i="0" lang="ko-KR" altLang="en-US" kern="0">
                 <a:solidFill>
                   <a:srgbClr val="1F2937"/>
                 </a:solidFill>
@@ -8057,7 +8057,7 @@
               <a:t>Mechanism 1</a:t>
             </a:r>
             <a:r>
-              <a:rPr sz="1800" b="0" i="0">
+              <a:rPr sz="1800" b="0" i="0" lang="ko-KR" altLang="en-US" kern="0">
                 <a:solidFill>
                   <a:srgbClr val="1F2937"/>
                 </a:solidFill>
@@ -8097,7 +8097,7 @@
               </a:spcAft>
             </a:pPr>
             <a:r>
-              <a:rPr sz="1800" b="1" i="0">
+              <a:rPr sz="1800" b="1" i="0" lang="ko-KR" altLang="en-US" kern="0">
                 <a:solidFill>
                   <a:srgbClr val="6B7280"/>
                 </a:solidFill>
@@ -8137,7 +8137,7 @@
               </a:spcAft>
             </a:pPr>
             <a:r>
-              <a:rPr sz="1700" b="1" i="0">
+              <a:rPr sz="1700" b="1" i="0" lang="ko-KR" altLang="en-US" kern="0">
                 <a:solidFill>
                   <a:srgbClr val="1F2937"/>
                 </a:solidFill>
@@ -8147,7 +8147,7 @@
               <a:t>Mechanism 2</a:t>
             </a:r>
             <a:r>
-              <a:rPr sz="1800" b="0" i="0">
+              <a:rPr sz="1800" b="0" i="0" lang="ko-KR" altLang="en-US" kern="0">
                 <a:solidFill>
                   <a:srgbClr val="1F2937"/>
                 </a:solidFill>
@@ -8187,7 +8187,7 @@
               </a:spcAft>
             </a:pPr>
             <a:r>
-              <a:rPr sz="1800" b="1" i="0">
+              <a:rPr sz="1800" b="1" i="0" lang="ko-KR" altLang="en-US" kern="0">
                 <a:solidFill>
                   <a:srgbClr val="6B7280"/>
                 </a:solidFill>
@@ -8227,7 +8227,7 @@
               </a:spcAft>
             </a:pPr>
             <a:r>
-              <a:rPr sz="1700" b="1" i="0">
+              <a:rPr sz="1700" b="1" i="0" lang="ko-KR" altLang="en-US" kern="0">
                 <a:solidFill>
                   <a:srgbClr val="1F2937"/>
                 </a:solidFill>
@@ -8237,7 +8237,7 @@
               <a:t>Mechanism 3</a:t>
             </a:r>
             <a:r>
-              <a:rPr sz="1800" b="0" i="0">
+              <a:rPr sz="1800" b="0" i="0" lang="ko-KR" altLang="en-US" kern="0">
                 <a:solidFill>
                   <a:srgbClr val="1F2937"/>
                 </a:solidFill>
@@ -8277,7 +8277,7 @@
               </a:spcAft>
             </a:pPr>
             <a:r>
-              <a:rPr sz="1800" b="1" i="0">
+              <a:rPr sz="1800" b="1" i="0" lang="ko-KR" altLang="en-US" kern="0">
                 <a:solidFill>
                   <a:srgbClr val="6B7280"/>
                 </a:solidFill>
@@ -8317,7 +8317,7 @@
               </a:spcAft>
             </a:pPr>
             <a:r>
-              <a:rPr sz="1700" b="1" i="0">
+              <a:rPr sz="1700" b="1" i="0" lang="ko-KR" altLang="en-US" kern="0">
                 <a:solidFill>
                   <a:srgbClr val="1F2937"/>
                 </a:solidFill>
@@ -8327,7 +8327,7 @@
               <a:t>Evaluation</a:t>
             </a:r>
             <a:r>
-              <a:rPr sz="1800" b="0" i="0">
+              <a:rPr sz="1800" b="0" i="0" lang="ko-KR" altLang="en-US" kern="0">
                 <a:solidFill>
                   <a:srgbClr val="1F2937"/>
                 </a:solidFill>
@@ -8367,7 +8367,7 @@
               </a:spcAft>
             </a:pPr>
             <a:r>
-              <a:rPr sz="1800" b="1" i="0">
+              <a:rPr sz="1800" b="1" i="0" lang="ko-KR" altLang="en-US" kern="0">
                 <a:solidFill>
                   <a:srgbClr val="6B7280"/>
                 </a:solidFill>
@@ -8407,7 +8407,7 @@
               </a:spcAft>
             </a:pPr>
             <a:r>
-              <a:rPr sz="1700" b="1" i="0">
+              <a:rPr sz="1700" b="1" i="0" lang="ko-KR" altLang="en-US" kern="0">
                 <a:solidFill>
                   <a:srgbClr val="1F2937"/>
                 </a:solidFill>
@@ -8417,7 +8417,7 @@
               <a:t>Discussion</a:t>
             </a:r>
             <a:r>
-              <a:rPr sz="1800" b="0" i="0">
+              <a:rPr sz="1800" b="0" i="0" lang="ko-KR" altLang="en-US" kern="0">
                 <a:solidFill>
                   <a:srgbClr val="1F2937"/>
                 </a:solidFill>
@@ -8457,7 +8457,7 @@
               </a:spcAft>
             </a:pPr>
             <a:r>
-              <a:rPr sz="1000" b="0" i="0">
+              <a:rPr sz="1000" b="0" i="0" lang="ko-KR" altLang="en-US" kern="0">
                 <a:solidFill>
                   <a:srgbClr val="6B7280"/>
                 </a:solidFill>
@@ -8515,7 +8515,7 @@
               </a:spcAft>
             </a:pPr>
             <a:r>
-              <a:rPr sz="1200" b="1" i="0">
+              <a:rPr sz="1200" b="1" i="0" lang="ko-KR" altLang="en-US" kern="0">
                 <a:solidFill>
                   <a:srgbClr val="6B7280"/>
                 </a:solidFill>
@@ -8532,7 +8532,7 @@
               </a:spcAft>
             </a:pPr>
             <a:r>
-              <a:rPr sz="2800" b="1" i="0">
+              <a:rPr sz="2800" b="1" i="0" lang="ko-KR" altLang="en-US" kern="0">
                 <a:solidFill>
                   <a:srgbClr val="1F2937"/>
                 </a:solidFill>
@@ -8596,7 +8596,7 @@
               </a:spcAft>
             </a:pPr>
             <a:r>
-              <a:rPr sz="1000" b="0" i="1">
+              <a:rPr sz="1000" b="0" i="1" lang="ko-KR" altLang="en-US" kern="0">
                 <a:solidFill>
                   <a:srgbClr val="6B7280"/>
                 </a:solidFill>
@@ -8636,7 +8636,7 @@
               </a:spcAft>
             </a:pPr>
             <a:r>
-              <a:rPr sz="2000" b="1" i="0">
+              <a:rPr sz="2000" b="1" i="0" lang="ko-KR" altLang="en-US" kern="0">
                 <a:solidFill>
                   <a:srgbClr val="1F2937"/>
                 </a:solidFill>
@@ -8653,7 +8653,7 @@
               </a:spcAft>
             </a:pPr>
             <a:r>
-              <a:rPr sz="1800" b="1" i="0">
+              <a:rPr sz="1800" b="1" i="0" lang="ko-KR" altLang="en-US" kern="0">
                 <a:solidFill>
                   <a:srgbClr val="1F2937"/>
                 </a:solidFill>
@@ -8670,7 +8670,7 @@
               </a:spcAft>
             </a:pPr>
             <a:r>
-              <a:rPr sz="1800" b="0" i="0">
+              <a:rPr sz="1800" b="0" i="0" lang="ko-KR" altLang="en-US" kern="0">
                 <a:solidFill>
                   <a:srgbClr val="6B7280"/>
                 </a:solidFill>
@@ -8687,7 +8687,7 @@
               </a:spcAft>
             </a:pPr>
             <a:r>
-              <a:rPr sz="1800" b="1" i="0">
+              <a:rPr sz="1800" b="1" i="0" lang="ko-KR" altLang="en-US" kern="0">
                 <a:solidFill>
                   <a:srgbClr val="D9352A"/>
                 </a:solidFill>
@@ -8704,7 +8704,7 @@
               </a:spcAft>
             </a:pPr>
             <a:r>
-              <a:rPr sz="1800" b="0" i="0">
+              <a:rPr sz="1800" b="0" i="0" lang="ko-KR" altLang="en-US" kern="0">
                 <a:solidFill>
                   <a:srgbClr val="6B7280"/>
                 </a:solidFill>
@@ -8721,7 +8721,7 @@
               </a:spcAft>
             </a:pPr>
             <a:r>
-              <a:rPr sz="1800" b="1" i="0">
+              <a:rPr sz="1800" b="1" i="0" lang="ko-KR" altLang="en-US" kern="0">
                 <a:solidFill>
                   <a:srgbClr val="1F2937"/>
                 </a:solidFill>
@@ -8738,7 +8738,7 @@
               </a:spcAft>
             </a:pPr>
             <a:r>
-              <a:rPr sz="1800" b="0" i="0">
+              <a:rPr sz="1800" b="0" i="0" lang="ko-KR" altLang="en-US" kern="0">
                 <a:solidFill>
                   <a:srgbClr val="6B7280"/>
                 </a:solidFill>
@@ -8824,7 +8824,7 @@
               </a:spcAft>
             </a:pPr>
             <a:r>
-              <a:rPr sz="1800" b="0" i="0">
+              <a:rPr sz="1800" b="0" i="0" lang="ko-KR" altLang="en-US" kern="0">
                 <a:solidFill>
                   <a:srgbClr val="1F2937"/>
                 </a:solidFill>
@@ -8835,7 +8835,7 @@
 </a:t>
             </a:r>
             <a:r>
-              <a:rPr sz="1800" b="0" i="0">
+              <a:rPr sz="1800" b="0" i="0" lang="ko-KR" altLang="en-US" kern="0">
                 <a:solidFill>
                   <a:srgbClr val="1F2937"/>
                 </a:solidFill>
@@ -8845,7 +8845,7 @@
               <a:t>Optimal과의 격차를 좁히려면 </a:t>
             </a:r>
             <a:r>
-              <a:rPr sz="1800" b="1" i="0">
+              <a:rPr sz="1800" b="1" i="0" lang="ko-KR" altLang="en-US" kern="0">
                 <a:solidFill>
                   <a:srgbClr val="D9352A"/>
                 </a:solidFill>
@@ -8855,7 +8855,7 @@
               <a:t>구간별 hit 확률을 모델링</a:t>
             </a:r>
             <a:r>
-              <a:rPr sz="1800" b="0" i="0">
+              <a:rPr sz="1800" b="0" i="0" lang="ko-KR" altLang="en-US" kern="0">
                 <a:solidFill>
                   <a:srgbClr val="1F2937"/>
                 </a:solidFill>
@@ -8895,7 +8895,7 @@
               </a:spcAft>
             </a:pPr>
             <a:r>
-              <a:rPr sz="1000" b="0" i="0">
+              <a:rPr sz="1000" b="0" i="0" lang="ko-KR" altLang="en-US" kern="0">
                 <a:solidFill>
                   <a:srgbClr val="6B7280"/>
                 </a:solidFill>
@@ -8953,7 +8953,7 @@
               </a:spcAft>
             </a:pPr>
             <a:r>
-              <a:rPr sz="1200" b="1" i="0">
+              <a:rPr sz="1200" b="1" i="0" lang="ko-KR" altLang="en-US" kern="0">
                 <a:solidFill>
                   <a:srgbClr val="6B7280"/>
                 </a:solidFill>
@@ -8970,7 +8970,7 @@
               </a:spcAft>
             </a:pPr>
             <a:r>
-              <a:rPr sz="2800" b="1" i="0">
+              <a:rPr sz="2800" b="1" i="0" lang="ko-KR" altLang="en-US" kern="0">
                 <a:solidFill>
                   <a:srgbClr val="1F2937"/>
                 </a:solidFill>
@@ -9010,7 +9010,7 @@
               </a:spcAft>
             </a:pPr>
             <a:r>
-              <a:rPr sz="2800" b="1" i="0">
+              <a:rPr sz="2800" b="1" i="0" lang="ko-KR" altLang="en-US" kern="0">
                 <a:solidFill>
                   <a:srgbClr val="6B7280"/>
                 </a:solidFill>
@@ -9050,7 +9050,7 @@
               </a:spcAft>
             </a:pPr>
             <a:r>
-              <a:rPr sz="1900" b="0" i="0">
+              <a:rPr sz="1900" b="0" i="0" lang="ko-KR" altLang="en-US" kern="0">
                 <a:solidFill>
                   <a:srgbClr val="1F2937"/>
                 </a:solidFill>
@@ -9090,7 +9090,7 @@
               </a:spcAft>
             </a:pPr>
             <a:r>
-              <a:rPr sz="2800" b="1" i="0">
+              <a:rPr sz="2800" b="1" i="0" lang="ko-KR" altLang="en-US" kern="0">
                 <a:solidFill>
                   <a:srgbClr val="6B7280"/>
                 </a:solidFill>
@@ -9130,7 +9130,7 @@
               </a:spcAft>
             </a:pPr>
             <a:r>
-              <a:rPr sz="1900" b="0" i="0">
+              <a:rPr sz="1900" b="0" i="0" lang="ko-KR" altLang="en-US" kern="0">
                 <a:solidFill>
                   <a:srgbClr val="1F2937"/>
                 </a:solidFill>
@@ -9170,7 +9170,7 @@
               </a:spcAft>
             </a:pPr>
             <a:r>
-              <a:rPr sz="2800" b="1" i="0">
+              <a:rPr sz="2800" b="1" i="0" lang="ko-KR" altLang="en-US" kern="0">
                 <a:solidFill>
                   <a:srgbClr val="6B7280"/>
                 </a:solidFill>
@@ -9210,7 +9210,7 @@
               </a:spcAft>
             </a:pPr>
             <a:r>
-              <a:rPr sz="1900" b="0" i="0">
+              <a:rPr sz="1900" b="0" i="0" lang="ko-KR" altLang="en-US" kern="0">
                 <a:solidFill>
                   <a:srgbClr val="1F2937"/>
                 </a:solidFill>
@@ -9250,7 +9250,7 @@
               </a:spcAft>
             </a:pPr>
             <a:r>
-              <a:rPr sz="2800" b="1" i="0">
+              <a:rPr sz="2800" b="1" i="0" lang="ko-KR" altLang="en-US" kern="0">
                 <a:solidFill>
                   <a:srgbClr val="6B7280"/>
                 </a:solidFill>
@@ -9290,7 +9290,7 @@
               </a:spcAft>
             </a:pPr>
             <a:r>
-              <a:rPr sz="1900" b="0" i="0">
+              <a:rPr sz="1900" b="0" i="0" lang="ko-KR" altLang="en-US" kern="0">
                 <a:solidFill>
                   <a:srgbClr val="1F2937"/>
                 </a:solidFill>
@@ -9330,7 +9330,7 @@
               </a:spcAft>
             </a:pPr>
             <a:r>
-              <a:rPr sz="2800" b="1" i="0">
+              <a:rPr sz="2800" b="1" i="0" lang="ko-KR" altLang="en-US" kern="0">
                 <a:solidFill>
                   <a:srgbClr val="6B7280"/>
                 </a:solidFill>
@@ -9370,7 +9370,7 @@
               </a:spcAft>
             </a:pPr>
             <a:r>
-              <a:rPr sz="1900" b="0" i="0">
+              <a:rPr sz="1900" b="0" i="0" lang="ko-KR" altLang="en-US" kern="0">
                 <a:solidFill>
                   <a:srgbClr val="1F2937"/>
                 </a:solidFill>
@@ -9410,7 +9410,7 @@
               </a:spcAft>
             </a:pPr>
             <a:r>
-              <a:rPr sz="1000" b="0" i="0">
+              <a:rPr sz="1000" b="0" i="0" lang="ko-KR" altLang="en-US" kern="0">
                 <a:solidFill>
                   <a:srgbClr val="6B7280"/>
                 </a:solidFill>
@@ -9468,7 +9468,7 @@
               </a:spcAft>
             </a:pPr>
             <a:r>
-              <a:rPr sz="1200" b="1" i="0">
+              <a:rPr sz="1200" b="1" i="0" lang="ko-KR" altLang="en-US" kern="0">
                 <a:solidFill>
                   <a:srgbClr val="6B7280"/>
                 </a:solidFill>
@@ -9485,7 +9485,7 @@
               </a:spcAft>
             </a:pPr>
             <a:r>
-              <a:rPr sz="2800" b="1" i="0">
+              <a:rPr sz="2800" b="1" i="0" lang="ko-KR" altLang="en-US" kern="0">
                 <a:solidFill>
                   <a:srgbClr val="1F2937"/>
                 </a:solidFill>
@@ -9571,7 +9571,7 @@
               </a:spcAft>
             </a:pPr>
             <a:r>
-              <a:rPr sz="2000" b="1" i="0">
+              <a:rPr sz="2000" b="1" i="0" lang="ko-KR" altLang="en-US" kern="0">
                 <a:solidFill>
                   <a:srgbClr val="1F2937"/>
                 </a:solidFill>
@@ -9588,7 +9588,7 @@
               </a:spcAft>
             </a:pPr>
             <a:r>
-              <a:rPr sz="1400" b="0" i="1">
+              <a:rPr sz="1400" b="0" i="1" lang="ko-KR" altLang="en-US" kern="0">
                 <a:solidFill>
                   <a:srgbClr val="6B7280"/>
                 </a:solidFill>
@@ -9628,7 +9628,7 @@
               </a:spcAft>
             </a:pPr>
             <a:r>
-              <a:rPr sz="1800" b="1" i="0">
+              <a:rPr sz="1800" b="1" i="0" lang="ko-KR" altLang="en-US" kern="0">
                 <a:solidFill>
                   <a:srgbClr val="D9352A"/>
                 </a:solidFill>
@@ -9638,7 +9638,7 @@
               <a:t>▸  </a:t>
             </a:r>
             <a:r>
-              <a:rPr sz="1800" b="1" i="0">
+              <a:rPr sz="1800" b="1" i="0" lang="ko-KR" altLang="en-US" kern="0">
                 <a:solidFill>
                   <a:srgbClr val="1F2937"/>
                 </a:solidFill>
@@ -9648,7 +9648,7 @@
               <a:t>prob_small</a:t>
             </a:r>
             <a:r>
-              <a:rPr sz="1800" b="0" i="0">
+              <a:rPr sz="1800" b="0" i="0" lang="ko-KR" altLang="en-US" kern="0">
                 <a:solidFill>
                   <a:srgbClr val="1F2937"/>
                 </a:solidFill>
@@ -9658,7 +9658,7 @@
               <a:t>    </a:t>
             </a:r>
             <a:r>
-              <a:rPr sz="1800" b="0" i="0">
+              <a:rPr sz="1800" b="0" i="0" lang="ko-KR" altLang="en-US" kern="0">
                 <a:solidFill>
                   <a:srgbClr val="1F2937"/>
                 </a:solidFill>
@@ -9698,7 +9698,7 @@
               </a:spcAft>
             </a:pPr>
             <a:r>
-              <a:rPr sz="1800" b="1" i="0">
+              <a:rPr sz="1800" b="1" i="0" lang="ko-KR" altLang="en-US" kern="0">
                 <a:solidFill>
                   <a:srgbClr val="D9352A"/>
                 </a:solidFill>
@@ -9708,7 +9708,7 @@
               <a:t>▸  </a:t>
             </a:r>
             <a:r>
-              <a:rPr sz="1800" b="1" i="0">
+              <a:rPr sz="1800" b="1" i="0" lang="ko-KR" altLang="en-US" kern="0">
                 <a:solidFill>
                   <a:srgbClr val="1F2937"/>
                 </a:solidFill>
@@ -9718,7 +9718,7 @@
               <a:t>prob_promising(i)</a:t>
             </a:r>
             <a:r>
-              <a:rPr sz="1800" b="0" i="0">
+              <a:rPr sz="1800" b="0" i="0" lang="ko-KR" altLang="en-US" kern="0">
                 <a:solidFill>
                   <a:srgbClr val="1F2937"/>
                 </a:solidFill>
@@ -9728,14 +9728,14 @@
               <a:t>    </a:t>
             </a:r>
             <a:r>
-              <a:rPr sz="1800" b="0" i="0">
-                <a:solidFill>
-                  <a:srgbClr val="1F2937"/>
-                </a:solidFill>
-                <a:latin typeface="Calibri"/>
-                <a:ea typeface="맑은 고딕"/>
-              </a:rPr>
-              <a:t>promising bucket i 에 떨어질 확률 (m개)</a:t>
+              <a:rPr sz="1800" b="0" i="0" lang="ko-KR" altLang="en-US" kern="0">
+                <a:solidFill>
+                  <a:srgbClr val="1F2937"/>
+                </a:solidFill>
+                <a:latin typeface="Calibri"/>
+                <a:ea typeface="맑은 고딕"/>
+              </a:rPr>
+              <a:t>promising bucket i에 떨어질 확률 (m개)</a:t>
             </a:r>
           </a:p>
         </p:txBody>
@@ -9768,7 +9768,7 @@
               </a:spcAft>
             </a:pPr>
             <a:r>
-              <a:rPr sz="1800" b="1" i="0">
+              <a:rPr sz="1800" b="1" i="0" lang="ko-KR" altLang="en-US" kern="0">
                 <a:solidFill>
                   <a:srgbClr val="D9352A"/>
                 </a:solidFill>
@@ -9778,7 +9778,7 @@
               <a:t>▸  </a:t>
             </a:r>
             <a:r>
-              <a:rPr sz="1800" b="1" i="0">
+              <a:rPr sz="1800" b="1" i="0" lang="ko-KR" altLang="en-US" kern="0">
                 <a:solidFill>
                   <a:srgbClr val="1F2937"/>
                 </a:solidFill>
@@ -9788,7 +9788,7 @@
               <a:t>hit_promising(i)</a:t>
             </a:r>
             <a:r>
-              <a:rPr sz="1800" b="0" i="0">
+              <a:rPr sz="1800" b="0" i="0" lang="ko-KR" altLang="en-US" kern="0">
                 <a:solidFill>
                   <a:srgbClr val="1F2937"/>
                 </a:solidFill>
@@ -9798,7 +9798,7 @@
               <a:t>    </a:t>
             </a:r>
             <a:r>
-              <a:rPr sz="1800" b="0" i="0">
+              <a:rPr sz="1800" b="0" i="0" lang="ko-KR" altLang="en-US" kern="0">
                 <a:solidFill>
                   <a:srgbClr val="1F2937"/>
                 </a:solidFill>
@@ -9838,7 +9838,7 @@
               </a:spcAft>
             </a:pPr>
             <a:r>
-              <a:rPr sz="1800" b="1" i="0">
+              <a:rPr sz="1800" b="1" i="0" lang="ko-KR" altLang="en-US" kern="0">
                 <a:solidFill>
                   <a:srgbClr val="D9352A"/>
                 </a:solidFill>
@@ -9848,7 +9848,7 @@
               <a:t>▸  </a:t>
             </a:r>
             <a:r>
-              <a:rPr sz="1800" b="1" i="0">
+              <a:rPr sz="1800" b="1" i="0" lang="ko-KR" altLang="en-US" kern="0">
                 <a:solidFill>
                   <a:srgbClr val="1F2937"/>
                 </a:solidFill>
@@ -9858,7 +9858,7 @@
               <a:t>prob_extreme</a:t>
             </a:r>
             <a:r>
-              <a:rPr sz="1800" b="0" i="0">
+              <a:rPr sz="1800" b="0" i="0" lang="ko-KR" altLang="en-US" kern="0">
                 <a:solidFill>
                   <a:srgbClr val="1F2937"/>
                 </a:solidFill>
@@ -9868,7 +9868,7 @@
               <a:t>    </a:t>
             </a:r>
             <a:r>
-              <a:rPr sz="1800" b="0" i="0">
+              <a:rPr sz="1800" b="0" i="0" lang="ko-KR" altLang="en-US" kern="0">
                 <a:solidFill>
                   <a:srgbClr val="1F2937"/>
                 </a:solidFill>
@@ -9954,7 +9954,7 @@
               </a:spcAft>
             </a:pPr>
             <a:r>
-              <a:rPr sz="1400" b="0" i="0">
+              <a:rPr sz="1400" b="0" i="0" lang="ko-KR" altLang="en-US" kern="0">
                 <a:solidFill>
                   <a:srgbClr val="1F2937"/>
                 </a:solidFill>
@@ -9964,7 +9964,7 @@
               <a:t>Note. Ghost cache는 백그라운드에서 Belady 시뮬레이션을 수행 — eviction 결정 단계에는 </a:t>
             </a:r>
             <a:r>
-              <a:rPr sz="1400" b="1" i="0">
+              <a:rPr sz="1400" b="1" i="0" lang="ko-KR" altLang="en-US" kern="0">
                 <a:solidFill>
                   <a:srgbClr val="D9352A"/>
                 </a:solidFill>
@@ -9974,7 +9974,7 @@
               <a:t>0.35 ms</a:t>
             </a:r>
             <a:r>
-              <a:rPr sz="1400" b="0" i="0">
+              <a:rPr sz="1400" b="0" i="0" lang="ko-KR" altLang="en-US" kern="0">
                 <a:solidFill>
                   <a:srgbClr val="1F2937"/>
                 </a:solidFill>
@@ -10014,7 +10014,7 @@
               </a:spcAft>
             </a:pPr>
             <a:r>
-              <a:rPr sz="1000" b="0" i="0">
+              <a:rPr sz="1000" b="0" i="0" lang="ko-KR" altLang="en-US" kern="0">
                 <a:solidFill>
                   <a:srgbClr val="6B7280"/>
                 </a:solidFill>
@@ -10072,7 +10072,7 @@
               </a:spcAft>
             </a:pPr>
             <a:r>
-              <a:rPr sz="1200" b="1" i="0">
+              <a:rPr sz="1200" b="1" i="0" lang="ko-KR" altLang="en-US" kern="0">
                 <a:solidFill>
                   <a:srgbClr val="6B7280"/>
                 </a:solidFill>
@@ -10089,7 +10089,7 @@
               </a:spcAft>
             </a:pPr>
             <a:r>
-              <a:rPr sz="2800" b="1" i="0">
+              <a:rPr sz="2800" b="1" i="0" lang="ko-KR" altLang="en-US" kern="0">
                 <a:solidFill>
                   <a:srgbClr val="1F2937"/>
                 </a:solidFill>
@@ -10153,7 +10153,7 @@
               </a:spcAft>
             </a:pPr>
             <a:r>
-              <a:rPr sz="1000" b="0" i="1">
+              <a:rPr sz="1000" b="0" i="1" lang="ko-KR" altLang="en-US" kern="0">
                 <a:solidFill>
                   <a:srgbClr val="6B7280"/>
                 </a:solidFill>
@@ -10193,7 +10193,7 @@
               </a:spcAft>
             </a:pPr>
             <a:r>
-              <a:rPr sz="1800" b="1" i="0">
+              <a:rPr sz="1800" b="1" i="0" lang="ko-KR" altLang="en-US" kern="0">
                 <a:solidFill>
                   <a:srgbClr val="1F2937"/>
                 </a:solidFill>
@@ -10210,7 +10210,7 @@
               </a:spcAft>
             </a:pPr>
             <a:r>
-              <a:rPr sz="1800" b="0" i="0">
+              <a:rPr sz="1800" b="0" i="0" lang="ko-KR" altLang="en-US" kern="0">
                 <a:solidFill>
                   <a:srgbClr val="1F2937"/>
                 </a:solidFill>
@@ -10220,14 +10220,14 @@
               <a:t>▸ KV tensor 직접 필요 — </a:t>
             </a:r>
             <a:r>
-              <a:rPr sz="1800" b="1" i="0">
-                <a:solidFill>
-                  <a:srgbClr val="1F2937"/>
-                </a:solidFill>
-                <a:latin typeface="Calibri"/>
-                <a:ea typeface="맑은 고딕"/>
-              </a:rPr>
-              <a:t>그러나 size 가 큼</a:t>
+              <a:rPr sz="1800" b="1" i="0" lang="ko-KR" altLang="en-US" kern="0">
+                <a:solidFill>
+                  <a:srgbClr val="1F2937"/>
+                </a:solidFill>
+                <a:latin typeface="Calibri"/>
+                <a:ea typeface="맑은 고딕"/>
+              </a:rPr>
+              <a:t>그러나 size가 큼</a:t>
             </a:r>
           </a:p>
           <a:p>
@@ -10237,7 +10237,7 @@
               </a:spcAft>
             </a:pPr>
             <a:r>
-              <a:rPr sz="1800" b="1" i="0">
+              <a:rPr sz="1800" b="1" i="0" lang="ko-KR" altLang="en-US" kern="0">
                 <a:solidFill>
                   <a:srgbClr val="1F2937"/>
                 </a:solidFill>
@@ -10254,7 +10254,7 @@
               </a:spcAft>
             </a:pPr>
             <a:r>
-              <a:rPr sz="1800" b="0" i="0">
+              <a:rPr sz="1800" b="0" i="0" lang="ko-KR" altLang="en-US" kern="0">
                 <a:solidFill>
                   <a:srgbClr val="1F2937"/>
                 </a:solidFill>
@@ -10271,7 +10271,7 @@
               </a:spcAft>
             </a:pPr>
             <a:r>
-              <a:rPr sz="1800" b="1" i="0">
+              <a:rPr sz="1800" b="1" i="0" lang="ko-KR" altLang="en-US" kern="0">
                 <a:solidFill>
                   <a:srgbClr val="D9352A"/>
                 </a:solidFill>
@@ -10288,7 +10288,7 @@
               </a:spcAft>
             </a:pPr>
             <a:r>
-              <a:rPr sz="1800" b="0" i="0">
+              <a:rPr sz="1800" b="0" i="0" lang="ko-KR" altLang="en-US" kern="0">
                 <a:solidFill>
                   <a:srgbClr val="1F2937"/>
                 </a:solidFill>
@@ -10305,7 +10305,7 @@
               </a:spcAft>
             </a:pPr>
             <a:r>
-              <a:rPr sz="1800" b="0" i="0">
+              <a:rPr sz="1800" b="0" i="0" lang="ko-KR" altLang="en-US" kern="0">
                 <a:solidFill>
                   <a:srgbClr val="1F2937"/>
                 </a:solidFill>
@@ -10315,7 +10315,7 @@
               <a:t>▸ KV tensor로 변환은 </a:t>
             </a:r>
             <a:r>
-              <a:rPr sz="1800" b="1" i="0">
+              <a:rPr sz="1800" b="1" i="0" lang="ko-KR" altLang="en-US" kern="0">
                 <a:solidFill>
                   <a:srgbClr val="1F2937"/>
                 </a:solidFill>
@@ -10325,7 +10325,7 @@
               <a:t>GPU 1 step</a:t>
             </a:r>
             <a:r>
-              <a:rPr sz="1800" b="0" i="0">
+              <a:rPr sz="1800" b="0" i="0" lang="ko-KR" altLang="en-US" kern="0">
                 <a:solidFill>
                   <a:srgbClr val="1F2937"/>
                 </a:solidFill>
@@ -10365,7 +10365,7 @@
               </a:spcAft>
             </a:pPr>
             <a:r>
-              <a:rPr sz="1000" b="0" i="0">
+              <a:rPr sz="1000" b="0" i="0" lang="ko-KR" altLang="en-US" kern="0">
                 <a:solidFill>
                   <a:srgbClr val="6B7280"/>
                 </a:solidFill>
@@ -10423,7 +10423,7 @@
               </a:spcAft>
             </a:pPr>
             <a:r>
-              <a:rPr sz="1200" b="1" i="0">
+              <a:rPr sz="1200" b="1" i="0" lang="ko-KR" altLang="en-US" kern="0">
                 <a:solidFill>
                   <a:srgbClr val="6B7280"/>
                 </a:solidFill>
@@ -10440,7 +10440,7 @@
               </a:spcAft>
             </a:pPr>
             <a:r>
-              <a:rPr sz="2800" b="1" i="0">
+              <a:rPr sz="2800" b="1" i="0" lang="ko-KR" altLang="en-US" kern="0">
                 <a:solidFill>
                   <a:srgbClr val="1F2937"/>
                 </a:solidFill>
@@ -10526,7 +10526,7 @@
               </a:spcAft>
             </a:pPr>
             <a:r>
-              <a:rPr sz="2000" b="1" i="0">
+              <a:rPr sz="2000" b="1" i="0" lang="ko-KR" altLang="en-US" kern="0">
                 <a:solidFill>
                   <a:srgbClr val="1F2937"/>
                 </a:solidFill>
@@ -10543,7 +10543,7 @@
               </a:spcAft>
             </a:pPr>
             <a:r>
-              <a:rPr sz="1800" b="1" i="0">
+              <a:rPr sz="1800" b="1" i="0" lang="ko-KR" altLang="en-US" kern="0">
                 <a:solidFill>
                   <a:srgbClr val="D9352A"/>
                 </a:solidFill>
@@ -10553,24 +10553,24 @@
               <a:t>▸ </a:t>
             </a:r>
             <a:r>
-              <a:rPr sz="1800" b="0" i="0">
-                <a:solidFill>
-                  <a:srgbClr val="1F2937"/>
-                </a:solidFill>
-                <a:latin typeface="Calibri"/>
-                <a:ea typeface="맑은 고딕"/>
-              </a:rPr>
-              <a:t>Llama · Qwen · Bloom · OPT · Baichuan</a:t>
-            </a:r>
-          </a:p>
-          <a:p>
-            <a:pPr algn="l">
-              <a:spcAft>
-                <a:spcPts val="400"/>
-              </a:spcAft>
-            </a:pPr>
-            <a:r>
-              <a:rPr sz="1800" b="1" i="0">
+              <a:rPr sz="1800" b="0" i="0" lang="ko-KR" altLang="en-US" kern="0">
+                <a:solidFill>
+                  <a:srgbClr val="1F2937"/>
+                </a:solidFill>
+                <a:latin typeface="Calibri"/>
+                <a:ea typeface="맑은 고딕"/>
+              </a:rPr>
+              <a:t>예: Llama, Qwen, Bloom, OPT, Baichuan</a:t>
+            </a:r>
+          </a:p>
+          <a:p>
+            <a:pPr algn="l">
+              <a:spcAft>
+                <a:spcPts val="400"/>
+              </a:spcAft>
+            </a:pPr>
+            <a:r>
+              <a:rPr sz="1800" b="1" i="0" lang="ko-KR" altLang="en-US" kern="0">
                 <a:solidFill>
                   <a:srgbClr val="D9352A"/>
                 </a:solidFill>
@@ -10580,24 +10580,24 @@
               <a:t>▸ </a:t>
             </a:r>
             <a:r>
-              <a:rPr sz="1800" b="0" i="0">
-                <a:solidFill>
-                  <a:srgbClr val="1F2937"/>
-                </a:solidFill>
-                <a:latin typeface="Calibri"/>
-                <a:ea typeface="맑은 고딕"/>
-              </a:rPr>
-              <a:t>head 별 K, V 분리 → KV 가 큼</a:t>
-            </a:r>
-          </a:p>
-          <a:p>
-            <a:pPr algn="l">
-              <a:spcAft>
-                <a:spcPts val="400"/>
-              </a:spcAft>
-            </a:pPr>
-            <a:r>
-              <a:rPr sz="1800" b="1" i="0">
+              <a:rPr sz="1800" b="0" i="0" lang="ko-KR" altLang="en-US" kern="0">
+                <a:solidFill>
+                  <a:srgbClr val="1F2937"/>
+                </a:solidFill>
+                <a:latin typeface="Calibri"/>
+                <a:ea typeface="맑은 고딕"/>
+              </a:rPr>
+              <a:t>head별로 K, V가 분리되어 있어 KV tensor가 큼</a:t>
+            </a:r>
+          </a:p>
+          <a:p>
+            <a:pPr algn="l">
+              <a:spcAft>
+                <a:spcPts val="400"/>
+              </a:spcAft>
+            </a:pPr>
+            <a:r>
+              <a:rPr sz="1800" b="1" i="0" lang="ko-KR" altLang="en-US" kern="0">
                 <a:solidFill>
                   <a:srgbClr val="D9352A"/>
                 </a:solidFill>
@@ -10607,24 +10607,24 @@
               <a:t>▸ </a:t>
             </a:r>
             <a:r>
-              <a:rPr sz="1800" b="0" i="0">
-                <a:solidFill>
-                  <a:srgbClr val="1F2937"/>
-                </a:solidFill>
-                <a:latin typeface="Calibri"/>
-                <a:ea typeface="맑은 고딕"/>
-              </a:rPr>
-              <a:t>Tensor 6 캐싱 = 적은 공간 / 많은 compute 절약</a:t>
-            </a:r>
-          </a:p>
-          <a:p>
-            <a:pPr algn="l">
-              <a:spcAft>
-                <a:spcPts val="400"/>
-              </a:spcAft>
-            </a:pPr>
-            <a:r>
-              <a:rPr sz="1800" b="0" i="0">
+              <a:rPr sz="1800" b="0" i="0" lang="ko-KR" altLang="en-US" kern="0">
+                <a:solidFill>
+                  <a:srgbClr val="1F2937"/>
+                </a:solidFill>
+                <a:latin typeface="Calibri"/>
+                <a:ea typeface="맑은 고딕"/>
+              </a:rPr>
+              <a:t>Tensor 6를 캐시하면 더 적은 공간으로 더 많은 compute를 절약</a:t>
+            </a:r>
+          </a:p>
+          <a:p>
+            <a:pPr algn="l">
+              <a:spcAft>
+                <a:spcPts val="400"/>
+              </a:spcAft>
+            </a:pPr>
+            <a:r>
+              <a:rPr sz="1800" b="0" i="0" lang="ko-KR" altLang="en-US" kern="0">
                 <a:solidFill>
                   <a:srgbClr val="1F2937"/>
                 </a:solidFill>
@@ -10634,7 +10634,7 @@
               <a:t>→ Bidaw에서는 </a:t>
             </a:r>
             <a:r>
-              <a:rPr sz="1800" b="1" i="0">
+              <a:rPr sz="1800" b="1" i="0" lang="ko-KR" altLang="en-US" kern="0">
                 <a:solidFill>
                   <a:srgbClr val="D9352A"/>
                 </a:solidFill>
@@ -10720,7 +10720,7 @@
               </a:spcAft>
             </a:pPr>
             <a:r>
-              <a:rPr sz="2000" b="1" i="0">
+              <a:rPr sz="2000" b="1" i="0" lang="ko-KR" altLang="en-US" kern="0">
                 <a:solidFill>
                   <a:srgbClr val="1F2937"/>
                 </a:solidFill>
@@ -10737,7 +10737,7 @@
               </a:spcAft>
             </a:pPr>
             <a:r>
-              <a:rPr sz="1800" b="1" i="0">
+              <a:rPr sz="1800" b="1" i="0" lang="ko-KR" altLang="en-US" kern="0">
                 <a:solidFill>
                   <a:srgbClr val="D9352A"/>
                 </a:solidFill>
@@ -10747,7 +10747,7 @@
               <a:t>▸ </a:t>
             </a:r>
             <a:r>
-              <a:rPr sz="1800" b="0" i="0">
+              <a:rPr sz="1800" b="0" i="0" lang="ko-KR" altLang="en-US" kern="0">
                 <a:solidFill>
                   <a:srgbClr val="1F2937"/>
                 </a:solidFill>
@@ -10764,7 +10764,7 @@
               </a:spcAft>
             </a:pPr>
             <a:r>
-              <a:rPr sz="1800" b="1" i="0">
+              <a:rPr sz="1800" b="1" i="0" lang="ko-KR" altLang="en-US" kern="0">
                 <a:solidFill>
                   <a:srgbClr val="D9352A"/>
                 </a:solidFill>
@@ -10774,7 +10774,7 @@
               <a:t>▸ </a:t>
             </a:r>
             <a:r>
-              <a:rPr sz="1800" b="0" i="0">
+              <a:rPr sz="1800" b="0" i="0" lang="ko-KR" altLang="en-US" kern="0">
                 <a:solidFill>
                   <a:srgbClr val="1F2937"/>
                 </a:solidFill>
@@ -10791,7 +10791,7 @@
               </a:spcAft>
             </a:pPr>
             <a:r>
-              <a:rPr sz="1800" b="0" i="0">
+              <a:rPr sz="1800" b="0" i="0" lang="ko-KR" altLang="en-US" kern="0">
                 <a:solidFill>
                   <a:srgbClr val="1F2937"/>
                 </a:solidFill>
@@ -10801,7 +10801,7 @@
               <a:t>→ GQA에서는 그냥 </a:t>
             </a:r>
             <a:r>
-              <a:rPr sz="1800" b="1" i="0">
+              <a:rPr sz="1800" b="1" i="0" lang="ko-KR" altLang="en-US" kern="0">
                 <a:solidFill>
                   <a:srgbClr val="D9352A"/>
                 </a:solidFill>
@@ -10841,7 +10841,7 @@
               </a:spcAft>
             </a:pPr>
             <a:r>
-              <a:rPr sz="1000" b="0" i="0">
+              <a:rPr sz="1000" b="0" i="0" lang="ko-KR" altLang="en-US" kern="0">
                 <a:solidFill>
                   <a:srgbClr val="6B7280"/>
                 </a:solidFill>
@@ -10899,7 +10899,7 @@
               </a:spcAft>
             </a:pPr>
             <a:r>
-              <a:rPr sz="1200" b="1" i="0">
+              <a:rPr sz="1200" b="1" i="0" lang="ko-KR" altLang="en-US" kern="0">
                 <a:solidFill>
                   <a:srgbClr val="6B7280"/>
                 </a:solidFill>
@@ -10916,7 +10916,7 @@
               </a:spcAft>
             </a:pPr>
             <a:r>
-              <a:rPr sz="2800" b="1" i="0">
+              <a:rPr sz="2800" b="1" i="0" lang="ko-KR" altLang="en-US" kern="0">
                 <a:solidFill>
                   <a:srgbClr val="1F2937"/>
                 </a:solidFill>
@@ -11000,7 +11000,7 @@
               </a:spcAft>
             </a:pPr>
             <a:r>
-              <a:rPr sz="2000" b="1" i="0">
+              <a:rPr sz="2000" b="1" i="0" lang="ko-KR" altLang="en-US" kern="0">
                 <a:solidFill>
                   <a:srgbClr val="1F2937"/>
                 </a:solidFill>
@@ -11017,7 +11017,7 @@
               </a:spcAft>
             </a:pPr>
             <a:r>
-              <a:rPr sz="1800" b="0" i="0">
+              <a:rPr sz="1800" b="0" i="0" lang="ko-KR" altLang="en-US" kern="0">
                 <a:solidFill>
                   <a:srgbClr val="1F2937"/>
                 </a:solidFill>
@@ -11101,7 +11101,7 @@
               </a:spcAft>
             </a:pPr>
             <a:r>
-              <a:rPr sz="2000" b="1" i="0">
+              <a:rPr sz="2000" b="1" i="0" lang="ko-KR" altLang="en-US" kern="0">
                 <a:solidFill>
                   <a:srgbClr val="1F2937"/>
                 </a:solidFill>
@@ -11118,7 +11118,7 @@
               </a:spcAft>
             </a:pPr>
             <a:r>
-              <a:rPr sz="1800" b="0" i="0">
+              <a:rPr sz="1800" b="0" i="0" lang="ko-KR" altLang="en-US" kern="0">
                 <a:solidFill>
                   <a:srgbClr val="1F2937"/>
                 </a:solidFill>
@@ -11202,7 +11202,7 @@
               </a:spcAft>
             </a:pPr>
             <a:r>
-              <a:rPr sz="2000" b="1" i="0">
+              <a:rPr sz="2000" b="1" i="0" lang="ko-KR" altLang="en-US" kern="0">
                 <a:solidFill>
                   <a:srgbClr val="1F2937"/>
                 </a:solidFill>
@@ -11219,7 +11219,7 @@
               </a:spcAft>
             </a:pPr>
             <a:r>
-              <a:rPr sz="1800" b="0" i="0">
+              <a:rPr sz="1800" b="0" i="0" lang="ko-KR" altLang="en-US" kern="0">
                 <a:solidFill>
                   <a:srgbClr val="1F2937"/>
                 </a:solidFill>
@@ -11303,7 +11303,7 @@
               </a:spcAft>
             </a:pPr>
             <a:r>
-              <a:rPr sz="2000" b="1" i="0">
+              <a:rPr sz="2000" b="1" i="0" lang="ko-KR" altLang="en-US" kern="0">
                 <a:solidFill>
                   <a:srgbClr val="1F2937"/>
                 </a:solidFill>
@@ -11320,7 +11320,7 @@
               </a:spcAft>
             </a:pPr>
             <a:r>
-              <a:rPr sz="1800" b="0" i="0">
+              <a:rPr sz="1800" b="0" i="0" lang="ko-KR" altLang="en-US" kern="0">
                 <a:solidFill>
                   <a:srgbClr val="1F2937"/>
                 </a:solidFill>
@@ -11360,7 +11360,7 @@
               </a:spcAft>
             </a:pPr>
             <a:r>
-              <a:rPr sz="1000" b="0" i="0">
+              <a:rPr sz="1000" b="0" i="0" lang="ko-KR" altLang="en-US" kern="0">
                 <a:solidFill>
                   <a:srgbClr val="6B7280"/>
                 </a:solidFill>
@@ -11418,7 +11418,7 @@
               </a:spcAft>
             </a:pPr>
             <a:r>
-              <a:rPr sz="1200" b="1" i="0">
+              <a:rPr sz="1200" b="1" i="0" lang="ko-KR" altLang="en-US" kern="0">
                 <a:solidFill>
                   <a:srgbClr val="6B7280"/>
                 </a:solidFill>
@@ -11435,7 +11435,7 @@
               </a:spcAft>
             </a:pPr>
             <a:r>
-              <a:rPr sz="2800" b="1" i="0">
+              <a:rPr sz="2800" b="1" i="0" lang="ko-KR" altLang="en-US" kern="0">
                 <a:solidFill>
                   <a:srgbClr val="1F2937"/>
                 </a:solidFill>
@@ -11521,7 +11521,7 @@
               </a:spcAft>
             </a:pPr>
             <a:r>
-              <a:rPr sz="2000" b="1" i="0">
+              <a:rPr sz="2000" b="1" i="0" lang="ko-KR" altLang="en-US" kern="0">
                 <a:solidFill>
                   <a:srgbClr val="1F2937"/>
                 </a:solidFill>
@@ -11538,7 +11538,7 @@
               </a:spcAft>
             </a:pPr>
             <a:r>
-              <a:rPr sz="1800" b="1" i="0">
+              <a:rPr sz="1800" b="1" i="0" lang="ko-KR" altLang="en-US" kern="0">
                 <a:solidFill>
                   <a:srgbClr val="1F2937"/>
                 </a:solidFill>
@@ -11548,7 +11548,7 @@
               <a:t>GPU:  </a:t>
             </a:r>
             <a:r>
-              <a:rPr sz="1800" b="0" i="0">
+              <a:rPr sz="1800" b="0" i="0" lang="ko-KR" altLang="en-US" kern="0">
                 <a:solidFill>
                   <a:srgbClr val="1F2937"/>
                 </a:solidFill>
@@ -11565,7 +11565,7 @@
               </a:spcAft>
             </a:pPr>
             <a:r>
-              <a:rPr sz="1800" b="1" i="0">
+              <a:rPr sz="1800" b="1" i="0" lang="ko-KR" altLang="en-US" kern="0">
                 <a:solidFill>
                   <a:srgbClr val="1F2937"/>
                 </a:solidFill>
@@ -11575,7 +11575,7 @@
               <a:t>Host mem:  </a:t>
             </a:r>
             <a:r>
-              <a:rPr sz="1800" b="0" i="0">
+              <a:rPr sz="1800" b="0" i="0" lang="ko-KR" altLang="en-US" kern="0">
                 <a:solidFill>
                   <a:srgbClr val="1F2937"/>
                 </a:solidFill>
@@ -11592,7 +11592,7 @@
               </a:spcAft>
             </a:pPr>
             <a:r>
-              <a:rPr sz="1800" b="1" i="0">
+              <a:rPr sz="1800" b="1" i="0" lang="ko-KR" altLang="en-US" kern="0">
                 <a:solidFill>
                   <a:srgbClr val="1F2937"/>
                 </a:solidFill>
@@ -11602,7 +11602,7 @@
               <a:t>Storage:  </a:t>
             </a:r>
             <a:r>
-              <a:rPr sz="1800" b="0" i="0">
+              <a:rPr sz="1800" b="0" i="0" lang="ko-KR" altLang="en-US" kern="0">
                 <a:solidFill>
                   <a:srgbClr val="1F2937"/>
                 </a:solidFill>
@@ -11619,7 +11619,7 @@
               </a:spcAft>
             </a:pPr>
             <a:r>
-              <a:rPr sz="1800" b="1" i="0">
+              <a:rPr sz="1800" b="1" i="0" lang="ko-KR" altLang="en-US" kern="0">
                 <a:solidFill>
                   <a:srgbClr val="1F2937"/>
                 </a:solidFill>
@@ -11629,7 +11629,7 @@
               <a:t>PCIe:  </a:t>
             </a:r>
             <a:r>
-              <a:rPr sz="1800" b="0" i="0">
+              <a:rPr sz="1800" b="0" i="0" lang="ko-KR" altLang="en-US" kern="0">
                 <a:solidFill>
                   <a:srgbClr val="1F2937"/>
                 </a:solidFill>
@@ -11646,7 +11646,7 @@
               </a:spcAft>
             </a:pPr>
             <a:r>
-              <a:rPr sz="1800" b="1" i="0">
+              <a:rPr sz="1800" b="1" i="0" lang="ko-KR" altLang="en-US" kern="0">
                 <a:solidFill>
                   <a:srgbClr val="1F2937"/>
                 </a:solidFill>
@@ -11656,7 +11656,7 @@
               <a:t>Models:  </a:t>
             </a:r>
             <a:r>
-              <a:rPr sz="1800" b="0" i="0">
+              <a:rPr sz="1800" b="0" i="0" lang="ko-KR" altLang="en-US" kern="0">
                 <a:solidFill>
                   <a:srgbClr val="1F2937"/>
                 </a:solidFill>
@@ -11673,7 +11673,7 @@
               </a:spcAft>
             </a:pPr>
             <a:r>
-              <a:rPr sz="1800" b="1" i="0">
+              <a:rPr sz="1800" b="1" i="0" lang="ko-KR" altLang="en-US" kern="0">
                 <a:solidFill>
                   <a:srgbClr val="1F2937"/>
                 </a:solidFill>
@@ -11683,7 +11683,7 @@
               <a:t>Workloads:  </a:t>
             </a:r>
             <a:r>
-              <a:rPr sz="1800" b="0" i="0">
+              <a:rPr sz="1800" b="0" i="0" lang="ko-KR" altLang="en-US" kern="0">
                 <a:solidFill>
                   <a:srgbClr val="1F2937"/>
                 </a:solidFill>
@@ -11769,7 +11769,7 @@
               </a:spcAft>
             </a:pPr>
             <a:r>
-              <a:rPr sz="2000" b="1" i="0">
+              <a:rPr sz="2000" b="1" i="0" lang="ko-KR" altLang="en-US" kern="0">
                 <a:solidFill>
                   <a:srgbClr val="1F2937"/>
                 </a:solidFill>
@@ -11786,7 +11786,7 @@
               </a:spcAft>
             </a:pPr>
             <a:r>
-              <a:rPr sz="1800" b="1" i="0">
+              <a:rPr sz="1800" b="1" i="0" lang="ko-KR" altLang="en-US" kern="0">
                 <a:solidFill>
                   <a:srgbClr val="D9352A"/>
                 </a:solidFill>
@@ -11796,7 +11796,7 @@
               <a:t>▸ </a:t>
             </a:r>
             <a:r>
-              <a:rPr sz="1800" b="1" i="0">
+              <a:rPr sz="1800" b="1" i="0" lang="ko-KR" altLang="en-US" kern="0">
                 <a:solidFill>
                   <a:srgbClr val="1F2937"/>
                 </a:solidFill>
@@ -11806,7 +11806,7 @@
               <a:t>vLLM</a:t>
             </a:r>
             <a:r>
-              <a:rPr sz="1400" b="0" i="0">
+              <a:rPr sz="1400" b="0" i="0" lang="ko-KR" altLang="en-US" kern="0">
                 <a:solidFill>
                   <a:srgbClr val="6B7280"/>
                 </a:solidFill>
@@ -11823,7 +11823,7 @@
               </a:spcAft>
             </a:pPr>
             <a:r>
-              <a:rPr sz="1800" b="1" i="0">
+              <a:rPr sz="1800" b="1" i="0" lang="ko-KR" altLang="en-US" kern="0">
                 <a:solidFill>
                   <a:srgbClr val="D9352A"/>
                 </a:solidFill>
@@ -11833,7 +11833,7 @@
               <a:t>▸ </a:t>
             </a:r>
             <a:r>
-              <a:rPr sz="1800" b="1" i="0">
+              <a:rPr sz="1800" b="1" i="0" lang="ko-KR" altLang="en-US" kern="0">
                 <a:solidFill>
                   <a:srgbClr val="1F2937"/>
                 </a:solidFill>
@@ -11843,7 +11843,7 @@
               <a:t>CachedAttention</a:t>
             </a:r>
             <a:r>
-              <a:rPr sz="1400" b="0" i="0">
+              <a:rPr sz="1400" b="0" i="0" lang="ko-KR" altLang="en-US" kern="0">
                 <a:solidFill>
                   <a:srgbClr val="6B7280"/>
                 </a:solidFill>
@@ -11860,7 +11860,7 @@
               </a:spcAft>
             </a:pPr>
             <a:r>
-              <a:rPr sz="1800" b="1" i="0">
+              <a:rPr sz="1800" b="1" i="0" lang="ko-KR" altLang="en-US" kern="0">
                 <a:solidFill>
                   <a:srgbClr val="D9352A"/>
                 </a:solidFill>
@@ -11870,7 +11870,7 @@
               <a:t>▸ </a:t>
             </a:r>
             <a:r>
-              <a:rPr sz="1800" b="1" i="0">
+              <a:rPr sz="1800" b="1" i="0" lang="ko-KR" altLang="en-US" kern="0">
                 <a:solidFill>
                   <a:srgbClr val="1F2937"/>
                 </a:solidFill>
@@ -11880,7 +11880,7 @@
               <a:t>FlashGen</a:t>
             </a:r>
             <a:r>
-              <a:rPr sz="1400" b="0" i="0">
+              <a:rPr sz="1400" b="0" i="0" lang="ko-KR" altLang="en-US" kern="0">
                 <a:solidFill>
                   <a:srgbClr val="6B7280"/>
                 </a:solidFill>
@@ -11897,7 +11897,7 @@
               </a:spcAft>
             </a:pPr>
             <a:r>
-              <a:rPr sz="1800" b="1" i="0">
+              <a:rPr sz="1800" b="1" i="0" lang="ko-KR" altLang="en-US" kern="0">
                 <a:solidFill>
                   <a:srgbClr val="D9352A"/>
                 </a:solidFill>
@@ -11907,7 +11907,7 @@
               <a:t>▸ </a:t>
             </a:r>
             <a:r>
-              <a:rPr sz="1800" b="1" i="0">
+              <a:rPr sz="1800" b="1" i="0" lang="ko-KR" altLang="en-US" kern="0">
                 <a:solidFill>
                   <a:srgbClr val="1F2937"/>
                 </a:solidFill>
@@ -11917,7 +11917,7 @@
               <a:t>Optimal</a:t>
             </a:r>
             <a:r>
-              <a:rPr sz="1400" b="0" i="0">
+              <a:rPr sz="1400" b="0" i="0" lang="ko-KR" altLang="en-US" kern="0">
                 <a:solidFill>
                   <a:srgbClr val="6B7280"/>
                 </a:solidFill>
@@ -11934,7 +11934,7 @@
               </a:spcAft>
             </a:pPr>
             <a:r>
-              <a:rPr sz="1800" b="1" i="0">
+              <a:rPr sz="1800" b="1" i="0" lang="ko-KR" altLang="en-US" kern="0">
                 <a:solidFill>
                   <a:srgbClr val="D9352A"/>
                 </a:solidFill>
@@ -11944,7 +11944,7 @@
               <a:t>▸ </a:t>
             </a:r>
             <a:r>
-              <a:rPr sz="1800" b="1" i="0">
+              <a:rPr sz="1800" b="1" i="0" lang="ko-KR" altLang="en-US" kern="0">
                 <a:solidFill>
                   <a:srgbClr val="1F2937"/>
                 </a:solidFill>
@@ -11954,7 +11954,7 @@
               <a:t>Bidaw</a:t>
             </a:r>
             <a:r>
-              <a:rPr sz="1400" b="0" i="0">
+              <a:rPr sz="1400" b="0" i="0" lang="ko-KR" altLang="en-US" kern="0">
                 <a:solidFill>
                   <a:srgbClr val="6B7280"/>
                 </a:solidFill>
@@ -11994,7 +11994,7 @@
               </a:spcAft>
             </a:pPr>
             <a:r>
-              <a:rPr sz="1000" b="0" i="0">
+              <a:rPr sz="1000" b="0" i="0" lang="ko-KR" altLang="en-US" kern="0">
                 <a:solidFill>
                   <a:srgbClr val="6B7280"/>
                 </a:solidFill>
@@ -12052,7 +12052,7 @@
               </a:spcAft>
             </a:pPr>
             <a:r>
-              <a:rPr sz="1200" b="1" i="0">
+              <a:rPr sz="1200" b="1" i="0" lang="ko-KR" altLang="en-US" kern="0">
                 <a:solidFill>
                   <a:srgbClr val="6B7280"/>
                 </a:solidFill>
@@ -12069,7 +12069,7 @@
               </a:spcAft>
             </a:pPr>
             <a:r>
-              <a:rPr sz="2800" b="1" i="0">
+              <a:rPr sz="2800" b="1" i="0" lang="ko-KR" altLang="en-US" kern="0">
                 <a:solidFill>
                   <a:srgbClr val="1F2937"/>
                 </a:solidFill>
@@ -12133,7 +12133,7 @@
               </a:spcAft>
             </a:pPr>
             <a:r>
-              <a:rPr sz="1000" b="0" i="1">
+              <a:rPr sz="1000" b="0" i="1" lang="ko-KR" altLang="en-US" kern="0">
                 <a:solidFill>
                   <a:srgbClr val="6B7280"/>
                 </a:solidFill>
@@ -12173,7 +12173,7 @@
               </a:spcAft>
             </a:pPr>
             <a:r>
-              <a:rPr sz="1800" b="1" i="0">
+              <a:rPr sz="1800" b="1" i="0" lang="ko-KR" altLang="en-US" kern="0">
                 <a:solidFill>
                   <a:srgbClr val="D9352A"/>
                 </a:solidFill>
@@ -12183,7 +12183,7 @@
               <a:t>▸ </a:t>
             </a:r>
             <a:r>
-              <a:rPr sz="1800" b="1" i="0">
+              <a:rPr sz="1800" b="1" i="0" lang="ko-KR" altLang="en-US" kern="0">
                 <a:solidFill>
                   <a:srgbClr val="1F2937"/>
                 </a:solidFill>
@@ -12193,7 +12193,7 @@
               <a:t>Bidaw — 응답 latency </a:t>
             </a:r>
             <a:r>
-              <a:rPr sz="1800" b="0" i="0">
+              <a:rPr sz="1800" b="0" i="0" lang="ko-KR" altLang="en-US" kern="0">
                 <a:solidFill>
                   <a:srgbClr val="1F2937"/>
                 </a:solidFill>
@@ -12210,7 +12210,7 @@
               </a:spcAft>
             </a:pPr>
             <a:r>
-              <a:rPr sz="1800" b="1" i="0">
+              <a:rPr sz="1800" b="1" i="0" lang="ko-KR" altLang="en-US" kern="0">
                 <a:solidFill>
                   <a:srgbClr val="D9352A"/>
                 </a:solidFill>
@@ -12220,7 +12220,7 @@
               <a:t>▸ </a:t>
             </a:r>
             <a:r>
-              <a:rPr sz="1800" b="1" i="0">
+              <a:rPr sz="1800" b="1" i="0" lang="ko-KR" altLang="en-US" kern="0">
                 <a:solidFill>
                   <a:srgbClr val="1F2937"/>
                 </a:solidFill>
@@ -12230,7 +12230,7 @@
               <a:t>Bidaw — throughput </a:t>
             </a:r>
             <a:r>
-              <a:rPr sz="1800" b="0" i="0">
+              <a:rPr sz="1800" b="0" i="0" lang="ko-KR" altLang="en-US" kern="0">
                 <a:solidFill>
                   <a:srgbClr val="1F2937"/>
                 </a:solidFill>
@@ -12247,7 +12247,7 @@
               </a:spcAft>
             </a:pPr>
             <a:r>
-              <a:rPr sz="1800" b="1" i="0">
+              <a:rPr sz="1800" b="1" i="0" lang="ko-KR" altLang="en-US" kern="0">
                 <a:solidFill>
                   <a:srgbClr val="D9352A"/>
                 </a:solidFill>
@@ -12257,7 +12257,7 @@
               <a:t>▸ </a:t>
             </a:r>
             <a:r>
-              <a:rPr sz="1800" b="1" i="0">
+              <a:rPr sz="1800" b="1" i="0" lang="ko-KR" altLang="en-US" kern="0">
                 <a:solidFill>
                   <a:srgbClr val="1F2937"/>
                 </a:solidFill>
@@ -12267,7 +12267,7 @@
               <a:t>Optimal과의 gap </a:t>
             </a:r>
             <a:r>
-              <a:rPr sz="1800" b="0" i="0">
+              <a:rPr sz="1800" b="0" i="0" lang="ko-KR" altLang="en-US" kern="0">
                 <a:solidFill>
                   <a:srgbClr val="1F2937"/>
                 </a:solidFill>
@@ -12284,7 +12284,7 @@
               </a:spcAft>
             </a:pPr>
             <a:r>
-              <a:rPr sz="1800" b="1" i="0">
+              <a:rPr sz="1800" b="1" i="0" lang="ko-KR" altLang="en-US" kern="0">
                 <a:solidFill>
                   <a:srgbClr val="D9352A"/>
                 </a:solidFill>
@@ -12294,7 +12294,7 @@
               <a:t>▸ </a:t>
             </a:r>
             <a:r>
-              <a:rPr sz="1800" b="1" i="0">
+              <a:rPr sz="1800" b="1" i="0" lang="ko-KR" altLang="en-US" kern="0">
                 <a:solidFill>
                   <a:srgbClr val="1F2937"/>
                 </a:solidFill>
@@ -12304,7 +12304,7 @@
               <a:t>Note </a:t>
             </a:r>
             <a:r>
-              <a:rPr sz="1800" b="0" i="0">
+              <a:rPr sz="1800" b="0" i="0" lang="ko-KR" altLang="en-US" kern="0">
                 <a:solidFill>
                   <a:srgbClr val="1F2937"/>
                 </a:solidFill>
@@ -12344,7 +12344,7 @@
               </a:spcAft>
             </a:pPr>
             <a:r>
-              <a:rPr sz="1000" b="0" i="0">
+              <a:rPr sz="1000" b="0" i="0" lang="ko-KR" altLang="en-US" kern="0">
                 <a:solidFill>
                   <a:srgbClr val="6B7280"/>
                 </a:solidFill>
@@ -12402,7 +12402,7 @@
               </a:spcAft>
             </a:pPr>
             <a:r>
-              <a:rPr sz="1200" b="1" i="0">
+              <a:rPr sz="1200" b="1" i="0" lang="ko-KR" altLang="en-US" kern="0">
                 <a:solidFill>
                   <a:srgbClr val="6B7280"/>
                 </a:solidFill>
@@ -12419,7 +12419,7 @@
               </a:spcAft>
             </a:pPr>
             <a:r>
-              <a:rPr sz="2800" b="1" i="0">
+              <a:rPr sz="2800" b="1" i="0" lang="ko-KR" altLang="en-US" kern="0">
                 <a:solidFill>
                   <a:srgbClr val="1F2937"/>
                 </a:solidFill>
@@ -12483,7 +12483,7 @@
               </a:spcAft>
             </a:pPr>
             <a:r>
-              <a:rPr sz="1000" b="0" i="1">
+              <a:rPr sz="1000" b="0" i="1" lang="ko-KR" altLang="en-US" kern="0">
                 <a:solidFill>
                   <a:srgbClr val="6B7280"/>
                 </a:solidFill>
@@ -12547,7 +12547,7 @@
               </a:spcAft>
             </a:pPr>
             <a:r>
-              <a:rPr sz="1000" b="0" i="1">
+              <a:rPr sz="1000" b="0" i="1" lang="ko-KR" altLang="en-US" kern="0">
                 <a:solidFill>
                   <a:srgbClr val="6B7280"/>
                 </a:solidFill>
@@ -12587,7 +12587,7 @@
               </a:spcAft>
             </a:pPr>
             <a:r>
-              <a:rPr sz="1800" b="1" i="0">
+              <a:rPr sz="1800" b="1" i="0" lang="ko-KR" altLang="en-US" kern="0">
                 <a:solidFill>
                   <a:srgbClr val="1F2937"/>
                 </a:solidFill>
@@ -12604,7 +12604,7 @@
               </a:spcAft>
             </a:pPr>
             <a:r>
-              <a:rPr sz="1800" b="1" i="0">
+              <a:rPr sz="1800" b="1" i="0" lang="ko-KR" altLang="en-US" kern="0">
                 <a:solidFill>
                   <a:srgbClr val="D9352A"/>
                 </a:solidFill>
@@ -12614,7 +12614,7 @@
               <a:t>▸ </a:t>
             </a:r>
             <a:r>
-              <a:rPr sz="1800" b="0" i="0">
+              <a:rPr sz="1800" b="0" i="0" lang="ko-KR" altLang="en-US" kern="0">
                 <a:solidFill>
                   <a:srgbClr val="1F2937"/>
                 </a:solidFill>
@@ -12631,7 +12631,7 @@
               </a:spcAft>
             </a:pPr>
             <a:r>
-              <a:rPr sz="1800" b="1" i="0">
+              <a:rPr sz="1800" b="1" i="0" lang="ko-KR" altLang="en-US" kern="0">
                 <a:solidFill>
                   <a:srgbClr val="D9352A"/>
                 </a:solidFill>
@@ -12641,7 +12641,7 @@
               <a:t>▸ </a:t>
             </a:r>
             <a:r>
-              <a:rPr sz="1800" b="0" i="0">
+              <a:rPr sz="1800" b="0" i="0" lang="ko-KR" altLang="en-US" kern="0">
                 <a:solidFill>
                   <a:srgbClr val="1F2937"/>
                 </a:solidFill>
@@ -12658,7 +12658,7 @@
               </a:spcAft>
             </a:pPr>
             <a:r>
-              <a:rPr sz="1800" b="1" i="0">
+              <a:rPr sz="1800" b="1" i="0" lang="ko-KR" altLang="en-US" kern="0">
                 <a:solidFill>
                   <a:srgbClr val="1F2937"/>
                 </a:solidFill>
@@ -12675,7 +12675,7 @@
               </a:spcAft>
             </a:pPr>
             <a:r>
-              <a:rPr sz="1800" b="1" i="0">
+              <a:rPr sz="1800" b="1" i="0" lang="ko-KR" altLang="en-US" kern="0">
                 <a:solidFill>
                   <a:srgbClr val="D9352A"/>
                 </a:solidFill>
@@ -12685,7 +12685,7 @@
               <a:t>▸ </a:t>
             </a:r>
             <a:r>
-              <a:rPr sz="1800" b="0" i="0">
+              <a:rPr sz="1800" b="0" i="0" lang="ko-KR" altLang="en-US" kern="0">
                 <a:solidFill>
                   <a:srgbClr val="1F2937"/>
                 </a:solidFill>
@@ -12695,7 +12695,7 @@
               <a:t>queue-enhanced (CachedAttention)</a:t>
             </a:r>
             <a:r>
-              <a:rPr sz="1800" b="1" i="0">
+              <a:rPr sz="1800" b="1" i="0" lang="ko-KR" altLang="en-US" kern="0">
                 <a:solidFill>
                   <a:srgbClr val="1F2937"/>
                 </a:solidFill>
@@ -12712,7 +12712,7 @@
               </a:spcAft>
             </a:pPr>
             <a:r>
-              <a:rPr sz="1800" b="1" i="0">
+              <a:rPr sz="1800" b="1" i="0" lang="ko-KR" altLang="en-US" kern="0">
                 <a:solidFill>
                   <a:srgbClr val="D9352A"/>
                 </a:solidFill>
@@ -12722,7 +12722,7 @@
               <a:t>▸ </a:t>
             </a:r>
             <a:r>
-              <a:rPr sz="1800" b="0" i="0">
+              <a:rPr sz="1800" b="0" i="0" lang="ko-KR" altLang="en-US" kern="0">
                 <a:solidFill>
                   <a:srgbClr val="1F2937"/>
                 </a:solidFill>
@@ -12732,7 +12732,7 @@
               <a:t>LFU/LRU/FIFO 일반 정책</a:t>
             </a:r>
             <a:r>
-              <a:rPr sz="1800" b="1" i="0">
+              <a:rPr sz="1800" b="1" i="0" lang="ko-KR" altLang="en-US" kern="0">
                 <a:solidFill>
                   <a:srgbClr val="1F2937"/>
                 </a:solidFill>
@@ -12772,7 +12772,7 @@
               </a:spcAft>
             </a:pPr>
             <a:r>
-              <a:rPr sz="1000" b="0" i="0">
+              <a:rPr sz="1000" b="0" i="0" lang="ko-KR" altLang="en-US" kern="0">
                 <a:solidFill>
                   <a:srgbClr val="6B7280"/>
                 </a:solidFill>
@@ -12830,7 +12830,7 @@
               </a:spcAft>
             </a:pPr>
             <a:r>
-              <a:rPr sz="1200" b="1" i="0">
+              <a:rPr sz="1200" b="1" i="0" lang="ko-KR" altLang="en-US" kern="0">
                 <a:solidFill>
                   <a:srgbClr val="6B7280"/>
                 </a:solidFill>
@@ -12847,7 +12847,7 @@
               </a:spcAft>
             </a:pPr>
             <a:r>
-              <a:rPr sz="2800" b="1" i="0">
+              <a:rPr sz="2800" b="1" i="0" lang="ko-KR" altLang="en-US" kern="0">
                 <a:solidFill>
                   <a:srgbClr val="1F2937"/>
                 </a:solidFill>
@@ -12911,7 +12911,7 @@
               </a:spcAft>
             </a:pPr>
             <a:r>
-              <a:rPr sz="1000" b="0" i="1">
+              <a:rPr sz="1000" b="0" i="1" lang="ko-KR" altLang="en-US" kern="0">
                 <a:solidFill>
                   <a:srgbClr val="6B7280"/>
                 </a:solidFill>
@@ -12975,7 +12975,7 @@
               </a:spcAft>
             </a:pPr>
             <a:r>
-              <a:rPr sz="1000" b="0" i="1">
+              <a:rPr sz="1000" b="0" i="1" lang="ko-KR" altLang="en-US" kern="0">
                 <a:solidFill>
                   <a:srgbClr val="6B7280"/>
                 </a:solidFill>
@@ -13039,7 +13039,7 @@
               </a:spcAft>
             </a:pPr>
             <a:r>
-              <a:rPr sz="1000" b="0" i="1">
+              <a:rPr sz="1000" b="0" i="1" lang="ko-KR" altLang="en-US" kern="0">
                 <a:solidFill>
                   <a:srgbClr val="6B7280"/>
                 </a:solidFill>
@@ -13079,7 +13079,7 @@
               </a:spcAft>
             </a:pPr>
             <a:r>
-              <a:rPr sz="1800" b="1" i="0">
+              <a:rPr sz="1800" b="1" i="0" lang="ko-KR" altLang="en-US" kern="0">
                 <a:solidFill>
                   <a:srgbClr val="D9352A"/>
                 </a:solidFill>
@@ -13089,7 +13089,7 @@
               <a:t>▸ </a:t>
             </a:r>
             <a:r>
-              <a:rPr sz="1800" b="1" i="0">
+              <a:rPr sz="1800" b="1" i="0" lang="ko-KR" altLang="en-US" kern="0">
                 <a:solidFill>
                   <a:srgbClr val="1F2937"/>
                 </a:solidFill>
@@ -13099,7 +13099,7 @@
               <a:t>Tail latency</a:t>
             </a:r>
             <a:r>
-              <a:rPr sz="1800" b="0" i="0">
+              <a:rPr sz="1800" b="0" i="0" lang="ko-KR" altLang="en-US" kern="0">
                 <a:solidFill>
                   <a:srgbClr val="1F2937"/>
                 </a:solidFill>
@@ -13116,7 +13116,7 @@
               </a:spcAft>
             </a:pPr>
             <a:r>
-              <a:rPr sz="1800" b="1" i="0">
+              <a:rPr sz="1800" b="1" i="0" lang="ko-KR" altLang="en-US" kern="0">
                 <a:solidFill>
                   <a:srgbClr val="D9352A"/>
                 </a:solidFill>
@@ -13126,7 +13126,7 @@
               <a:t>▸ </a:t>
             </a:r>
             <a:r>
-              <a:rPr sz="1800" b="1" i="0">
+              <a:rPr sz="1800" b="1" i="0" lang="ko-KR" altLang="en-US" kern="0">
                 <a:solidFill>
                   <a:srgbClr val="1F2937"/>
                 </a:solidFill>
@@ -13136,7 +13136,7 @@
               <a:t>Ablation</a:t>
             </a:r>
             <a:r>
-              <a:rPr sz="1800" b="0" i="0">
+              <a:rPr sz="1800" b="0" i="0" lang="ko-KR" altLang="en-US" kern="0">
                 <a:solidFill>
                   <a:srgbClr val="1F2937"/>
                 </a:solidFill>
@@ -13153,7 +13153,7 @@
               </a:spcAft>
             </a:pPr>
             <a:r>
-              <a:rPr sz="1800" b="1" i="0">
+              <a:rPr sz="1800" b="1" i="0" lang="ko-KR" altLang="en-US" kern="0">
                 <a:solidFill>
                   <a:srgbClr val="D9352A"/>
                 </a:solidFill>
@@ -13163,7 +13163,7 @@
               <a:t>▸ </a:t>
             </a:r>
             <a:r>
-              <a:rPr sz="1800" b="1" i="0">
+              <a:rPr sz="1800" b="1" i="0" lang="ko-KR" altLang="en-US" kern="0">
                 <a:solidFill>
                   <a:srgbClr val="1F2937"/>
                 </a:solidFill>
@@ -13173,7 +13173,7 @@
               <a:t>Overhead</a:t>
             </a:r>
             <a:r>
-              <a:rPr sz="1800" b="0" i="0">
+              <a:rPr sz="1800" b="0" i="0" lang="ko-KR" altLang="en-US" kern="0">
                 <a:solidFill>
                   <a:srgbClr val="1F2937"/>
                 </a:solidFill>
@@ -13213,7 +13213,7 @@
               </a:spcAft>
             </a:pPr>
             <a:r>
-              <a:rPr sz="1000" b="0" i="0">
+              <a:rPr sz="1000" b="0" i="0" lang="ko-KR" altLang="en-US" kern="0">
                 <a:solidFill>
                   <a:srgbClr val="6B7280"/>
                 </a:solidFill>
@@ -13271,7 +13271,7 @@
               </a:spcAft>
             </a:pPr>
             <a:r>
-              <a:rPr sz="1200" b="1" i="0">
+              <a:rPr sz="1200" b="1" i="0" lang="ko-KR" altLang="en-US" kern="0">
                 <a:solidFill>
                   <a:srgbClr val="6B7280"/>
                 </a:solidFill>
@@ -13288,7 +13288,7 @@
               </a:spcAft>
             </a:pPr>
             <a:r>
-              <a:rPr sz="2800" b="1" i="0">
+              <a:rPr sz="2800" b="1" i="0" lang="ko-KR" altLang="en-US" kern="0">
                 <a:solidFill>
                   <a:srgbClr val="1F2937"/>
                 </a:solidFill>
@@ -13352,7 +13352,7 @@
               </a:spcAft>
             </a:pPr>
             <a:r>
-              <a:rPr sz="1000" b="0" i="1">
+              <a:rPr sz="1000" b="0" i="1" lang="ko-KR" altLang="en-US" kern="0">
                 <a:solidFill>
                   <a:srgbClr val="6B7280"/>
                 </a:solidFill>
@@ -13392,7 +13392,7 @@
               </a:spcAft>
             </a:pPr>
             <a:r>
-              <a:rPr sz="2000" b="1" i="0">
+              <a:rPr sz="2000" b="1" i="0" lang="ko-KR" altLang="en-US" kern="0">
                 <a:solidFill>
                   <a:srgbClr val="1F2937"/>
                 </a:solidFill>
@@ -13409,7 +13409,7 @@
               </a:spcAft>
             </a:pPr>
             <a:r>
-              <a:rPr sz="1800" b="1" i="0">
+              <a:rPr sz="1800" b="1" i="0" lang="ko-KR" altLang="en-US" kern="0">
                 <a:solidFill>
                   <a:srgbClr val="D9352A"/>
                 </a:solidFill>
@@ -13419,24 +13419,24 @@
               <a:t>•  </a:t>
             </a:r>
             <a:r>
-              <a:rPr sz="1800" b="0" i="0">
-                <a:solidFill>
-                  <a:srgbClr val="1F2937"/>
-                </a:solidFill>
-                <a:latin typeface="Calibri"/>
-                <a:ea typeface="맑은 고딕"/>
-              </a:rPr>
-              <a:t>Replika · Duolingo · 챗봇 — 사용자가 LLM과 번갈아 대화</a:t>
-            </a:r>
-          </a:p>
-          <a:p>
-            <a:pPr algn="l">
-              <a:spcAft>
-                <a:spcPts val="400"/>
-              </a:spcAft>
-            </a:pPr>
-            <a:r>
-              <a:rPr sz="1800" b="1" i="0">
+              <a:rPr sz="1800" b="0" i="0" lang="ko-KR" altLang="en-US" kern="0">
+                <a:solidFill>
+                  <a:srgbClr val="1F2937"/>
+                </a:solidFill>
+                <a:latin typeface="Calibri"/>
+                <a:ea typeface="맑은 고딕"/>
+              </a:rPr>
+              <a:t>Replika, Duolingo Max, 고객 응대 챗봇 — 사용자가 LLM과 번갈아 대화</a:t>
+            </a:r>
+          </a:p>
+          <a:p>
+            <a:pPr algn="l">
+              <a:spcAft>
+                <a:spcPts val="400"/>
+              </a:spcAft>
+            </a:pPr>
+            <a:r>
+              <a:rPr sz="1800" b="1" i="0" lang="ko-KR" altLang="en-US" kern="0">
                 <a:solidFill>
                   <a:srgbClr val="D9352A"/>
                 </a:solidFill>
@@ -13446,24 +13446,24 @@
               <a:t>•  </a:t>
             </a:r>
             <a:r>
-              <a:rPr sz="1800" b="0" i="0">
-                <a:solidFill>
-                  <a:srgbClr val="1F2937"/>
-                </a:solidFill>
-                <a:latin typeface="Calibri"/>
-                <a:ea typeface="맑은 고딕"/>
-              </a:rPr>
-              <a:t>사용자 평균 22.4 라운드 (P90 = 45 라운드)</a:t>
-            </a:r>
-          </a:p>
-          <a:p>
-            <a:pPr algn="l">
-              <a:spcAft>
-                <a:spcPts val="400"/>
-              </a:spcAft>
-            </a:pPr>
-            <a:r>
-              <a:rPr sz="1800" b="1" i="0">
+              <a:rPr sz="1800" b="0" i="0" lang="ko-KR" altLang="en-US" kern="0">
+                <a:solidFill>
+                  <a:srgbClr val="1F2937"/>
+                </a:solidFill>
+                <a:latin typeface="Calibri"/>
+                <a:ea typeface="맑은 고딕"/>
+              </a:rPr>
+              <a:t>한 사용자가 평균 22.4 라운드 (P90 = 45 라운드)까지 진행</a:t>
+            </a:r>
+          </a:p>
+          <a:p>
+            <a:pPr algn="l">
+              <a:spcAft>
+                <a:spcPts val="400"/>
+              </a:spcAft>
+            </a:pPr>
+            <a:r>
+              <a:rPr sz="1800" b="1" i="0" lang="ko-KR" altLang="en-US" kern="0">
                 <a:solidFill>
                   <a:srgbClr val="D9352A"/>
                 </a:solidFill>
@@ -13473,24 +13473,24 @@
               <a:t>•  </a:t>
             </a:r>
             <a:r>
-              <a:rPr sz="1800" b="0" i="0">
-                <a:solidFill>
-                  <a:srgbClr val="1F2937"/>
-                </a:solidFill>
-                <a:latin typeface="Calibri"/>
-                <a:ea typeface="맑은 고딕"/>
-              </a:rPr>
-              <a:t>대화 지속 시간 평균 분 단위, 길게는 60분 이상</a:t>
-            </a:r>
-          </a:p>
-          <a:p>
-            <a:pPr algn="l">
-              <a:spcAft>
-                <a:spcPts val="400"/>
-              </a:spcAft>
-            </a:pPr>
-            <a:r>
-              <a:rPr sz="2000" b="1" i="0">
+              <a:rPr sz="1800" b="0" i="0" lang="ko-KR" altLang="en-US" kern="0">
+                <a:solidFill>
+                  <a:srgbClr val="1F2937"/>
+                </a:solidFill>
+                <a:latin typeface="Calibri"/>
+                <a:ea typeface="맑은 고딕"/>
+              </a:rPr>
+              <a:t>대화 지속 시간은 평균 분 단위, 길게는 60분 이상</a:t>
+            </a:r>
+          </a:p>
+          <a:p>
+            <a:pPr algn="l">
+              <a:spcAft>
+                <a:spcPts val="400"/>
+              </a:spcAft>
+            </a:pPr>
+            <a:r>
+              <a:rPr sz="2000" b="1" i="0" lang="ko-KR" altLang="en-US" kern="0">
                 <a:solidFill>
                   <a:srgbClr val="1F2937"/>
                 </a:solidFill>
@@ -13507,7 +13507,7 @@
               </a:spcAft>
             </a:pPr>
             <a:r>
-              <a:rPr sz="1800" b="1" i="0">
+              <a:rPr sz="1800" b="1" i="0" lang="ko-KR" altLang="en-US" kern="0">
                 <a:solidFill>
                   <a:srgbClr val="D9352A"/>
                 </a:solidFill>
@@ -13517,24 +13517,24 @@
               <a:t>•  </a:t>
             </a:r>
             <a:r>
-              <a:rPr sz="1800" b="0" i="0">
-                <a:solidFill>
-                  <a:srgbClr val="1F2937"/>
-                </a:solidFill>
-                <a:latin typeface="Calibri"/>
-                <a:ea typeface="맑은 고딕"/>
-              </a:rPr>
-              <a:t>라운드 N 답변 = 0..N-1 라운드 KV 재사용</a:t>
-            </a:r>
-          </a:p>
-          <a:p>
-            <a:pPr algn="l">
-              <a:spcAft>
-                <a:spcPts val="400"/>
-              </a:spcAft>
-            </a:pPr>
-            <a:r>
-              <a:rPr sz="1800" b="1" i="0">
+              <a:rPr sz="1800" b="0" i="0" lang="ko-KR" altLang="en-US" kern="0">
+                <a:solidFill>
+                  <a:srgbClr val="1F2937"/>
+                </a:solidFill>
+                <a:latin typeface="Calibri"/>
+                <a:ea typeface="맑은 고딕"/>
+              </a:rPr>
+              <a:t>라운드 N의 답변은 0..N-1 라운드의 KV를 attention 입력으로 재사용</a:t>
+            </a:r>
+          </a:p>
+          <a:p>
+            <a:pPr algn="l">
+              <a:spcAft>
+                <a:spcPts val="400"/>
+              </a:spcAft>
+            </a:pPr>
+            <a:r>
+              <a:rPr sz="1800" b="1" i="0" lang="ko-KR" altLang="en-US" kern="0">
                 <a:solidFill>
                   <a:srgbClr val="D9352A"/>
                 </a:solidFill>
@@ -13544,14 +13544,14 @@
               <a:t>•  </a:t>
             </a:r>
             <a:r>
-              <a:rPr sz="1800" b="0" i="0">
-                <a:solidFill>
-                  <a:srgbClr val="1F2937"/>
-                </a:solidFill>
-                <a:latin typeface="Calibri"/>
-                <a:ea typeface="맑은 고딕"/>
-              </a:rPr>
-              <a:t>재계산 = GPU FLOPs 낭비 → caching 필수</a:t>
+              <a:rPr sz="1800" b="0" i="0" lang="ko-KR" altLang="en-US" kern="0">
+                <a:solidFill>
+                  <a:srgbClr val="1F2937"/>
+                </a:solidFill>
+                <a:latin typeface="Calibri"/>
+                <a:ea typeface="맑은 고딕"/>
+              </a:rPr>
+              <a:t>재계산하면 매번 GPU FLOPs를 다시 태움 → caching이 필수</a:t>
             </a:r>
           </a:p>
         </p:txBody>
@@ -13584,7 +13584,7 @@
               </a:spcAft>
             </a:pPr>
             <a:r>
-              <a:rPr sz="1000" b="0" i="0">
+              <a:rPr sz="1000" b="0" i="0" lang="ko-KR" altLang="en-US" kern="0">
                 <a:solidFill>
                   <a:srgbClr val="6B7280"/>
                 </a:solidFill>
@@ -13642,7 +13642,7 @@
               </a:spcAft>
             </a:pPr>
             <a:r>
-              <a:rPr sz="1200" b="1" i="0">
+              <a:rPr sz="1200" b="1" i="0" lang="ko-KR" altLang="en-US" kern="0">
                 <a:solidFill>
                   <a:srgbClr val="6B7280"/>
                 </a:solidFill>
@@ -13659,7 +13659,7 @@
               </a:spcAft>
             </a:pPr>
             <a:r>
-              <a:rPr sz="2800" b="1" i="0">
+              <a:rPr sz="2800" b="1" i="0" lang="ko-KR" altLang="en-US" kern="0">
                 <a:solidFill>
                   <a:srgbClr val="1F2937"/>
                 </a:solidFill>
@@ -13745,7 +13745,7 @@
               </a:spcAft>
             </a:pPr>
             <a:r>
-              <a:rPr sz="1800" b="1" i="0">
+              <a:rPr sz="1800" b="1" i="0" lang="ko-KR" altLang="en-US" kern="0">
                 <a:solidFill>
                   <a:srgbClr val="1F2937"/>
                 </a:solidFill>
@@ -13762,7 +13762,7 @@
               </a:spcAft>
             </a:pPr>
             <a:r>
-              <a:rPr sz="1800" b="1" i="0">
+              <a:rPr sz="1800" b="1" i="0" lang="ko-KR" altLang="en-US" kern="0">
                 <a:solidFill>
                   <a:srgbClr val="D9352A"/>
                 </a:solidFill>
@@ -13772,7 +13772,7 @@
               <a:t>▸ </a:t>
             </a:r>
             <a:r>
-              <a:rPr sz="1400" b="0" i="0">
+              <a:rPr sz="1400" b="0" i="0" lang="ko-KR" altLang="en-US" kern="0">
                 <a:solidFill>
                   <a:srgbClr val="1F2937"/>
                 </a:solidFill>
@@ -13789,7 +13789,7 @@
               </a:spcAft>
             </a:pPr>
             <a:r>
-              <a:rPr sz="1800" b="1" i="0">
+              <a:rPr sz="1800" b="1" i="0" lang="ko-KR" altLang="en-US" kern="0">
                 <a:solidFill>
                   <a:srgbClr val="D9352A"/>
                 </a:solidFill>
@@ -13799,7 +13799,7 @@
               <a:t>▸ </a:t>
             </a:r>
             <a:r>
-              <a:rPr sz="1400" b="0" i="0">
+              <a:rPr sz="1400" b="0" i="0" lang="ko-KR" altLang="en-US" kern="0">
                 <a:solidFill>
                   <a:srgbClr val="1F2937"/>
                 </a:solidFill>
@@ -13816,7 +13816,7 @@
               </a:spcAft>
             </a:pPr>
             <a:r>
-              <a:rPr sz="1800" b="1" i="0">
+              <a:rPr sz="1800" b="1" i="0" lang="ko-KR" altLang="en-US" kern="0">
                 <a:solidFill>
                   <a:srgbClr val="D9352A"/>
                 </a:solidFill>
@@ -13826,7 +13826,7 @@
               <a:t>▸ </a:t>
             </a:r>
             <a:r>
-              <a:rPr sz="1400" b="0" i="0">
+              <a:rPr sz="1400" b="0" i="0" lang="ko-KR" altLang="en-US" kern="0">
                 <a:solidFill>
                   <a:srgbClr val="1F2937"/>
                 </a:solidFill>
@@ -13843,7 +13843,7 @@
               </a:spcAft>
             </a:pPr>
             <a:r>
-              <a:rPr sz="1800" b="1" i="0">
+              <a:rPr sz="1800" b="1" i="0" lang="ko-KR" altLang="en-US" kern="0">
                 <a:solidFill>
                   <a:srgbClr val="D9352A"/>
                 </a:solidFill>
@@ -13853,7 +13853,7 @@
               <a:t>▸ </a:t>
             </a:r>
             <a:r>
-              <a:rPr sz="1400" b="0" i="0">
+              <a:rPr sz="1400" b="0" i="0" lang="ko-KR" altLang="en-US" kern="0">
                 <a:solidFill>
                   <a:srgbClr val="1F2937"/>
                 </a:solidFill>
@@ -13939,7 +13939,7 @@
               </a:spcAft>
             </a:pPr>
             <a:r>
-              <a:rPr sz="1800" b="1" i="0">
+              <a:rPr sz="1800" b="1" i="0" lang="ko-KR" altLang="en-US" kern="0">
                 <a:solidFill>
                   <a:srgbClr val="1F2937"/>
                 </a:solidFill>
@@ -13956,7 +13956,7 @@
               </a:spcAft>
             </a:pPr>
             <a:r>
-              <a:rPr sz="1800" b="1" i="0">
+              <a:rPr sz="1800" b="1" i="0" lang="ko-KR" altLang="en-US" kern="0">
                 <a:solidFill>
                   <a:srgbClr val="D9352A"/>
                 </a:solidFill>
@@ -13966,7 +13966,7 @@
               <a:t>▸ </a:t>
             </a:r>
             <a:r>
-              <a:rPr sz="1400" b="0" i="0">
+              <a:rPr sz="1400" b="0" i="0" lang="ko-KR" altLang="en-US" kern="0">
                 <a:solidFill>
                   <a:srgbClr val="1F2937"/>
                 </a:solidFill>
@@ -13983,7 +13983,7 @@
               </a:spcAft>
             </a:pPr>
             <a:r>
-              <a:rPr sz="1800" b="1" i="0">
+              <a:rPr sz="1800" b="1" i="0" lang="ko-KR" altLang="en-US" kern="0">
                 <a:solidFill>
                   <a:srgbClr val="D9352A"/>
                 </a:solidFill>
@@ -13993,7 +13993,7 @@
               <a:t>▸ </a:t>
             </a:r>
             <a:r>
-              <a:rPr sz="1400" b="0" i="0">
+              <a:rPr sz="1400" b="0" i="0" lang="ko-KR" altLang="en-US" kern="0">
                 <a:solidFill>
                   <a:srgbClr val="1F2937"/>
                 </a:solidFill>
@@ -14010,7 +14010,7 @@
               </a:spcAft>
             </a:pPr>
             <a:r>
-              <a:rPr sz="1800" b="1" i="0">
+              <a:rPr sz="1800" b="1" i="0" lang="ko-KR" altLang="en-US" kern="0">
                 <a:solidFill>
                   <a:srgbClr val="D9352A"/>
                 </a:solidFill>
@@ -14020,7 +14020,7 @@
               <a:t>▸ </a:t>
             </a:r>
             <a:r>
-              <a:rPr sz="1400" b="0" i="0">
+              <a:rPr sz="1400" b="0" i="0" lang="ko-KR" altLang="en-US" kern="0">
                 <a:solidFill>
                   <a:srgbClr val="1F2937"/>
                 </a:solidFill>
@@ -14037,7 +14037,7 @@
               </a:spcAft>
             </a:pPr>
             <a:r>
-              <a:rPr sz="1800" b="1" i="0">
+              <a:rPr sz="1800" b="1" i="0" lang="ko-KR" altLang="en-US" kern="0">
                 <a:solidFill>
                   <a:srgbClr val="D9352A"/>
                 </a:solidFill>
@@ -14047,7 +14047,7 @@
               <a:t>▸ </a:t>
             </a:r>
             <a:r>
-              <a:rPr sz="1400" b="0" i="0">
+              <a:rPr sz="1400" b="0" i="0" lang="ko-KR" altLang="en-US" kern="0">
                 <a:solidFill>
                   <a:srgbClr val="1F2937"/>
                 </a:solidFill>
@@ -14133,7 +14133,7 @@
               </a:spcAft>
             </a:pPr>
             <a:r>
-              <a:rPr sz="1800" b="1" i="0">
+              <a:rPr sz="1800" b="1" i="0" lang="ko-KR" altLang="en-US" kern="0">
                 <a:solidFill>
                   <a:srgbClr val="1F2937"/>
                 </a:solidFill>
@@ -14150,7 +14150,7 @@
               </a:spcAft>
             </a:pPr>
             <a:r>
-              <a:rPr sz="1800" b="1" i="0">
+              <a:rPr sz="1800" b="1" i="0" lang="ko-KR" altLang="en-US" kern="0">
                 <a:solidFill>
                   <a:srgbClr val="D9352A"/>
                 </a:solidFill>
@@ -14160,7 +14160,7 @@
               <a:t>▸ </a:t>
             </a:r>
             <a:r>
-              <a:rPr sz="1400" b="0" i="0">
+              <a:rPr sz="1400" b="0" i="0" lang="ko-KR" altLang="en-US" kern="0">
                 <a:solidFill>
                   <a:srgbClr val="1F2937"/>
                 </a:solidFill>
@@ -14177,7 +14177,7 @@
               </a:spcAft>
             </a:pPr>
             <a:r>
-              <a:rPr sz="1800" b="1" i="0">
+              <a:rPr sz="1800" b="1" i="0" lang="ko-KR" altLang="en-US" kern="0">
                 <a:solidFill>
                   <a:srgbClr val="D9352A"/>
                 </a:solidFill>
@@ -14187,7 +14187,7 @@
               <a:t>▸ </a:t>
             </a:r>
             <a:r>
-              <a:rPr sz="1400" b="0" i="0">
+              <a:rPr sz="1400" b="0" i="0" lang="ko-KR" altLang="en-US" kern="0">
                 <a:solidFill>
                   <a:srgbClr val="1F2937"/>
                 </a:solidFill>
@@ -14204,7 +14204,7 @@
               </a:spcAft>
             </a:pPr>
             <a:r>
-              <a:rPr sz="1800" b="1" i="0">
+              <a:rPr sz="1800" b="1" i="0" lang="ko-KR" altLang="en-US" kern="0">
                 <a:solidFill>
                   <a:srgbClr val="D9352A"/>
                 </a:solidFill>
@@ -14214,14 +14214,14 @@
               <a:t>▸ </a:t>
             </a:r>
             <a:r>
-              <a:rPr sz="1400" b="0" i="0">
-                <a:solidFill>
-                  <a:srgbClr val="1F2937"/>
-                </a:solidFill>
-                <a:latin typeface="Calibri"/>
-                <a:ea typeface="맑은 고딕"/>
-              </a:rPr>
-              <a:t>ML serving + storage co-design 의 좋은 사례 — 후속 연구가 활발할 영역</a:t>
+              <a:rPr sz="1400" b="0" i="0" lang="ko-KR" altLang="en-US" kern="0">
+                <a:solidFill>
+                  <a:srgbClr val="1F2937"/>
+                </a:solidFill>
+                <a:latin typeface="Calibri"/>
+                <a:ea typeface="맑은 고딕"/>
+              </a:rPr>
+              <a:t>ML serving + storage co-design의 좋은 사례 — 후속 연구가 활발할 영역</a:t>
             </a:r>
           </a:p>
         </p:txBody>
@@ -14254,7 +14254,7 @@
               </a:spcAft>
             </a:pPr>
             <a:r>
-              <a:rPr sz="1000" b="0" i="0">
+              <a:rPr sz="1000" b="0" i="0" lang="ko-KR" altLang="en-US" kern="0">
                 <a:solidFill>
                   <a:srgbClr val="6B7280"/>
                 </a:solidFill>
@@ -14312,7 +14312,7 @@
               </a:spcAft>
             </a:pPr>
             <a:r>
-              <a:rPr sz="1200" b="1" i="0">
+              <a:rPr sz="1200" b="1" i="0" lang="ko-KR" altLang="en-US" kern="0">
                 <a:solidFill>
                   <a:srgbClr val="6B7280"/>
                 </a:solidFill>
@@ -14329,7 +14329,7 @@
               </a:spcAft>
             </a:pPr>
             <a:r>
-              <a:rPr sz="2800" b="1" i="0">
+              <a:rPr sz="2800" b="1" i="0" lang="ko-KR" altLang="en-US" kern="0">
                 <a:solidFill>
                   <a:srgbClr val="1F2937"/>
                 </a:solidFill>
@@ -14415,7 +14415,7 @@
               </a:spcAft>
             </a:pPr>
             <a:r>
-              <a:rPr sz="1800" b="1" i="0">
+              <a:rPr sz="1800" b="1" i="0" lang="ko-KR" altLang="en-US" kern="0">
                 <a:solidFill>
                   <a:srgbClr val="1F2937"/>
                 </a:solidFill>
@@ -14432,7 +14432,7 @@
               </a:spcAft>
             </a:pPr>
             <a:r>
-              <a:rPr sz="1800" b="0" i="0">
+              <a:rPr sz="1800" b="0" i="0" lang="ko-KR" altLang="en-US" kern="0">
                 <a:solidFill>
                   <a:srgbClr val="1F2937"/>
                 </a:solidFill>
@@ -14449,7 +14449,7 @@
               </a:spcAft>
             </a:pPr>
             <a:r>
-              <a:rPr sz="1800" b="0" i="0">
+              <a:rPr sz="1800" b="0" i="0" lang="ko-KR" altLang="en-US" kern="0">
                 <a:solidFill>
                   <a:srgbClr val="1F2937"/>
                 </a:solidFill>
@@ -14466,7 +14466,7 @@
               </a:spcAft>
             </a:pPr>
             <a:r>
-              <a:rPr sz="1800" b="0" i="0">
+              <a:rPr sz="1800" b="0" i="0" lang="ko-KR" altLang="en-US" kern="0">
                 <a:solidFill>
                   <a:srgbClr val="1F2937"/>
                 </a:solidFill>
@@ -14476,7 +14476,7 @@
               <a:t>▸ 과거 토큰의 K, V는 변하지 않음 → </a:t>
             </a:r>
             <a:r>
-              <a:rPr sz="1800" b="1" i="0">
+              <a:rPr sz="1800" b="1" i="0" lang="ko-KR" altLang="en-US" kern="0">
                 <a:solidFill>
                   <a:srgbClr val="D9352A"/>
                 </a:solidFill>
@@ -14493,7 +14493,7 @@
               </a:spcAft>
             </a:pPr>
             <a:r>
-              <a:rPr sz="1800" b="0" i="0">
+              <a:rPr sz="1800" b="0" i="0" lang="ko-KR" altLang="en-US" kern="0">
                 <a:solidFill>
                   <a:srgbClr val="6B7280"/>
                 </a:solidFill>
@@ -14510,7 +14510,7 @@
               </a:spcAft>
             </a:pPr>
             <a:r>
-              <a:rPr sz="1800" b="0" i="0">
+              <a:rPr sz="1800" b="0" i="0" lang="ko-KR" altLang="en-US" kern="0">
                 <a:solidFill>
                   <a:srgbClr val="1F2937"/>
                 </a:solidFill>
@@ -14527,7 +14527,7 @@
               </a:spcAft>
             </a:pPr>
             <a:r>
-              <a:rPr sz="1800" b="0" i="1">
+              <a:rPr sz="1800" b="0" i="1" lang="ko-KR" altLang="en-US" kern="0">
                 <a:solidFill>
                   <a:srgbClr val="6B7280"/>
                 </a:solidFill>
@@ -14567,7 +14567,7 @@
               </a:spcAft>
             </a:pPr>
             <a:r>
-              <a:rPr sz="2000" b="1" i="0">
+              <a:rPr sz="2000" b="1" i="0" lang="ko-KR" altLang="en-US" kern="0">
                 <a:solidFill>
                   <a:srgbClr val="1F2937"/>
                 </a:solidFill>
@@ -14584,7 +14584,7 @@
               </a:spcAft>
             </a:pPr>
             <a:r>
-              <a:rPr sz="1800" b="1" i="0">
+              <a:rPr sz="1800" b="1" i="0" lang="ko-KR" altLang="en-US" kern="0">
                 <a:solidFill>
                   <a:srgbClr val="D9352A"/>
                 </a:solidFill>
@@ -14594,7 +14594,7 @@
               <a:t>•  </a:t>
             </a:r>
             <a:r>
-              <a:rPr sz="1800" b="0" i="0">
+              <a:rPr sz="1800" b="0" i="0" lang="ko-KR" altLang="en-US" kern="0">
                 <a:solidFill>
                   <a:srgbClr val="1F2937"/>
                 </a:solidFill>
@@ -14604,7 +14604,7 @@
               <a:t>재계산을 안 하면 </a:t>
             </a:r>
             <a:r>
-              <a:rPr sz="1800" b="1" i="0">
+              <a:rPr sz="1800" b="1" i="0" lang="ko-KR" altLang="en-US" kern="0">
                 <a:solidFill>
                   <a:srgbClr val="1F2937"/>
                 </a:solidFill>
@@ -14621,7 +14621,7 @@
               </a:spcAft>
             </a:pPr>
             <a:r>
-              <a:rPr sz="1800" b="1" i="0">
+              <a:rPr sz="1800" b="1" i="0" lang="ko-KR" altLang="en-US" kern="0">
                 <a:solidFill>
                   <a:srgbClr val="D9352A"/>
                 </a:solidFill>
@@ -14631,7 +14631,7 @@
               <a:t>•  </a:t>
             </a:r>
             <a:r>
-              <a:rPr sz="1800" b="0" i="0">
+              <a:rPr sz="1800" b="0" i="0" lang="ko-KR" altLang="en-US" kern="0">
                 <a:solidFill>
                   <a:srgbClr val="1F2937"/>
                 </a:solidFill>
@@ -14641,7 +14641,7 @@
               <a:t>저장 비용이 매우 큼 </a:t>
             </a:r>
             <a:r>
-              <a:rPr sz="1800" b="1" i="0">
+              <a:rPr sz="1800" b="1" i="0" lang="ko-KR" altLang="en-US" kern="0">
                 <a:solidFill>
                   <a:srgbClr val="1F2937"/>
                 </a:solidFill>
@@ -14658,7 +14658,7 @@
               </a:spcAft>
             </a:pPr>
             <a:r>
-              <a:rPr sz="1800" b="1" i="0">
+              <a:rPr sz="1800" b="1" i="0" lang="ko-KR" altLang="en-US" kern="0">
                 <a:solidFill>
                   <a:srgbClr val="D9352A"/>
                 </a:solidFill>
@@ -14668,7 +14668,7 @@
               <a:t>•  </a:t>
             </a:r>
             <a:r>
-              <a:rPr sz="1800" b="0" i="0">
+              <a:rPr sz="1800" b="0" i="0" lang="ko-KR" altLang="en-US" kern="0">
                 <a:solidFill>
                   <a:srgbClr val="1F2937"/>
                 </a:solidFill>
@@ -14678,7 +14678,7 @@
               <a:t>vLLM, PagedAttention 류 가속 시스템도 </a:t>
             </a:r>
             <a:r>
-              <a:rPr sz="1800" b="1" i="0">
+              <a:rPr sz="1800" b="1" i="0" lang="ko-KR" altLang="en-US" kern="0">
                 <a:solidFill>
                   <a:srgbClr val="1F2937"/>
                 </a:solidFill>
@@ -14695,7 +14695,7 @@
               </a:spcAft>
             </a:pPr>
             <a:r>
-              <a:rPr sz="2000" b="1" i="0">
+              <a:rPr sz="2000" b="1" i="0" lang="ko-KR" altLang="en-US" kern="0">
                 <a:solidFill>
                   <a:srgbClr val="1F2937"/>
                 </a:solidFill>
@@ -14712,7 +14712,7 @@
               </a:spcAft>
             </a:pPr>
             <a:r>
-              <a:rPr sz="1800" b="0" i="0">
+              <a:rPr sz="1800" b="0" i="0" lang="ko-KR" altLang="en-US" kern="0">
                 <a:solidFill>
                   <a:srgbClr val="1F2937"/>
                 </a:solidFill>
@@ -14722,7 +14722,7 @@
               <a:t>▸ 한 사용자의 </a:t>
             </a:r>
             <a:r>
-              <a:rPr sz="1800" b="1" i="0">
+              <a:rPr sz="1800" b="1" i="0" lang="ko-KR" altLang="en-US" kern="0">
                 <a:solidFill>
                   <a:srgbClr val="D9352A"/>
                 </a:solidFill>
@@ -14732,7 +14732,7 @@
               <a:t>여러 라운드 대화 KV</a:t>
             </a:r>
             <a:r>
-              <a:rPr sz="1800" b="0" i="0">
+              <a:rPr sz="1800" b="0" i="0" lang="ko-KR" altLang="en-US" kern="0">
                 <a:solidFill>
                   <a:srgbClr val="1F2937"/>
                 </a:solidFill>
@@ -14772,7 +14772,7 @@
               </a:spcAft>
             </a:pPr>
             <a:r>
-              <a:rPr sz="1000" b="0" i="0">
+              <a:rPr sz="1000" b="0" i="0" lang="ko-KR" altLang="en-US" kern="0">
                 <a:solidFill>
                   <a:srgbClr val="6B7280"/>
                 </a:solidFill>
@@ -14830,7 +14830,7 @@
               </a:spcAft>
             </a:pPr>
             <a:r>
-              <a:rPr sz="1200" b="1" i="0">
+              <a:rPr sz="1200" b="1" i="0" lang="ko-KR" altLang="en-US" kern="0">
                 <a:solidFill>
                   <a:srgbClr val="6B7280"/>
                 </a:solidFill>
@@ -14847,7 +14847,7 @@
               </a:spcAft>
             </a:pPr>
             <a:r>
-              <a:rPr sz="2800" b="1" i="0">
+              <a:rPr sz="2800" b="1" i="0" lang="ko-KR" altLang="en-US" kern="0">
                 <a:solidFill>
                   <a:srgbClr val="1F2937"/>
                 </a:solidFill>
@@ -14911,7 +14911,7 @@
               </a:spcAft>
             </a:pPr>
             <a:r>
-              <a:rPr sz="1000" b="0" i="1">
+              <a:rPr sz="1000" b="0" i="1" lang="ko-KR" altLang="en-US" kern="0">
                 <a:solidFill>
                   <a:srgbClr val="6B7280"/>
                 </a:solidFill>
@@ -14951,7 +14951,7 @@
               </a:spcAft>
             </a:pPr>
             <a:r>
-              <a:rPr sz="1800" b="1" i="0">
+              <a:rPr sz="1800" b="1" i="0" lang="ko-KR" altLang="en-US" kern="0">
                 <a:solidFill>
                   <a:srgbClr val="D9352A"/>
                 </a:solidFill>
@@ -14961,7 +14961,7 @@
               <a:t>•  </a:t>
             </a:r>
             <a:r>
-              <a:rPr sz="1800" b="1" i="0">
+              <a:rPr sz="1800" b="1" i="0" lang="ko-KR" altLang="en-US" kern="0">
                 <a:solidFill>
                   <a:srgbClr val="1F2937"/>
                 </a:solidFill>
@@ -14971,7 +14971,7 @@
               <a:t>80GB A800 GPU 1장 </a:t>
             </a:r>
             <a:r>
-              <a:rPr sz="1800" b="0" i="0">
+              <a:rPr sz="1800" b="0" i="0" lang="ko-KR" altLang="en-US" kern="0">
                 <a:solidFill>
                   <a:srgbClr val="1F2937"/>
                 </a:solidFill>
@@ -14988,7 +14988,7 @@
               </a:spcAft>
             </a:pPr>
             <a:r>
-              <a:rPr sz="1800" b="1" i="0">
+              <a:rPr sz="1800" b="1" i="0" lang="ko-KR" altLang="en-US" kern="0">
                 <a:solidFill>
                   <a:srgbClr val="D9352A"/>
                 </a:solidFill>
@@ -14998,24 +14998,24 @@
               <a:t>•  </a:t>
             </a:r>
             <a:r>
-              <a:rPr sz="1800" b="1" i="0">
-                <a:solidFill>
-                  <a:srgbClr val="1F2937"/>
-                </a:solidFill>
-                <a:latin typeface="Calibri"/>
-                <a:ea typeface="맑은 고딕"/>
-              </a:rPr>
-              <a:t>30 users/min 도착 시 </a:t>
-            </a:r>
-            <a:r>
-              <a:rPr sz="1800" b="0" i="0">
-                <a:solidFill>
-                  <a:srgbClr val="1F2937"/>
-                </a:solidFill>
-                <a:latin typeface="Calibri"/>
-                <a:ea typeface="맑은 고딕"/>
-              </a:rPr>
-              <a:t>OPT-13B 동시 캐시 KV ≈ 480 GB</a:t>
+              <a:rPr sz="1800" b="1" i="0" lang="ko-KR" altLang="en-US" kern="0">
+                <a:solidFill>
+                  <a:srgbClr val="1F2937"/>
+                </a:solidFill>
+                <a:latin typeface="Calibri"/>
+                <a:ea typeface="맑은 고딕"/>
+              </a:rPr>
+              <a:t>사용자가 30명/분 도착하면 </a:t>
+            </a:r>
+            <a:r>
+              <a:rPr sz="1800" b="0" i="0" lang="ko-KR" altLang="en-US" kern="0">
+                <a:solidFill>
+                  <a:srgbClr val="1F2937"/>
+                </a:solidFill>
+                <a:latin typeface="Calibri"/>
+                <a:ea typeface="맑은 고딕"/>
+              </a:rPr>
+              <a:t>OPT-13B에서 동시 캐시 KV가 약 480 GB까지 증가</a:t>
             </a:r>
           </a:p>
           <a:p>
@@ -15025,7 +15025,7 @@
               </a:spcAft>
             </a:pPr>
             <a:r>
-              <a:rPr sz="1800" b="1" i="0">
+              <a:rPr sz="1800" b="1" i="0" lang="ko-KR" altLang="en-US" kern="0">
                 <a:solidFill>
                   <a:srgbClr val="D9352A"/>
                 </a:solidFill>
@@ -15035,24 +15035,24 @@
               <a:t>•  </a:t>
             </a:r>
             <a:r>
-              <a:rPr sz="1800" b="1" i="0">
-                <a:solidFill>
-                  <a:srgbClr val="1F2937"/>
-                </a:solidFill>
-                <a:latin typeface="Calibri"/>
-                <a:ea typeface="맑은 고딕"/>
-              </a:rPr>
-              <a:t>LLM 서버 host memory </a:t>
-            </a:r>
-            <a:r>
-              <a:rPr sz="1800" b="0" i="0">
-                <a:solidFill>
-                  <a:srgbClr val="1F2937"/>
-                </a:solidFill>
-                <a:latin typeface="Calibri"/>
-                <a:ea typeface="맑은 고딕"/>
-              </a:rPr>
-              <a:t>≈ GPU mem 의 1.6–3.2×</a:t>
+              <a:rPr sz="1800" b="1" i="0" lang="ko-KR" altLang="en-US" kern="0">
+                <a:solidFill>
+                  <a:srgbClr val="1F2937"/>
+                </a:solidFill>
+                <a:latin typeface="Calibri"/>
+                <a:ea typeface="맑은 고딕"/>
+              </a:rPr>
+              <a:t>일반적인 LLM 서버의 host memory는 </a:t>
+            </a:r>
+            <a:r>
+              <a:rPr sz="1800" b="0" i="0" lang="ko-KR" altLang="en-US" kern="0">
+                <a:solidFill>
+                  <a:srgbClr val="1F2937"/>
+                </a:solidFill>
+                <a:latin typeface="Calibri"/>
+                <a:ea typeface="맑은 고딕"/>
+              </a:rPr>
+              <a:t>GPU memory의 1.6–3.2배</a:t>
             </a:r>
           </a:p>
           <a:p>
@@ -15062,7 +15062,7 @@
               </a:spcAft>
             </a:pPr>
             <a:r>
-              <a:rPr sz="1800" b="1" i="0">
+              <a:rPr sz="1800" b="1" i="0" lang="ko-KR" altLang="en-US" kern="0">
                 <a:solidFill>
                   <a:srgbClr val="D9352A"/>
                 </a:solidFill>
@@ -15072,24 +15072,24 @@
               <a:t>•  </a:t>
             </a:r>
             <a:r>
-              <a:rPr sz="1800" b="1" i="0">
-                <a:solidFill>
-                  <a:srgbClr val="1F2937"/>
-                </a:solidFill>
-                <a:latin typeface="Calibri"/>
-                <a:ea typeface="맑은 고딕"/>
-              </a:rPr>
-              <a:t>→ host memory </a:t>
-            </a:r>
-            <a:r>
-              <a:rPr sz="1800" b="0" i="0">
-                <a:solidFill>
-                  <a:srgbClr val="1F2937"/>
-                </a:solidFill>
-                <a:latin typeface="Calibri"/>
-                <a:ea typeface="맑은 고딕"/>
-              </a:rPr>
-              <a:t>도 부족, capacity SSD 도 사용해야 함</a:t>
+              <a:rPr sz="1800" b="1" i="0" lang="ko-KR" altLang="en-US" kern="0">
+                <a:solidFill>
+                  <a:srgbClr val="1F2937"/>
+                </a:solidFill>
+                <a:latin typeface="Calibri"/>
+                <a:ea typeface="맑은 고딕"/>
+              </a:rPr>
+              <a:t>따라서 host memory도 부족 </a:t>
+            </a:r>
+            <a:r>
+              <a:rPr sz="1800" b="0" i="0" lang="ko-KR" altLang="en-US" kern="0">
+                <a:solidFill>
+                  <a:srgbClr val="1F2937"/>
+                </a:solidFill>
+                <a:latin typeface="Calibri"/>
+                <a:ea typeface="맑은 고딕"/>
+              </a:rPr>
+              <a:t>→ capacity layer(SSD)까지 사용해야 함</a:t>
             </a:r>
           </a:p>
         </p:txBody>
@@ -15168,7 +15168,7 @@
               </a:spcAft>
             </a:pPr>
             <a:r>
-              <a:rPr sz="2000" b="0" i="0">
+              <a:rPr sz="2000" b="0" i="0" lang="ko-KR" altLang="en-US" kern="0">
                 <a:solidFill>
                   <a:srgbClr val="1F2937"/>
                 </a:solidFill>
@@ -15178,7 +15178,7 @@
               <a:t>동시 캐시 KV는 perf layer를 </a:t>
             </a:r>
             <a:r>
-              <a:rPr sz="2000" b="1" i="0">
+              <a:rPr sz="2000" b="1" i="0" lang="ko-KR" altLang="en-US" kern="0">
                 <a:solidFill>
                   <a:srgbClr val="D9352A"/>
                 </a:solidFill>
@@ -15188,7 +15188,7 @@
               <a:t>최대 3.91×</a:t>
             </a:r>
             <a:r>
-              <a:rPr sz="2000" b="0" i="0">
+              <a:rPr sz="2000" b="0" i="0" lang="ko-KR" altLang="en-US" kern="0">
                 <a:solidFill>
                   <a:srgbClr val="1F2937"/>
                 </a:solidFill>
@@ -15205,7 +15205,7 @@
               </a:spcAft>
             </a:pPr>
             <a:r>
-              <a:rPr sz="1800" b="0" i="1">
+              <a:rPr sz="1800" b="0" i="1" lang="ko-KR" altLang="en-US" kern="0">
                 <a:solidFill>
                   <a:srgbClr val="6B7280"/>
                 </a:solidFill>
@@ -15245,7 +15245,7 @@
               </a:spcAft>
             </a:pPr>
             <a:r>
-              <a:rPr sz="1000" b="0" i="0">
+              <a:rPr sz="1000" b="0" i="0" lang="ko-KR" altLang="en-US" kern="0">
                 <a:solidFill>
                   <a:srgbClr val="6B7280"/>
                 </a:solidFill>
@@ -15303,7 +15303,7 @@
               </a:spcAft>
             </a:pPr>
             <a:r>
-              <a:rPr sz="1200" b="1" i="0">
+              <a:rPr sz="1200" b="1" i="0" lang="ko-KR" altLang="en-US" kern="0">
                 <a:solidFill>
                   <a:srgbClr val="6B7280"/>
                 </a:solidFill>
@@ -15320,7 +15320,7 @@
               </a:spcAft>
             </a:pPr>
             <a:r>
-              <a:rPr sz="2800" b="1" i="0">
+              <a:rPr sz="2800" b="1" i="0" lang="ko-KR" altLang="en-US" kern="0">
                 <a:solidFill>
                   <a:srgbClr val="1F2937"/>
                 </a:solidFill>
@@ -15384,7 +15384,7 @@
               </a:spcAft>
             </a:pPr>
             <a:r>
-              <a:rPr sz="1000" b="0" i="1">
+              <a:rPr sz="1000" b="0" i="1" lang="ko-KR" altLang="en-US" kern="0">
                 <a:solidFill>
                   <a:srgbClr val="6B7280"/>
                 </a:solidFill>
@@ -15424,7 +15424,7 @@
               </a:spcAft>
             </a:pPr>
             <a:r>
-              <a:rPr sz="2000" b="1" i="0">
+              <a:rPr sz="2000" b="1" i="0" lang="ko-KR" altLang="en-US" kern="0">
                 <a:solidFill>
                   <a:srgbClr val="1F2937"/>
                 </a:solidFill>
@@ -15441,7 +15441,7 @@
               </a:spcAft>
             </a:pPr>
             <a:r>
-              <a:rPr sz="1800" b="0" i="0">
+              <a:rPr sz="1800" b="0" i="0" lang="ko-KR" altLang="en-US" kern="0">
                 <a:solidFill>
                   <a:srgbClr val="6B7280"/>
                 </a:solidFill>
@@ -15458,7 +15458,7 @@
               </a:spcAft>
             </a:pPr>
             <a:r>
-              <a:rPr sz="2000" b="1" i="0">
+              <a:rPr sz="2000" b="1" i="0" lang="ko-KR" altLang="en-US" kern="0">
                 <a:solidFill>
                   <a:srgbClr val="1F2937"/>
                 </a:solidFill>
@@ -15475,7 +15475,7 @@
               </a:spcAft>
             </a:pPr>
             <a:r>
-              <a:rPr sz="1800" b="0" i="0">
+              <a:rPr sz="1800" b="0" i="0" lang="ko-KR" altLang="en-US" kern="0">
                 <a:solidFill>
                   <a:srgbClr val="6B7280"/>
                 </a:solidFill>
@@ -15492,7 +15492,7 @@
               </a:spcAft>
             </a:pPr>
             <a:r>
-              <a:rPr sz="2000" b="1" i="0">
+              <a:rPr sz="2000" b="1" i="0" lang="ko-KR" altLang="en-US" kern="0">
                 <a:solidFill>
                   <a:srgbClr val="1F2937"/>
                 </a:solidFill>
@@ -15509,7 +15509,7 @@
               </a:spcAft>
             </a:pPr>
             <a:r>
-              <a:rPr sz="1800" b="1" i="0">
+              <a:rPr sz="1800" b="1" i="0" lang="ko-KR" altLang="en-US" kern="0">
                 <a:solidFill>
                   <a:srgbClr val="D9352A"/>
                 </a:solidFill>
@@ -15519,7 +15519,7 @@
               <a:t>▸ </a:t>
             </a:r>
             <a:r>
-              <a:rPr sz="1800" b="1" i="0">
+              <a:rPr sz="1800" b="1" i="0" lang="ko-KR" altLang="en-US" kern="0">
                 <a:solidFill>
                   <a:srgbClr val="1F2937"/>
                 </a:solidFill>
@@ -15529,7 +15529,7 @@
               <a:t>CachedAttention</a:t>
             </a:r>
             <a:r>
-              <a:rPr sz="1400" b="0" i="0">
+              <a:rPr sz="1400" b="0" i="0" lang="ko-KR" altLang="en-US" kern="0">
                 <a:solidFill>
                   <a:srgbClr val="6B7280"/>
                 </a:solidFill>
@@ -15546,7 +15546,7 @@
               </a:spcAft>
             </a:pPr>
             <a:r>
-              <a:rPr sz="1800" b="1" i="0">
+              <a:rPr sz="1800" b="1" i="0" lang="ko-KR" altLang="en-US" kern="0">
                 <a:solidFill>
                   <a:srgbClr val="D9352A"/>
                 </a:solidFill>
@@ -15556,7 +15556,7 @@
               <a:t>▸ </a:t>
             </a:r>
             <a:r>
-              <a:rPr sz="1800" b="1" i="0">
+              <a:rPr sz="1800" b="1" i="0" lang="ko-KR" altLang="en-US" kern="0">
                 <a:solidFill>
                   <a:srgbClr val="1F2937"/>
                 </a:solidFill>
@@ -15566,7 +15566,7 @@
               <a:t>FlashGen</a:t>
             </a:r>
             <a:r>
-              <a:rPr sz="1400" b="0" i="0">
+              <a:rPr sz="1400" b="0" i="0" lang="ko-KR" altLang="en-US" kern="0">
                 <a:solidFill>
                   <a:srgbClr val="6B7280"/>
                 </a:solidFill>
@@ -15583,7 +15583,7 @@
               </a:spcAft>
             </a:pPr>
             <a:r>
-              <a:rPr sz="1800" b="1" i="0">
+              <a:rPr sz="1800" b="1" i="0" lang="ko-KR" altLang="en-US" kern="0">
                 <a:solidFill>
                   <a:srgbClr val="D9352A"/>
                 </a:solidFill>
@@ -15593,7 +15593,7 @@
               <a:t>▸ </a:t>
             </a:r>
             <a:r>
-              <a:rPr sz="1800" b="1" i="0">
+              <a:rPr sz="1800" b="1" i="0" lang="ko-KR" altLang="en-US" kern="0">
                 <a:solidFill>
                   <a:srgbClr val="1F2937"/>
                 </a:solidFill>
@@ -15603,7 +15603,7 @@
               <a:t>HCache</a:t>
             </a:r>
             <a:r>
-              <a:rPr sz="1400" b="0" i="0">
+              <a:rPr sz="1400" b="0" i="0" lang="ko-KR" altLang="en-US" kern="0">
                 <a:solidFill>
                   <a:srgbClr val="6B7280"/>
                 </a:solidFill>
@@ -15689,7 +15689,7 @@
               </a:spcAft>
             </a:pPr>
             <a:r>
-              <a:rPr sz="1800" b="0" i="0">
+              <a:rPr sz="1800" b="0" i="0" lang="ko-KR" altLang="en-US" kern="0">
                 <a:solidFill>
                   <a:srgbClr val="1F2937"/>
                 </a:solidFill>
@@ -15699,7 +15699,7 @@
               <a:t>쓰기는 백그라운드, 그러나 읽기(load)는 </a:t>
             </a:r>
             <a:r>
-              <a:rPr sz="1800" b="1" i="0">
+              <a:rPr sz="1800" b="1" i="0" lang="ko-KR" altLang="en-US" kern="0">
                 <a:solidFill>
                   <a:srgbClr val="D9352A"/>
                 </a:solidFill>
@@ -15739,7 +15739,7 @@
               </a:spcAft>
             </a:pPr>
             <a:r>
-              <a:rPr sz="1000" b="0" i="0">
+              <a:rPr sz="1000" b="0" i="0" lang="ko-KR" altLang="en-US" kern="0">
                 <a:solidFill>
                   <a:srgbClr val="6B7280"/>
                 </a:solidFill>
@@ -15797,7 +15797,7 @@
               </a:spcAft>
             </a:pPr>
             <a:r>
-              <a:rPr sz="1200" b="1" i="0">
+              <a:rPr sz="1200" b="1" i="0" lang="ko-KR" altLang="en-US" kern="0">
                 <a:solidFill>
                   <a:srgbClr val="6B7280"/>
                 </a:solidFill>
@@ -15814,7 +15814,7 @@
               </a:spcAft>
             </a:pPr>
             <a:r>
-              <a:rPr sz="2800" b="1" i="0">
+              <a:rPr sz="2800" b="1" i="0" lang="ko-KR" altLang="en-US" kern="0">
                 <a:solidFill>
                   <a:srgbClr val="1F2937"/>
                 </a:solidFill>
@@ -15878,14 +15878,14 @@
               </a:spcAft>
             </a:pPr>
             <a:r>
-              <a:rPr sz="1000" b="0" i="1">
+              <a:rPr sz="1000" b="0" i="1" lang="ko-KR" altLang="en-US" kern="0">
                 <a:solidFill>
                   <a:srgbClr val="6B7280"/>
                 </a:solidFill>
                 <a:latin typeface="Calibri"/>
                 <a:ea typeface="맑은 고딕"/>
               </a:rPr>
-              <a:t>Figure 3. KV recompute / 기존 cache / Ideal cache 의 latency 비교</a:t>
+              <a:t>Figure 3. KV recompute / 기존 cache / Ideal cache의 latency 비교</a:t>
             </a:r>
           </a:p>
         </p:txBody>
@@ -15918,7 +15918,7 @@
               </a:spcAft>
             </a:pPr>
             <a:r>
-              <a:rPr sz="1800" b="1" i="0">
+              <a:rPr sz="1800" b="1" i="0" lang="ko-KR" altLang="en-US" kern="0">
                 <a:solidFill>
                   <a:srgbClr val="1F2937"/>
                 </a:solidFill>
@@ -15935,7 +15935,7 @@
               </a:spcAft>
             </a:pPr>
             <a:r>
-              <a:rPr sz="1400" b="0" i="0">
+              <a:rPr sz="1400" b="0" i="0" lang="ko-KR" altLang="en-US" kern="0">
                 <a:solidFill>
                   <a:srgbClr val="6B7280"/>
                 </a:solidFill>
@@ -15952,7 +15952,7 @@
               </a:spcAft>
             </a:pPr>
             <a:r>
-              <a:rPr sz="1800" b="1" i="0">
+              <a:rPr sz="1800" b="1" i="0" lang="ko-KR" altLang="en-US" kern="0">
                 <a:solidFill>
                   <a:srgbClr val="1F2937"/>
                 </a:solidFill>
@@ -15969,7 +15969,7 @@
               </a:spcAft>
             </a:pPr>
             <a:r>
-              <a:rPr sz="1800" b="0" i="0">
+              <a:rPr sz="1800" b="0" i="0" lang="ko-KR" altLang="en-US" kern="0">
                 <a:solidFill>
                   <a:srgbClr val="1F2937"/>
                 </a:solidFill>
@@ -15979,7 +15979,7 @@
               <a:t>▸ 응답 latency가 </a:t>
             </a:r>
             <a:r>
-              <a:rPr sz="1800" b="1" i="0">
+              <a:rPr sz="1800" b="1" i="0" lang="ko-KR" altLang="en-US" kern="0">
                 <a:solidFill>
                   <a:srgbClr val="D9352A"/>
                 </a:solidFill>
@@ -15996,7 +15996,7 @@
               </a:spcAft>
             </a:pPr>
             <a:r>
-              <a:rPr sz="1800" b="0" i="0">
+              <a:rPr sz="1800" b="0" i="0" lang="ko-KR" altLang="en-US" kern="0">
                 <a:solidFill>
                   <a:srgbClr val="1F2937"/>
                 </a:solidFill>
@@ -16006,7 +16006,7 @@
               <a:t>▸ throughput은 </a:t>
             </a:r>
             <a:r>
-              <a:rPr sz="1800" b="1" i="0">
+              <a:rPr sz="1800" b="1" i="0" lang="ko-KR" altLang="en-US" kern="0">
                 <a:solidFill>
                   <a:srgbClr val="D9352A"/>
                 </a:solidFill>
@@ -16023,7 +16023,7 @@
               </a:spcAft>
             </a:pPr>
             <a:r>
-              <a:rPr sz="1800" b="1" i="0">
+              <a:rPr sz="1800" b="1" i="0" lang="ko-KR" altLang="en-US" kern="0">
                 <a:solidFill>
                   <a:srgbClr val="1F2937"/>
                 </a:solidFill>
@@ -16040,7 +16040,7 @@
               </a:spcAft>
             </a:pPr>
             <a:r>
-              <a:rPr sz="1400" b="0" i="0">
+              <a:rPr sz="1400" b="0" i="0" lang="ko-KR" altLang="en-US" kern="0">
                 <a:solidFill>
                   <a:srgbClr val="6B7280"/>
                 </a:solidFill>
@@ -16057,7 +16057,7 @@
               </a:spcAft>
             </a:pPr>
             <a:r>
-              <a:rPr sz="1400" b="0" i="1">
+              <a:rPr sz="1400" b="0" i="1" lang="ko-KR" altLang="en-US" kern="0">
                 <a:solidFill>
                   <a:srgbClr val="1F2937"/>
                 </a:solidFill>
@@ -16097,7 +16097,7 @@
               </a:spcAft>
             </a:pPr>
             <a:r>
-              <a:rPr sz="1000" b="0" i="0">
+              <a:rPr sz="1000" b="0" i="0" lang="ko-KR" altLang="en-US" kern="0">
                 <a:solidFill>
                   <a:srgbClr val="6B7280"/>
                 </a:solidFill>
@@ -16155,7 +16155,7 @@
               </a:spcAft>
             </a:pPr>
             <a:r>
-              <a:rPr sz="1200" b="1" i="0">
+              <a:rPr sz="1200" b="1" i="0" lang="ko-KR" altLang="en-US" kern="0">
                 <a:solidFill>
                   <a:srgbClr val="6B7280"/>
                 </a:solidFill>
@@ -16172,7 +16172,7 @@
               </a:spcAft>
             </a:pPr>
             <a:r>
-              <a:rPr sz="2800" b="1" i="0">
+              <a:rPr sz="2800" b="1" i="0" lang="ko-KR" altLang="en-US" kern="0">
                 <a:solidFill>
                   <a:srgbClr val="1F2937"/>
                 </a:solidFill>
@@ -16236,7 +16236,7 @@
               </a:spcAft>
             </a:pPr>
             <a:r>
-              <a:rPr sz="1000" b="0" i="1">
+              <a:rPr sz="1000" b="0" i="1" lang="ko-KR" altLang="en-US" kern="0">
                 <a:solidFill>
                   <a:srgbClr val="6B7280"/>
                 </a:solidFill>
@@ -16276,7 +16276,7 @@
               </a:spcAft>
             </a:pPr>
             <a:r>
-              <a:rPr sz="1800" b="1" i="0">
+              <a:rPr sz="1800" b="1" i="0" lang="ko-KR" altLang="en-US" kern="0">
                 <a:solidFill>
                   <a:srgbClr val="1F2937"/>
                 </a:solidFill>
@@ -16293,7 +16293,7 @@
               </a:spcAft>
             </a:pPr>
             <a:r>
-              <a:rPr sz="1400" b="0" i="0">
+              <a:rPr sz="1400" b="0" i="0" lang="ko-KR" altLang="en-US" kern="0">
                 <a:solidFill>
                   <a:srgbClr val="6B7280"/>
                 </a:solidFill>
@@ -16310,7 +16310,7 @@
               </a:spcAft>
             </a:pPr>
             <a:r>
-              <a:rPr sz="1800" b="1" i="0">
+              <a:rPr sz="1800" b="1" i="0" lang="ko-KR" altLang="en-US" kern="0">
                 <a:solidFill>
                   <a:srgbClr val="1F2937"/>
                 </a:solidFill>
@@ -16327,7 +16327,7 @@
               </a:spcAft>
             </a:pPr>
             <a:r>
-              <a:rPr sz="1800" b="1" i="0">
+              <a:rPr sz="1800" b="1" i="0" lang="ko-KR" altLang="en-US" kern="0">
                 <a:solidFill>
                   <a:srgbClr val="D9352A"/>
                 </a:solidFill>
@@ -16337,24 +16337,24 @@
               <a:t>▸ </a:t>
             </a:r>
             <a:r>
-              <a:rPr sz="1400" b="0" i="0">
-                <a:solidFill>
-                  <a:srgbClr val="1F2937"/>
-                </a:solidFill>
-                <a:latin typeface="Calibri"/>
-                <a:ea typeface="맑은 고딕"/>
-              </a:rPr>
-              <a:t>ShareGPT: 5.7 라운드 — interactive 분석엔 짧음</a:t>
-            </a:r>
-          </a:p>
-          <a:p>
-            <a:pPr algn="l">
-              <a:spcAft>
-                <a:spcPts val="400"/>
-              </a:spcAft>
-            </a:pPr>
-            <a:r>
-              <a:rPr sz="1800" b="1" i="0">
+              <a:rPr sz="1400" b="0" i="0" lang="ko-KR" altLang="en-US" kern="0">
+                <a:solidFill>
+                  <a:srgbClr val="1F2937"/>
+                </a:solidFill>
+                <a:latin typeface="Calibri"/>
+                <a:ea typeface="맑은 고딕"/>
+              </a:rPr>
+              <a:t>ShareGPT: 평균 5.7 라운드 — interactive 분석엔 너무 짧음</a:t>
+            </a:r>
+          </a:p>
+          <a:p>
+            <a:pPr algn="l">
+              <a:spcAft>
+                <a:spcPts val="400"/>
+              </a:spcAft>
+            </a:pPr>
+            <a:r>
+              <a:rPr sz="1800" b="1" i="0" lang="ko-KR" altLang="en-US" kern="0">
                 <a:solidFill>
                   <a:srgbClr val="D9352A"/>
                 </a:solidFill>
@@ -16364,24 +16364,24 @@
               <a:t>▸ </a:t>
             </a:r>
             <a:r>
-              <a:rPr sz="1400" b="0" i="0">
-                <a:solidFill>
-                  <a:srgbClr val="1F2937"/>
-                </a:solidFill>
-                <a:latin typeface="Calibri"/>
-                <a:ea typeface="맑은 고딕"/>
-              </a:rPr>
-              <a:t>Mooncake: 12k+ 토큰 — 길지만 대화 패턴 부재</a:t>
-            </a:r>
-          </a:p>
-          <a:p>
-            <a:pPr algn="l">
-              <a:spcAft>
-                <a:spcPts val="400"/>
-              </a:spcAft>
-            </a:pPr>
-            <a:r>
-              <a:rPr sz="1800" b="1" i="0">
+              <a:rPr sz="1400" b="0" i="0" lang="ko-KR" altLang="en-US" kern="0">
+                <a:solidFill>
+                  <a:srgbClr val="1F2937"/>
+                </a:solidFill>
+                <a:latin typeface="Calibri"/>
+                <a:ea typeface="맑은 고딕"/>
+              </a:rPr>
+              <a:t>Mooncake: 12k+ 토큰 — 길지만 대화 패턴이 없음</a:t>
+            </a:r>
+          </a:p>
+          <a:p>
+            <a:pPr algn="l">
+              <a:spcAft>
+                <a:spcPts val="400"/>
+              </a:spcAft>
+            </a:pPr>
+            <a:r>
+              <a:rPr sz="1800" b="1" i="0" lang="ko-KR" altLang="en-US" kern="0">
                 <a:solidFill>
                   <a:srgbClr val="D9352A"/>
                 </a:solidFill>
@@ -16391,14 +16391,14 @@
               <a:t>▸ </a:t>
             </a:r>
             <a:r>
-              <a:rPr sz="1400" b="0" i="0">
-                <a:solidFill>
-                  <a:srgbClr val="1F2937"/>
-                </a:solidFill>
-                <a:latin typeface="Calibri"/>
-                <a:ea typeface="맑은 고딕"/>
-              </a:rPr>
-              <a:t>본 trace: 22.4 라운드 / 36 토큰 — interactive 부합</a:t>
+              <a:rPr sz="1400" b="0" i="0" lang="ko-KR" altLang="en-US" kern="0">
+                <a:solidFill>
+                  <a:srgbClr val="1F2937"/>
+                </a:solidFill>
+                <a:latin typeface="Calibri"/>
+                <a:ea typeface="맑은 고딕"/>
+              </a:rPr>
+              <a:t>본 trace: 22.4 라운드 / 36 토큰 — interactive 정의에 부합</a:t>
             </a:r>
           </a:p>
         </p:txBody>
@@ -16431,7 +16431,7 @@
               </a:spcAft>
             </a:pPr>
             <a:r>
-              <a:rPr sz="1800" b="0" i="0">
+              <a:rPr sz="1800" b="0" i="0" lang="ko-KR" altLang="en-US" kern="0">
                 <a:solidFill>
                   <a:srgbClr val="6B7280"/>
                 </a:solidFill>
@@ -16441,7 +16441,7 @@
               <a:t>이어지는 세 슬라이드 →  </a:t>
             </a:r>
             <a:r>
-              <a:rPr sz="2200" b="1" i="0">
+              <a:rPr sz="2200" b="1" i="0" lang="ko-KR" altLang="en-US" kern="0">
                 <a:solidFill>
                   <a:srgbClr val="D9352A"/>
                 </a:solidFill>
@@ -16481,7 +16481,7 @@
               </a:spcAft>
             </a:pPr>
             <a:r>
-              <a:rPr sz="1000" b="0" i="0">
+              <a:rPr sz="1000" b="0" i="0" lang="ko-KR" altLang="en-US" kern="0">
                 <a:solidFill>
                   <a:srgbClr val="6B7280"/>
                 </a:solidFill>
@@ -16539,7 +16539,7 @@
               </a:spcAft>
             </a:pPr>
             <a:r>
-              <a:rPr sz="1200" b="1" i="0">
+              <a:rPr sz="1200" b="1" i="0" lang="ko-KR" altLang="en-US" kern="0">
                 <a:solidFill>
                   <a:srgbClr val="6B7280"/>
                 </a:solidFill>
@@ -16556,7 +16556,7 @@
               </a:spcAft>
             </a:pPr>
             <a:r>
-              <a:rPr sz="2800" b="1" i="0">
+              <a:rPr sz="2800" b="1" i="0" lang="ko-KR" altLang="en-US" kern="0">
                 <a:solidFill>
                   <a:srgbClr val="1F2937"/>
                 </a:solidFill>
@@ -16620,7 +16620,7 @@
               </a:spcAft>
             </a:pPr>
             <a:r>
-              <a:rPr sz="1000" b="0" i="1">
+              <a:rPr sz="1000" b="0" i="1" lang="ko-KR" altLang="en-US" kern="0">
                 <a:solidFill>
                   <a:srgbClr val="6B7280"/>
                 </a:solidFill>
@@ -16660,7 +16660,7 @@
               </a:spcAft>
             </a:pPr>
             <a:r>
-              <a:rPr sz="1800" b="1" i="0">
+              <a:rPr sz="1800" b="1" i="0" lang="ko-KR" altLang="en-US" kern="0">
                 <a:solidFill>
                   <a:srgbClr val="1F2937"/>
                 </a:solidFill>
@@ -16677,7 +16677,7 @@
               </a:spcAft>
             </a:pPr>
             <a:r>
-              <a:rPr sz="1800" b="1" i="0">
+              <a:rPr sz="1800" b="1" i="0" lang="ko-KR" altLang="en-US" kern="0">
                 <a:solidFill>
                   <a:srgbClr val="D9352A"/>
                 </a:solidFill>
@@ -16687,24 +16687,24 @@
               <a:t>▸ </a:t>
             </a:r>
             <a:r>
-              <a:rPr sz="1800" b="0" i="0">
-                <a:solidFill>
-                  <a:srgbClr val="1F2937"/>
-                </a:solidFill>
-                <a:latin typeface="Calibri"/>
-                <a:ea typeface="맑은 고딕"/>
-              </a:rPr>
-              <a:t>22.4 라운드 동안 KV 생존</a:t>
-            </a:r>
-          </a:p>
-          <a:p>
-            <a:pPr algn="l">
-              <a:spcAft>
-                <a:spcPts val="400"/>
-              </a:spcAft>
-            </a:pPr>
-            <a:r>
-              <a:rPr sz="1800" b="1" i="0">
+              <a:rPr sz="1800" b="0" i="0" lang="ko-KR" altLang="en-US" kern="0">
+                <a:solidFill>
+                  <a:srgbClr val="1F2937"/>
+                </a:solidFill>
+                <a:latin typeface="Calibri"/>
+                <a:ea typeface="맑은 고딕"/>
+              </a:rPr>
+              <a:t>한 사용자의 KV가 평균 22.4 라운드 동안 살아있어야 함</a:t>
+            </a:r>
+          </a:p>
+          <a:p>
+            <a:pPr algn="l">
+              <a:spcAft>
+                <a:spcPts val="400"/>
+              </a:spcAft>
+            </a:pPr>
+            <a:r>
+              <a:rPr sz="1800" b="1" i="0" lang="ko-KR" altLang="en-US" kern="0">
                 <a:solidFill>
                   <a:srgbClr val="D9352A"/>
                 </a:solidFill>
@@ -16714,24 +16714,24 @@
               <a:t>▸ </a:t>
             </a:r>
             <a:r>
-              <a:rPr sz="1800" b="0" i="0">
-                <a:solidFill>
-                  <a:srgbClr val="1F2937"/>
-                </a:solidFill>
-                <a:latin typeface="Calibri"/>
-                <a:ea typeface="맑은 고딕"/>
-              </a:rPr>
-              <a:t>도착률↑ → 동시 사용자 수 선형 증가</a:t>
-            </a:r>
-          </a:p>
-          <a:p>
-            <a:pPr algn="l">
-              <a:spcAft>
-                <a:spcPts val="400"/>
-              </a:spcAft>
-            </a:pPr>
-            <a:r>
-              <a:rPr sz="1800" b="1" i="0">
+              <a:rPr sz="1800" b="0" i="0" lang="ko-KR" altLang="en-US" kern="0">
+                <a:solidFill>
+                  <a:srgbClr val="1F2937"/>
+                </a:solidFill>
+                <a:latin typeface="Calibri"/>
+                <a:ea typeface="맑은 고딕"/>
+              </a:rPr>
+              <a:t>도착률이 늘면 동시 사용자 수가 선형으로 증가</a:t>
+            </a:r>
+          </a:p>
+          <a:p>
+            <a:pPr algn="l">
+              <a:spcAft>
+                <a:spcPts val="400"/>
+              </a:spcAft>
+            </a:pPr>
+            <a:r>
+              <a:rPr sz="1800" b="1" i="0" lang="ko-KR" altLang="en-US" kern="0">
                 <a:solidFill>
                   <a:srgbClr val="D9352A"/>
                 </a:solidFill>
@@ -16741,24 +16741,24 @@
               <a:t>▸ </a:t>
             </a:r>
             <a:r>
-              <a:rPr sz="1800" b="0" i="0">
-                <a:solidFill>
-                  <a:srgbClr val="1F2937"/>
-                </a:solidFill>
-                <a:latin typeface="Calibri"/>
-                <a:ea typeface="맑은 고딕"/>
-              </a:rPr>
-              <a:t>30 users/min ≈ 480 GB &gt; perf 200 GB</a:t>
-            </a:r>
-          </a:p>
-          <a:p>
-            <a:pPr algn="l">
-              <a:spcAft>
-                <a:spcPts val="400"/>
-              </a:spcAft>
-            </a:pPr>
-            <a:r>
-              <a:rPr sz="1800" b="1" i="0">
+              <a:rPr sz="1800" b="0" i="0" lang="ko-KR" altLang="en-US" kern="0">
+                <a:solidFill>
+                  <a:srgbClr val="1F2937"/>
+                </a:solidFill>
+                <a:latin typeface="Calibri"/>
+                <a:ea typeface="맑은 고딕"/>
+              </a:rPr>
+              <a:t>30 users/min일 때 KV 약 480 GB → perf layer(200 GB) 초과</a:t>
+            </a:r>
+          </a:p>
+          <a:p>
+            <a:pPr algn="l">
+              <a:spcAft>
+                <a:spcPts val="400"/>
+              </a:spcAft>
+            </a:pPr>
+            <a:r>
+              <a:rPr sz="1800" b="1" i="0" lang="ko-KR" altLang="en-US" kern="0">
                 <a:solidFill>
                   <a:srgbClr val="1F2937"/>
                 </a:solidFill>
@@ -16775,7 +16775,7 @@
               </a:spcAft>
             </a:pPr>
             <a:r>
-              <a:rPr sz="1800" b="1" i="0">
+              <a:rPr sz="1800" b="1" i="0" lang="ko-KR" altLang="en-US" kern="0">
                 <a:solidFill>
                   <a:srgbClr val="D9352A"/>
                 </a:solidFill>
@@ -16785,24 +16785,24 @@
               <a:t>▸ </a:t>
             </a:r>
             <a:r>
-              <a:rPr sz="1800" b="0" i="0">
-                <a:solidFill>
-                  <a:srgbClr val="1F2937"/>
-                </a:solidFill>
-                <a:latin typeface="Calibri"/>
-                <a:ea typeface="맑은 고딕"/>
-              </a:rPr>
-              <a:t>perf layer 가 커도 결국 한계</a:t>
-            </a:r>
-          </a:p>
-          <a:p>
-            <a:pPr algn="l">
-              <a:spcAft>
-                <a:spcPts val="400"/>
-              </a:spcAft>
-            </a:pPr>
-            <a:r>
-              <a:rPr sz="1800" b="1" i="0">
+              <a:rPr sz="1800" b="0" i="0" lang="ko-KR" altLang="en-US" kern="0">
+                <a:solidFill>
+                  <a:srgbClr val="1F2937"/>
+                </a:solidFill>
+                <a:latin typeface="Calibri"/>
+                <a:ea typeface="맑은 고딕"/>
+              </a:rPr>
+              <a:t>perf layer가 아무리 커도 결국 한계에 부딪힘</a:t>
+            </a:r>
+          </a:p>
+          <a:p>
+            <a:pPr algn="l">
+              <a:spcAft>
+                <a:spcPts val="400"/>
+              </a:spcAft>
+            </a:pPr>
+            <a:r>
+              <a:rPr sz="1800" b="1" i="0" lang="ko-KR" altLang="en-US" kern="0">
                 <a:solidFill>
                   <a:srgbClr val="D9352A"/>
                 </a:solidFill>
@@ -16812,14 +16812,14 @@
               <a:t>▸ </a:t>
             </a:r>
             <a:r>
-              <a:rPr sz="1800" b="0" i="0">
-                <a:solidFill>
-                  <a:srgbClr val="1F2937"/>
-                </a:solidFill>
-                <a:latin typeface="Calibri"/>
-                <a:ea typeface="맑은 고딕"/>
-              </a:rPr>
-              <a:t>eviction 부실 → capacity layer 로 빈번히 fallback</a:t>
+              <a:rPr sz="1800" b="0" i="0" lang="ko-KR" altLang="en-US" kern="0">
+                <a:solidFill>
+                  <a:srgbClr val="1F2937"/>
+                </a:solidFill>
+                <a:latin typeface="Calibri"/>
+                <a:ea typeface="맑은 고딕"/>
+              </a:rPr>
+              <a:t>eviction이 부실하면 capacity layer로 자주 fallback</a:t>
             </a:r>
           </a:p>
         </p:txBody>
@@ -16852,7 +16852,7 @@
               </a:spcAft>
             </a:pPr>
             <a:r>
-              <a:rPr sz="1000" b="0" i="0">
+              <a:rPr sz="1000" b="0" i="0" lang="ko-KR" altLang="en-US" kern="0">
                 <a:solidFill>
                   <a:srgbClr val="6B7280"/>
                 </a:solidFill>

--- a/Bidaw_seminar.pptx
+++ b/Bidaw_seminar.pptx
@@ -35,6 +35,7 @@
     <p:sldId id="283" r:id="rId34"/>
     <p:sldId id="284" r:id="rId35"/>
     <p:sldId id="285" r:id="rId36"/>
+    <p:sldId id="286" r:id="rId37"/>
   </p:sldIdLst>
   <p:sldSz cx="12191695" cy="6858000" type="screen4x3"/>
   <p:notesSz cx="6858000" cy="9144000"/>
@@ -10079,7 +10080,7 @@
                 <a:latin typeface="Calibri"/>
                 <a:ea typeface="맑은 고딕"/>
               </a:rPr>
-              <a:t>MECHANISM 3 / 3</a:t>
+              <a:t>MECHANISM 2 / 3</a:t>
             </a:r>
           </a:p>
           <a:p>
@@ -10096,14 +10097,14 @@
                 <a:latin typeface="Calibri"/>
                 <a:ea typeface="맑은 고딕"/>
               </a:rPr>
-              <a:t>Mechanism 3 — 어떤 tensor를 캐싱할 것인가</a:t>
+              <a:t>예시 — 두 사용자의 답변 길이에 따른 evict 결정</a:t>
             </a:r>
           </a:p>
         </p:txBody>
       </p:sp>
       <p:pic>
         <p:nvPicPr>
-          <p:cNvPr id="3" name="Picture 2" descr="figure_14.png"/>
+          <p:cNvPr id="3" name="Picture 2" descr="example_alice_bob.png"/>
           <p:cNvPicPr>
             <a:picLocks noChangeAspect="1"/>
           </p:cNvPicPr>
@@ -10117,8 +10118,8 @@
         </p:blipFill>
         <p:spPr>
           <a:xfrm>
-            <a:off x="457200" y="1188720"/>
-            <a:ext cx="6858000" cy="4059150"/>
+            <a:off x="1578207" y="1280160"/>
+            <a:ext cx="9005106" cy="4297680"/>
           </a:xfrm>
           <a:prstGeom prst="rect">
             <a:avLst/>
@@ -10133,8 +10134,8 @@
         </p:nvSpPr>
         <p:spPr>
           <a:xfrm>
-            <a:off x="457200" y="5293590"/>
-            <a:ext cx="6858000" cy="320040"/>
+            <a:off x="457200" y="5852160"/>
+            <a:ext cx="11247120" cy="640080"/>
           </a:xfrm>
           <a:prstGeom prst="rect">
             <a:avLst/>
@@ -10142,7 +10143,7 @@
           <a:noFill/>
         </p:spPr>
         <p:txBody>
-          <a:bodyPr wrap="square" lIns="45720" rIns="45720" tIns="18288" bIns="18288">
+          <a:bodyPr wrap="square" lIns="45720" rIns="45720" tIns="18288" bIns="18288" anchor="ctr">
             <a:spAutoFit/>
           </a:bodyPr>
           <a:lstStyle/>
@@ -10153,14 +10154,54 @@
               </a:spcAft>
             </a:pPr>
             <a:r>
-              <a:rPr sz="1000" b="0" i="1">
-                <a:solidFill>
-                  <a:srgbClr val="6B7280"/>
-                </a:solidFill>
-                <a:latin typeface="Calibri"/>
-                <a:ea typeface="맑은 고딕"/>
-              </a:rPr>
-              <a:t>Figure 14. (a) tensor별 size와 절약 가능한 GFLOPs, (b) cost efficiency</a:t>
+              <a:rPr sz="1600" b="0" i="0">
+                <a:solidFill>
+                  <a:srgbClr val="1F2937"/>
+                </a:solidFill>
+                <a:latin typeface="Calibri"/>
+                <a:ea typeface="맑은 고딕"/>
+              </a:rPr>
+              <a:t>같은 과거 분포라도 </a:t>
+            </a:r>
+            <a:r>
+              <a:rPr sz="1600" b="1" i="0">
+                <a:solidFill>
+                  <a:srgbClr val="D9352A"/>
+                </a:solidFill>
+                <a:latin typeface="Calibri"/>
+                <a:ea typeface="맑은 고딕"/>
+              </a:rPr>
+              <a:t>직전 답변 길이 한 가지</a:t>
+            </a:r>
+            <a:r>
+              <a:rPr sz="1600" b="0" i="0">
+                <a:solidFill>
+                  <a:srgbClr val="1F2937"/>
+                </a:solidFill>
+                <a:latin typeface="Calibri"/>
+                <a:ea typeface="맑은 고딕"/>
+              </a:rPr>
+              <a:t>가 potential 을 </a:t>
+            </a:r>
+            <a:r>
+              <a:rPr sz="1600" b="1" i="0">
+                <a:solidFill>
+                  <a:srgbClr val="D9352A"/>
+                </a:solidFill>
+                <a:latin typeface="Calibri"/>
+                <a:ea typeface="맑은 고딕"/>
+              </a:rPr>
+              <a:t>0.79 ↔ 0.07</a:t>
+            </a:r>
+            <a:r>
+              <a:rPr sz="1600" b="0" i="0">
+                <a:solidFill>
+                  <a:srgbClr val="1F2937"/>
+                </a:solidFill>
+                <a:latin typeface="Calibri"/>
+                <a:ea typeface="맑은 고딕"/>
+              </a:rPr>
+              <a:t>로 가른다</a:t>
             </a:r>
           </a:p>
         </p:txBody>
@@ -10168,178 +10209,6 @@
       <p:sp>
         <p:nvSpPr>
           <p:cNvPr id="5" name="TextBox 4"/>
-          <p:cNvSpPr txBox="1"/>
-          <p:nvPr/>
-        </p:nvSpPr>
-        <p:spPr>
-          <a:xfrm>
-            <a:off x="7589520" y="1280160"/>
-            <a:ext cx="4389120" cy="5029200"/>
-          </a:xfrm>
-          <a:prstGeom prst="rect">
-            <a:avLst/>
-          </a:prstGeom>
-          <a:noFill/>
-        </p:spPr>
-        <p:txBody>
-          <a:bodyPr wrap="square" lIns="45720" rIns="45720" tIns="18288" bIns="18288">
-            <a:spAutoFit/>
-          </a:bodyPr>
-          <a:lstStyle/>
-          <a:p>
-            <a:pPr algn="l">
-              <a:spcAft>
-                <a:spcPts val="400"/>
-              </a:spcAft>
-            </a:pPr>
-            <a:r>
-              <a:rPr sz="1800" b="1" i="0">
-                <a:solidFill>
-                  <a:srgbClr val="1F2937"/>
-                </a:solidFill>
-                <a:latin typeface="Calibri"/>
-                <a:ea typeface="맑은 고딕"/>
-              </a:rPr>
-              <a:t>왜 KV tensor가 최선이 아닌가</a:t>
-            </a:r>
-          </a:p>
-          <a:p>
-            <a:pPr algn="l">
-              <a:spcAft>
-                <a:spcPts val="600"/>
-              </a:spcAft>
-            </a:pPr>
-            <a:r>
-              <a:rPr sz="1800" b="0" i="0">
-                <a:solidFill>
-                  <a:srgbClr val="1F2937"/>
-                </a:solidFill>
-                <a:latin typeface="Calibri"/>
-                <a:ea typeface="맑은 고딕"/>
-              </a:rPr>
-              <a:t>▸ KV tensor가 직접 필요하지만 </a:t>
-            </a:r>
-            <a:r>
-              <a:rPr sz="1800" b="1" i="0">
-                <a:solidFill>
-                  <a:srgbClr val="1F2937"/>
-                </a:solidFill>
-                <a:latin typeface="Calibri"/>
-                <a:ea typeface="맑은 고딕"/>
-              </a:rPr>
-              <a:t>size가 크다</a:t>
-            </a:r>
-          </a:p>
-          <a:p>
-            <a:pPr algn="l">
-              <a:spcAft>
-                <a:spcPts val="200"/>
-              </a:spcAft>
-            </a:pPr>
-            <a:r>
-              <a:rPr sz="1800" b="1" i="0">
-                <a:solidFill>
-                  <a:srgbClr val="1F2937"/>
-                </a:solidFill>
-                <a:latin typeface="Calibri"/>
-                <a:ea typeface="맑은 고딕"/>
-              </a:rPr>
-              <a:t>Cost Efficiency</a:t>
-            </a:r>
-          </a:p>
-          <a:p>
-            <a:pPr algn="l">
-              <a:spcAft>
-                <a:spcPts val="800"/>
-              </a:spcAft>
-            </a:pPr>
-            <a:r>
-              <a:rPr sz="1800" b="0" i="0">
-                <a:solidFill>
-                  <a:srgbClr val="1F2937"/>
-                </a:solidFill>
-                <a:latin typeface="Consolas"/>
-                <a:ea typeface="맑은 고딕"/>
-              </a:rPr>
-              <a:t>= Saved compute / Required space  (GFLOPs/MB)</a:t>
-            </a:r>
-          </a:p>
-          <a:p>
-            <a:pPr algn="l">
-              <a:spcAft>
-                <a:spcPts val="200"/>
-              </a:spcAft>
-            </a:pPr>
-            <a:r>
-              <a:rPr sz="1800" b="1" i="0">
-                <a:solidFill>
-                  <a:srgbClr val="D9352A"/>
-                </a:solidFill>
-                <a:latin typeface="Calibri"/>
-                <a:ea typeface="맑은 고딕"/>
-              </a:rPr>
-              <a:t>Tensor 6 (정규화된 activation)</a:t>
-            </a:r>
-          </a:p>
-          <a:p>
-            <a:pPr algn="l">
-              <a:spcAft>
-                <a:spcPts val="200"/>
-              </a:spcAft>
-            </a:pPr>
-            <a:r>
-              <a:rPr sz="1800" b="0" i="0">
-                <a:solidFill>
-                  <a:srgbClr val="1F2937"/>
-                </a:solidFill>
-                <a:latin typeface="Calibri"/>
-                <a:ea typeface="맑은 고딕"/>
-              </a:rPr>
-              <a:t>▸ 51 GFLOPs/MB — KV tensor(30.5)의 1.67배</a:t>
-            </a:r>
-          </a:p>
-          <a:p>
-            <a:pPr algn="l">
-              <a:spcAft>
-                <a:spcPts val="400"/>
-              </a:spcAft>
-            </a:pPr>
-            <a:r>
-              <a:rPr sz="1800" b="0" i="0">
-                <a:solidFill>
-                  <a:srgbClr val="1F2937"/>
-                </a:solidFill>
-                <a:latin typeface="Calibri"/>
-                <a:ea typeface="맑은 고딕"/>
-              </a:rPr>
-              <a:t>▸ KV tensor로 변환하는 데 </a:t>
-            </a:r>
-            <a:r>
-              <a:rPr sz="1800" b="1" i="0">
-                <a:solidFill>
-                  <a:srgbClr val="1F2937"/>
-                </a:solidFill>
-                <a:latin typeface="Calibri"/>
-                <a:ea typeface="맑은 고딕"/>
-              </a:rPr>
-              <a:t>GPU 1 step</a:t>
-            </a:r>
-            <a:r>
-              <a:rPr sz="1800" b="0" i="0">
-                <a:solidFill>
-                  <a:srgbClr val="1F2937"/>
-                </a:solidFill>
-                <a:latin typeface="Calibri"/>
-                <a:ea typeface="맑은 고딕"/>
-              </a:rPr>
-              <a:t>이면 충분</a:t>
-            </a:r>
-          </a:p>
-        </p:txBody>
-      </p:sp>
-      <p:sp>
-        <p:nvSpPr>
-          <p:cNvPr id="6" name="TextBox 5"/>
           <p:cNvSpPr txBox="1"/>
           <p:nvPr/>
         </p:nvSpPr>
@@ -10447,57 +10316,35 @@
                 <a:latin typeface="Calibri"/>
                 <a:ea typeface="맑은 고딕"/>
               </a:rPr>
-              <a:t>Storage-efficient tensor caching — 적용 범위</a:t>
-            </a:r>
-          </a:p>
-        </p:txBody>
-      </p:sp>
-      <p:sp>
-        <p:nvSpPr>
-          <p:cNvPr id="3" name="Rectangle 2"/>
-          <p:cNvSpPr/>
-          <p:nvPr/>
-        </p:nvSpPr>
-        <p:spPr>
-          <a:xfrm>
-            <a:off x="457200" y="1280160"/>
-            <a:ext cx="5669280" cy="3108960"/>
-          </a:xfrm>
-          <a:prstGeom prst="rect">
-            <a:avLst/>
-          </a:prstGeom>
-          <a:solidFill>
-            <a:srgbClr val="FFFFFF"/>
-          </a:solidFill>
-          <a:ln w="6350">
-            <a:solidFill>
-              <a:srgbClr val="E5E7EB"/>
-            </a:solidFill>
-          </a:ln>
-          <a:effectLst/>
-        </p:spPr>
-        <p:style>
-          <a:lnRef idx="1">
-            <a:schemeClr val="accent1"/>
-          </a:lnRef>
-          <a:fillRef idx="3">
-            <a:schemeClr val="accent1"/>
-          </a:fillRef>
-          <a:effectRef idx="2">
-            <a:schemeClr val="accent1"/>
-          </a:effectRef>
-          <a:fontRef idx="minor">
-            <a:schemeClr val="lt1"/>
-          </a:fontRef>
-        </p:style>
-        <p:txBody>
-          <a:bodyPr rtlCol="0" anchor="ctr"/>
-          <a:lstStyle/>
-          <a:p>
-            <a:pPr algn="ctr"/>
-          </a:p>
-        </p:txBody>
-      </p:sp>
+              <a:t>Mechanism 3 — 어떤 tensor를 캐싱할 것인가</a:t>
+            </a:r>
+          </a:p>
+        </p:txBody>
+      </p:sp>
+      <p:pic>
+        <p:nvPicPr>
+          <p:cNvPr id="3" name="Picture 2" descr="figure_14.png"/>
+          <p:cNvPicPr>
+            <a:picLocks noChangeAspect="1"/>
+          </p:cNvPicPr>
+          <p:nvPr/>
+        </p:nvPicPr>
+        <p:blipFill>
+          <a:blip r:embed="rId2"/>
+          <a:stretch>
+            <a:fillRect/>
+          </a:stretch>
+        </p:blipFill>
+        <p:spPr>
+          <a:xfrm>
+            <a:off x="457200" y="1188720"/>
+            <a:ext cx="6858000" cy="4059150"/>
+          </a:xfrm>
+          <a:prstGeom prst="rect">
+            <a:avLst/>
+          </a:prstGeom>
+        </p:spPr>
+      </p:pic>
       <p:sp>
         <p:nvSpPr>
           <p:cNvPr id="4" name="TextBox 3"/>
@@ -10506,8 +10353,8 @@
         </p:nvSpPr>
         <p:spPr>
           <a:xfrm>
-            <a:off x="640080" y="1417320"/>
-            <a:ext cx="5303520" cy="2834640"/>
+            <a:off x="457200" y="5293590"/>
+            <a:ext cx="6858000" cy="320040"/>
           </a:xfrm>
           <a:prstGeom prst="rect">
             <a:avLst/>
@@ -10520,188 +10367,34 @@
           </a:bodyPr>
           <a:lstStyle/>
           <a:p>
-            <a:pPr algn="l">
-              <a:spcAft>
-                <a:spcPts val="400"/>
-              </a:spcAft>
-            </a:pPr>
-            <a:r>
-              <a:rPr sz="2000" b="1" i="0">
-                <a:solidFill>
-                  <a:srgbClr val="1F2937"/>
-                </a:solidFill>
-                <a:latin typeface="Calibri"/>
-                <a:ea typeface="맑은 고딕"/>
-              </a:rPr>
-              <a:t>MHA 기반 모델</a:t>
-            </a:r>
-          </a:p>
-          <a:p>
-            <a:pPr algn="l">
-              <a:spcAft>
-                <a:spcPts val="400"/>
-              </a:spcAft>
-            </a:pPr>
-            <a:r>
-              <a:rPr sz="1800" b="1" i="0">
-                <a:solidFill>
-                  <a:srgbClr val="D9352A"/>
-                </a:solidFill>
-                <a:latin typeface="Calibri"/>
-                <a:ea typeface="맑은 고딕"/>
-              </a:rPr>
-              <a:t>▸ </a:t>
-            </a:r>
-            <a:r>
-              <a:rPr sz="1800" b="0" i="0">
-                <a:solidFill>
-                  <a:srgbClr val="1F2937"/>
-                </a:solidFill>
-                <a:latin typeface="Calibri"/>
-                <a:ea typeface="맑은 고딕"/>
-              </a:rPr>
-              <a:t>Llama · Qwen · Bloom · OPT · Baichuan</a:t>
-            </a:r>
-          </a:p>
-          <a:p>
-            <a:pPr algn="l">
-              <a:spcAft>
-                <a:spcPts val="400"/>
-              </a:spcAft>
-            </a:pPr>
-            <a:r>
-              <a:rPr sz="1800" b="1" i="0">
-                <a:solidFill>
-                  <a:srgbClr val="D9352A"/>
-                </a:solidFill>
-                <a:latin typeface="Calibri"/>
-                <a:ea typeface="맑은 고딕"/>
-              </a:rPr>
-              <a:t>▸ </a:t>
-            </a:r>
-            <a:r>
-              <a:rPr sz="1800" b="0" i="0">
-                <a:solidFill>
-                  <a:srgbClr val="1F2937"/>
-                </a:solidFill>
-                <a:latin typeface="Calibri"/>
-                <a:ea typeface="맑은 고딕"/>
-              </a:rPr>
-              <a:t>head마다 K, V가 분리 → KV가 큼</a:t>
-            </a:r>
-          </a:p>
-          <a:p>
-            <a:pPr algn="l">
-              <a:spcAft>
-                <a:spcPts val="400"/>
-              </a:spcAft>
-            </a:pPr>
-            <a:r>
-              <a:rPr sz="1800" b="1" i="0">
-                <a:solidFill>
-                  <a:srgbClr val="D9352A"/>
-                </a:solidFill>
-                <a:latin typeface="Calibri"/>
-                <a:ea typeface="맑은 고딕"/>
-              </a:rPr>
-              <a:t>▸ </a:t>
-            </a:r>
-            <a:r>
-              <a:rPr sz="1800" b="0" i="0">
-                <a:solidFill>
-                  <a:srgbClr val="1F2937"/>
-                </a:solidFill>
-                <a:latin typeface="Calibri"/>
-                <a:ea typeface="맑은 고딕"/>
-              </a:rPr>
-              <a:t>tensor 6 캐싱이 적은 공간으로 많은 compute를 절약</a:t>
-            </a:r>
-          </a:p>
-          <a:p>
-            <a:pPr algn="l">
-              <a:spcAft>
-                <a:spcPts val="400"/>
-              </a:spcAft>
-            </a:pPr>
-            <a:r>
-              <a:rPr sz="1800" b="0" i="0">
-                <a:solidFill>
-                  <a:srgbClr val="1F2937"/>
-                </a:solidFill>
-                <a:latin typeface="Calibri"/>
-                <a:ea typeface="맑은 고딕"/>
-              </a:rPr>
-              <a:t>→ Bidaw는 </a:t>
-            </a:r>
-            <a:r>
-              <a:rPr sz="1800" b="1" i="0">
-                <a:solidFill>
-                  <a:srgbClr val="D9352A"/>
-                </a:solidFill>
-                <a:latin typeface="Calibri"/>
-                <a:ea typeface="맑은 고딕"/>
-              </a:rPr>
-              <a:t>tensor 6를 캐싱</a:t>
-            </a:r>
-          </a:p>
-        </p:txBody>
-      </p:sp>
-      <p:sp>
-        <p:nvSpPr>
-          <p:cNvPr id="5" name="Rectangle 4"/>
-          <p:cNvSpPr/>
-          <p:nvPr/>
-        </p:nvSpPr>
-        <p:spPr>
-          <a:xfrm>
-            <a:off x="6309360" y="1280160"/>
-            <a:ext cx="5394960" cy="3108960"/>
-          </a:xfrm>
-          <a:prstGeom prst="rect">
-            <a:avLst/>
-          </a:prstGeom>
-          <a:solidFill>
-            <a:srgbClr val="FFFFFF"/>
-          </a:solidFill>
-          <a:ln w="6350">
-            <a:solidFill>
-              <a:srgbClr val="E5E7EB"/>
-            </a:solidFill>
-          </a:ln>
-          <a:effectLst/>
-        </p:spPr>
-        <p:style>
-          <a:lnRef idx="1">
-            <a:schemeClr val="accent1"/>
-          </a:lnRef>
-          <a:fillRef idx="3">
-            <a:schemeClr val="accent1"/>
-          </a:fillRef>
-          <a:effectRef idx="2">
-            <a:schemeClr val="accent1"/>
-          </a:effectRef>
-          <a:fontRef idx="minor">
-            <a:schemeClr val="lt1"/>
-          </a:fontRef>
-        </p:style>
-        <p:txBody>
-          <a:bodyPr rtlCol="0" anchor="ctr"/>
-          <a:lstStyle/>
-          <a:p>
-            <a:pPr algn="ctr"/>
-          </a:p>
-        </p:txBody>
-      </p:sp>
-      <p:sp>
-        <p:nvSpPr>
-          <p:cNvPr id="6" name="TextBox 5"/>
+            <a:pPr algn="ctr">
+              <a:spcAft>
+                <a:spcPts val="400"/>
+              </a:spcAft>
+            </a:pPr>
+            <a:r>
+              <a:rPr sz="1000" b="0" i="1">
+                <a:solidFill>
+                  <a:srgbClr val="6B7280"/>
+                </a:solidFill>
+                <a:latin typeface="Calibri"/>
+                <a:ea typeface="맑은 고딕"/>
+              </a:rPr>
+              <a:t>Figure 14. (a) tensor별 size와 절약 가능한 GFLOPs, (b) cost efficiency</a:t>
+            </a:r>
+          </a:p>
+        </p:txBody>
+      </p:sp>
+      <p:sp>
+        <p:nvSpPr>
+          <p:cNvPr id="5" name="TextBox 4"/>
           <p:cNvSpPr txBox="1"/>
           <p:nvPr/>
         </p:nvSpPr>
         <p:spPr>
           <a:xfrm>
-            <a:off x="6492240" y="1417320"/>
-            <a:ext cx="5029200" cy="2834640"/>
+            <a:off x="7589520" y="1280160"/>
+            <a:ext cx="4389120" cy="5029200"/>
           </a:xfrm>
           <a:prstGeom prst="rect">
             <a:avLst/>
@@ -10720,32 +10413,100 @@
               </a:spcAft>
             </a:pPr>
             <a:r>
-              <a:rPr sz="2000" b="1" i="0">
-                <a:solidFill>
-                  <a:srgbClr val="1F2937"/>
-                </a:solidFill>
-                <a:latin typeface="Calibri"/>
-                <a:ea typeface="맑은 고딕"/>
-              </a:rPr>
-              <a:t>GQA 기반 모델</a:t>
-            </a:r>
-          </a:p>
-          <a:p>
-            <a:pPr algn="l">
-              <a:spcAft>
-                <a:spcPts val="400"/>
-              </a:spcAft>
-            </a:pPr>
-            <a:r>
               <a:rPr sz="1800" b="1" i="0">
                 <a:solidFill>
+                  <a:srgbClr val="1F2937"/>
+                </a:solidFill>
+                <a:latin typeface="Calibri"/>
+                <a:ea typeface="맑은 고딕"/>
+              </a:rPr>
+              <a:t>왜 KV tensor가 최선이 아닌가</a:t>
+            </a:r>
+          </a:p>
+          <a:p>
+            <a:pPr algn="l">
+              <a:spcAft>
+                <a:spcPts val="600"/>
+              </a:spcAft>
+            </a:pPr>
+            <a:r>
+              <a:rPr sz="1800" b="0" i="0">
+                <a:solidFill>
+                  <a:srgbClr val="1F2937"/>
+                </a:solidFill>
+                <a:latin typeface="Calibri"/>
+                <a:ea typeface="맑은 고딕"/>
+              </a:rPr>
+              <a:t>▸ KV tensor가 직접 필요하지만 </a:t>
+            </a:r>
+            <a:r>
+              <a:rPr sz="1800" b="1" i="0">
+                <a:solidFill>
+                  <a:srgbClr val="1F2937"/>
+                </a:solidFill>
+                <a:latin typeface="Calibri"/>
+                <a:ea typeface="맑은 고딕"/>
+              </a:rPr>
+              <a:t>size가 크다</a:t>
+            </a:r>
+          </a:p>
+          <a:p>
+            <a:pPr algn="l">
+              <a:spcAft>
+                <a:spcPts val="200"/>
+              </a:spcAft>
+            </a:pPr>
+            <a:r>
+              <a:rPr sz="1800" b="1" i="0">
+                <a:solidFill>
+                  <a:srgbClr val="1F2937"/>
+                </a:solidFill>
+                <a:latin typeface="Calibri"/>
+                <a:ea typeface="맑은 고딕"/>
+              </a:rPr>
+              <a:t>Cost Efficiency</a:t>
+            </a:r>
+          </a:p>
+          <a:p>
+            <a:pPr algn="l">
+              <a:spcAft>
+                <a:spcPts val="800"/>
+              </a:spcAft>
+            </a:pPr>
+            <a:r>
+              <a:rPr sz="1800" b="0" i="0">
+                <a:solidFill>
+                  <a:srgbClr val="1F2937"/>
+                </a:solidFill>
+                <a:latin typeface="Consolas"/>
+                <a:ea typeface="맑은 고딕"/>
+              </a:rPr>
+              <a:t>= Saved compute / Required space  (GFLOPs/MB)</a:t>
+            </a:r>
+          </a:p>
+          <a:p>
+            <a:pPr algn="l">
+              <a:spcAft>
+                <a:spcPts val="200"/>
+              </a:spcAft>
+            </a:pPr>
+            <a:r>
+              <a:rPr sz="1800" b="1" i="0">
+                <a:solidFill>
                   <a:srgbClr val="D9352A"/>
                 </a:solidFill>
                 <a:latin typeface="Calibri"/>
                 <a:ea typeface="맑은 고딕"/>
               </a:rPr>
-              <a:t>▸ </a:t>
-            </a:r>
+              <a:t>Tensor 6 (정규화된 activation)</a:t>
+            </a:r>
+          </a:p>
+          <a:p>
+            <a:pPr algn="l">
+              <a:spcAft>
+                <a:spcPts val="200"/>
+              </a:spcAft>
+            </a:pPr>
             <a:r>
               <a:rPr sz="1800" b="0" i="0">
                 <a:solidFill>
@@ -10754,24 +10515,34 @@
                 <a:latin typeface="Calibri"/>
                 <a:ea typeface="맑은 고딕"/>
               </a:rPr>
-              <a:t>여러 query head가 K, V를 공유 → KV tensor 자체가 작음</a:t>
-            </a:r>
-          </a:p>
-          <a:p>
-            <a:pPr algn="l">
-              <a:spcAft>
-                <a:spcPts val="400"/>
-              </a:spcAft>
-            </a:pPr>
+              <a:t>▸ 51 GFLOPs/MB — KV tensor(30.5)의 1.67배</a:t>
+            </a:r>
+          </a:p>
+          <a:p>
+            <a:pPr algn="l">
+              <a:spcAft>
+                <a:spcPts val="400"/>
+              </a:spcAft>
+            </a:pPr>
+            <a:r>
+              <a:rPr sz="1800" b="0" i="0">
+                <a:solidFill>
+                  <a:srgbClr val="1F2937"/>
+                </a:solidFill>
+                <a:latin typeface="Calibri"/>
+                <a:ea typeface="맑은 고딕"/>
+              </a:rPr>
+              <a:t>▸ KV tensor로 변환하는 데 </a:t>
+            </a:r>
             <a:r>
               <a:rPr sz="1800" b="1" i="0">
                 <a:solidFill>
-                  <a:srgbClr val="D9352A"/>
-                </a:solidFill>
-                <a:latin typeface="Calibri"/>
-                <a:ea typeface="맑은 고딕"/>
-              </a:rPr>
-              <a:t>▸ </a:t>
+                  <a:srgbClr val="1F2937"/>
+                </a:solidFill>
+                <a:latin typeface="Calibri"/>
+                <a:ea typeface="맑은 고딕"/>
+              </a:rPr>
+              <a:t>GPU 1 step</a:t>
             </a:r>
             <a:r>
               <a:rPr sz="1800" b="0" i="0">
@@ -10781,41 +10552,14 @@
                 <a:latin typeface="Calibri"/>
                 <a:ea typeface="맑은 고딕"/>
               </a:rPr>
-              <a:t>tensor 6의 cost-efficiency 이점이 사라짐</a:t>
-            </a:r>
-          </a:p>
-          <a:p>
-            <a:pPr algn="l">
-              <a:spcAft>
-                <a:spcPts val="400"/>
-              </a:spcAft>
-            </a:pPr>
-            <a:r>
-              <a:rPr sz="1800" b="0" i="0">
-                <a:solidFill>
-                  <a:srgbClr val="1F2937"/>
-                </a:solidFill>
-                <a:latin typeface="Calibri"/>
-                <a:ea typeface="맑은 고딕"/>
-              </a:rPr>
-              <a:t>→ GQA에서는 </a:t>
-            </a:r>
-            <a:r>
-              <a:rPr sz="1800" b="1" i="0">
-                <a:solidFill>
-                  <a:srgbClr val="D9352A"/>
-                </a:solidFill>
-                <a:latin typeface="Calibri"/>
-                <a:ea typeface="맑은 고딕"/>
-              </a:rPr>
-              <a:t>KV tensor를 그대로 캐싱</a:t>
-            </a:r>
-          </a:p>
-        </p:txBody>
-      </p:sp>
-      <p:sp>
-        <p:nvSpPr>
-          <p:cNvPr id="7" name="TextBox 6"/>
+              <a:t>이면 충분</a:t>
+            </a:r>
+          </a:p>
+        </p:txBody>
+      </p:sp>
+      <p:sp>
+        <p:nvSpPr>
+          <p:cNvPr id="6" name="TextBox 5"/>
           <p:cNvSpPr txBox="1"/>
           <p:nvPr/>
         </p:nvSpPr>
@@ -10906,7 +10650,7 @@
                 <a:latin typeface="Calibri"/>
                 <a:ea typeface="맑은 고딕"/>
               </a:rPr>
-              <a:t>IMPLEMENTATION</a:t>
+              <a:t>MECHANISM 3 / 3</a:t>
             </a:r>
           </a:p>
           <a:p>
@@ -10923,7 +10667,7 @@
                 <a:latin typeface="Calibri"/>
                 <a:ea typeface="맑은 고딕"/>
               </a:rPr>
-              <a:t>구현 노트 — vLLM 위에 얹는 네 가지 기법</a:t>
+              <a:t>Storage-efficient tensor caching — 적용 범위</a:t>
             </a:r>
           </a:p>
         </p:txBody>
@@ -10936,17 +10680,19 @@
         </p:nvSpPr>
         <p:spPr>
           <a:xfrm>
-            <a:off x="457200" y="1188720"/>
-            <a:ext cx="164592" cy="1005840"/>
+            <a:off x="457200" y="1280160"/>
+            <a:ext cx="5669280" cy="3108960"/>
           </a:xfrm>
           <a:prstGeom prst="rect">
             <a:avLst/>
           </a:prstGeom>
           <a:solidFill>
-            <a:srgbClr val="D9352A"/>
+            <a:srgbClr val="FFFFFF"/>
           </a:solidFill>
-          <a:ln>
-            <a:noFill/>
+          <a:ln w="6350">
+            <a:solidFill>
+              <a:srgbClr val="E5E7EB"/>
+            </a:solidFill>
           </a:ln>
           <a:effectLst/>
         </p:spPr>
@@ -10980,8 +10726,8 @@
         </p:nvSpPr>
         <p:spPr>
           <a:xfrm>
-            <a:off x="822960" y="1234440"/>
-            <a:ext cx="10789920" cy="1005840"/>
+            <a:off x="640080" y="1417320"/>
+            <a:ext cx="5303520" cy="2834640"/>
           </a:xfrm>
           <a:prstGeom prst="rect">
             <a:avLst/>
@@ -11007,15 +10753,25 @@
                 <a:latin typeface="Calibri"/>
                 <a:ea typeface="맑은 고딕"/>
               </a:rPr>
-              <a:t>Continuous batching</a:t>
-            </a:r>
-          </a:p>
-          <a:p>
-            <a:pPr algn="l">
-              <a:spcAft>
-                <a:spcPts val="400"/>
-              </a:spcAft>
-            </a:pPr>
+              <a:t>MHA 기반 모델</a:t>
+            </a:r>
+          </a:p>
+          <a:p>
+            <a:pPr algn="l">
+              <a:spcAft>
+                <a:spcPts val="400"/>
+              </a:spcAft>
+            </a:pPr>
+            <a:r>
+              <a:rPr sz="1800" b="1" i="0">
+                <a:solidFill>
+                  <a:srgbClr val="D9352A"/>
+                </a:solidFill>
+                <a:latin typeface="Calibri"/>
+                <a:ea typeface="맑은 고딕"/>
+              </a:rPr>
+              <a:t>▸ </a:t>
+            </a:r>
             <a:r>
               <a:rPr sz="1800" b="0" i="0">
                 <a:solidFill>
@@ -11024,7 +10780,88 @@
                 <a:latin typeface="Calibri"/>
                 <a:ea typeface="맑은 고딕"/>
               </a:rPr>
-              <a:t>일찍 끝난 요청을 배치에서 바로 빼고 새 요청을 곧장 받아들임 (ORCA 계열과 호환)</a:t>
+              <a:t>Llama · Qwen · Bloom · OPT · Baichuan</a:t>
+            </a:r>
+          </a:p>
+          <a:p>
+            <a:pPr algn="l">
+              <a:spcAft>
+                <a:spcPts val="400"/>
+              </a:spcAft>
+            </a:pPr>
+            <a:r>
+              <a:rPr sz="1800" b="1" i="0">
+                <a:solidFill>
+                  <a:srgbClr val="D9352A"/>
+                </a:solidFill>
+                <a:latin typeface="Calibri"/>
+                <a:ea typeface="맑은 고딕"/>
+              </a:rPr>
+              <a:t>▸ </a:t>
+            </a:r>
+            <a:r>
+              <a:rPr sz="1800" b="0" i="0">
+                <a:solidFill>
+                  <a:srgbClr val="1F2937"/>
+                </a:solidFill>
+                <a:latin typeface="Calibri"/>
+                <a:ea typeface="맑은 고딕"/>
+              </a:rPr>
+              <a:t>head마다 K, V가 분리 → KV가 큼</a:t>
+            </a:r>
+          </a:p>
+          <a:p>
+            <a:pPr algn="l">
+              <a:spcAft>
+                <a:spcPts val="400"/>
+              </a:spcAft>
+            </a:pPr>
+            <a:r>
+              <a:rPr sz="1800" b="1" i="0">
+                <a:solidFill>
+                  <a:srgbClr val="D9352A"/>
+                </a:solidFill>
+                <a:latin typeface="Calibri"/>
+                <a:ea typeface="맑은 고딕"/>
+              </a:rPr>
+              <a:t>▸ </a:t>
+            </a:r>
+            <a:r>
+              <a:rPr sz="1800" b="0" i="0">
+                <a:solidFill>
+                  <a:srgbClr val="1F2937"/>
+                </a:solidFill>
+                <a:latin typeface="Calibri"/>
+                <a:ea typeface="맑은 고딕"/>
+              </a:rPr>
+              <a:t>tensor 6 캐싱이 적은 공간으로 많은 compute를 절약</a:t>
+            </a:r>
+          </a:p>
+          <a:p>
+            <a:pPr algn="l">
+              <a:spcAft>
+                <a:spcPts val="400"/>
+              </a:spcAft>
+            </a:pPr>
+            <a:r>
+              <a:rPr sz="1800" b="0" i="0">
+                <a:solidFill>
+                  <a:srgbClr val="1F2937"/>
+                </a:solidFill>
+                <a:latin typeface="Calibri"/>
+                <a:ea typeface="맑은 고딕"/>
+              </a:rPr>
+              <a:t>→ Bidaw는 </a:t>
+            </a:r>
+            <a:r>
+              <a:rPr sz="1800" b="1" i="0">
+                <a:solidFill>
+                  <a:srgbClr val="D9352A"/>
+                </a:solidFill>
+                <a:latin typeface="Calibri"/>
+                <a:ea typeface="맑은 고딕"/>
+              </a:rPr>
+              <a:t>tensor 6를 캐싱</a:t>
             </a:r>
           </a:p>
         </p:txBody>
@@ -11037,17 +10874,19 @@
         </p:nvSpPr>
         <p:spPr>
           <a:xfrm>
-            <a:off x="457200" y="2468880"/>
-            <a:ext cx="164592" cy="1005840"/>
+            <a:off x="6309360" y="1280160"/>
+            <a:ext cx="5394960" cy="3108960"/>
           </a:xfrm>
           <a:prstGeom prst="rect">
             <a:avLst/>
           </a:prstGeom>
           <a:solidFill>
-            <a:srgbClr val="D9352A"/>
+            <a:srgbClr val="FFFFFF"/>
           </a:solidFill>
-          <a:ln>
-            <a:noFill/>
+          <a:ln w="6350">
+            <a:solidFill>
+              <a:srgbClr val="E5E7EB"/>
+            </a:solidFill>
           </a:ln>
           <a:effectLst/>
         </p:spPr>
@@ -11081,8 +10920,8 @@
         </p:nvSpPr>
         <p:spPr>
           <a:xfrm>
-            <a:off x="822960" y="2514600"/>
-            <a:ext cx="10789920" cy="1005840"/>
+            <a:off x="6492240" y="1417320"/>
+            <a:ext cx="5029200" cy="2834640"/>
           </a:xfrm>
           <a:prstGeom prst="rect">
             <a:avLst/>
@@ -11108,15 +10947,25 @@
                 <a:latin typeface="Calibri"/>
                 <a:ea typeface="맑은 고딕"/>
               </a:rPr>
-              <a:t>Mix-grained PagedAttention</a:t>
-            </a:r>
-          </a:p>
-          <a:p>
-            <a:pPr algn="l">
-              <a:spcAft>
-                <a:spcPts val="400"/>
-              </a:spcAft>
-            </a:pPr>
+              <a:t>GQA 기반 모델</a:t>
+            </a:r>
+          </a:p>
+          <a:p>
+            <a:pPr algn="l">
+              <a:spcAft>
+                <a:spcPts val="400"/>
+              </a:spcAft>
+            </a:pPr>
+            <a:r>
+              <a:rPr sz="1800" b="1" i="0">
+                <a:solidFill>
+                  <a:srgbClr val="D9352A"/>
+                </a:solidFill>
+                <a:latin typeface="Calibri"/>
+                <a:ea typeface="맑은 고딕"/>
+              </a:rPr>
+              <a:t>▸ </a:t>
+            </a:r>
             <a:r>
               <a:rPr sz="1800" b="0" i="0">
                 <a:solidFill>
@@ -11125,99 +10974,25 @@
                 <a:latin typeface="Calibri"/>
                 <a:ea typeface="맑은 고딕"/>
               </a:rPr>
-              <a:t>history/query 토큰은 256토큰의 큰 블록, response 토큰은 16토큰의 작은 블록으로 관리 → CPU-GPU 대역폭 활용도 향상, 단편화 감소</a:t>
-            </a:r>
-          </a:p>
-        </p:txBody>
-      </p:sp>
-      <p:sp>
-        <p:nvSpPr>
-          <p:cNvPr id="7" name="Rectangle 6"/>
-          <p:cNvSpPr/>
-          <p:nvPr/>
-        </p:nvSpPr>
-        <p:spPr>
-          <a:xfrm>
-            <a:off x="457200" y="3749040"/>
-            <a:ext cx="164592" cy="1005840"/>
-          </a:xfrm>
-          <a:prstGeom prst="rect">
-            <a:avLst/>
-          </a:prstGeom>
-          <a:solidFill>
-            <a:srgbClr val="D9352A"/>
-          </a:solidFill>
-          <a:ln>
-            <a:noFill/>
-          </a:ln>
-          <a:effectLst/>
-        </p:spPr>
-        <p:style>
-          <a:lnRef idx="1">
-            <a:schemeClr val="accent1"/>
-          </a:lnRef>
-          <a:fillRef idx="3">
-            <a:schemeClr val="accent1"/>
-          </a:fillRef>
-          <a:effectRef idx="2">
-            <a:schemeClr val="accent1"/>
-          </a:effectRef>
-          <a:fontRef idx="minor">
-            <a:schemeClr val="lt1"/>
-          </a:fontRef>
-        </p:style>
-        <p:txBody>
-          <a:bodyPr rtlCol="0" anchor="ctr"/>
-          <a:lstStyle/>
-          <a:p>
-            <a:pPr algn="ctr"/>
-          </a:p>
-        </p:txBody>
-      </p:sp>
-      <p:sp>
-        <p:nvSpPr>
-          <p:cNvPr id="8" name="TextBox 7"/>
-          <p:cNvSpPr txBox="1"/>
-          <p:nvPr/>
-        </p:nvSpPr>
-        <p:spPr>
-          <a:xfrm>
-            <a:off x="822960" y="3794760"/>
-            <a:ext cx="10789920" cy="1005840"/>
-          </a:xfrm>
-          <a:prstGeom prst="rect">
-            <a:avLst/>
-          </a:prstGeom>
-          <a:noFill/>
-        </p:spPr>
-        <p:txBody>
-          <a:bodyPr wrap="square" lIns="45720" rIns="45720" tIns="18288" bIns="18288">
-            <a:spAutoFit/>
-          </a:bodyPr>
-          <a:lstStyle/>
-          <a:p>
-            <a:pPr algn="l">
-              <a:spcAft>
-                <a:spcPts val="400"/>
-              </a:spcAft>
-            </a:pPr>
-            <a:r>
-              <a:rPr sz="2000" b="1" i="0">
-                <a:solidFill>
-                  <a:srgbClr val="1F2937"/>
-                </a:solidFill>
-                <a:latin typeface="Calibri"/>
-                <a:ea typeface="맑은 고딕"/>
-              </a:rPr>
-              <a:t>Low-priority CUDA stream</a:t>
-            </a:r>
-          </a:p>
-          <a:p>
-            <a:pPr algn="l">
-              <a:spcAft>
-                <a:spcPts val="400"/>
-              </a:spcAft>
-            </a:pPr>
+              <a:t>여러 query head가 K, V를 공유 → KV tensor 자체가 작음</a:t>
+            </a:r>
+          </a:p>
+          <a:p>
+            <a:pPr algn="l">
+              <a:spcAft>
+                <a:spcPts val="400"/>
+              </a:spcAft>
+            </a:pPr>
+            <a:r>
+              <a:rPr sz="1800" b="1" i="0">
+                <a:solidFill>
+                  <a:srgbClr val="D9352A"/>
+                </a:solidFill>
+                <a:latin typeface="Calibri"/>
+                <a:ea typeface="맑은 고딕"/>
+              </a:rPr>
+              <a:t>▸ </a:t>
+            </a:r>
             <a:r>
               <a:rPr sz="1800" b="0" i="0">
                 <a:solidFill>
@@ -11226,91 +11001,7 @@
                 <a:latin typeface="Calibri"/>
                 <a:ea typeface="맑은 고딕"/>
               </a:rPr>
-              <a:t>storage-efficient tensor를 KV tensor로 바꾸는 작업을 별도 스트림에서 실행 → 유휴 SM을 활용하고 실제 추론 latency에 영향 없음</a:t>
-            </a:r>
-          </a:p>
-        </p:txBody>
-      </p:sp>
-      <p:sp>
-        <p:nvSpPr>
-          <p:cNvPr id="9" name="Rectangle 8"/>
-          <p:cNvSpPr/>
-          <p:nvPr/>
-        </p:nvSpPr>
-        <p:spPr>
-          <a:xfrm>
-            <a:off x="457200" y="5029200"/>
-            <a:ext cx="164592" cy="1005840"/>
-          </a:xfrm>
-          <a:prstGeom prst="rect">
-            <a:avLst/>
-          </a:prstGeom>
-          <a:solidFill>
-            <a:srgbClr val="D9352A"/>
-          </a:solidFill>
-          <a:ln>
-            <a:noFill/>
-          </a:ln>
-          <a:effectLst/>
-        </p:spPr>
-        <p:style>
-          <a:lnRef idx="1">
-            <a:schemeClr val="accent1"/>
-          </a:lnRef>
-          <a:fillRef idx="3">
-            <a:schemeClr val="accent1"/>
-          </a:fillRef>
-          <a:effectRef idx="2">
-            <a:schemeClr val="accent1"/>
-          </a:effectRef>
-          <a:fontRef idx="minor">
-            <a:schemeClr val="lt1"/>
-          </a:fontRef>
-        </p:style>
-        <p:txBody>
-          <a:bodyPr rtlCol="0" anchor="ctr"/>
-          <a:lstStyle/>
-          <a:p>
-            <a:pPr algn="ctr"/>
-          </a:p>
-        </p:txBody>
-      </p:sp>
-      <p:sp>
-        <p:nvSpPr>
-          <p:cNvPr id="10" name="TextBox 9"/>
-          <p:cNvSpPr txBox="1"/>
-          <p:nvPr/>
-        </p:nvSpPr>
-        <p:spPr>
-          <a:xfrm>
-            <a:off x="822960" y="5074920"/>
-            <a:ext cx="10789920" cy="1005840"/>
-          </a:xfrm>
-          <a:prstGeom prst="rect">
-            <a:avLst/>
-          </a:prstGeom>
-          <a:noFill/>
-        </p:spPr>
-        <p:txBody>
-          <a:bodyPr wrap="square" lIns="45720" rIns="45720" tIns="18288" bIns="18288">
-            <a:spAutoFit/>
-          </a:bodyPr>
-          <a:lstStyle/>
-          <a:p>
-            <a:pPr algn="l">
-              <a:spcAft>
-                <a:spcPts val="400"/>
-              </a:spcAft>
-            </a:pPr>
-            <a:r>
-              <a:rPr sz="2000" b="1" i="0">
-                <a:solidFill>
-                  <a:srgbClr val="1F2937"/>
-                </a:solidFill>
-                <a:latin typeface="Calibri"/>
-                <a:ea typeface="맑은 고딕"/>
-              </a:rPr>
-              <a:t>Inclusive caching</a:t>
+              <a:t>tensor 6의 cost-efficiency 이점이 사라짐</a:t>
             </a:r>
           </a:p>
           <a:p>
@@ -11327,14 +11018,24 @@
                 <a:latin typeface="Calibri"/>
                 <a:ea typeface="맑은 고딕"/>
               </a:rPr>
-              <a:t>eviction 시점에 capacity layer에 이미 사본이 있어 추가 write 트래픽이 거의 없음 (FlashGen 계열과 동일)</a:t>
-            </a:r>
-          </a:p>
-        </p:txBody>
-      </p:sp>
-      <p:sp>
-        <p:nvSpPr>
-          <p:cNvPr id="11" name="TextBox 10"/>
+              <a:t>→ GQA에서는 </a:t>
+            </a:r>
+            <a:r>
+              <a:rPr sz="1800" b="1" i="0">
+                <a:solidFill>
+                  <a:srgbClr val="D9352A"/>
+                </a:solidFill>
+                <a:latin typeface="Calibri"/>
+                <a:ea typeface="맑은 고딕"/>
+              </a:rPr>
+              <a:t>KV tensor를 그대로 캐싱</a:t>
+            </a:r>
+          </a:p>
+        </p:txBody>
+      </p:sp>
+      <p:sp>
+        <p:nvSpPr>
+          <p:cNvPr id="7" name="TextBox 6"/>
           <p:cNvSpPr txBox="1"/>
           <p:nvPr/>
         </p:nvSpPr>
@@ -11425,7 +11126,7 @@
                 <a:latin typeface="Calibri"/>
                 <a:ea typeface="맑은 고딕"/>
               </a:rPr>
-              <a:t>EVALUATION</a:t>
+              <a:t>IMPLEMENTATION</a:t>
             </a:r>
           </a:p>
           <a:p>
@@ -11442,7 +11143,7 @@
                 <a:latin typeface="Calibri"/>
                 <a:ea typeface="맑은 고딕"/>
               </a:rPr>
-              <a:t>실험 환경 및 비교 대상</a:t>
+              <a:t>구현 노트 — vLLM 위에 얹는 네 가지 기법</a:t>
             </a:r>
           </a:p>
         </p:txBody>
@@ -11456,18 +11157,16 @@
         <p:spPr>
           <a:xfrm>
             <a:off x="457200" y="1188720"/>
-            <a:ext cx="5669280" cy="5120640"/>
+            <a:ext cx="164592" cy="1005840"/>
           </a:xfrm>
           <a:prstGeom prst="rect">
             <a:avLst/>
           </a:prstGeom>
           <a:solidFill>
-            <a:srgbClr val="FFFFFF"/>
+            <a:srgbClr val="D9352A"/>
           </a:solidFill>
-          <a:ln w="6350">
-            <a:solidFill>
-              <a:srgbClr val="E5E7EB"/>
-            </a:solidFill>
+          <a:ln>
+            <a:noFill/>
           </a:ln>
           <a:effectLst/>
         </p:spPr>
@@ -11501,8 +11200,8 @@
         </p:nvSpPr>
         <p:spPr>
           <a:xfrm>
-            <a:off x="640080" y="1280160"/>
-            <a:ext cx="5303520" cy="4937760"/>
+            <a:off x="822960" y="1234440"/>
+            <a:ext cx="10789920" cy="1005840"/>
           </a:xfrm>
           <a:prstGeom prst="rect">
             <a:avLst/>
@@ -11517,7 +11216,7 @@
           <a:p>
             <a:pPr algn="l">
               <a:spcAft>
-                <a:spcPts val="600"/>
+                <a:spcPts val="400"/>
               </a:spcAft>
             </a:pPr>
             <a:r>
@@ -11528,25 +11227,15 @@
                 <a:latin typeface="Calibri"/>
                 <a:ea typeface="맑은 고딕"/>
               </a:rPr>
-              <a:t>Hardware / Software</a:t>
-            </a:r>
-          </a:p>
-          <a:p>
-            <a:pPr algn="l">
-              <a:spcAft>
-                <a:spcPts val="400"/>
-              </a:spcAft>
-            </a:pPr>
-            <a:r>
-              <a:rPr sz="1800" b="1" i="0">
-                <a:solidFill>
-                  <a:srgbClr val="1F2937"/>
-                </a:solidFill>
-                <a:latin typeface="Calibri"/>
-                <a:ea typeface="맑은 고딕"/>
-              </a:rPr>
-              <a:t>GPU:  </a:t>
-            </a:r>
+              <a:t>Continuous batching</a:t>
+            </a:r>
+          </a:p>
+          <a:p>
+            <a:pPr algn="l">
+              <a:spcAft>
+                <a:spcPts val="400"/>
+              </a:spcAft>
+            </a:pPr>
             <a:r>
               <a:rPr sz="1800" b="0" i="0">
                 <a:solidFill>
@@ -11555,142 +11244,7 @@
                 <a:latin typeface="Calibri"/>
                 <a:ea typeface="맑은 고딕"/>
               </a:rPr>
-              <a:t>NVIDIA A800 80GB</a:t>
-            </a:r>
-          </a:p>
-          <a:p>
-            <a:pPr algn="l">
-              <a:spcAft>
-                <a:spcPts val="400"/>
-              </a:spcAft>
-            </a:pPr>
-            <a:r>
-              <a:rPr sz="1800" b="1" i="0">
-                <a:solidFill>
-                  <a:srgbClr val="1F2937"/>
-                </a:solidFill>
-                <a:latin typeface="Calibri"/>
-                <a:ea typeface="맑은 고딕"/>
-              </a:rPr>
-              <a:t>Host mem:  </a:t>
-            </a:r>
-            <a:r>
-              <a:rPr sz="1800" b="0" i="0">
-                <a:solidFill>
-                  <a:srgbClr val="1F2937"/>
-                </a:solidFill>
-                <a:latin typeface="Calibri"/>
-                <a:ea typeface="맑은 고딕"/>
-              </a:rPr>
-              <a:t>200 GB (perf layer)</a:t>
-            </a:r>
-          </a:p>
-          <a:p>
-            <a:pPr algn="l">
-              <a:spcAft>
-                <a:spcPts val="400"/>
-              </a:spcAft>
-            </a:pPr>
-            <a:r>
-              <a:rPr sz="1800" b="1" i="0">
-                <a:solidFill>
-                  <a:srgbClr val="1F2937"/>
-                </a:solidFill>
-                <a:latin typeface="Calibri"/>
-                <a:ea typeface="맑은 고딕"/>
-              </a:rPr>
-              <a:t>Storage:  </a:t>
-            </a:r>
-            <a:r>
-              <a:rPr sz="1800" b="0" i="0">
-                <a:solidFill>
-                  <a:srgbClr val="1F2937"/>
-                </a:solidFill>
-                <a:latin typeface="Calibri"/>
-                <a:ea typeface="맑은 고딕"/>
-              </a:rPr>
-              <a:t>SATA SSD 4장 RAID-5, 1.5 GB/s</a:t>
-            </a:r>
-          </a:p>
-          <a:p>
-            <a:pPr algn="l">
-              <a:spcAft>
-                <a:spcPts val="400"/>
-              </a:spcAft>
-            </a:pPr>
-            <a:r>
-              <a:rPr sz="1800" b="1" i="0">
-                <a:solidFill>
-                  <a:srgbClr val="1F2937"/>
-                </a:solidFill>
-                <a:latin typeface="Calibri"/>
-                <a:ea typeface="맑은 고딕"/>
-              </a:rPr>
-              <a:t>PCIe:  </a:t>
-            </a:r>
-            <a:r>
-              <a:rPr sz="1800" b="0" i="0">
-                <a:solidFill>
-                  <a:srgbClr val="1F2937"/>
-                </a:solidFill>
-                <a:latin typeface="Calibri"/>
-                <a:ea typeface="맑은 고딕"/>
-              </a:rPr>
-              <a:t>Gen 4 (~30 GB/s)</a:t>
-            </a:r>
-          </a:p>
-          <a:p>
-            <a:pPr algn="l">
-              <a:spcAft>
-                <a:spcPts val="400"/>
-              </a:spcAft>
-            </a:pPr>
-            <a:r>
-              <a:rPr sz="1800" b="1" i="0">
-                <a:solidFill>
-                  <a:srgbClr val="1F2937"/>
-                </a:solidFill>
-                <a:latin typeface="Calibri"/>
-                <a:ea typeface="맑은 고딕"/>
-              </a:rPr>
-              <a:t>Models:  </a:t>
-            </a:r>
-            <a:r>
-              <a:rPr sz="1800" b="0" i="0">
-                <a:solidFill>
-                  <a:srgbClr val="1F2937"/>
-                </a:solidFill>
-                <a:latin typeface="Calibri"/>
-                <a:ea typeface="맑은 고딕"/>
-              </a:rPr>
-              <a:t>OPT-6.7B/13B/30B, Qwen-7B/14B</a:t>
-            </a:r>
-          </a:p>
-          <a:p>
-            <a:pPr algn="l">
-              <a:spcAft>
-                <a:spcPts val="400"/>
-              </a:spcAft>
-            </a:pPr>
-            <a:r>
-              <a:rPr sz="1800" b="1" i="0">
-                <a:solidFill>
-                  <a:srgbClr val="1F2937"/>
-                </a:solidFill>
-                <a:latin typeface="Calibri"/>
-                <a:ea typeface="맑은 고딕"/>
-              </a:rPr>
-              <a:t>Workloads:  </a:t>
-            </a:r>
-            <a:r>
-              <a:rPr sz="1800" b="0" i="0">
-                <a:solidFill>
-                  <a:srgbClr val="1F2937"/>
-                </a:solidFill>
-                <a:latin typeface="Calibri"/>
-                <a:ea typeface="맑은 고딕"/>
-              </a:rPr>
-              <a:t>자체 100만 라운드 trace, ShareGPT (Poisson 시뮬)</a:t>
+              <a:t>일찍 끝난 요청을 배치에서 바로 빼고 새 요청을 곧장 받아들임 (ORCA 계열과 호환)</a:t>
             </a:r>
           </a:p>
         </p:txBody>
@@ -11703,19 +11257,17 @@
         </p:nvSpPr>
         <p:spPr>
           <a:xfrm>
-            <a:off x="6309360" y="1188720"/>
-            <a:ext cx="5394960" cy="5120640"/>
+            <a:off x="457200" y="2468880"/>
+            <a:ext cx="164592" cy="1005840"/>
           </a:xfrm>
           <a:prstGeom prst="rect">
             <a:avLst/>
           </a:prstGeom>
           <a:solidFill>
-            <a:srgbClr val="FFFFFF"/>
+            <a:srgbClr val="D9352A"/>
           </a:solidFill>
-          <a:ln w="6350">
-            <a:solidFill>
-              <a:srgbClr val="E5E7EB"/>
-            </a:solidFill>
+          <a:ln>
+            <a:noFill/>
           </a:ln>
           <a:effectLst/>
         </p:spPr>
@@ -11749,8 +11301,8 @@
         </p:nvSpPr>
         <p:spPr>
           <a:xfrm>
-            <a:off x="6492240" y="1280160"/>
-            <a:ext cx="5029200" cy="4937760"/>
+            <a:off x="822960" y="2514600"/>
+            <a:ext cx="10789920" cy="1005840"/>
           </a:xfrm>
           <a:prstGeom prst="rect">
             <a:avLst/>
@@ -11765,7 +11317,7 @@
           <a:p>
             <a:pPr algn="l">
               <a:spcAft>
-                <a:spcPts val="600"/>
+                <a:spcPts val="400"/>
               </a:spcAft>
             </a:pPr>
             <a:r>
@@ -11776,199 +11328,233 @@
                 <a:latin typeface="Calibri"/>
                 <a:ea typeface="맑은 고딕"/>
               </a:rPr>
-              <a:t>Baselines</a:t>
-            </a:r>
-          </a:p>
-          <a:p>
-            <a:pPr algn="l">
-              <a:spcAft>
-                <a:spcPts val="400"/>
-              </a:spcAft>
-            </a:pPr>
-            <a:r>
-              <a:rPr sz="1800" b="1" i="0">
-                <a:solidFill>
-                  <a:srgbClr val="D9352A"/>
-                </a:solidFill>
-                <a:latin typeface="Calibri"/>
-                <a:ea typeface="맑은 고딕"/>
-              </a:rPr>
-              <a:t>▸ </a:t>
-            </a:r>
-            <a:r>
-              <a:rPr sz="1800" b="1" i="0">
-                <a:solidFill>
-                  <a:srgbClr val="1F2937"/>
-                </a:solidFill>
-                <a:latin typeface="Calibri"/>
-                <a:ea typeface="맑은 고딕"/>
-              </a:rPr>
-              <a:t>vLLM</a:t>
-            </a:r>
-            <a:r>
-              <a:rPr sz="1400" b="0" i="0">
-                <a:solidFill>
-                  <a:srgbClr val="6B7280"/>
-                </a:solidFill>
-                <a:latin typeface="Calibri"/>
-                <a:ea typeface="맑은 고딕"/>
-              </a:rPr>
-              <a:t>  Recompute (KV caching 없음)</a:t>
-            </a:r>
-          </a:p>
-          <a:p>
-            <a:pPr algn="l">
-              <a:spcAft>
-                <a:spcPts val="400"/>
-              </a:spcAft>
-            </a:pPr>
-            <a:r>
-              <a:rPr sz="1800" b="1" i="0">
-                <a:solidFill>
-                  <a:srgbClr val="D9352A"/>
-                </a:solidFill>
-                <a:latin typeface="Calibri"/>
-                <a:ea typeface="맑은 고딕"/>
-              </a:rPr>
-              <a:t>▸ </a:t>
-            </a:r>
-            <a:r>
-              <a:rPr sz="1800" b="1" i="0">
-                <a:solidFill>
-                  <a:srgbClr val="1F2937"/>
-                </a:solidFill>
-                <a:latin typeface="Calibri"/>
-                <a:ea typeface="맑은 고딕"/>
-              </a:rPr>
-              <a:t>CachedAttention</a:t>
-            </a:r>
-            <a:r>
-              <a:rPr sz="1400" b="0" i="0">
-                <a:solidFill>
-                  <a:srgbClr val="6B7280"/>
-                </a:solidFill>
-                <a:latin typeface="Calibri"/>
-                <a:ea typeface="맑은 고딕"/>
-              </a:rPr>
-              <a:t>  Queue-enhanced LRU + 2-tier</a:t>
-            </a:r>
-          </a:p>
-          <a:p>
-            <a:pPr algn="l">
-              <a:spcAft>
-                <a:spcPts val="400"/>
-              </a:spcAft>
-            </a:pPr>
-            <a:r>
-              <a:rPr sz="1800" b="1" i="0">
-                <a:solidFill>
-                  <a:srgbClr val="D9352A"/>
-                </a:solidFill>
-                <a:latin typeface="Calibri"/>
-                <a:ea typeface="맑은 고딕"/>
-              </a:rPr>
-              <a:t>▸ </a:t>
-            </a:r>
-            <a:r>
-              <a:rPr sz="1800" b="1" i="0">
-                <a:solidFill>
-                  <a:srgbClr val="1F2937"/>
-                </a:solidFill>
-                <a:latin typeface="Calibri"/>
-                <a:ea typeface="맑은 고딕"/>
-              </a:rPr>
-              <a:t>FlashGen</a:t>
-            </a:r>
-            <a:r>
-              <a:rPr sz="1400" b="0" i="0">
-                <a:solidFill>
-                  <a:srgbClr val="6B7280"/>
-                </a:solidFill>
-                <a:latin typeface="Calibri"/>
-                <a:ea typeface="맑은 고딕"/>
-              </a:rPr>
-              <a:t>  Inclusive caching + GPU-fit scheduling</a:t>
-            </a:r>
-          </a:p>
-          <a:p>
-            <a:pPr algn="l">
-              <a:spcAft>
-                <a:spcPts val="400"/>
-              </a:spcAft>
-            </a:pPr>
-            <a:r>
-              <a:rPr sz="1800" b="1" i="0">
-                <a:solidFill>
-                  <a:srgbClr val="D9352A"/>
-                </a:solidFill>
-                <a:latin typeface="Calibri"/>
-                <a:ea typeface="맑은 고딕"/>
-              </a:rPr>
-              <a:t>▸ </a:t>
-            </a:r>
-            <a:r>
-              <a:rPr sz="1800" b="1" i="0">
-                <a:solidFill>
-                  <a:srgbClr val="1F2937"/>
-                </a:solidFill>
-                <a:latin typeface="Calibri"/>
-                <a:ea typeface="맑은 고딕"/>
-              </a:rPr>
-              <a:t>Optimal</a:t>
-            </a:r>
-            <a:r>
-              <a:rPr sz="1400" b="0" i="0">
-                <a:solidFill>
-                  <a:srgbClr val="6B7280"/>
-                </a:solidFill>
-                <a:latin typeface="Calibri"/>
-                <a:ea typeface="맑은 고딕"/>
-              </a:rPr>
-              <a:t>  모든 KV가 perf layer에 있는 상한선</a:t>
-            </a:r>
-          </a:p>
-          <a:p>
-            <a:pPr algn="l">
-              <a:spcAft>
-                <a:spcPts val="400"/>
-              </a:spcAft>
-            </a:pPr>
-            <a:r>
-              <a:rPr sz="1800" b="1" i="0">
-                <a:solidFill>
-                  <a:srgbClr val="D9352A"/>
-                </a:solidFill>
-                <a:latin typeface="Calibri"/>
-                <a:ea typeface="맑은 고딕"/>
-              </a:rPr>
-              <a:t>▸ </a:t>
-            </a:r>
-            <a:r>
-              <a:rPr sz="1800" b="1" i="0">
-                <a:solidFill>
-                  <a:srgbClr val="1F2937"/>
-                </a:solidFill>
-                <a:latin typeface="Calibri"/>
-                <a:ea typeface="맑은 고딕"/>
-              </a:rPr>
-              <a:t>Bidaw</a:t>
-            </a:r>
-            <a:r>
-              <a:rPr sz="1400" b="0" i="0">
-                <a:solidFill>
-                  <a:srgbClr val="6B7280"/>
-                </a:solidFill>
-                <a:latin typeface="Calibri"/>
-                <a:ea typeface="맑은 고딕"/>
-              </a:rPr>
-              <a:t>  이 논문</a:t>
-            </a:r>
-          </a:p>
-        </p:txBody>
-      </p:sp>
-      <p:sp>
-        <p:nvSpPr>
-          <p:cNvPr id="7" name="TextBox 6"/>
+              <a:t>Mix-grained PagedAttention</a:t>
+            </a:r>
+          </a:p>
+          <a:p>
+            <a:pPr algn="l">
+              <a:spcAft>
+                <a:spcPts val="400"/>
+              </a:spcAft>
+            </a:pPr>
+            <a:r>
+              <a:rPr sz="1800" b="0" i="0">
+                <a:solidFill>
+                  <a:srgbClr val="1F2937"/>
+                </a:solidFill>
+                <a:latin typeface="Calibri"/>
+                <a:ea typeface="맑은 고딕"/>
+              </a:rPr>
+              <a:t>history/query 토큰은 256토큰의 큰 블록, response 토큰은 16토큰의 작은 블록으로 관리 → CPU-GPU 대역폭 활용도 향상, 단편화 감소</a:t>
+            </a:r>
+          </a:p>
+        </p:txBody>
+      </p:sp>
+      <p:sp>
+        <p:nvSpPr>
+          <p:cNvPr id="7" name="Rectangle 6"/>
+          <p:cNvSpPr/>
+          <p:nvPr/>
+        </p:nvSpPr>
+        <p:spPr>
+          <a:xfrm>
+            <a:off x="457200" y="3749040"/>
+            <a:ext cx="164592" cy="1005840"/>
+          </a:xfrm>
+          <a:prstGeom prst="rect">
+            <a:avLst/>
+          </a:prstGeom>
+          <a:solidFill>
+            <a:srgbClr val="D9352A"/>
+          </a:solidFill>
+          <a:ln>
+            <a:noFill/>
+          </a:ln>
+          <a:effectLst/>
+        </p:spPr>
+        <p:style>
+          <a:lnRef idx="1">
+            <a:schemeClr val="accent1"/>
+          </a:lnRef>
+          <a:fillRef idx="3">
+            <a:schemeClr val="accent1"/>
+          </a:fillRef>
+          <a:effectRef idx="2">
+            <a:schemeClr val="accent1"/>
+          </a:effectRef>
+          <a:fontRef idx="minor">
+            <a:schemeClr val="lt1"/>
+          </a:fontRef>
+        </p:style>
+        <p:txBody>
+          <a:bodyPr rtlCol="0" anchor="ctr"/>
+          <a:lstStyle/>
+          <a:p>
+            <a:pPr algn="ctr"/>
+          </a:p>
+        </p:txBody>
+      </p:sp>
+      <p:sp>
+        <p:nvSpPr>
+          <p:cNvPr id="8" name="TextBox 7"/>
+          <p:cNvSpPr txBox="1"/>
+          <p:nvPr/>
+        </p:nvSpPr>
+        <p:spPr>
+          <a:xfrm>
+            <a:off x="822960" y="3794760"/>
+            <a:ext cx="10789920" cy="1005840"/>
+          </a:xfrm>
+          <a:prstGeom prst="rect">
+            <a:avLst/>
+          </a:prstGeom>
+          <a:noFill/>
+        </p:spPr>
+        <p:txBody>
+          <a:bodyPr wrap="square" lIns="45720" rIns="45720" tIns="18288" bIns="18288">
+            <a:spAutoFit/>
+          </a:bodyPr>
+          <a:lstStyle/>
+          <a:p>
+            <a:pPr algn="l">
+              <a:spcAft>
+                <a:spcPts val="400"/>
+              </a:spcAft>
+            </a:pPr>
+            <a:r>
+              <a:rPr sz="2000" b="1" i="0">
+                <a:solidFill>
+                  <a:srgbClr val="1F2937"/>
+                </a:solidFill>
+                <a:latin typeface="Calibri"/>
+                <a:ea typeface="맑은 고딕"/>
+              </a:rPr>
+              <a:t>Low-priority CUDA stream</a:t>
+            </a:r>
+          </a:p>
+          <a:p>
+            <a:pPr algn="l">
+              <a:spcAft>
+                <a:spcPts val="400"/>
+              </a:spcAft>
+            </a:pPr>
+            <a:r>
+              <a:rPr sz="1800" b="0" i="0">
+                <a:solidFill>
+                  <a:srgbClr val="1F2937"/>
+                </a:solidFill>
+                <a:latin typeface="Calibri"/>
+                <a:ea typeface="맑은 고딕"/>
+              </a:rPr>
+              <a:t>storage-efficient tensor를 KV tensor로 바꾸는 작업을 별도 스트림에서 실행 → 유휴 SM을 활용하고 실제 추론 latency에 영향 없음</a:t>
+            </a:r>
+          </a:p>
+        </p:txBody>
+      </p:sp>
+      <p:sp>
+        <p:nvSpPr>
+          <p:cNvPr id="9" name="Rectangle 8"/>
+          <p:cNvSpPr/>
+          <p:nvPr/>
+        </p:nvSpPr>
+        <p:spPr>
+          <a:xfrm>
+            <a:off x="457200" y="5029200"/>
+            <a:ext cx="164592" cy="1005840"/>
+          </a:xfrm>
+          <a:prstGeom prst="rect">
+            <a:avLst/>
+          </a:prstGeom>
+          <a:solidFill>
+            <a:srgbClr val="D9352A"/>
+          </a:solidFill>
+          <a:ln>
+            <a:noFill/>
+          </a:ln>
+          <a:effectLst/>
+        </p:spPr>
+        <p:style>
+          <a:lnRef idx="1">
+            <a:schemeClr val="accent1"/>
+          </a:lnRef>
+          <a:fillRef idx="3">
+            <a:schemeClr val="accent1"/>
+          </a:fillRef>
+          <a:effectRef idx="2">
+            <a:schemeClr val="accent1"/>
+          </a:effectRef>
+          <a:fontRef idx="minor">
+            <a:schemeClr val="lt1"/>
+          </a:fontRef>
+        </p:style>
+        <p:txBody>
+          <a:bodyPr rtlCol="0" anchor="ctr"/>
+          <a:lstStyle/>
+          <a:p>
+            <a:pPr algn="ctr"/>
+          </a:p>
+        </p:txBody>
+      </p:sp>
+      <p:sp>
+        <p:nvSpPr>
+          <p:cNvPr id="10" name="TextBox 9"/>
+          <p:cNvSpPr txBox="1"/>
+          <p:nvPr/>
+        </p:nvSpPr>
+        <p:spPr>
+          <a:xfrm>
+            <a:off x="822960" y="5074920"/>
+            <a:ext cx="10789920" cy="1005840"/>
+          </a:xfrm>
+          <a:prstGeom prst="rect">
+            <a:avLst/>
+          </a:prstGeom>
+          <a:noFill/>
+        </p:spPr>
+        <p:txBody>
+          <a:bodyPr wrap="square" lIns="45720" rIns="45720" tIns="18288" bIns="18288">
+            <a:spAutoFit/>
+          </a:bodyPr>
+          <a:lstStyle/>
+          <a:p>
+            <a:pPr algn="l">
+              <a:spcAft>
+                <a:spcPts val="400"/>
+              </a:spcAft>
+            </a:pPr>
+            <a:r>
+              <a:rPr sz="2000" b="1" i="0">
+                <a:solidFill>
+                  <a:srgbClr val="1F2937"/>
+                </a:solidFill>
+                <a:latin typeface="Calibri"/>
+                <a:ea typeface="맑은 고딕"/>
+              </a:rPr>
+              <a:t>Inclusive caching</a:t>
+            </a:r>
+          </a:p>
+          <a:p>
+            <a:pPr algn="l">
+              <a:spcAft>
+                <a:spcPts val="400"/>
+              </a:spcAft>
+            </a:pPr>
+            <a:r>
+              <a:rPr sz="1800" b="0" i="0">
+                <a:solidFill>
+                  <a:srgbClr val="1F2937"/>
+                </a:solidFill>
+                <a:latin typeface="Calibri"/>
+                <a:ea typeface="맑은 고딕"/>
+              </a:rPr>
+              <a:t>eviction 시점에 capacity layer에 이미 사본이 있어 추가 write 트래픽이 거의 없음 (FlashGen 계열과 동일)</a:t>
+            </a:r>
+          </a:p>
+        </p:txBody>
+      </p:sp>
+      <p:sp>
+        <p:nvSpPr>
+          <p:cNvPr id="11" name="TextBox 10"/>
           <p:cNvSpPr txBox="1"/>
           <p:nvPr/>
         </p:nvSpPr>
@@ -12076,35 +11662,57 @@
                 <a:latin typeface="Calibri"/>
                 <a:ea typeface="맑은 고딕"/>
               </a:rPr>
-              <a:t>Overall performance — 모델 5종 동시 평가</a:t>
-            </a:r>
-          </a:p>
-        </p:txBody>
-      </p:sp>
-      <p:pic>
-        <p:nvPicPr>
-          <p:cNvPr id="3" name="Picture 2" descr="figure_15.png"/>
-          <p:cNvPicPr>
-            <a:picLocks noChangeAspect="1"/>
-          </p:cNvPicPr>
-          <p:nvPr/>
-        </p:nvPicPr>
-        <p:blipFill>
-          <a:blip r:embed="rId2"/>
-          <a:stretch>
-            <a:fillRect/>
-          </a:stretch>
-        </p:blipFill>
-        <p:spPr>
-          <a:xfrm>
-            <a:off x="274320" y="1188720"/>
-            <a:ext cx="11612880" cy="2024636"/>
-          </a:xfrm>
-          <a:prstGeom prst="rect">
-            <a:avLst/>
-          </a:prstGeom>
-        </p:spPr>
-      </p:pic>
+              <a:t>실험 환경 및 비교 대상</a:t>
+            </a:r>
+          </a:p>
+        </p:txBody>
+      </p:sp>
+      <p:sp>
+        <p:nvSpPr>
+          <p:cNvPr id="3" name="Rectangle 2"/>
+          <p:cNvSpPr/>
+          <p:nvPr/>
+        </p:nvSpPr>
+        <p:spPr>
+          <a:xfrm>
+            <a:off x="457200" y="1188720"/>
+            <a:ext cx="5669280" cy="5120640"/>
+          </a:xfrm>
+          <a:prstGeom prst="rect">
+            <a:avLst/>
+          </a:prstGeom>
+          <a:solidFill>
+            <a:srgbClr val="FFFFFF"/>
+          </a:solidFill>
+          <a:ln w="6350">
+            <a:solidFill>
+              <a:srgbClr val="E5E7EB"/>
+            </a:solidFill>
+          </a:ln>
+          <a:effectLst/>
+        </p:spPr>
+        <p:style>
+          <a:lnRef idx="1">
+            <a:schemeClr val="accent1"/>
+          </a:lnRef>
+          <a:fillRef idx="3">
+            <a:schemeClr val="accent1"/>
+          </a:fillRef>
+          <a:effectRef idx="2">
+            <a:schemeClr val="accent1"/>
+          </a:effectRef>
+          <a:fontRef idx="minor">
+            <a:schemeClr val="lt1"/>
+          </a:fontRef>
+        </p:style>
+        <p:txBody>
+          <a:bodyPr rtlCol="0" anchor="ctr"/>
+          <a:lstStyle/>
+          <a:p>
+            <a:pPr algn="ctr"/>
+          </a:p>
+        </p:txBody>
+      </p:sp>
       <p:sp>
         <p:nvSpPr>
           <p:cNvPr id="4" name="TextBox 3"/>
@@ -12113,8 +11721,8 @@
         </p:nvSpPr>
         <p:spPr>
           <a:xfrm>
-            <a:off x="274320" y="3259076"/>
-            <a:ext cx="11612880" cy="320040"/>
+            <a:off x="640080" y="1280160"/>
+            <a:ext cx="5303520" cy="4937760"/>
           </a:xfrm>
           <a:prstGeom prst="rect">
             <a:avLst/>
@@ -12127,34 +11735,242 @@
           </a:bodyPr>
           <a:lstStyle/>
           <a:p>
-            <a:pPr algn="ctr">
-              <a:spcAft>
-                <a:spcPts val="400"/>
-              </a:spcAft>
-            </a:pPr>
-            <a:r>
-              <a:rPr sz="1000" b="0" i="1">
-                <a:solidFill>
-                  <a:srgbClr val="6B7280"/>
-                </a:solidFill>
-                <a:latin typeface="Calibri"/>
-                <a:ea typeface="맑은 고딕"/>
-              </a:rPr>
-              <a:t>Figure 15. 사용자 도착률 vs 평균 응답 latency, 모델 5종</a:t>
-            </a:r>
-          </a:p>
-        </p:txBody>
-      </p:sp>
-      <p:sp>
-        <p:nvSpPr>
-          <p:cNvPr id="5" name="TextBox 4"/>
+            <a:pPr algn="l">
+              <a:spcAft>
+                <a:spcPts val="600"/>
+              </a:spcAft>
+            </a:pPr>
+            <a:r>
+              <a:rPr sz="2000" b="1" i="0">
+                <a:solidFill>
+                  <a:srgbClr val="1F2937"/>
+                </a:solidFill>
+                <a:latin typeface="Calibri"/>
+                <a:ea typeface="맑은 고딕"/>
+              </a:rPr>
+              <a:t>Hardware / Software</a:t>
+            </a:r>
+          </a:p>
+          <a:p>
+            <a:pPr algn="l">
+              <a:spcAft>
+                <a:spcPts val="400"/>
+              </a:spcAft>
+            </a:pPr>
+            <a:r>
+              <a:rPr sz="1800" b="1" i="0">
+                <a:solidFill>
+                  <a:srgbClr val="1F2937"/>
+                </a:solidFill>
+                <a:latin typeface="Calibri"/>
+                <a:ea typeface="맑은 고딕"/>
+              </a:rPr>
+              <a:t>GPU:  </a:t>
+            </a:r>
+            <a:r>
+              <a:rPr sz="1800" b="0" i="0">
+                <a:solidFill>
+                  <a:srgbClr val="1F2937"/>
+                </a:solidFill>
+                <a:latin typeface="Calibri"/>
+                <a:ea typeface="맑은 고딕"/>
+              </a:rPr>
+              <a:t>NVIDIA A800 80GB</a:t>
+            </a:r>
+          </a:p>
+          <a:p>
+            <a:pPr algn="l">
+              <a:spcAft>
+                <a:spcPts val="400"/>
+              </a:spcAft>
+            </a:pPr>
+            <a:r>
+              <a:rPr sz="1800" b="1" i="0">
+                <a:solidFill>
+                  <a:srgbClr val="1F2937"/>
+                </a:solidFill>
+                <a:latin typeface="Calibri"/>
+                <a:ea typeface="맑은 고딕"/>
+              </a:rPr>
+              <a:t>Host mem:  </a:t>
+            </a:r>
+            <a:r>
+              <a:rPr sz="1800" b="0" i="0">
+                <a:solidFill>
+                  <a:srgbClr val="1F2937"/>
+                </a:solidFill>
+                <a:latin typeface="Calibri"/>
+                <a:ea typeface="맑은 고딕"/>
+              </a:rPr>
+              <a:t>200 GB (perf layer)</a:t>
+            </a:r>
+          </a:p>
+          <a:p>
+            <a:pPr algn="l">
+              <a:spcAft>
+                <a:spcPts val="400"/>
+              </a:spcAft>
+            </a:pPr>
+            <a:r>
+              <a:rPr sz="1800" b="1" i="0">
+                <a:solidFill>
+                  <a:srgbClr val="1F2937"/>
+                </a:solidFill>
+                <a:latin typeface="Calibri"/>
+                <a:ea typeface="맑은 고딕"/>
+              </a:rPr>
+              <a:t>Storage:  </a:t>
+            </a:r>
+            <a:r>
+              <a:rPr sz="1800" b="0" i="0">
+                <a:solidFill>
+                  <a:srgbClr val="1F2937"/>
+                </a:solidFill>
+                <a:latin typeface="Calibri"/>
+                <a:ea typeface="맑은 고딕"/>
+              </a:rPr>
+              <a:t>SATA SSD 4장 RAID-5, 1.5 GB/s</a:t>
+            </a:r>
+          </a:p>
+          <a:p>
+            <a:pPr algn="l">
+              <a:spcAft>
+                <a:spcPts val="400"/>
+              </a:spcAft>
+            </a:pPr>
+            <a:r>
+              <a:rPr sz="1800" b="1" i="0">
+                <a:solidFill>
+                  <a:srgbClr val="1F2937"/>
+                </a:solidFill>
+                <a:latin typeface="Calibri"/>
+                <a:ea typeface="맑은 고딕"/>
+              </a:rPr>
+              <a:t>PCIe:  </a:t>
+            </a:r>
+            <a:r>
+              <a:rPr sz="1800" b="0" i="0">
+                <a:solidFill>
+                  <a:srgbClr val="1F2937"/>
+                </a:solidFill>
+                <a:latin typeface="Calibri"/>
+                <a:ea typeface="맑은 고딕"/>
+              </a:rPr>
+              <a:t>Gen 4 (~30 GB/s)</a:t>
+            </a:r>
+          </a:p>
+          <a:p>
+            <a:pPr algn="l">
+              <a:spcAft>
+                <a:spcPts val="400"/>
+              </a:spcAft>
+            </a:pPr>
+            <a:r>
+              <a:rPr sz="1800" b="1" i="0">
+                <a:solidFill>
+                  <a:srgbClr val="1F2937"/>
+                </a:solidFill>
+                <a:latin typeface="Calibri"/>
+                <a:ea typeface="맑은 고딕"/>
+              </a:rPr>
+              <a:t>Models:  </a:t>
+            </a:r>
+            <a:r>
+              <a:rPr sz="1800" b="0" i="0">
+                <a:solidFill>
+                  <a:srgbClr val="1F2937"/>
+                </a:solidFill>
+                <a:latin typeface="Calibri"/>
+                <a:ea typeface="맑은 고딕"/>
+              </a:rPr>
+              <a:t>OPT-6.7B/13B/30B, Qwen-7B/14B</a:t>
+            </a:r>
+          </a:p>
+          <a:p>
+            <a:pPr algn="l">
+              <a:spcAft>
+                <a:spcPts val="400"/>
+              </a:spcAft>
+            </a:pPr>
+            <a:r>
+              <a:rPr sz="1800" b="1" i="0">
+                <a:solidFill>
+                  <a:srgbClr val="1F2937"/>
+                </a:solidFill>
+                <a:latin typeface="Calibri"/>
+                <a:ea typeface="맑은 고딕"/>
+              </a:rPr>
+              <a:t>Workloads:  </a:t>
+            </a:r>
+            <a:r>
+              <a:rPr sz="1800" b="0" i="0">
+                <a:solidFill>
+                  <a:srgbClr val="1F2937"/>
+                </a:solidFill>
+                <a:latin typeface="Calibri"/>
+                <a:ea typeface="맑은 고딕"/>
+              </a:rPr>
+              <a:t>자체 100만 라운드 trace, ShareGPT (Poisson 시뮬)</a:t>
+            </a:r>
+          </a:p>
+        </p:txBody>
+      </p:sp>
+      <p:sp>
+        <p:nvSpPr>
+          <p:cNvPr id="5" name="Rectangle 4"/>
+          <p:cNvSpPr/>
+          <p:nvPr/>
+        </p:nvSpPr>
+        <p:spPr>
+          <a:xfrm>
+            <a:off x="6309360" y="1188720"/>
+            <a:ext cx="5394960" cy="5120640"/>
+          </a:xfrm>
+          <a:prstGeom prst="rect">
+            <a:avLst/>
+          </a:prstGeom>
+          <a:solidFill>
+            <a:srgbClr val="FFFFFF"/>
+          </a:solidFill>
+          <a:ln w="6350">
+            <a:solidFill>
+              <a:srgbClr val="E5E7EB"/>
+            </a:solidFill>
+          </a:ln>
+          <a:effectLst/>
+        </p:spPr>
+        <p:style>
+          <a:lnRef idx="1">
+            <a:schemeClr val="accent1"/>
+          </a:lnRef>
+          <a:fillRef idx="3">
+            <a:schemeClr val="accent1"/>
+          </a:fillRef>
+          <a:effectRef idx="2">
+            <a:schemeClr val="accent1"/>
+          </a:effectRef>
+          <a:fontRef idx="minor">
+            <a:schemeClr val="lt1"/>
+          </a:fontRef>
+        </p:style>
+        <p:txBody>
+          <a:bodyPr rtlCol="0" anchor="ctr"/>
+          <a:lstStyle/>
+          <a:p>
+            <a:pPr algn="ctr"/>
+          </a:p>
+        </p:txBody>
+      </p:sp>
+      <p:sp>
+        <p:nvSpPr>
+          <p:cNvPr id="6" name="TextBox 5"/>
           <p:cNvSpPr txBox="1"/>
           <p:nvPr/>
         </p:nvSpPr>
         <p:spPr>
           <a:xfrm>
-            <a:off x="457200" y="4937760"/>
-            <a:ext cx="11247120" cy="1554480"/>
+            <a:off x="6492240" y="1280160"/>
+            <a:ext cx="5029200" cy="4937760"/>
           </a:xfrm>
           <a:prstGeom prst="rect">
             <a:avLst/>
@@ -12169,6 +11985,23 @@
           <a:p>
             <a:pPr algn="l">
               <a:spcAft>
+                <a:spcPts val="600"/>
+              </a:spcAft>
+            </a:pPr>
+            <a:r>
+              <a:rPr sz="2000" b="1" i="0">
+                <a:solidFill>
+                  <a:srgbClr val="1F2937"/>
+                </a:solidFill>
+                <a:latin typeface="Calibri"/>
+                <a:ea typeface="맑은 고딕"/>
+              </a:rPr>
+              <a:t>Baselines</a:t>
+            </a:r>
+          </a:p>
+          <a:p>
+            <a:pPr algn="l">
+              <a:spcAft>
                 <a:spcPts val="400"/>
               </a:spcAft>
             </a:pPr>
@@ -12190,17 +12023,17 @@
                 <a:latin typeface="Calibri"/>
                 <a:ea typeface="맑은 고딕"/>
               </a:rPr>
-              <a:t>Bidaw — 응답 latency </a:t>
-            </a:r>
-            <a:r>
-              <a:rPr sz="1800" b="0" i="0">
-                <a:solidFill>
-                  <a:srgbClr val="1F2937"/>
-                </a:solidFill>
-                <a:latin typeface="Calibri"/>
-                <a:ea typeface="맑은 고딕"/>
-              </a:rPr>
-              <a:t>최대 3.58배 감소 (vs CachedAttention/FlashGen)</a:t>
+              <a:t>vLLM</a:t>
+            </a:r>
+            <a:r>
+              <a:rPr sz="1400" b="0" i="0">
+                <a:solidFill>
+                  <a:srgbClr val="6B7280"/>
+                </a:solidFill>
+                <a:latin typeface="Calibri"/>
+                <a:ea typeface="맑은 고딕"/>
+              </a:rPr>
+              <a:t>  Recompute (KV caching 없음)</a:t>
             </a:r>
           </a:p>
           <a:p>
@@ -12227,17 +12060,17 @@
                 <a:latin typeface="Calibri"/>
                 <a:ea typeface="맑은 고딕"/>
               </a:rPr>
-              <a:t>Bidaw — throughput </a:t>
-            </a:r>
-            <a:r>
-              <a:rPr sz="1800" b="0" i="0">
-                <a:solidFill>
-                  <a:srgbClr val="1F2937"/>
-                </a:solidFill>
-                <a:latin typeface="Calibri"/>
-                <a:ea typeface="맑은 고딕"/>
-              </a:rPr>
-              <a:t>1.43~1.83배 향상 (동일 latency 기준)</a:t>
+              <a:t>CachedAttention</a:t>
+            </a:r>
+            <a:r>
+              <a:rPr sz="1400" b="0" i="0">
+                <a:solidFill>
+                  <a:srgbClr val="6B7280"/>
+                </a:solidFill>
+                <a:latin typeface="Calibri"/>
+                <a:ea typeface="맑은 고딕"/>
+              </a:rPr>
+              <a:t>  Queue-enhanced LRU + 2-tier</a:t>
             </a:r>
           </a:p>
           <a:p>
@@ -12264,17 +12097,17 @@
                 <a:latin typeface="Calibri"/>
                 <a:ea typeface="맑은 고딕"/>
               </a:rPr>
-              <a:t>Optimal과의 격차 </a:t>
-            </a:r>
-            <a:r>
-              <a:rPr sz="1800" b="0" i="0">
-                <a:solidFill>
-                  <a:srgbClr val="1F2937"/>
-                </a:solidFill>
-                <a:latin typeface="Calibri"/>
-                <a:ea typeface="맑은 고딕"/>
-              </a:rPr>
-              <a:t>거의 없음 — perf-layer-only 수준에 근접</a:t>
+              <a:t>FlashGen</a:t>
+            </a:r>
+            <a:r>
+              <a:rPr sz="1400" b="0" i="0">
+                <a:solidFill>
+                  <a:srgbClr val="6B7280"/>
+                </a:solidFill>
+                <a:latin typeface="Calibri"/>
+                <a:ea typeface="맑은 고딕"/>
+              </a:rPr>
+              <a:t>  Inclusive caching + GPU-fit scheduling</a:t>
             </a:r>
           </a:p>
           <a:p>
@@ -12301,24 +12134,61 @@
                 <a:latin typeface="Calibri"/>
                 <a:ea typeface="맑은 고딕"/>
               </a:rPr>
-              <a:t>Note </a:t>
-            </a:r>
-            <a:r>
-              <a:rPr sz="1800" b="0" i="0">
-                <a:solidFill>
-                  <a:srgbClr val="1F2937"/>
-                </a:solidFill>
-                <a:latin typeface="Calibri"/>
-                <a:ea typeface="맑은 고딕"/>
-              </a:rPr>
-              <a:t>Bidaw는 lossless — 답변 정확도는 FlashGen 등과 같음</a:t>
-            </a:r>
-          </a:p>
-        </p:txBody>
-      </p:sp>
-      <p:sp>
-        <p:nvSpPr>
-          <p:cNvPr id="6" name="TextBox 5"/>
+              <a:t>Optimal</a:t>
+            </a:r>
+            <a:r>
+              <a:rPr sz="1400" b="0" i="0">
+                <a:solidFill>
+                  <a:srgbClr val="6B7280"/>
+                </a:solidFill>
+                <a:latin typeface="Calibri"/>
+                <a:ea typeface="맑은 고딕"/>
+              </a:rPr>
+              <a:t>  모든 KV가 perf layer에 있는 상한선</a:t>
+            </a:r>
+          </a:p>
+          <a:p>
+            <a:pPr algn="l">
+              <a:spcAft>
+                <a:spcPts val="400"/>
+              </a:spcAft>
+            </a:pPr>
+            <a:r>
+              <a:rPr sz="1800" b="1" i="0">
+                <a:solidFill>
+                  <a:srgbClr val="D9352A"/>
+                </a:solidFill>
+                <a:latin typeface="Calibri"/>
+                <a:ea typeface="맑은 고딕"/>
+              </a:rPr>
+              <a:t>▸ </a:t>
+            </a:r>
+            <a:r>
+              <a:rPr sz="1800" b="1" i="0">
+                <a:solidFill>
+                  <a:srgbClr val="1F2937"/>
+                </a:solidFill>
+                <a:latin typeface="Calibri"/>
+                <a:ea typeface="맑은 고딕"/>
+              </a:rPr>
+              <a:t>Bidaw</a:t>
+            </a:r>
+            <a:r>
+              <a:rPr sz="1400" b="0" i="0">
+                <a:solidFill>
+                  <a:srgbClr val="6B7280"/>
+                </a:solidFill>
+                <a:latin typeface="Calibri"/>
+                <a:ea typeface="맑은 고딕"/>
+              </a:rPr>
+              <a:t>  이 논문</a:t>
+            </a:r>
+          </a:p>
+        </p:txBody>
+      </p:sp>
+      <p:sp>
+        <p:nvSpPr>
+          <p:cNvPr id="7" name="TextBox 6"/>
           <p:cNvSpPr txBox="1"/>
           <p:nvPr/>
         </p:nvSpPr>
@@ -12426,14 +12296,14 @@
                 <a:latin typeface="Calibri"/>
                 <a:ea typeface="맑은 고딕"/>
               </a:rPr>
-              <a:t>Memory sensitivity &amp; Eviction miss rate</a:t>
+              <a:t>Overall performance — 모델 5종 동시 평가</a:t>
             </a:r>
           </a:p>
         </p:txBody>
       </p:sp>
       <p:pic>
         <p:nvPicPr>
-          <p:cNvPr id="3" name="Picture 2" descr="figure_16.png"/>
+          <p:cNvPr id="3" name="Picture 2" descr="figure_15.png"/>
           <p:cNvPicPr>
             <a:picLocks noChangeAspect="1"/>
           </p:cNvPicPr>
@@ -12448,7 +12318,7 @@
         <p:spPr>
           <a:xfrm>
             <a:off x="274320" y="1188720"/>
-            <a:ext cx="6400800" cy="1115941"/>
+            <a:ext cx="11612880" cy="2024636"/>
           </a:xfrm>
           <a:prstGeom prst="rect">
             <a:avLst/>
@@ -12463,8 +12333,8 @@
         </p:nvSpPr>
         <p:spPr>
           <a:xfrm>
-            <a:off x="274320" y="2350381"/>
-            <a:ext cx="6400800" cy="320040"/>
+            <a:off x="274320" y="3259076"/>
+            <a:ext cx="11612880" cy="320040"/>
           </a:xfrm>
           <a:prstGeom prst="rect">
             <a:avLst/>
@@ -12490,45 +12360,21 @@
                 <a:latin typeface="Calibri"/>
                 <a:ea typeface="맑은 고딕"/>
               </a:rPr>
-              <a:t>Figure 16. host memory 120~200GB 범위에서의 latency</a:t>
-            </a:r>
-          </a:p>
-        </p:txBody>
-      </p:sp>
-      <p:pic>
-        <p:nvPicPr>
-          <p:cNvPr id="5" name="Picture 4" descr="figure_18.png"/>
-          <p:cNvPicPr>
-            <a:picLocks noChangeAspect="1"/>
-          </p:cNvPicPr>
-          <p:nvPr/>
-        </p:nvPicPr>
-        <p:blipFill>
-          <a:blip r:embed="rId3"/>
-          <a:stretch>
-            <a:fillRect/>
-          </a:stretch>
-        </p:blipFill>
-        <p:spPr>
-          <a:xfrm>
-            <a:off x="6949440" y="1188720"/>
-            <a:ext cx="5029200" cy="2335189"/>
-          </a:xfrm>
-          <a:prstGeom prst="rect">
-            <a:avLst/>
-          </a:prstGeom>
-        </p:spPr>
-      </p:pic>
-      <p:sp>
-        <p:nvSpPr>
-          <p:cNvPr id="6" name="TextBox 5"/>
+              <a:t>Figure 15. 사용자 도착률 vs 평균 응답 latency, 모델 5종</a:t>
+            </a:r>
+          </a:p>
+        </p:txBody>
+      </p:sp>
+      <p:sp>
+        <p:nvSpPr>
+          <p:cNvPr id="5" name="TextBox 4"/>
           <p:cNvSpPr txBox="1"/>
           <p:nvPr/>
         </p:nvSpPr>
         <p:spPr>
           <a:xfrm>
-            <a:off x="6949440" y="3569629"/>
-            <a:ext cx="5029200" cy="320040"/>
+            <a:off x="457200" y="4937760"/>
+            <a:ext cx="11247120" cy="1554480"/>
           </a:xfrm>
           <a:prstGeom prst="rect">
             <a:avLst/>
@@ -12541,46 +12387,6 @@
           </a:bodyPr>
           <a:lstStyle/>
           <a:p>
-            <a:pPr algn="ctr">
-              <a:spcAft>
-                <a:spcPts val="400"/>
-              </a:spcAft>
-            </a:pPr>
-            <a:r>
-              <a:rPr sz="1000" b="0" i="1">
-                <a:solidFill>
-                  <a:srgbClr val="6B7280"/>
-                </a:solidFill>
-                <a:latin typeface="Calibri"/>
-                <a:ea typeface="맑은 고딕"/>
-              </a:rPr>
-              <a:t>Figure 18. (a) memory size · (b) workload pressure</a:t>
-            </a:r>
-          </a:p>
-        </p:txBody>
-      </p:sp>
-      <p:sp>
-        <p:nvSpPr>
-          <p:cNvPr id="7" name="TextBox 6"/>
-          <p:cNvSpPr txBox="1"/>
-          <p:nvPr/>
-        </p:nvSpPr>
-        <p:spPr>
-          <a:xfrm>
-            <a:off x="457200" y="4023360"/>
-            <a:ext cx="11247120" cy="2468880"/>
-          </a:xfrm>
-          <a:prstGeom prst="rect">
-            <a:avLst/>
-          </a:prstGeom>
-          <a:noFill/>
-        </p:spPr>
-        <p:txBody>
-          <a:bodyPr wrap="square" lIns="45720" rIns="45720" tIns="18288" bIns="18288">
-            <a:spAutoFit/>
-          </a:bodyPr>
-          <a:lstStyle/>
-          <a:p>
             <a:pPr algn="l">
               <a:spcAft>
                 <a:spcPts val="400"/>
@@ -12589,23 +12395,43 @@
             <a:r>
               <a:rPr sz="1800" b="1" i="0">
                 <a:solidFill>
-                  <a:srgbClr val="1F2937"/>
-                </a:solidFill>
-                <a:latin typeface="Calibri"/>
-                <a:ea typeface="맑은 고딕"/>
-              </a:rPr>
-              <a:t>Memory sensitivity (Fig. 16)</a:t>
-            </a:r>
-          </a:p>
-          <a:p>
-            <a:pPr algn="l">
-              <a:spcAft>
-                <a:spcPts val="200"/>
-              </a:spcAft>
-            </a:pPr>
+                  <a:srgbClr val="D9352A"/>
+                </a:solidFill>
+                <a:latin typeface="Calibri"/>
+                <a:ea typeface="맑은 고딕"/>
+              </a:rPr>
+              <a:t>▸ </a:t>
+            </a:r>
             <a:r>
               <a:rPr sz="1800" b="1" i="0">
                 <a:solidFill>
+                  <a:srgbClr val="1F2937"/>
+                </a:solidFill>
+                <a:latin typeface="Calibri"/>
+                <a:ea typeface="맑은 고딕"/>
+              </a:rPr>
+              <a:t>Bidaw — 응답 latency </a:t>
+            </a:r>
+            <a:r>
+              <a:rPr sz="1800" b="0" i="0">
+                <a:solidFill>
+                  <a:srgbClr val="1F2937"/>
+                </a:solidFill>
+                <a:latin typeface="Calibri"/>
+                <a:ea typeface="맑은 고딕"/>
+              </a:rPr>
+              <a:t>최대 3.58배 감소 (vs CachedAttention/FlashGen)</a:t>
+            </a:r>
+          </a:p>
+          <a:p>
+            <a:pPr algn="l">
+              <a:spcAft>
+                <a:spcPts val="400"/>
+              </a:spcAft>
+            </a:pPr>
+            <a:r>
+              <a:rPr sz="1800" b="1" i="0">
+                <a:solidFill>
                   <a:srgbClr val="D9352A"/>
                 </a:solidFill>
                 <a:latin typeface="Calibri"/>
@@ -12614,6 +12440,16 @@
               <a:t>▸ </a:t>
             </a:r>
             <a:r>
+              <a:rPr sz="1800" b="1" i="0">
+                <a:solidFill>
+                  <a:srgbClr val="1F2937"/>
+                </a:solidFill>
+                <a:latin typeface="Calibri"/>
+                <a:ea typeface="맑은 고딕"/>
+              </a:rPr>
+              <a:t>Bidaw — throughput </a:t>
+            </a:r>
+            <a:r>
               <a:rPr sz="1800" b="0" i="0">
                 <a:solidFill>
                   <a:srgbClr val="1F2937"/>
@@ -12621,13 +12457,13 @@
                 <a:latin typeface="Calibri"/>
                 <a:ea typeface="맑은 고딕"/>
               </a:rPr>
-              <a:t>host memory를 120GB까지 줄여도 Bidaw는 baseline 200GB 수준의 latency</a:t>
-            </a:r>
-          </a:p>
-          <a:p>
-            <a:pPr algn="l">
-              <a:spcAft>
-                <a:spcPts val="200"/>
+              <a:t>1.43~1.83배 향상 (동일 latency 기준)</a:t>
+            </a:r>
+          </a:p>
+          <a:p>
+            <a:pPr algn="l">
+              <a:spcAft>
+                <a:spcPts val="400"/>
               </a:spcAft>
             </a:pPr>
             <a:r>
@@ -12641,6 +12477,16 @@
               <a:t>▸ </a:t>
             </a:r>
             <a:r>
+              <a:rPr sz="1800" b="1" i="0">
+                <a:solidFill>
+                  <a:srgbClr val="1F2937"/>
+                </a:solidFill>
+                <a:latin typeface="Calibri"/>
+                <a:ea typeface="맑은 고딕"/>
+              </a:rPr>
+              <a:t>Optimal과의 격차 </a:t>
+            </a:r>
+            <a:r>
               <a:rPr sz="1800" b="0" i="0">
                 <a:solidFill>
                   <a:srgbClr val="1F2937"/>
@@ -12648,7 +12494,7 @@
                 <a:latin typeface="Calibri"/>
                 <a:ea typeface="맑은 고딕"/>
               </a:rPr>
-              <a:t>동일 메모리에서 1.75~2.19배 더 많은 사용자/분 처리 — 메모리가 작을수록 격차가 더 벌어짐</a:t>
+              <a:t>거의 없음 — perf-layer-only 수준에 근접</a:t>
             </a:r>
           </a:p>
           <a:p>
@@ -12660,29 +12506,22 @@
             <a:r>
               <a:rPr sz="1800" b="1" i="0">
                 <a:solidFill>
-                  <a:srgbClr val="1F2937"/>
-                </a:solidFill>
-                <a:latin typeface="Calibri"/>
-                <a:ea typeface="맑은 고딕"/>
-              </a:rPr>
-              <a:t>Eviction miss rate (Fig. 18)</a:t>
-            </a:r>
-          </a:p>
-          <a:p>
-            <a:pPr algn="l">
-              <a:spcAft>
-                <a:spcPts val="200"/>
-              </a:spcAft>
-            </a:pPr>
+                  <a:srgbClr val="D9352A"/>
+                </a:solidFill>
+                <a:latin typeface="Calibri"/>
+                <a:ea typeface="맑은 고딕"/>
+              </a:rPr>
+              <a:t>▸ </a:t>
+            </a:r>
             <a:r>
               <a:rPr sz="1800" b="1" i="0">
                 <a:solidFill>
-                  <a:srgbClr val="D9352A"/>
-                </a:solidFill>
-                <a:latin typeface="Calibri"/>
-                <a:ea typeface="맑은 고딕"/>
-              </a:rPr>
-              <a:t>▸ </a:t>
+                  <a:srgbClr val="1F2937"/>
+                </a:solidFill>
+                <a:latin typeface="Calibri"/>
+                <a:ea typeface="맑은 고딕"/>
+              </a:rPr>
+              <a:t>Note </a:t>
             </a:r>
             <a:r>
               <a:rPr sz="1800" b="0" i="0">
@@ -12692,61 +12531,14 @@
                 <a:latin typeface="Calibri"/>
                 <a:ea typeface="맑은 고딕"/>
               </a:rPr>
-              <a:t>queue-enhanced (CachedAttention)</a:t>
-            </a:r>
-            <a:r>
-              <a:rPr sz="1800" b="1" i="0">
-                <a:solidFill>
-                  <a:srgbClr val="1F2937"/>
-                </a:solidFill>
-                <a:latin typeface="Calibri"/>
-                <a:ea typeface="맑은 고딕"/>
-              </a:rPr>
-              <a:t>  보다 miss rate -57.6%</a:t>
-            </a:r>
-          </a:p>
-          <a:p>
-            <a:pPr algn="l">
-              <a:spcAft>
-                <a:spcPts val="200"/>
-              </a:spcAft>
-            </a:pPr>
-            <a:r>
-              <a:rPr sz="1800" b="1" i="0">
-                <a:solidFill>
-                  <a:srgbClr val="D9352A"/>
-                </a:solidFill>
-                <a:latin typeface="Calibri"/>
-                <a:ea typeface="맑은 고딕"/>
-              </a:rPr>
-              <a:t>▸ </a:t>
-            </a:r>
-            <a:r>
-              <a:rPr sz="1800" b="0" i="0">
-                <a:solidFill>
-                  <a:srgbClr val="1F2937"/>
-                </a:solidFill>
-                <a:latin typeface="Calibri"/>
-                <a:ea typeface="맑은 고딕"/>
-              </a:rPr>
-              <a:t>LFU/LRU/FIFO 같은 일반 정책</a:t>
-            </a:r>
-            <a:r>
-              <a:rPr sz="1800" b="1" i="0">
-                <a:solidFill>
-                  <a:srgbClr val="1F2937"/>
-                </a:solidFill>
-                <a:latin typeface="Calibri"/>
-                <a:ea typeface="맑은 고딕"/>
-              </a:rPr>
-              <a:t>  보다 miss rate -69.9%</a:t>
-            </a:r>
-          </a:p>
-        </p:txBody>
-      </p:sp>
-      <p:sp>
-        <p:nvSpPr>
-          <p:cNvPr id="8" name="TextBox 7"/>
+              <a:t>Bidaw는 lossless — 답변 정확도는 FlashGen 등과 같음</a:t>
+            </a:r>
+          </a:p>
+        </p:txBody>
+      </p:sp>
+      <p:sp>
+        <p:nvSpPr>
+          <p:cNvPr id="6" name="TextBox 5"/>
           <p:cNvSpPr txBox="1"/>
           <p:nvPr/>
         </p:nvSpPr>
@@ -12854,14 +12646,14 @@
                 <a:latin typeface="Calibri"/>
                 <a:ea typeface="맑은 고딕"/>
               </a:rPr>
-              <a:t>Tail latency · Ablation · Overhead</a:t>
+              <a:t>Memory sensitivity &amp; Eviction miss rate</a:t>
             </a:r>
           </a:p>
         </p:txBody>
       </p:sp>
       <p:pic>
         <p:nvPicPr>
-          <p:cNvPr id="3" name="Picture 2" descr="figure_22.png"/>
+          <p:cNvPr id="3" name="Picture 2" descr="figure_16.png"/>
           <p:cNvPicPr>
             <a:picLocks noChangeAspect="1"/>
           </p:cNvPicPr>
@@ -12875,8 +12667,8 @@
         </p:blipFill>
         <p:spPr>
           <a:xfrm>
-            <a:off x="786216" y="1188720"/>
-            <a:ext cx="4919808" cy="2743200"/>
+            <a:off x="274320" y="1188720"/>
+            <a:ext cx="6400800" cy="1115941"/>
           </a:xfrm>
           <a:prstGeom prst="rect">
             <a:avLst/>
@@ -12891,8 +12683,8 @@
         </p:nvSpPr>
         <p:spPr>
           <a:xfrm>
-            <a:off x="274320" y="3977640"/>
-            <a:ext cx="5943600" cy="320040"/>
+            <a:off x="274320" y="2350381"/>
+            <a:ext cx="6400800" cy="320040"/>
           </a:xfrm>
           <a:prstGeom prst="rect">
             <a:avLst/>
@@ -12918,14 +12710,14 @@
                 <a:latin typeface="Calibri"/>
                 <a:ea typeface="맑은 고딕"/>
               </a:rPr>
-              <a:t>Figure 22. Tail latency P90 / P95 / P99 (OPT-30B)</a:t>
+              <a:t>Figure 16. host memory 120~200GB 범위에서의 latency</a:t>
             </a:r>
           </a:p>
         </p:txBody>
       </p:sp>
       <p:pic>
         <p:nvPicPr>
-          <p:cNvPr id="5" name="Picture 4" descr="figure_21.png"/>
+          <p:cNvPr id="5" name="Picture 4" descr="figure_18.png"/>
           <p:cNvPicPr>
             <a:picLocks noChangeAspect="1"/>
           </p:cNvPicPr>
@@ -12939,8 +12731,8 @@
         </p:blipFill>
         <p:spPr>
           <a:xfrm>
-            <a:off x="6400800" y="1188720"/>
-            <a:ext cx="2743200" cy="1223023"/>
+            <a:off x="6949440" y="1188720"/>
+            <a:ext cx="5029200" cy="2335189"/>
           </a:xfrm>
           <a:prstGeom prst="rect">
             <a:avLst/>
@@ -12955,8 +12747,8 @@
         </p:nvSpPr>
         <p:spPr>
           <a:xfrm>
-            <a:off x="6400800" y="2457463"/>
-            <a:ext cx="2743200" cy="320040"/>
+            <a:off x="6949440" y="3569629"/>
+            <a:ext cx="5029200" cy="320040"/>
           </a:xfrm>
           <a:prstGeom prst="rect">
             <a:avLst/>
@@ -12982,45 +12774,21 @@
                 <a:latin typeface="Calibri"/>
                 <a:ea typeface="맑은 고딕"/>
               </a:rPr>
-              <a:t>Figure 21. Ablation</a:t>
-            </a:r>
-          </a:p>
-        </p:txBody>
-      </p:sp>
-      <p:pic>
-        <p:nvPicPr>
-          <p:cNvPr id="7" name="Picture 6" descr="figure_20.png"/>
-          <p:cNvPicPr>
-            <a:picLocks noChangeAspect="1"/>
-          </p:cNvPicPr>
-          <p:nvPr/>
-        </p:nvPicPr>
-        <p:blipFill>
-          <a:blip r:embed="rId4"/>
-          <a:stretch>
-            <a:fillRect/>
-          </a:stretch>
-        </p:blipFill>
-        <p:spPr>
-          <a:xfrm>
-            <a:off x="9326880" y="1188720"/>
-            <a:ext cx="2651760" cy="934995"/>
-          </a:xfrm>
-          <a:prstGeom prst="rect">
-            <a:avLst/>
-          </a:prstGeom>
-        </p:spPr>
-      </p:pic>
-      <p:sp>
-        <p:nvSpPr>
-          <p:cNvPr id="8" name="TextBox 7"/>
+              <a:t>Figure 18. (a) memory size · (b) workload pressure</a:t>
+            </a:r>
+          </a:p>
+        </p:txBody>
+      </p:sp>
+      <p:sp>
+        <p:nvSpPr>
+          <p:cNvPr id="7" name="TextBox 6"/>
           <p:cNvSpPr txBox="1"/>
           <p:nvPr/>
         </p:nvSpPr>
         <p:spPr>
           <a:xfrm>
-            <a:off x="9326880" y="2169435"/>
-            <a:ext cx="2651760" cy="320040"/>
+            <a:off x="457200" y="4023360"/>
+            <a:ext cx="11247120" cy="2468880"/>
           </a:xfrm>
           <a:prstGeom prst="rect">
             <a:avLst/>
@@ -13033,54 +12801,31 @@
           </a:bodyPr>
           <a:lstStyle/>
           <a:p>
-            <a:pPr algn="ctr">
-              <a:spcAft>
-                <a:spcPts val="400"/>
-              </a:spcAft>
-            </a:pPr>
-            <a:r>
-              <a:rPr sz="1000" b="0" i="1">
-                <a:solidFill>
-                  <a:srgbClr val="6B7280"/>
-                </a:solidFill>
-                <a:latin typeface="Calibri"/>
-                <a:ea typeface="맑은 고딕"/>
-              </a:rPr>
-              <a:t>Figure 20. Overhead</a:t>
-            </a:r>
-          </a:p>
-        </p:txBody>
-      </p:sp>
-      <p:sp>
-        <p:nvSpPr>
-          <p:cNvPr id="9" name="TextBox 8"/>
-          <p:cNvSpPr txBox="1"/>
-          <p:nvPr/>
-        </p:nvSpPr>
-        <p:spPr>
-          <a:xfrm>
-            <a:off x="457200" y="4206240"/>
-            <a:ext cx="11247120" cy="2286000"/>
-          </a:xfrm>
-          <a:prstGeom prst="rect">
-            <a:avLst/>
-          </a:prstGeom>
-          <a:noFill/>
-        </p:spPr>
-        <p:txBody>
-          <a:bodyPr wrap="square" lIns="45720" rIns="45720" tIns="18288" bIns="18288">
-            <a:spAutoFit/>
-          </a:bodyPr>
-          <a:lstStyle/>
-          <a:p>
-            <a:pPr algn="l">
-              <a:spcAft>
-                <a:spcPts val="600"/>
+            <a:pPr algn="l">
+              <a:spcAft>
+                <a:spcPts val="400"/>
               </a:spcAft>
             </a:pPr>
             <a:r>
               <a:rPr sz="1800" b="1" i="0">
                 <a:solidFill>
+                  <a:srgbClr val="1F2937"/>
+                </a:solidFill>
+                <a:latin typeface="Calibri"/>
+                <a:ea typeface="맑은 고딕"/>
+              </a:rPr>
+              <a:t>Memory sensitivity (Fig. 16)</a:t>
+            </a:r>
+          </a:p>
+          <a:p>
+            <a:pPr algn="l">
+              <a:spcAft>
+                <a:spcPts val="200"/>
+              </a:spcAft>
+            </a:pPr>
+            <a:r>
+              <a:rPr sz="1800" b="1" i="0">
+                <a:solidFill>
                   <a:srgbClr val="D9352A"/>
                 </a:solidFill>
                 <a:latin typeface="Calibri"/>
@@ -13089,14 +12834,31 @@
               <a:t>▸ </a:t>
             </a:r>
             <a:r>
+              <a:rPr sz="1800" b="0" i="0">
+                <a:solidFill>
+                  <a:srgbClr val="1F2937"/>
+                </a:solidFill>
+                <a:latin typeface="Calibri"/>
+                <a:ea typeface="맑은 고딕"/>
+              </a:rPr>
+              <a:t>host memory를 120GB까지 줄여도 Bidaw는 baseline 200GB 수준의 latency</a:t>
+            </a:r>
+          </a:p>
+          <a:p>
+            <a:pPr algn="l">
+              <a:spcAft>
+                <a:spcPts val="200"/>
+              </a:spcAft>
+            </a:pPr>
+            <a:r>
               <a:rPr sz="1800" b="1" i="0">
                 <a:solidFill>
-                  <a:srgbClr val="1F2937"/>
-                </a:solidFill>
-                <a:latin typeface="Calibri"/>
-                <a:ea typeface="맑은 고딕"/>
-              </a:rPr>
-              <a:t>Tail latency</a:t>
+                  <a:srgbClr val="D9352A"/>
+                </a:solidFill>
+                <a:latin typeface="Calibri"/>
+                <a:ea typeface="맑은 고딕"/>
+              </a:rPr>
+              <a:t>▸ </a:t>
             </a:r>
             <a:r>
               <a:rPr sz="1800" b="0" i="0">
@@ -13106,18 +12868,35 @@
                 <a:latin typeface="Calibri"/>
                 <a:ea typeface="맑은 고딕"/>
               </a:rPr>
-              <a:t>    CachedAttention 대비 P90 −52.96% / P95 −49.30% / P99 −47.03%</a:t>
-            </a:r>
-          </a:p>
-          <a:p>
-            <a:pPr algn="l">
-              <a:spcAft>
-                <a:spcPts val="600"/>
+              <a:t>동일 메모리에서 1.75~2.19배 더 많은 사용자/분 처리 — 메모리가 작을수록 격차가 더 벌어짐</a:t>
+            </a:r>
+          </a:p>
+          <a:p>
+            <a:pPr algn="l">
+              <a:spcAft>
+                <a:spcPts val="400"/>
               </a:spcAft>
             </a:pPr>
             <a:r>
               <a:rPr sz="1800" b="1" i="0">
                 <a:solidFill>
+                  <a:srgbClr val="1F2937"/>
+                </a:solidFill>
+                <a:latin typeface="Calibri"/>
+                <a:ea typeface="맑은 고딕"/>
+              </a:rPr>
+              <a:t>Eviction miss rate (Fig. 18)</a:t>
+            </a:r>
+          </a:p>
+          <a:p>
+            <a:pPr algn="l">
+              <a:spcAft>
+                <a:spcPts val="200"/>
+              </a:spcAft>
+            </a:pPr>
+            <a:r>
+              <a:rPr sz="1800" b="1" i="0">
+                <a:solidFill>
                   <a:srgbClr val="D9352A"/>
                 </a:solidFill>
                 <a:latin typeface="Calibri"/>
@@ -13126,6 +12905,16 @@
               <a:t>▸ </a:t>
             </a:r>
             <a:r>
+              <a:rPr sz="1800" b="0" i="0">
+                <a:solidFill>
+                  <a:srgbClr val="1F2937"/>
+                </a:solidFill>
+                <a:latin typeface="Calibri"/>
+                <a:ea typeface="맑은 고딕"/>
+              </a:rPr>
+              <a:t>queue-enhanced (CachedAttention)</a:t>
+            </a:r>
+            <a:r>
               <a:rPr sz="1800" b="1" i="0">
                 <a:solidFill>
                   <a:srgbClr val="1F2937"/>
@@ -13133,7 +12922,24 @@
                 <a:latin typeface="Calibri"/>
                 <a:ea typeface="맑은 고딕"/>
               </a:rPr>
-              <a:t>Ablation</a:t>
+              <a:t>  보다 miss rate -57.6%</a:t>
+            </a:r>
+          </a:p>
+          <a:p>
+            <a:pPr algn="l">
+              <a:spcAft>
+                <a:spcPts val="200"/>
+              </a:spcAft>
+            </a:pPr>
+            <a:r>
+              <a:rPr sz="1800" b="1" i="0">
+                <a:solidFill>
+                  <a:srgbClr val="D9352A"/>
+                </a:solidFill>
+                <a:latin typeface="Calibri"/>
+                <a:ea typeface="맑은 고딕"/>
+              </a:rPr>
+              <a:t>▸ </a:t>
             </a:r>
             <a:r>
               <a:rPr sz="1800" b="0" i="0">
@@ -13143,51 +12949,24 @@
                 <a:latin typeface="Calibri"/>
                 <a:ea typeface="맑은 고딕"/>
               </a:rPr>
-              <a:t>    Scheduling +1.58배, Eviction +1.25배, Tensor caching +1.10배</a:t>
-            </a:r>
-          </a:p>
-          <a:p>
-            <a:pPr algn="l">
-              <a:spcAft>
-                <a:spcPts val="600"/>
-              </a:spcAft>
-            </a:pPr>
+              <a:t>LFU/LRU/FIFO 같은 일반 정책</a:t>
+            </a:r>
             <a:r>
               <a:rPr sz="1800" b="1" i="0">
                 <a:solidFill>
-                  <a:srgbClr val="D9352A"/>
-                </a:solidFill>
-                <a:latin typeface="Calibri"/>
-                <a:ea typeface="맑은 고딕"/>
-              </a:rPr>
-              <a:t>▸ </a:t>
-            </a:r>
-            <a:r>
-              <a:rPr sz="1800" b="1" i="0">
-                <a:solidFill>
-                  <a:srgbClr val="1F2937"/>
-                </a:solidFill>
-                <a:latin typeface="Calibri"/>
-                <a:ea typeface="맑은 고딕"/>
-              </a:rPr>
-              <a:t>Overhead</a:t>
-            </a:r>
-            <a:r>
-              <a:rPr sz="1800" b="0" i="0">
-                <a:solidFill>
-                  <a:srgbClr val="1F2937"/>
-                </a:solidFill>
-                <a:latin typeface="Calibri"/>
-                <a:ea typeface="맑은 고딕"/>
-              </a:rPr>
-              <a:t>    Scheduling 0.62 ms, Eviction 0.35 ms, KV transform &lt;0.1 s</a:t>
-            </a:r>
-          </a:p>
-        </p:txBody>
-      </p:sp>
-      <p:sp>
-        <p:nvSpPr>
-          <p:cNvPr id="10" name="TextBox 9"/>
+                  <a:srgbClr val="1F2937"/>
+                </a:solidFill>
+                <a:latin typeface="Calibri"/>
+                <a:ea typeface="맑은 고딕"/>
+              </a:rPr>
+              <a:t>  보다 miss rate -69.9%</a:t>
+            </a:r>
+          </a:p>
+        </p:txBody>
+      </p:sp>
+      <p:sp>
+        <p:nvSpPr>
+          <p:cNvPr id="8" name="TextBox 7"/>
           <p:cNvSpPr txBox="1"/>
           <p:nvPr/>
         </p:nvSpPr>
@@ -13649,6 +13428,447 @@
                 <a:latin typeface="Calibri"/>
                 <a:ea typeface="맑은 고딕"/>
               </a:rPr>
+              <a:t>EVALUATION</a:t>
+            </a:r>
+          </a:p>
+          <a:p>
+            <a:pPr algn="l">
+              <a:spcAft>
+                <a:spcPts val="400"/>
+              </a:spcAft>
+            </a:pPr>
+            <a:r>
+              <a:rPr sz="2800" b="1" i="0">
+                <a:solidFill>
+                  <a:srgbClr val="1F2937"/>
+                </a:solidFill>
+                <a:latin typeface="Calibri"/>
+                <a:ea typeface="맑은 고딕"/>
+              </a:rPr>
+              <a:t>Tail latency · Ablation · Overhead</a:t>
+            </a:r>
+          </a:p>
+        </p:txBody>
+      </p:sp>
+      <p:pic>
+        <p:nvPicPr>
+          <p:cNvPr id="3" name="Picture 2" descr="figure_22.png"/>
+          <p:cNvPicPr>
+            <a:picLocks noChangeAspect="1"/>
+          </p:cNvPicPr>
+          <p:nvPr/>
+        </p:nvPicPr>
+        <p:blipFill>
+          <a:blip r:embed="rId2"/>
+          <a:stretch>
+            <a:fillRect/>
+          </a:stretch>
+        </p:blipFill>
+        <p:spPr>
+          <a:xfrm>
+            <a:off x="786216" y="1188720"/>
+            <a:ext cx="4919808" cy="2743200"/>
+          </a:xfrm>
+          <a:prstGeom prst="rect">
+            <a:avLst/>
+          </a:prstGeom>
+        </p:spPr>
+      </p:pic>
+      <p:sp>
+        <p:nvSpPr>
+          <p:cNvPr id="4" name="TextBox 3"/>
+          <p:cNvSpPr txBox="1"/>
+          <p:nvPr/>
+        </p:nvSpPr>
+        <p:spPr>
+          <a:xfrm>
+            <a:off x="274320" y="3977640"/>
+            <a:ext cx="5943600" cy="320040"/>
+          </a:xfrm>
+          <a:prstGeom prst="rect">
+            <a:avLst/>
+          </a:prstGeom>
+          <a:noFill/>
+        </p:spPr>
+        <p:txBody>
+          <a:bodyPr wrap="square" lIns="45720" rIns="45720" tIns="18288" bIns="18288">
+            <a:spAutoFit/>
+          </a:bodyPr>
+          <a:lstStyle/>
+          <a:p>
+            <a:pPr algn="ctr">
+              <a:spcAft>
+                <a:spcPts val="400"/>
+              </a:spcAft>
+            </a:pPr>
+            <a:r>
+              <a:rPr sz="1000" b="0" i="1">
+                <a:solidFill>
+                  <a:srgbClr val="6B7280"/>
+                </a:solidFill>
+                <a:latin typeface="Calibri"/>
+                <a:ea typeface="맑은 고딕"/>
+              </a:rPr>
+              <a:t>Figure 22. Tail latency P90 / P95 / P99 (OPT-30B)</a:t>
+            </a:r>
+          </a:p>
+        </p:txBody>
+      </p:sp>
+      <p:pic>
+        <p:nvPicPr>
+          <p:cNvPr id="5" name="Picture 4" descr="figure_21.png"/>
+          <p:cNvPicPr>
+            <a:picLocks noChangeAspect="1"/>
+          </p:cNvPicPr>
+          <p:nvPr/>
+        </p:nvPicPr>
+        <p:blipFill>
+          <a:blip r:embed="rId3"/>
+          <a:stretch>
+            <a:fillRect/>
+          </a:stretch>
+        </p:blipFill>
+        <p:spPr>
+          <a:xfrm>
+            <a:off x="6400800" y="1188720"/>
+            <a:ext cx="2743200" cy="1223023"/>
+          </a:xfrm>
+          <a:prstGeom prst="rect">
+            <a:avLst/>
+          </a:prstGeom>
+        </p:spPr>
+      </p:pic>
+      <p:sp>
+        <p:nvSpPr>
+          <p:cNvPr id="6" name="TextBox 5"/>
+          <p:cNvSpPr txBox="1"/>
+          <p:nvPr/>
+        </p:nvSpPr>
+        <p:spPr>
+          <a:xfrm>
+            <a:off x="6400800" y="2457463"/>
+            <a:ext cx="2743200" cy="320040"/>
+          </a:xfrm>
+          <a:prstGeom prst="rect">
+            <a:avLst/>
+          </a:prstGeom>
+          <a:noFill/>
+        </p:spPr>
+        <p:txBody>
+          <a:bodyPr wrap="square" lIns="45720" rIns="45720" tIns="18288" bIns="18288">
+            <a:spAutoFit/>
+          </a:bodyPr>
+          <a:lstStyle/>
+          <a:p>
+            <a:pPr algn="ctr">
+              <a:spcAft>
+                <a:spcPts val="400"/>
+              </a:spcAft>
+            </a:pPr>
+            <a:r>
+              <a:rPr sz="1000" b="0" i="1">
+                <a:solidFill>
+                  <a:srgbClr val="6B7280"/>
+                </a:solidFill>
+                <a:latin typeface="Calibri"/>
+                <a:ea typeface="맑은 고딕"/>
+              </a:rPr>
+              <a:t>Figure 21. Ablation</a:t>
+            </a:r>
+          </a:p>
+        </p:txBody>
+      </p:sp>
+      <p:pic>
+        <p:nvPicPr>
+          <p:cNvPr id="7" name="Picture 6" descr="figure_20.png"/>
+          <p:cNvPicPr>
+            <a:picLocks noChangeAspect="1"/>
+          </p:cNvPicPr>
+          <p:nvPr/>
+        </p:nvPicPr>
+        <p:blipFill>
+          <a:blip r:embed="rId4"/>
+          <a:stretch>
+            <a:fillRect/>
+          </a:stretch>
+        </p:blipFill>
+        <p:spPr>
+          <a:xfrm>
+            <a:off x="9326880" y="1188720"/>
+            <a:ext cx="2651760" cy="934995"/>
+          </a:xfrm>
+          <a:prstGeom prst="rect">
+            <a:avLst/>
+          </a:prstGeom>
+        </p:spPr>
+      </p:pic>
+      <p:sp>
+        <p:nvSpPr>
+          <p:cNvPr id="8" name="TextBox 7"/>
+          <p:cNvSpPr txBox="1"/>
+          <p:nvPr/>
+        </p:nvSpPr>
+        <p:spPr>
+          <a:xfrm>
+            <a:off x="9326880" y="2169435"/>
+            <a:ext cx="2651760" cy="320040"/>
+          </a:xfrm>
+          <a:prstGeom prst="rect">
+            <a:avLst/>
+          </a:prstGeom>
+          <a:noFill/>
+        </p:spPr>
+        <p:txBody>
+          <a:bodyPr wrap="square" lIns="45720" rIns="45720" tIns="18288" bIns="18288">
+            <a:spAutoFit/>
+          </a:bodyPr>
+          <a:lstStyle/>
+          <a:p>
+            <a:pPr algn="ctr">
+              <a:spcAft>
+                <a:spcPts val="400"/>
+              </a:spcAft>
+            </a:pPr>
+            <a:r>
+              <a:rPr sz="1000" b="0" i="1">
+                <a:solidFill>
+                  <a:srgbClr val="6B7280"/>
+                </a:solidFill>
+                <a:latin typeface="Calibri"/>
+                <a:ea typeface="맑은 고딕"/>
+              </a:rPr>
+              <a:t>Figure 20. Overhead</a:t>
+            </a:r>
+          </a:p>
+        </p:txBody>
+      </p:sp>
+      <p:sp>
+        <p:nvSpPr>
+          <p:cNvPr id="9" name="TextBox 8"/>
+          <p:cNvSpPr txBox="1"/>
+          <p:nvPr/>
+        </p:nvSpPr>
+        <p:spPr>
+          <a:xfrm>
+            <a:off x="457200" y="4206240"/>
+            <a:ext cx="11247120" cy="2286000"/>
+          </a:xfrm>
+          <a:prstGeom prst="rect">
+            <a:avLst/>
+          </a:prstGeom>
+          <a:noFill/>
+        </p:spPr>
+        <p:txBody>
+          <a:bodyPr wrap="square" lIns="45720" rIns="45720" tIns="18288" bIns="18288">
+            <a:spAutoFit/>
+          </a:bodyPr>
+          <a:lstStyle/>
+          <a:p>
+            <a:pPr algn="l">
+              <a:spcAft>
+                <a:spcPts val="600"/>
+              </a:spcAft>
+            </a:pPr>
+            <a:r>
+              <a:rPr sz="1800" b="1" i="0">
+                <a:solidFill>
+                  <a:srgbClr val="D9352A"/>
+                </a:solidFill>
+                <a:latin typeface="Calibri"/>
+                <a:ea typeface="맑은 고딕"/>
+              </a:rPr>
+              <a:t>▸ </a:t>
+            </a:r>
+            <a:r>
+              <a:rPr sz="1800" b="1" i="0">
+                <a:solidFill>
+                  <a:srgbClr val="1F2937"/>
+                </a:solidFill>
+                <a:latin typeface="Calibri"/>
+                <a:ea typeface="맑은 고딕"/>
+              </a:rPr>
+              <a:t>Tail latency</a:t>
+            </a:r>
+            <a:r>
+              <a:rPr sz="1800" b="0" i="0">
+                <a:solidFill>
+                  <a:srgbClr val="1F2937"/>
+                </a:solidFill>
+                <a:latin typeface="Calibri"/>
+                <a:ea typeface="맑은 고딕"/>
+              </a:rPr>
+              <a:t>    CachedAttention 대비 P90 −52.96% / P95 −49.30% / P99 −47.03%</a:t>
+            </a:r>
+          </a:p>
+          <a:p>
+            <a:pPr algn="l">
+              <a:spcAft>
+                <a:spcPts val="600"/>
+              </a:spcAft>
+            </a:pPr>
+            <a:r>
+              <a:rPr sz="1800" b="1" i="0">
+                <a:solidFill>
+                  <a:srgbClr val="D9352A"/>
+                </a:solidFill>
+                <a:latin typeface="Calibri"/>
+                <a:ea typeface="맑은 고딕"/>
+              </a:rPr>
+              <a:t>▸ </a:t>
+            </a:r>
+            <a:r>
+              <a:rPr sz="1800" b="1" i="0">
+                <a:solidFill>
+                  <a:srgbClr val="1F2937"/>
+                </a:solidFill>
+                <a:latin typeface="Calibri"/>
+                <a:ea typeface="맑은 고딕"/>
+              </a:rPr>
+              <a:t>Ablation</a:t>
+            </a:r>
+            <a:r>
+              <a:rPr sz="1800" b="0" i="0">
+                <a:solidFill>
+                  <a:srgbClr val="1F2937"/>
+                </a:solidFill>
+                <a:latin typeface="Calibri"/>
+                <a:ea typeface="맑은 고딕"/>
+              </a:rPr>
+              <a:t>    Scheduling +1.58배, Eviction +1.25배, Tensor caching +1.10배</a:t>
+            </a:r>
+          </a:p>
+          <a:p>
+            <a:pPr algn="l">
+              <a:spcAft>
+                <a:spcPts val="600"/>
+              </a:spcAft>
+            </a:pPr>
+            <a:r>
+              <a:rPr sz="1800" b="1" i="0">
+                <a:solidFill>
+                  <a:srgbClr val="D9352A"/>
+                </a:solidFill>
+                <a:latin typeface="Calibri"/>
+                <a:ea typeface="맑은 고딕"/>
+              </a:rPr>
+              <a:t>▸ </a:t>
+            </a:r>
+            <a:r>
+              <a:rPr sz="1800" b="1" i="0">
+                <a:solidFill>
+                  <a:srgbClr val="1F2937"/>
+                </a:solidFill>
+                <a:latin typeface="Calibri"/>
+                <a:ea typeface="맑은 고딕"/>
+              </a:rPr>
+              <a:t>Overhead</a:t>
+            </a:r>
+            <a:r>
+              <a:rPr sz="1800" b="0" i="0">
+                <a:solidFill>
+                  <a:srgbClr val="1F2937"/>
+                </a:solidFill>
+                <a:latin typeface="Calibri"/>
+                <a:ea typeface="맑은 고딕"/>
+              </a:rPr>
+              <a:t>    Scheduling 0.62 ms, Eviction 0.35 ms, KV transform &lt;0.1 s</a:t>
+            </a:r>
+          </a:p>
+        </p:txBody>
+      </p:sp>
+      <p:sp>
+        <p:nvSpPr>
+          <p:cNvPr id="10" name="TextBox 9"/>
+          <p:cNvSpPr txBox="1"/>
+          <p:nvPr/>
+        </p:nvSpPr>
+        <p:spPr>
+          <a:xfrm>
+            <a:off x="11094415" y="6446520"/>
+            <a:ext cx="822960" cy="274320"/>
+          </a:xfrm>
+          <a:prstGeom prst="rect">
+            <a:avLst/>
+          </a:prstGeom>
+          <a:noFill/>
+        </p:spPr>
+        <p:txBody>
+          <a:bodyPr wrap="square" lIns="45720" rIns="45720" tIns="18288" bIns="18288">
+            <a:spAutoFit/>
+          </a:bodyPr>
+          <a:lstStyle/>
+          <a:p>
+            <a:pPr algn="r">
+              <a:spcAft>
+                <a:spcPts val="400"/>
+              </a:spcAft>
+            </a:pPr>
+            <a:r>
+              <a:rPr sz="1000" b="0" i="0">
+                <a:solidFill>
+                  <a:srgbClr val="6B7280"/>
+                </a:solidFill>
+                <a:latin typeface="Calibri"/>
+                <a:ea typeface="맑은 고딕"/>
+              </a:rPr>
+              <a:t>30</a:t>
+            </a:r>
+          </a:p>
+        </p:txBody>
+      </p:sp>
+    </p:spTree>
+  </p:cSld>
+  <p:clrMapOvr>
+    <a:masterClrMapping/>
+  </p:clrMapOvr>
+</p:sld>
+</file>
+
+<file path=ppt/slides/slide31.xml><?xml version="1.0" encoding="utf-8"?>
+<p:sld xmlns:a="http://schemas.openxmlformats.org/drawingml/2006/main" xmlns:p="http://schemas.openxmlformats.org/presentationml/2006/main" xmlns:r="http://schemas.openxmlformats.org/officeDocument/2006/relationships">
+  <p:cSld>
+    <p:spTree>
+      <p:nvGrpSpPr>
+        <p:cNvPr id="1" name=""/>
+        <p:cNvGrpSpPr/>
+        <p:nvPr/>
+      </p:nvGrpSpPr>
+      <p:grpSpPr/>
+      <p:sp>
+        <p:nvSpPr>
+          <p:cNvPr id="2" name="TextBox 1"/>
+          <p:cNvSpPr txBox="1"/>
+          <p:nvPr/>
+        </p:nvSpPr>
+        <p:spPr>
+          <a:xfrm>
+            <a:off x="548640" y="320040"/>
+            <a:ext cx="11094415" cy="914400"/>
+          </a:xfrm>
+          <a:prstGeom prst="rect">
+            <a:avLst/>
+          </a:prstGeom>
+          <a:noFill/>
+        </p:spPr>
+        <p:txBody>
+          <a:bodyPr wrap="square" lIns="45720" rIns="45720" tIns="18288" bIns="18288">
+            <a:spAutoFit/>
+          </a:bodyPr>
+          <a:lstStyle/>
+          <a:p>
+            <a:pPr algn="l">
+              <a:spcAft>
+                <a:spcPts val="200"/>
+              </a:spcAft>
+            </a:pPr>
+            <a:r>
+              <a:rPr sz="1200" b="1" i="0">
+                <a:solidFill>
+                  <a:srgbClr val="6B7280"/>
+                </a:solidFill>
+                <a:latin typeface="Calibri"/>
+                <a:ea typeface="맑은 고딕"/>
+              </a:rPr>
               <a:t>CONCLUSION</a:t>
             </a:r>
           </a:p>
@@ -14261,7 +14481,7 @@
                 <a:latin typeface="Calibri"/>
                 <a:ea typeface="맑은 고딕"/>
               </a:rPr>
-              <a:t>30</a:t>
+              <a:t>31</a:t>
             </a:r>
           </a:p>
         </p:txBody>
